--- a/storytelling/Wikipedia_25_Marcinos.pptx
+++ b/storytelling/Wikipedia_25_Marcinos.pptx
@@ -7,6 +7,9 @@
   <p:notesMasterIdLst>
     <p:notesMasterId r:id="rId14"/>
   </p:notesMasterIdLst>
+  <p:handoutMasterIdLst>
+    <p:handoutMasterId r:id="rId15"/>
+  </p:handoutMasterIdLst>
   <p:sldIdLst>
     <p:sldId id="256" r:id="rId2"/>
     <p:sldId id="258" r:id="rId3"/>
@@ -163,10 +166,10 @@
     <c:title>
       <c:tx>
         <c:rich>
-          <a:bodyPr rot="0" spcFirstLastPara="1" vertOverflow="ellipsis" vert="horz" wrap="square" anchor="ctr" anchorCtr="1"/>
+          <a:bodyPr rot="0" spcFirstLastPara="1" vertOverflow="ellipsis" wrap="square" anchor="t" anchorCtr="0"/>
           <a:lstStyle/>
           <a:p>
-            <a:pPr>
+            <a:pPr algn="l">
               <a:defRPr sz="1862" b="0" i="0" u="none" strike="noStrike" kern="1200" spc="0" baseline="0">
                 <a:solidFill>
                   <a:schemeClr val="tx1"/>
@@ -191,6 +194,14 @@
           </a:p>
         </c:rich>
       </c:tx>
+      <c:layout>
+        <c:manualLayout>
+          <c:xMode val="edge"/>
+          <c:yMode val="edge"/>
+          <c:x val="4.2546637366927385E-4"/>
+          <c:y val="2.9186424957105147E-3"/>
+        </c:manualLayout>
+      </c:layout>
       <c:overlay val="0"/>
       <c:spPr>
         <a:noFill/>
@@ -200,10 +211,10 @@
         <a:effectLst/>
       </c:spPr>
       <c:txPr>
-        <a:bodyPr rot="0" spcFirstLastPara="1" vertOverflow="ellipsis" vert="horz" wrap="square" anchor="ctr" anchorCtr="1"/>
+        <a:bodyPr rot="0" spcFirstLastPara="1" vertOverflow="ellipsis" wrap="square" anchor="t" anchorCtr="0"/>
         <a:lstStyle/>
         <a:p>
-          <a:pPr>
+          <a:pPr algn="l">
             <a:defRPr sz="1862" b="0" i="0" u="none" strike="noStrike" kern="1200" spc="0" baseline="0">
               <a:solidFill>
                 <a:schemeClr val="tx1"/>
@@ -594,6 +605,14 @@
           </a:p>
         </c:rich>
       </c:tx>
+      <c:layout>
+        <c:manualLayout>
+          <c:xMode val="edge"/>
+          <c:yMode val="edge"/>
+          <c:x val="4.2103009997835928E-4"/>
+          <c:y val="3.7427145997402495E-3"/>
+        </c:manualLayout>
+      </c:layout>
       <c:overlay val="0"/>
       <c:spPr>
         <a:noFill/>
@@ -1110,7 +1129,7 @@
   </mc:AlternateContent>
   <c:pivotSource>
     <c:name>[Dane_do_ppt.xlsx]Historia zmian!Tabela przestawna1</c:name>
-    <c:fmtId val="14"/>
+    <c:fmtId val="-1"/>
   </c:pivotSource>
   <c:chart>
     <c:title>
@@ -1119,7 +1138,7 @@
           <a:bodyPr rot="0" spcFirstLastPara="1" vertOverflow="ellipsis" vert="horz" wrap="square" anchor="ctr" anchorCtr="1"/>
           <a:lstStyle/>
           <a:p>
-            <a:pPr>
+            <a:pPr algn="l">
               <a:defRPr sz="1400" b="0" i="0" u="none" strike="noStrike" kern="1200" spc="0" baseline="0">
                 <a:solidFill>
                   <a:schemeClr val="tx1"/>
@@ -1185,6 +1204,14 @@
           </a:p>
         </c:rich>
       </c:tx>
+      <c:layout>
+        <c:manualLayout>
+          <c:xMode val="edge"/>
+          <c:yMode val="edge"/>
+          <c:x val="1.4112899592264745E-3"/>
+          <c:y val="0"/>
+        </c:manualLayout>
+      </c:layout>
       <c:overlay val="0"/>
       <c:spPr>
         <a:noFill/>
@@ -1197,7 +1224,7 @@
         <a:bodyPr rot="0" spcFirstLastPara="1" vertOverflow="ellipsis" vert="horz" wrap="square" anchor="ctr" anchorCtr="1"/>
         <a:lstStyle/>
         <a:p>
-          <a:pPr>
+          <a:pPr algn="l">
             <a:defRPr sz="1400" b="0" i="0" u="none" strike="noStrike" kern="1200" spc="0" baseline="0">
               <a:solidFill>
                 <a:schemeClr val="tx1"/>
@@ -1427,7 +1454,7 @@
             </c:spPr>
             <c:extLst>
               <c:ext xmlns:c16="http://schemas.microsoft.com/office/drawing/2014/chart" uri="{C3380CC4-5D6E-409C-BE32-E72D297353CC}">
-                <c16:uniqueId val="{00000006-A067-45B7-A7C5-005738E5D216}"/>
+                <c16:uniqueId val="{00000001-1932-440C-9327-C5BDE0F89BCE}"/>
               </c:ext>
             </c:extLst>
           </c:dPt>
@@ -1446,7 +1473,7 @@
             </c:spPr>
             <c:extLst>
               <c:ext xmlns:c16="http://schemas.microsoft.com/office/drawing/2014/chart" uri="{C3380CC4-5D6E-409C-BE32-E72D297353CC}">
-                <c16:uniqueId val="{00000005-A067-45B7-A7C5-005738E5D216}"/>
+                <c16:uniqueId val="{00000003-1932-440C-9327-C5BDE0F89BCE}"/>
               </c:ext>
             </c:extLst>
           </c:dPt>
@@ -1465,7 +1492,7 @@
             </c:spPr>
             <c:extLst>
               <c:ext xmlns:c16="http://schemas.microsoft.com/office/drawing/2014/chart" uri="{C3380CC4-5D6E-409C-BE32-E72D297353CC}">
-                <c16:uniqueId val="{00000007-A067-45B7-A7C5-005738E5D216}"/>
+                <c16:uniqueId val="{00000005-1932-440C-9327-C5BDE0F89BCE}"/>
               </c:ext>
             </c:extLst>
           </c:dPt>
@@ -1484,7 +1511,7 @@
             </c:spPr>
             <c:extLst>
               <c:ext xmlns:c16="http://schemas.microsoft.com/office/drawing/2014/chart" uri="{C3380CC4-5D6E-409C-BE32-E72D297353CC}">
-                <c16:uniqueId val="{00000004-A067-45B7-A7C5-005738E5D216}"/>
+                <c16:uniqueId val="{00000007-1932-440C-9327-C5BDE0F89BCE}"/>
               </c:ext>
             </c:extLst>
           </c:dPt>
@@ -1503,7 +1530,7 @@
             </c:spPr>
             <c:extLst>
               <c:ext xmlns:c16="http://schemas.microsoft.com/office/drawing/2014/chart" uri="{C3380CC4-5D6E-409C-BE32-E72D297353CC}">
-                <c16:uniqueId val="{00000008-A067-45B7-A7C5-005738E5D216}"/>
+                <c16:uniqueId val="{00000009-1932-440C-9327-C5BDE0F89BCE}"/>
               </c:ext>
             </c:extLst>
           </c:dPt>
@@ -1522,7 +1549,7 @@
             </c:spPr>
             <c:extLst>
               <c:ext xmlns:c16="http://schemas.microsoft.com/office/drawing/2014/chart" uri="{C3380CC4-5D6E-409C-BE32-E72D297353CC}">
-                <c16:uniqueId val="{00000009-A067-45B7-A7C5-005738E5D216}"/>
+                <c16:uniqueId val="{0000000B-1932-440C-9327-C5BDE0F89BCE}"/>
               </c:ext>
             </c:extLst>
           </c:dPt>
@@ -1541,7 +1568,7 @@
             </c:spPr>
             <c:extLst>
               <c:ext xmlns:c16="http://schemas.microsoft.com/office/drawing/2014/chart" uri="{C3380CC4-5D6E-409C-BE32-E72D297353CC}">
-                <c16:uniqueId val="{00000003-A067-45B7-A7C5-005738E5D216}"/>
+                <c16:uniqueId val="{0000000D-1932-440C-9327-C5BDE0F89BCE}"/>
               </c:ext>
             </c:extLst>
           </c:dPt>
@@ -1560,7 +1587,7 @@
             </c:spPr>
             <c:extLst>
               <c:ext xmlns:c16="http://schemas.microsoft.com/office/drawing/2014/chart" uri="{C3380CC4-5D6E-409C-BE32-E72D297353CC}">
-                <c16:uniqueId val="{00000002-A067-45B7-A7C5-005738E5D216}"/>
+                <c16:uniqueId val="{0000000F-1932-440C-9327-C5BDE0F89BCE}"/>
               </c:ext>
             </c:extLst>
           </c:dPt>
@@ -1637,7 +1664,7 @@
           </c:val>
           <c:extLst>
             <c:ext xmlns:c16="http://schemas.microsoft.com/office/drawing/2014/chart" uri="{C3380CC4-5D6E-409C-BE32-E72D297353CC}">
-              <c16:uniqueId val="{00000000-A067-45B7-A7C5-005738E5D216}"/>
+              <c16:uniqueId val="{00000010-1932-440C-9327-C5BDE0F89BCE}"/>
             </c:ext>
           </c:extLst>
         </c:ser>
@@ -1822,7 +1849,7 @@
           <a:bodyPr rot="0" spcFirstLastPara="1" vertOverflow="ellipsis" vert="horz" wrap="square" anchor="ctr" anchorCtr="1"/>
           <a:lstStyle/>
           <a:p>
-            <a:pPr>
+            <a:pPr algn="l">
               <a:defRPr sz="1862" b="0" i="0" u="none" strike="noStrike" kern="1200" spc="0" baseline="0">
                 <a:solidFill>
                   <a:schemeClr val="tx1"/>
@@ -1872,6 +1899,14 @@
           </a:p>
         </c:rich>
       </c:tx>
+      <c:layout>
+        <c:manualLayout>
+          <c:xMode val="edge"/>
+          <c:yMode val="edge"/>
+          <c:x val="6.7410078951817497E-4"/>
+          <c:y val="0"/>
+        </c:manualLayout>
+      </c:layout>
       <c:overlay val="0"/>
       <c:spPr>
         <a:noFill/>
@@ -1884,7 +1919,7 @@
         <a:bodyPr rot="0" spcFirstLastPara="1" vertOverflow="ellipsis" vert="horz" wrap="square" anchor="ctr" anchorCtr="1"/>
         <a:lstStyle/>
         <a:p>
-          <a:pPr>
+          <a:pPr algn="l">
             <a:defRPr sz="1862" b="0" i="0" u="none" strike="noStrike" kern="1200" spc="0" baseline="0">
               <a:solidFill>
                 <a:schemeClr val="tx1"/>
@@ -1905,10 +1940,10 @@
           <c:layoutTarget val="inner"/>
           <c:xMode val="edge"/>
           <c:yMode val="edge"/>
-          <c:x val="5.3603301286851403E-2"/>
-          <c:y val="0.10213800904457435"/>
+          <c:x val="5.5737209555632855E-2"/>
+          <c:y val="0.19334063952432939"/>
           <c:w val="0.94418872912625051"/>
-          <c:h val="0.64714071855599353"/>
+          <c:h val="0.69569096249522122"/>
         </c:manualLayout>
       </c:layout>
       <c:lineChart>
@@ -2016,7 +2051,7 @@
                   </a:bodyPr>
                   <a:lstStyle/>
                   <a:p>
-                    <a:pPr marL="0" marR="0" lvl="0" indent="0" algn="ctr" defTabSz="914400" rtl="0" eaLnBrk="1" fontAlgn="auto" latinLnBrk="0" hangingPunct="1">
+                    <a:pPr marL="0" marR="0" lvl="0" indent="0" algn="l" defTabSz="914400" rtl="0" eaLnBrk="1" fontAlgn="auto" latinLnBrk="0" hangingPunct="1">
                       <a:lnSpc>
                         <a:spcPct val="100000"/>
                       </a:lnSpc>
@@ -2050,7 +2085,7 @@
                     </a:r>
                   </a:p>
                   <a:p>
-                    <a:pPr marL="0" marR="0" lvl="0" indent="0" algn="ctr" defTabSz="914400" rtl="0" eaLnBrk="1" fontAlgn="auto" latinLnBrk="0" hangingPunct="1">
+                    <a:pPr marL="0" marR="0" lvl="0" indent="0" algn="l" defTabSz="914400" rtl="0" eaLnBrk="1" fontAlgn="auto" latinLnBrk="0" hangingPunct="1">
                       <a:lnSpc>
                         <a:spcPct val="100000"/>
                       </a:lnSpc>
@@ -2118,7 +2153,7 @@
                 </a:bodyPr>
                 <a:lstStyle/>
                 <a:p>
-                  <a:pPr marL="0" marR="0" lvl="0" indent="0" algn="ctr" defTabSz="914400" rtl="0" eaLnBrk="1" fontAlgn="auto" latinLnBrk="0" hangingPunct="1">
+                  <a:pPr marL="0" marR="0" lvl="0" indent="0" algn="l" defTabSz="914400" rtl="0" eaLnBrk="1" fontAlgn="auto" latinLnBrk="0" hangingPunct="1">
                     <a:lnSpc>
                       <a:spcPct val="100000"/>
                     </a:lnSpc>
@@ -2184,7 +2219,7 @@
                   </a:bodyPr>
                   <a:lstStyle/>
                   <a:p>
-                    <a:pPr marL="0" marR="0" lvl="0" indent="0" algn="ctr" defTabSz="914400" rtl="0" eaLnBrk="1" fontAlgn="auto" latinLnBrk="0" hangingPunct="1">
+                    <a:pPr marL="0" marR="0" lvl="0" indent="0" algn="l" defTabSz="914400" rtl="0" eaLnBrk="1" fontAlgn="auto" latinLnBrk="0" hangingPunct="1">
                       <a:lnSpc>
                         <a:spcPct val="100000"/>
                       </a:lnSpc>
@@ -2242,7 +2277,7 @@
                     </a:r>
                   </a:p>
                   <a:p>
-                    <a:pPr marL="0" marR="0" lvl="0" indent="0" algn="ctr" defTabSz="914400" rtl="0" eaLnBrk="1" fontAlgn="auto" latinLnBrk="0" hangingPunct="1">
+                    <a:pPr marL="0" marR="0" lvl="0" indent="0" algn="l" defTabSz="914400" rtl="0" eaLnBrk="1" fontAlgn="auto" latinLnBrk="0" hangingPunct="1">
                       <a:lnSpc>
                         <a:spcPct val="100000"/>
                       </a:lnSpc>
@@ -2310,7 +2345,7 @@
                 </a:bodyPr>
                 <a:lstStyle/>
                 <a:p>
-                  <a:pPr marL="0" marR="0" lvl="0" indent="0" algn="ctr" defTabSz="914400" rtl="0" eaLnBrk="1" fontAlgn="auto" latinLnBrk="0" hangingPunct="1">
+                  <a:pPr marL="0" marR="0" lvl="0" indent="0" algn="l" defTabSz="914400" rtl="0" eaLnBrk="1" fontAlgn="auto" latinLnBrk="0" hangingPunct="1">
                     <a:lnSpc>
                       <a:spcPct val="100000"/>
                     </a:lnSpc>
@@ -2424,12 +2459,12 @@
               <a:effectLst/>
             </c:spPr>
             <c:txPr>
-              <a:bodyPr rot="0" spcFirstLastPara="1" vertOverflow="clip" horzOverflow="clip" vert="horz" wrap="square" lIns="38100" tIns="19050" rIns="38100" bIns="19050" anchor="ctr" anchorCtr="1">
+              <a:bodyPr rot="0" spcFirstLastPara="1" vertOverflow="clip" horzOverflow="clip" vert="horz" wrap="square" lIns="38100" tIns="19050" rIns="38100" bIns="19050" anchor="ctr" anchorCtr="0">
                 <a:spAutoFit/>
               </a:bodyPr>
               <a:lstStyle/>
               <a:p>
-                <a:pPr>
+                <a:pPr algn="l">
                   <a:defRPr sz="1197" b="0" i="0" u="none" strike="noStrike" kern="1200" baseline="0">
                     <a:solidFill>
                       <a:schemeClr val="tx2"/>
@@ -3321,6 +3356,14 @@
           </a:p>
         </c:rich>
       </c:tx>
+      <c:layout>
+        <c:manualLayout>
+          <c:xMode val="edge"/>
+          <c:yMode val="edge"/>
+          <c:x val="1.2086079838830137E-3"/>
+          <c:y val="0"/>
+        </c:manualLayout>
+      </c:layout>
       <c:overlay val="0"/>
       <c:spPr>
         <a:noFill/>
@@ -3355,9 +3398,9 @@
           <c:xMode val="edge"/>
           <c:yMode val="edge"/>
           <c:x val="5.3603301286851403E-2"/>
-          <c:y val="0.10213800904457435"/>
+          <c:y val="0.13158215048234079"/>
           <c:w val="0.94418872912625051"/>
-          <c:h val="0.64714071855599353"/>
+          <c:h val="0.75608435149749476"/>
         </c:manualLayout>
       </c:layout>
       <c:lineChart>
@@ -4205,7 +4248,7 @@
           <a:bodyPr rot="0" spcFirstLastPara="1" vertOverflow="ellipsis" vert="horz" wrap="square" anchor="ctr" anchorCtr="1"/>
           <a:lstStyle/>
           <a:p>
-            <a:pPr>
+            <a:pPr algn="l">
               <a:defRPr sz="1862" b="0" i="0" u="none" strike="noStrike" kern="1200" spc="0" baseline="0">
                 <a:solidFill>
                   <a:schemeClr val="tx1"/>
@@ -4279,6 +4322,14 @@
           </a:p>
         </c:rich>
       </c:tx>
+      <c:layout>
+        <c:manualLayout>
+          <c:xMode val="edge"/>
+          <c:yMode val="edge"/>
+          <c:x val="1.5465320444964783E-3"/>
+          <c:y val="0"/>
+        </c:manualLayout>
+      </c:layout>
       <c:overlay val="0"/>
       <c:spPr>
         <a:noFill/>
@@ -4291,7 +4342,7 @@
         <a:bodyPr rot="0" spcFirstLastPara="1" vertOverflow="ellipsis" vert="horz" wrap="square" anchor="ctr" anchorCtr="1"/>
         <a:lstStyle/>
         <a:p>
-          <a:pPr>
+          <a:pPr algn="l">
             <a:defRPr sz="1862" b="0" i="0" u="none" strike="noStrike" kern="1200" spc="0" baseline="0">
               <a:solidFill>
                 <a:schemeClr val="tx1"/>
@@ -4313,9 +4364,9 @@
           <c:xMode val="edge"/>
           <c:yMode val="edge"/>
           <c:x val="5.3603301286851403E-2"/>
-          <c:y val="0.1663481439502057"/>
+          <c:y val="0.19579239443601174"/>
           <c:w val="0.94418872912625051"/>
-          <c:h val="0.5829305836503621"/>
+          <c:h val="0.69323897573910265"/>
         </c:manualLayout>
       </c:layout>
       <c:lineChart>
@@ -5301,7 +5352,7 @@
           <a:bodyPr rot="0" spcFirstLastPara="1" vertOverflow="ellipsis" vert="horz" wrap="square" anchor="ctr" anchorCtr="1"/>
           <a:lstStyle/>
           <a:p>
-            <a:pPr>
+            <a:pPr algn="l">
               <a:defRPr sz="1862" b="0" i="0" u="none" strike="noStrike" kern="1200" spc="0" baseline="0">
                 <a:solidFill>
                   <a:schemeClr val="tx1"/>
@@ -5343,6 +5394,14 @@
           </a:p>
         </c:rich>
       </c:tx>
+      <c:layout>
+        <c:manualLayout>
+          <c:xMode val="edge"/>
+          <c:yMode val="edge"/>
+          <c:x val="1.8313502485770299E-4"/>
+          <c:y val="0"/>
+        </c:manualLayout>
+      </c:layout>
       <c:overlay val="0"/>
       <c:spPr>
         <a:noFill/>
@@ -5355,7 +5414,7 @@
         <a:bodyPr rot="0" spcFirstLastPara="1" vertOverflow="ellipsis" vert="horz" wrap="square" anchor="ctr" anchorCtr="1"/>
         <a:lstStyle/>
         <a:p>
-          <a:pPr>
+          <a:pPr algn="l">
             <a:defRPr sz="1862" b="0" i="0" u="none" strike="noStrike" kern="1200" spc="0" baseline="0">
               <a:solidFill>
                 <a:schemeClr val="tx1"/>
@@ -5377,9 +5436,9 @@
           <c:xMode val="edge"/>
           <c:yMode val="edge"/>
           <c:x val="5.3603301286851403E-2"/>
-          <c:y val="0.16926678644591617"/>
+          <c:y val="0.19282223536522569"/>
           <c:w val="0.94418872912625051"/>
-          <c:h val="0.58001194115465171"/>
+          <c:h val="0.69326471047150895"/>
         </c:manualLayout>
       </c:layout>
       <c:lineChart>
@@ -6903,7 +6962,7 @@
           <a:bodyPr rot="0" spcFirstLastPara="1" vertOverflow="ellipsis" vert="horz" wrap="square" anchor="ctr" anchorCtr="1"/>
           <a:lstStyle/>
           <a:p>
-            <a:pPr>
+            <a:pPr algn="l">
               <a:defRPr sz="1800" b="0" i="0" u="none" strike="noStrike" kern="1200" spc="0" baseline="0">
                 <a:solidFill>
                   <a:schemeClr val="tx1"/>
@@ -6945,6 +7004,14 @@
           </a:p>
         </c:rich>
       </c:tx>
+      <c:layout>
+        <c:manualLayout>
+          <c:xMode val="edge"/>
+          <c:yMode val="edge"/>
+          <c:x val="1.0486937544985171E-3"/>
+          <c:y val="0"/>
+        </c:manualLayout>
+      </c:layout>
       <c:overlay val="0"/>
       <c:spPr>
         <a:noFill/>
@@ -6957,7 +7024,7 @@
         <a:bodyPr rot="0" spcFirstLastPara="1" vertOverflow="ellipsis" vert="horz" wrap="square" anchor="ctr" anchorCtr="1"/>
         <a:lstStyle/>
         <a:p>
-          <a:pPr>
+          <a:pPr algn="l">
             <a:defRPr sz="1800" b="0" i="0" u="none" strike="noStrike" kern="1200" spc="0" baseline="0">
               <a:solidFill>
                 <a:schemeClr val="tx1"/>
@@ -6979,9 +7046,9 @@
           <c:xMode val="edge"/>
           <c:yMode val="edge"/>
           <c:x val="5.3603301286851403E-2"/>
-          <c:y val="0.1663481439502057"/>
+          <c:y val="0.1987368187743915"/>
           <c:w val="0.94418872912625051"/>
-          <c:h val="0.5829305836503621"/>
+          <c:h val="0.69323897573910265"/>
         </c:manualLayout>
       </c:layout>
       <c:lineChart>
@@ -12194,6 +12261,211 @@
 </cs:chartStyle>
 </file>
 
+<file path=ppt/handoutMasters/handoutMaster1.xml><?xml version="1.0" encoding="utf-8"?>
+<p:handoutMaster xmlns:a="http://schemas.openxmlformats.org/drawingml/2006/main" xmlns:r="http://schemas.openxmlformats.org/officeDocument/2006/relationships" xmlns:p="http://schemas.openxmlformats.org/presentationml/2006/main">
+  <p:cSld>
+    <p:bg>
+      <p:bgRef idx="1001">
+        <a:schemeClr val="bg1"/>
+      </p:bgRef>
+    </p:bg>
+    <p:spTree>
+      <p:nvGrpSpPr>
+        <p:cNvPr id="1" name=""/>
+        <p:cNvGrpSpPr/>
+        <p:nvPr/>
+      </p:nvGrpSpPr>
+      <p:grpSpPr>
+        <a:xfrm>
+          <a:off x="0" y="0"/>
+          <a:ext cx="0" cy="0"/>
+          <a:chOff x="0" y="0"/>
+          <a:chExt cx="0" cy="0"/>
+        </a:xfrm>
+      </p:grpSpPr>
+      <p:sp>
+        <p:nvSpPr>
+          <p:cNvPr id="2" name="Symbol zastępczy nagłówka 1">
+            <a:extLst>
+              <a:ext uri="{FF2B5EF4-FFF2-40B4-BE49-F238E27FC236}">
+                <a16:creationId xmlns:a16="http://schemas.microsoft.com/office/drawing/2014/main" id="{3F312BC8-7CED-964C-5C2B-78003A548EEB}"/>
+              </a:ext>
+            </a:extLst>
+          </p:cNvPr>
+          <p:cNvSpPr>
+            <a:spLocks noGrp="1"/>
+          </p:cNvSpPr>
+          <p:nvPr>
+            <p:ph type="hdr" sz="quarter"/>
+          </p:nvPr>
+        </p:nvSpPr>
+        <p:spPr>
+          <a:xfrm>
+            <a:off x="0" y="0"/>
+            <a:ext cx="2971800" cy="458788"/>
+          </a:xfrm>
+          <a:prstGeom prst="rect">
+            <a:avLst/>
+          </a:prstGeom>
+        </p:spPr>
+        <p:txBody>
+          <a:bodyPr vert="horz" lIns="91440" tIns="45720" rIns="91440" bIns="45720" rtlCol="0"/>
+          <a:lstStyle>
+            <a:lvl1pPr algn="l">
+              <a:defRPr sz="1200"/>
+            </a:lvl1pPr>
+          </a:lstStyle>
+          <a:p>
+            <a:endParaRPr lang="pl-PL"/>
+          </a:p>
+        </p:txBody>
+      </p:sp>
+      <p:sp>
+        <p:nvSpPr>
+          <p:cNvPr id="3" name="Symbol zastępczy daty 2">
+            <a:extLst>
+              <a:ext uri="{FF2B5EF4-FFF2-40B4-BE49-F238E27FC236}">
+                <a16:creationId xmlns:a16="http://schemas.microsoft.com/office/drawing/2014/main" id="{939024C0-F6FE-C279-6068-CE47CB74D41A}"/>
+              </a:ext>
+            </a:extLst>
+          </p:cNvPr>
+          <p:cNvSpPr>
+            <a:spLocks noGrp="1"/>
+          </p:cNvSpPr>
+          <p:nvPr>
+            <p:ph type="dt" sz="quarter" idx="1"/>
+          </p:nvPr>
+        </p:nvSpPr>
+        <p:spPr>
+          <a:xfrm>
+            <a:off x="3884613" y="0"/>
+            <a:ext cx="2971800" cy="458788"/>
+          </a:xfrm>
+          <a:prstGeom prst="rect">
+            <a:avLst/>
+          </a:prstGeom>
+        </p:spPr>
+        <p:txBody>
+          <a:bodyPr vert="horz" lIns="91440" tIns="45720" rIns="91440" bIns="45720" rtlCol="0"/>
+          <a:lstStyle>
+            <a:lvl1pPr algn="r">
+              <a:defRPr sz="1200"/>
+            </a:lvl1pPr>
+          </a:lstStyle>
+          <a:p>
+            <a:fld id="{3A47170D-57BC-4138-8517-84641EEC49C6}" type="datetimeFigureOut">
+              <a:rPr lang="pl-PL" smtClean="0"/>
+              <a:t>17.10.2026</a:t>
+            </a:fld>
+            <a:endParaRPr lang="pl-PL"/>
+          </a:p>
+        </p:txBody>
+      </p:sp>
+      <p:sp>
+        <p:nvSpPr>
+          <p:cNvPr id="4" name="Symbol zastępczy stopki 3">
+            <a:extLst>
+              <a:ext uri="{FF2B5EF4-FFF2-40B4-BE49-F238E27FC236}">
+                <a16:creationId xmlns:a16="http://schemas.microsoft.com/office/drawing/2014/main" id="{674DE053-A33E-A90D-E6F9-AFE55ACE293B}"/>
+              </a:ext>
+            </a:extLst>
+          </p:cNvPr>
+          <p:cNvSpPr>
+            <a:spLocks noGrp="1"/>
+          </p:cNvSpPr>
+          <p:nvPr>
+            <p:ph type="ftr" sz="quarter" idx="2"/>
+          </p:nvPr>
+        </p:nvSpPr>
+        <p:spPr>
+          <a:xfrm>
+            <a:off x="0" y="8685213"/>
+            <a:ext cx="2971800" cy="458787"/>
+          </a:xfrm>
+          <a:prstGeom prst="rect">
+            <a:avLst/>
+          </a:prstGeom>
+        </p:spPr>
+        <p:txBody>
+          <a:bodyPr vert="horz" lIns="91440" tIns="45720" rIns="91440" bIns="45720" rtlCol="0" anchor="b"/>
+          <a:lstStyle>
+            <a:lvl1pPr algn="l">
+              <a:defRPr sz="1200"/>
+            </a:lvl1pPr>
+          </a:lstStyle>
+          <a:p>
+            <a:endParaRPr lang="pl-PL"/>
+          </a:p>
+        </p:txBody>
+      </p:sp>
+      <p:sp>
+        <p:nvSpPr>
+          <p:cNvPr id="5" name="Symbol zastępczy numeru slajdu 4">
+            <a:extLst>
+              <a:ext uri="{FF2B5EF4-FFF2-40B4-BE49-F238E27FC236}">
+                <a16:creationId xmlns:a16="http://schemas.microsoft.com/office/drawing/2014/main" id="{D8CC52E2-731A-DE1B-F690-C9CAD254B9B2}"/>
+              </a:ext>
+            </a:extLst>
+          </p:cNvPr>
+          <p:cNvSpPr>
+            <a:spLocks noGrp="1"/>
+          </p:cNvSpPr>
+          <p:nvPr>
+            <p:ph type="sldNum" sz="quarter" idx="3"/>
+          </p:nvPr>
+        </p:nvSpPr>
+        <p:spPr>
+          <a:xfrm>
+            <a:off x="3884613" y="8685213"/>
+            <a:ext cx="2971800" cy="458787"/>
+          </a:xfrm>
+          <a:prstGeom prst="rect">
+            <a:avLst/>
+          </a:prstGeom>
+        </p:spPr>
+        <p:txBody>
+          <a:bodyPr vert="horz" lIns="91440" tIns="45720" rIns="91440" bIns="45720" rtlCol="0" anchor="b"/>
+          <a:lstStyle>
+            <a:lvl1pPr algn="r">
+              <a:defRPr sz="1200"/>
+            </a:lvl1pPr>
+          </a:lstStyle>
+          <a:p>
+            <a:fld id="{B951BC16-D8E6-4521-92A3-4C35721D9F74}" type="slidenum">
+              <a:rPr lang="pl-PL" smtClean="0"/>
+              <a:t>‹#›</a:t>
+            </a:fld>
+            <a:endParaRPr lang="pl-PL"/>
+          </a:p>
+        </p:txBody>
+      </p:sp>
+    </p:spTree>
+    <p:extLst>
+      <p:ext uri="{BB962C8B-B14F-4D97-AF65-F5344CB8AC3E}">
+        <p14:creationId xmlns:p14="http://schemas.microsoft.com/office/powerpoint/2010/main" val="3279922084"/>
+      </p:ext>
+    </p:extLst>
+  </p:cSld>
+  <p:clrMap bg1="lt1" tx1="dk1" bg2="lt2" tx2="dk2" accent1="accent1" accent2="accent2" accent3="accent3" accent4="accent4" accent5="accent5" accent6="accent6" hlink="hlink" folHlink="folHlink"/>
+  <p:extLst>
+    <p:ext uri="{56416CCD-93CA-4268-BC5B-53C4BB910035}">
+      <p15:sldGuideLst xmlns:p15="http://schemas.microsoft.com/office/powerpoint/2012/main">
+        <p15:guide id="1" orient="horz" pos="2880" userDrawn="1">
+          <p15:clr>
+            <a:srgbClr val="F26B43"/>
+          </p15:clr>
+        </p15:guide>
+        <p15:guide id="2" pos="2160" userDrawn="1">
+          <p15:clr>
+            <a:srgbClr val="F26B43"/>
+          </p15:clr>
+        </p15:guide>
+      </p15:sldGuideLst>
+    </p:ext>
+  </p:extLst>
+</p:handoutMaster>
+</file>
+
 <file path=ppt/notesMasters/notesMaster1.xml><?xml version="1.0" encoding="utf-8"?>
 <p:notesMaster xmlns:a="http://schemas.openxmlformats.org/drawingml/2006/main" xmlns:r="http://schemas.openxmlformats.org/officeDocument/2006/relationships" xmlns:p="http://schemas.openxmlformats.org/presentationml/2006/main">
   <p:cSld>
@@ -12276,7 +12548,7 @@
           <a:p>
             <a:fld id="{E5935C60-06B4-43D2-8FB6-7E8AA44FCC6B}" type="datetimeFigureOut">
               <a:rPr lang="pl-PL" smtClean="0"/>
-              <a:t>25.09.2026</a:t>
+              <a:t>17.10.2026</a:t>
             </a:fld>
             <a:endParaRPr lang="pl-PL"/>
           </a:p>
@@ -12797,7 +13069,7 @@
           <a:p>
             <a:fld id="{395FEE27-536F-479E-B304-98213E6B58CC}" type="datetimeFigureOut">
               <a:rPr lang="pl-PL" smtClean="0"/>
-              <a:t>25.09.2026</a:t>
+              <a:t>17.10.2026</a:t>
             </a:fld>
             <a:endParaRPr lang="pl-PL"/>
           </a:p>
@@ -12871,2127 +13143,6 @@
 </file>
 
 <file path=ppt/slideLayouts/slideLayout10.xml><?xml version="1.0" encoding="utf-8"?>
-<p:sldLayout xmlns:a="http://schemas.openxmlformats.org/drawingml/2006/main" xmlns:r="http://schemas.openxmlformats.org/officeDocument/2006/relationships" xmlns:p="http://schemas.openxmlformats.org/presentationml/2006/main" type="vertTx" preserve="1">
-  <p:cSld name="Tytuł i tekst pionowy">
-    <p:spTree>
-      <p:nvGrpSpPr>
-        <p:cNvPr id="1" name=""/>
-        <p:cNvGrpSpPr/>
-        <p:nvPr/>
-      </p:nvGrpSpPr>
-      <p:grpSpPr>
-        <a:xfrm>
-          <a:off x="0" y="0"/>
-          <a:ext cx="0" cy="0"/>
-          <a:chOff x="0" y="0"/>
-          <a:chExt cx="0" cy="0"/>
-        </a:xfrm>
-      </p:grpSpPr>
-      <p:sp>
-        <p:nvSpPr>
-          <p:cNvPr id="2" name="Tytuł 1">
-            <a:extLst>
-              <a:ext uri="{FF2B5EF4-FFF2-40B4-BE49-F238E27FC236}">
-                <a16:creationId xmlns:a16="http://schemas.microsoft.com/office/drawing/2014/main" id="{474882DE-D6C2-ADAA-5CC4-9C86E558EADA}"/>
-              </a:ext>
-            </a:extLst>
-          </p:cNvPr>
-          <p:cNvSpPr>
-            <a:spLocks noGrp="1"/>
-          </p:cNvSpPr>
-          <p:nvPr>
-            <p:ph type="title"/>
-          </p:nvPr>
-        </p:nvSpPr>
-        <p:spPr/>
-        <p:txBody>
-          <a:bodyPr/>
-          <a:lstStyle/>
-          <a:p>
-            <a:r>
-              <a:rPr lang="pl-PL"/>
-              <a:t>Kliknij, aby edytować styl</a:t>
-            </a:r>
-          </a:p>
-        </p:txBody>
-      </p:sp>
-      <p:sp>
-        <p:nvSpPr>
-          <p:cNvPr id="3" name="Symbol zastępczy tytułu pionowego 2">
-            <a:extLst>
-              <a:ext uri="{FF2B5EF4-FFF2-40B4-BE49-F238E27FC236}">
-                <a16:creationId xmlns:a16="http://schemas.microsoft.com/office/drawing/2014/main" id="{8F2EAB83-76D1-C014-BDE4-459C3BEA27EE}"/>
-              </a:ext>
-            </a:extLst>
-          </p:cNvPr>
-          <p:cNvSpPr>
-            <a:spLocks noGrp="1"/>
-          </p:cNvSpPr>
-          <p:nvPr>
-            <p:ph type="body" orient="vert" idx="1"/>
-          </p:nvPr>
-        </p:nvSpPr>
-        <p:spPr/>
-        <p:txBody>
-          <a:bodyPr vert="eaVert"/>
-          <a:lstStyle/>
-          <a:p>
-            <a:pPr lvl="0"/>
-            <a:r>
-              <a:rPr lang="pl-PL"/>
-              <a:t>Kliknij, aby edytować style wzorca tekstu</a:t>
-            </a:r>
-          </a:p>
-          <a:p>
-            <a:pPr lvl="1"/>
-            <a:r>
-              <a:rPr lang="pl-PL"/>
-              <a:t>Drugi poziom</a:t>
-            </a:r>
-          </a:p>
-          <a:p>
-            <a:pPr lvl="2"/>
-            <a:r>
-              <a:rPr lang="pl-PL"/>
-              <a:t>Trzeci poziom</a:t>
-            </a:r>
-          </a:p>
-          <a:p>
-            <a:pPr lvl="3"/>
-            <a:r>
-              <a:rPr lang="pl-PL"/>
-              <a:t>Czwarty poziom</a:t>
-            </a:r>
-          </a:p>
-          <a:p>
-            <a:pPr lvl="4"/>
-            <a:r>
-              <a:rPr lang="pl-PL"/>
-              <a:t>Piąty poziom</a:t>
-            </a:r>
-          </a:p>
-        </p:txBody>
-      </p:sp>
-      <p:sp>
-        <p:nvSpPr>
-          <p:cNvPr id="4" name="Symbol zastępczy daty 3">
-            <a:extLst>
-              <a:ext uri="{FF2B5EF4-FFF2-40B4-BE49-F238E27FC236}">
-                <a16:creationId xmlns:a16="http://schemas.microsoft.com/office/drawing/2014/main" id="{64F553C6-CE96-31E2-9D0B-87F0804214E7}"/>
-              </a:ext>
-            </a:extLst>
-          </p:cNvPr>
-          <p:cNvSpPr>
-            <a:spLocks noGrp="1"/>
-          </p:cNvSpPr>
-          <p:nvPr>
-            <p:ph type="dt" sz="half" idx="10"/>
-          </p:nvPr>
-        </p:nvSpPr>
-        <p:spPr/>
-        <p:txBody>
-          <a:bodyPr/>
-          <a:lstStyle/>
-          <a:p>
-            <a:fld id="{395FEE27-536F-479E-B304-98213E6B58CC}" type="datetimeFigureOut">
-              <a:rPr lang="pl-PL" smtClean="0"/>
-              <a:t>25.09.2026</a:t>
-            </a:fld>
-            <a:endParaRPr lang="pl-PL"/>
-          </a:p>
-        </p:txBody>
-      </p:sp>
-      <p:sp>
-        <p:nvSpPr>
-          <p:cNvPr id="5" name="Symbol zastępczy stopki 4">
-            <a:extLst>
-              <a:ext uri="{FF2B5EF4-FFF2-40B4-BE49-F238E27FC236}">
-                <a16:creationId xmlns:a16="http://schemas.microsoft.com/office/drawing/2014/main" id="{9E984E3A-F428-9721-57D4-4DA6A60FA881}"/>
-              </a:ext>
-            </a:extLst>
-          </p:cNvPr>
-          <p:cNvSpPr>
-            <a:spLocks noGrp="1"/>
-          </p:cNvSpPr>
-          <p:nvPr>
-            <p:ph type="ftr" sz="quarter" idx="11"/>
-          </p:nvPr>
-        </p:nvSpPr>
-        <p:spPr/>
-        <p:txBody>
-          <a:bodyPr/>
-          <a:lstStyle/>
-          <a:p>
-            <a:endParaRPr lang="pl-PL"/>
-          </a:p>
-        </p:txBody>
-      </p:sp>
-      <p:sp>
-        <p:nvSpPr>
-          <p:cNvPr id="6" name="Symbol zastępczy numeru slajdu 5">
-            <a:extLst>
-              <a:ext uri="{FF2B5EF4-FFF2-40B4-BE49-F238E27FC236}">
-                <a16:creationId xmlns:a16="http://schemas.microsoft.com/office/drawing/2014/main" id="{BB3202D7-522C-85FA-AF9E-E3EECD96BF58}"/>
-              </a:ext>
-            </a:extLst>
-          </p:cNvPr>
-          <p:cNvSpPr>
-            <a:spLocks noGrp="1"/>
-          </p:cNvSpPr>
-          <p:nvPr>
-            <p:ph type="sldNum" sz="quarter" idx="12"/>
-          </p:nvPr>
-        </p:nvSpPr>
-        <p:spPr/>
-        <p:txBody>
-          <a:bodyPr/>
-          <a:lstStyle/>
-          <a:p>
-            <a:fld id="{E4D5C528-8E18-4212-8660-D147A651E159}" type="slidenum">
-              <a:rPr lang="pl-PL" smtClean="0"/>
-              <a:t>‹#›</a:t>
-            </a:fld>
-            <a:endParaRPr lang="pl-PL"/>
-          </a:p>
-        </p:txBody>
-      </p:sp>
-    </p:spTree>
-    <p:extLst>
-      <p:ext uri="{BB962C8B-B14F-4D97-AF65-F5344CB8AC3E}">
-        <p14:creationId xmlns:p14="http://schemas.microsoft.com/office/powerpoint/2010/main" val="1595716553"/>
-      </p:ext>
-    </p:extLst>
-  </p:cSld>
-  <p:clrMapOvr>
-    <a:masterClrMapping/>
-  </p:clrMapOvr>
-</p:sldLayout>
-</file>
-
-<file path=ppt/slideLayouts/slideLayout11.xml><?xml version="1.0" encoding="utf-8"?>
-<p:sldLayout xmlns:a="http://schemas.openxmlformats.org/drawingml/2006/main" xmlns:r="http://schemas.openxmlformats.org/officeDocument/2006/relationships" xmlns:p="http://schemas.openxmlformats.org/presentationml/2006/main" type="vertTitleAndTx" preserve="1">
-  <p:cSld name="Tytuł pionowy i tekst">
-    <p:spTree>
-      <p:nvGrpSpPr>
-        <p:cNvPr id="1" name=""/>
-        <p:cNvGrpSpPr/>
-        <p:nvPr/>
-      </p:nvGrpSpPr>
-      <p:grpSpPr>
-        <a:xfrm>
-          <a:off x="0" y="0"/>
-          <a:ext cx="0" cy="0"/>
-          <a:chOff x="0" y="0"/>
-          <a:chExt cx="0" cy="0"/>
-        </a:xfrm>
-      </p:grpSpPr>
-      <p:sp>
-        <p:nvSpPr>
-          <p:cNvPr id="2" name="Tytuł pionowy 1">
-            <a:extLst>
-              <a:ext uri="{FF2B5EF4-FFF2-40B4-BE49-F238E27FC236}">
-                <a16:creationId xmlns:a16="http://schemas.microsoft.com/office/drawing/2014/main" id="{C432D806-DFEC-1939-C6F7-E41DAFDFBA62}"/>
-              </a:ext>
-            </a:extLst>
-          </p:cNvPr>
-          <p:cNvSpPr>
-            <a:spLocks noGrp="1"/>
-          </p:cNvSpPr>
-          <p:nvPr>
-            <p:ph type="title" orient="vert"/>
-          </p:nvPr>
-        </p:nvSpPr>
-        <p:spPr>
-          <a:xfrm>
-            <a:off x="8724900" y="365125"/>
-            <a:ext cx="2628900" cy="5811838"/>
-          </a:xfrm>
-        </p:spPr>
-        <p:txBody>
-          <a:bodyPr vert="eaVert"/>
-          <a:lstStyle/>
-          <a:p>
-            <a:r>
-              <a:rPr lang="pl-PL"/>
-              <a:t>Kliknij, aby edytować styl</a:t>
-            </a:r>
-          </a:p>
-        </p:txBody>
-      </p:sp>
-      <p:sp>
-        <p:nvSpPr>
-          <p:cNvPr id="3" name="Symbol zastępczy tytułu pionowego 2">
-            <a:extLst>
-              <a:ext uri="{FF2B5EF4-FFF2-40B4-BE49-F238E27FC236}">
-                <a16:creationId xmlns:a16="http://schemas.microsoft.com/office/drawing/2014/main" id="{ED926729-E8F8-36B4-561D-2BCAA84B760A}"/>
-              </a:ext>
-            </a:extLst>
-          </p:cNvPr>
-          <p:cNvSpPr>
-            <a:spLocks noGrp="1"/>
-          </p:cNvSpPr>
-          <p:nvPr>
-            <p:ph type="body" orient="vert" idx="1"/>
-          </p:nvPr>
-        </p:nvSpPr>
-        <p:spPr>
-          <a:xfrm>
-            <a:off x="838200" y="365125"/>
-            <a:ext cx="7734300" cy="5811838"/>
-          </a:xfrm>
-        </p:spPr>
-        <p:txBody>
-          <a:bodyPr vert="eaVert"/>
-          <a:lstStyle/>
-          <a:p>
-            <a:pPr lvl="0"/>
-            <a:r>
-              <a:rPr lang="pl-PL"/>
-              <a:t>Kliknij, aby edytować style wzorca tekstu</a:t>
-            </a:r>
-          </a:p>
-          <a:p>
-            <a:pPr lvl="1"/>
-            <a:r>
-              <a:rPr lang="pl-PL"/>
-              <a:t>Drugi poziom</a:t>
-            </a:r>
-          </a:p>
-          <a:p>
-            <a:pPr lvl="2"/>
-            <a:r>
-              <a:rPr lang="pl-PL"/>
-              <a:t>Trzeci poziom</a:t>
-            </a:r>
-          </a:p>
-          <a:p>
-            <a:pPr lvl="3"/>
-            <a:r>
-              <a:rPr lang="pl-PL"/>
-              <a:t>Czwarty poziom</a:t>
-            </a:r>
-          </a:p>
-          <a:p>
-            <a:pPr lvl="4"/>
-            <a:r>
-              <a:rPr lang="pl-PL"/>
-              <a:t>Piąty poziom</a:t>
-            </a:r>
-          </a:p>
-        </p:txBody>
-      </p:sp>
-      <p:sp>
-        <p:nvSpPr>
-          <p:cNvPr id="4" name="Symbol zastępczy daty 3">
-            <a:extLst>
-              <a:ext uri="{FF2B5EF4-FFF2-40B4-BE49-F238E27FC236}">
-                <a16:creationId xmlns:a16="http://schemas.microsoft.com/office/drawing/2014/main" id="{E8D9FD4A-C811-CC77-4EAE-26EF19E68739}"/>
-              </a:ext>
-            </a:extLst>
-          </p:cNvPr>
-          <p:cNvSpPr>
-            <a:spLocks noGrp="1"/>
-          </p:cNvSpPr>
-          <p:nvPr>
-            <p:ph type="dt" sz="half" idx="10"/>
-          </p:nvPr>
-        </p:nvSpPr>
-        <p:spPr/>
-        <p:txBody>
-          <a:bodyPr/>
-          <a:lstStyle/>
-          <a:p>
-            <a:fld id="{395FEE27-536F-479E-B304-98213E6B58CC}" type="datetimeFigureOut">
-              <a:rPr lang="pl-PL" smtClean="0"/>
-              <a:t>25.09.2026</a:t>
-            </a:fld>
-            <a:endParaRPr lang="pl-PL"/>
-          </a:p>
-        </p:txBody>
-      </p:sp>
-      <p:sp>
-        <p:nvSpPr>
-          <p:cNvPr id="5" name="Symbol zastępczy stopki 4">
-            <a:extLst>
-              <a:ext uri="{FF2B5EF4-FFF2-40B4-BE49-F238E27FC236}">
-                <a16:creationId xmlns:a16="http://schemas.microsoft.com/office/drawing/2014/main" id="{4BF210D4-8811-A5CC-BFF8-ABF352F915AA}"/>
-              </a:ext>
-            </a:extLst>
-          </p:cNvPr>
-          <p:cNvSpPr>
-            <a:spLocks noGrp="1"/>
-          </p:cNvSpPr>
-          <p:nvPr>
-            <p:ph type="ftr" sz="quarter" idx="11"/>
-          </p:nvPr>
-        </p:nvSpPr>
-        <p:spPr/>
-        <p:txBody>
-          <a:bodyPr/>
-          <a:lstStyle/>
-          <a:p>
-            <a:endParaRPr lang="pl-PL"/>
-          </a:p>
-        </p:txBody>
-      </p:sp>
-      <p:sp>
-        <p:nvSpPr>
-          <p:cNvPr id="6" name="Symbol zastępczy numeru slajdu 5">
-            <a:extLst>
-              <a:ext uri="{FF2B5EF4-FFF2-40B4-BE49-F238E27FC236}">
-                <a16:creationId xmlns:a16="http://schemas.microsoft.com/office/drawing/2014/main" id="{7B9B824F-4746-C760-83D5-28C515466FF7}"/>
-              </a:ext>
-            </a:extLst>
-          </p:cNvPr>
-          <p:cNvSpPr>
-            <a:spLocks noGrp="1"/>
-          </p:cNvSpPr>
-          <p:nvPr>
-            <p:ph type="sldNum" sz="quarter" idx="12"/>
-          </p:nvPr>
-        </p:nvSpPr>
-        <p:spPr/>
-        <p:txBody>
-          <a:bodyPr/>
-          <a:lstStyle/>
-          <a:p>
-            <a:fld id="{E4D5C528-8E18-4212-8660-D147A651E159}" type="slidenum">
-              <a:rPr lang="pl-PL" smtClean="0"/>
-              <a:t>‹#›</a:t>
-            </a:fld>
-            <a:endParaRPr lang="pl-PL"/>
-          </a:p>
-        </p:txBody>
-      </p:sp>
-    </p:spTree>
-    <p:extLst>
-      <p:ext uri="{BB962C8B-B14F-4D97-AF65-F5344CB8AC3E}">
-        <p14:creationId xmlns:p14="http://schemas.microsoft.com/office/powerpoint/2010/main" val="2143279362"/>
-      </p:ext>
-    </p:extLst>
-  </p:cSld>
-  <p:clrMapOvr>
-    <a:masterClrMapping/>
-  </p:clrMapOvr>
-</p:sldLayout>
-</file>
-
-<file path=ppt/slideLayouts/slideLayout2.xml><?xml version="1.0" encoding="utf-8"?>
-<p:sldLayout xmlns:a="http://schemas.openxmlformats.org/drawingml/2006/main" xmlns:r="http://schemas.openxmlformats.org/officeDocument/2006/relationships" xmlns:p="http://schemas.openxmlformats.org/presentationml/2006/main" type="obj" preserve="1">
-  <p:cSld name="Tytuł i zawartość">
-    <p:spTree>
-      <p:nvGrpSpPr>
-        <p:cNvPr id="1" name=""/>
-        <p:cNvGrpSpPr/>
-        <p:nvPr/>
-      </p:nvGrpSpPr>
-      <p:grpSpPr>
-        <a:xfrm>
-          <a:off x="0" y="0"/>
-          <a:ext cx="0" cy="0"/>
-          <a:chOff x="0" y="0"/>
-          <a:chExt cx="0" cy="0"/>
-        </a:xfrm>
-      </p:grpSpPr>
-      <p:sp>
-        <p:nvSpPr>
-          <p:cNvPr id="2" name="Tytuł 1">
-            <a:extLst>
-              <a:ext uri="{FF2B5EF4-FFF2-40B4-BE49-F238E27FC236}">
-                <a16:creationId xmlns:a16="http://schemas.microsoft.com/office/drawing/2014/main" id="{874624C3-F21A-D57C-4779-71E4C7A0F489}"/>
-              </a:ext>
-            </a:extLst>
-          </p:cNvPr>
-          <p:cNvSpPr>
-            <a:spLocks noGrp="1"/>
-          </p:cNvSpPr>
-          <p:nvPr>
-            <p:ph type="title"/>
-          </p:nvPr>
-        </p:nvSpPr>
-        <p:spPr/>
-        <p:txBody>
-          <a:bodyPr/>
-          <a:lstStyle/>
-          <a:p>
-            <a:r>
-              <a:rPr lang="pl-PL"/>
-              <a:t>Kliknij, aby edytować styl</a:t>
-            </a:r>
-          </a:p>
-        </p:txBody>
-      </p:sp>
-      <p:sp>
-        <p:nvSpPr>
-          <p:cNvPr id="3" name="Symbol zastępczy zawartości 2">
-            <a:extLst>
-              <a:ext uri="{FF2B5EF4-FFF2-40B4-BE49-F238E27FC236}">
-                <a16:creationId xmlns:a16="http://schemas.microsoft.com/office/drawing/2014/main" id="{596DF078-20D2-95CF-5E14-A94DDEECB1B8}"/>
-              </a:ext>
-            </a:extLst>
-          </p:cNvPr>
-          <p:cNvSpPr>
-            <a:spLocks noGrp="1"/>
-          </p:cNvSpPr>
-          <p:nvPr>
-            <p:ph idx="1"/>
-          </p:nvPr>
-        </p:nvSpPr>
-        <p:spPr/>
-        <p:txBody>
-          <a:bodyPr/>
-          <a:lstStyle/>
-          <a:p>
-            <a:pPr lvl="0"/>
-            <a:r>
-              <a:rPr lang="pl-PL"/>
-              <a:t>Kliknij, aby edytować style wzorca tekstu</a:t>
-            </a:r>
-          </a:p>
-          <a:p>
-            <a:pPr lvl="1"/>
-            <a:r>
-              <a:rPr lang="pl-PL"/>
-              <a:t>Drugi poziom</a:t>
-            </a:r>
-          </a:p>
-          <a:p>
-            <a:pPr lvl="2"/>
-            <a:r>
-              <a:rPr lang="pl-PL"/>
-              <a:t>Trzeci poziom</a:t>
-            </a:r>
-          </a:p>
-          <a:p>
-            <a:pPr lvl="3"/>
-            <a:r>
-              <a:rPr lang="pl-PL"/>
-              <a:t>Czwarty poziom</a:t>
-            </a:r>
-          </a:p>
-          <a:p>
-            <a:pPr lvl="4"/>
-            <a:r>
-              <a:rPr lang="pl-PL"/>
-              <a:t>Piąty poziom</a:t>
-            </a:r>
-          </a:p>
-        </p:txBody>
-      </p:sp>
-      <p:sp>
-        <p:nvSpPr>
-          <p:cNvPr id="4" name="Symbol zastępczy daty 3">
-            <a:extLst>
-              <a:ext uri="{FF2B5EF4-FFF2-40B4-BE49-F238E27FC236}">
-                <a16:creationId xmlns:a16="http://schemas.microsoft.com/office/drawing/2014/main" id="{A6982C61-7CAE-31F3-18B7-2DFB504BBACE}"/>
-              </a:ext>
-            </a:extLst>
-          </p:cNvPr>
-          <p:cNvSpPr>
-            <a:spLocks noGrp="1"/>
-          </p:cNvSpPr>
-          <p:nvPr>
-            <p:ph type="dt" sz="half" idx="10"/>
-          </p:nvPr>
-        </p:nvSpPr>
-        <p:spPr/>
-        <p:txBody>
-          <a:bodyPr/>
-          <a:lstStyle/>
-          <a:p>
-            <a:fld id="{395FEE27-536F-479E-B304-98213E6B58CC}" type="datetimeFigureOut">
-              <a:rPr lang="pl-PL" smtClean="0"/>
-              <a:t>25.09.2026</a:t>
-            </a:fld>
-            <a:endParaRPr lang="pl-PL"/>
-          </a:p>
-        </p:txBody>
-      </p:sp>
-      <p:sp>
-        <p:nvSpPr>
-          <p:cNvPr id="5" name="Symbol zastępczy stopki 4">
-            <a:extLst>
-              <a:ext uri="{FF2B5EF4-FFF2-40B4-BE49-F238E27FC236}">
-                <a16:creationId xmlns:a16="http://schemas.microsoft.com/office/drawing/2014/main" id="{BFAC59E4-A4C2-4C9E-C116-F32B86275EC3}"/>
-              </a:ext>
-            </a:extLst>
-          </p:cNvPr>
-          <p:cNvSpPr>
-            <a:spLocks noGrp="1"/>
-          </p:cNvSpPr>
-          <p:nvPr>
-            <p:ph type="ftr" sz="quarter" idx="11"/>
-          </p:nvPr>
-        </p:nvSpPr>
-        <p:spPr/>
-        <p:txBody>
-          <a:bodyPr/>
-          <a:lstStyle/>
-          <a:p>
-            <a:endParaRPr lang="pl-PL"/>
-          </a:p>
-        </p:txBody>
-      </p:sp>
-      <p:sp>
-        <p:nvSpPr>
-          <p:cNvPr id="6" name="Symbol zastępczy numeru slajdu 5">
-            <a:extLst>
-              <a:ext uri="{FF2B5EF4-FFF2-40B4-BE49-F238E27FC236}">
-                <a16:creationId xmlns:a16="http://schemas.microsoft.com/office/drawing/2014/main" id="{38231EC9-AF99-43AE-4BF9-EFDF0851A123}"/>
-              </a:ext>
-            </a:extLst>
-          </p:cNvPr>
-          <p:cNvSpPr>
-            <a:spLocks noGrp="1"/>
-          </p:cNvSpPr>
-          <p:nvPr>
-            <p:ph type="sldNum" sz="quarter" idx="12"/>
-          </p:nvPr>
-        </p:nvSpPr>
-        <p:spPr/>
-        <p:txBody>
-          <a:bodyPr/>
-          <a:lstStyle/>
-          <a:p>
-            <a:fld id="{E4D5C528-8E18-4212-8660-D147A651E159}" type="slidenum">
-              <a:rPr lang="pl-PL" smtClean="0"/>
-              <a:t>‹#›</a:t>
-            </a:fld>
-            <a:endParaRPr lang="pl-PL"/>
-          </a:p>
-        </p:txBody>
-      </p:sp>
-    </p:spTree>
-    <p:extLst>
-      <p:ext uri="{BB962C8B-B14F-4D97-AF65-F5344CB8AC3E}">
-        <p14:creationId xmlns:p14="http://schemas.microsoft.com/office/powerpoint/2010/main" val="4080086671"/>
-      </p:ext>
-    </p:extLst>
-  </p:cSld>
-  <p:clrMapOvr>
-    <a:masterClrMapping/>
-  </p:clrMapOvr>
-</p:sldLayout>
-</file>
-
-<file path=ppt/slideLayouts/slideLayout3.xml><?xml version="1.0" encoding="utf-8"?>
-<p:sldLayout xmlns:a="http://schemas.openxmlformats.org/drawingml/2006/main" xmlns:r="http://schemas.openxmlformats.org/officeDocument/2006/relationships" xmlns:p="http://schemas.openxmlformats.org/presentationml/2006/main" type="secHead" preserve="1">
-  <p:cSld name="Nagłówek sekcji">
-    <p:spTree>
-      <p:nvGrpSpPr>
-        <p:cNvPr id="1" name=""/>
-        <p:cNvGrpSpPr/>
-        <p:nvPr/>
-      </p:nvGrpSpPr>
-      <p:grpSpPr>
-        <a:xfrm>
-          <a:off x="0" y="0"/>
-          <a:ext cx="0" cy="0"/>
-          <a:chOff x="0" y="0"/>
-          <a:chExt cx="0" cy="0"/>
-        </a:xfrm>
-      </p:grpSpPr>
-      <p:sp>
-        <p:nvSpPr>
-          <p:cNvPr id="2" name="Tytuł 1">
-            <a:extLst>
-              <a:ext uri="{FF2B5EF4-FFF2-40B4-BE49-F238E27FC236}">
-                <a16:creationId xmlns:a16="http://schemas.microsoft.com/office/drawing/2014/main" id="{F1EC914C-3EFF-FC05-C5D4-D338B73FBFE7}"/>
-              </a:ext>
-            </a:extLst>
-          </p:cNvPr>
-          <p:cNvSpPr>
-            <a:spLocks noGrp="1"/>
-          </p:cNvSpPr>
-          <p:nvPr>
-            <p:ph type="title"/>
-          </p:nvPr>
-        </p:nvSpPr>
-        <p:spPr>
-          <a:xfrm>
-            <a:off x="831850" y="1709738"/>
-            <a:ext cx="10515600" cy="2852737"/>
-          </a:xfrm>
-        </p:spPr>
-        <p:txBody>
-          <a:bodyPr anchor="b"/>
-          <a:lstStyle>
-            <a:lvl1pPr>
-              <a:defRPr sz="6000"/>
-            </a:lvl1pPr>
-          </a:lstStyle>
-          <a:p>
-            <a:r>
-              <a:rPr lang="pl-PL"/>
-              <a:t>Kliknij, aby edytować styl</a:t>
-            </a:r>
-          </a:p>
-        </p:txBody>
-      </p:sp>
-      <p:sp>
-        <p:nvSpPr>
-          <p:cNvPr id="3" name="Symbol zastępczy tekstu 2">
-            <a:extLst>
-              <a:ext uri="{FF2B5EF4-FFF2-40B4-BE49-F238E27FC236}">
-                <a16:creationId xmlns:a16="http://schemas.microsoft.com/office/drawing/2014/main" id="{E9140809-F34E-A8C6-5D6F-B06FBB8793EC}"/>
-              </a:ext>
-            </a:extLst>
-          </p:cNvPr>
-          <p:cNvSpPr>
-            <a:spLocks noGrp="1"/>
-          </p:cNvSpPr>
-          <p:nvPr>
-            <p:ph type="body" idx="1"/>
-          </p:nvPr>
-        </p:nvSpPr>
-        <p:spPr>
-          <a:xfrm>
-            <a:off x="831850" y="4589463"/>
-            <a:ext cx="10515600" cy="1500187"/>
-          </a:xfrm>
-        </p:spPr>
-        <p:txBody>
-          <a:bodyPr/>
-          <a:lstStyle>
-            <a:lvl1pPr marL="0" indent="0">
-              <a:buNone/>
-              <a:defRPr sz="2400">
-                <a:solidFill>
-                  <a:schemeClr val="tx1">
-                    <a:tint val="82000"/>
-                  </a:schemeClr>
-                </a:solidFill>
-              </a:defRPr>
-            </a:lvl1pPr>
-            <a:lvl2pPr marL="457200" indent="0">
-              <a:buNone/>
-              <a:defRPr sz="2000">
-                <a:solidFill>
-                  <a:schemeClr val="tx1">
-                    <a:tint val="82000"/>
-                  </a:schemeClr>
-                </a:solidFill>
-              </a:defRPr>
-            </a:lvl2pPr>
-            <a:lvl3pPr marL="914400" indent="0">
-              <a:buNone/>
-              <a:defRPr sz="1800">
-                <a:solidFill>
-                  <a:schemeClr val="tx1">
-                    <a:tint val="82000"/>
-                  </a:schemeClr>
-                </a:solidFill>
-              </a:defRPr>
-            </a:lvl3pPr>
-            <a:lvl4pPr marL="1371600" indent="0">
-              <a:buNone/>
-              <a:defRPr sz="1600">
-                <a:solidFill>
-                  <a:schemeClr val="tx1">
-                    <a:tint val="82000"/>
-                  </a:schemeClr>
-                </a:solidFill>
-              </a:defRPr>
-            </a:lvl4pPr>
-            <a:lvl5pPr marL="1828800" indent="0">
-              <a:buNone/>
-              <a:defRPr sz="1600">
-                <a:solidFill>
-                  <a:schemeClr val="tx1">
-                    <a:tint val="82000"/>
-                  </a:schemeClr>
-                </a:solidFill>
-              </a:defRPr>
-            </a:lvl5pPr>
-            <a:lvl6pPr marL="2286000" indent="0">
-              <a:buNone/>
-              <a:defRPr sz="1600">
-                <a:solidFill>
-                  <a:schemeClr val="tx1">
-                    <a:tint val="82000"/>
-                  </a:schemeClr>
-                </a:solidFill>
-              </a:defRPr>
-            </a:lvl6pPr>
-            <a:lvl7pPr marL="2743200" indent="0">
-              <a:buNone/>
-              <a:defRPr sz="1600">
-                <a:solidFill>
-                  <a:schemeClr val="tx1">
-                    <a:tint val="82000"/>
-                  </a:schemeClr>
-                </a:solidFill>
-              </a:defRPr>
-            </a:lvl7pPr>
-            <a:lvl8pPr marL="3200400" indent="0">
-              <a:buNone/>
-              <a:defRPr sz="1600">
-                <a:solidFill>
-                  <a:schemeClr val="tx1">
-                    <a:tint val="82000"/>
-                  </a:schemeClr>
-                </a:solidFill>
-              </a:defRPr>
-            </a:lvl8pPr>
-            <a:lvl9pPr marL="3657600" indent="0">
-              <a:buNone/>
-              <a:defRPr sz="1600">
-                <a:solidFill>
-                  <a:schemeClr val="tx1">
-                    <a:tint val="82000"/>
-                  </a:schemeClr>
-                </a:solidFill>
-              </a:defRPr>
-            </a:lvl9pPr>
-          </a:lstStyle>
-          <a:p>
-            <a:pPr lvl="0"/>
-            <a:r>
-              <a:rPr lang="pl-PL"/>
-              <a:t>Kliknij, aby edytować style wzorca tekstu</a:t>
-            </a:r>
-          </a:p>
-        </p:txBody>
-      </p:sp>
-      <p:sp>
-        <p:nvSpPr>
-          <p:cNvPr id="4" name="Symbol zastępczy daty 3">
-            <a:extLst>
-              <a:ext uri="{FF2B5EF4-FFF2-40B4-BE49-F238E27FC236}">
-                <a16:creationId xmlns:a16="http://schemas.microsoft.com/office/drawing/2014/main" id="{01597F03-AA90-1517-F4C5-10CD3432EF64}"/>
-              </a:ext>
-            </a:extLst>
-          </p:cNvPr>
-          <p:cNvSpPr>
-            <a:spLocks noGrp="1"/>
-          </p:cNvSpPr>
-          <p:nvPr>
-            <p:ph type="dt" sz="half" idx="10"/>
-          </p:nvPr>
-        </p:nvSpPr>
-        <p:spPr/>
-        <p:txBody>
-          <a:bodyPr/>
-          <a:lstStyle/>
-          <a:p>
-            <a:fld id="{395FEE27-536F-479E-B304-98213E6B58CC}" type="datetimeFigureOut">
-              <a:rPr lang="pl-PL" smtClean="0"/>
-              <a:t>25.09.2026</a:t>
-            </a:fld>
-            <a:endParaRPr lang="pl-PL"/>
-          </a:p>
-        </p:txBody>
-      </p:sp>
-      <p:sp>
-        <p:nvSpPr>
-          <p:cNvPr id="5" name="Symbol zastępczy stopki 4">
-            <a:extLst>
-              <a:ext uri="{FF2B5EF4-FFF2-40B4-BE49-F238E27FC236}">
-                <a16:creationId xmlns:a16="http://schemas.microsoft.com/office/drawing/2014/main" id="{04E40038-BB1E-5A52-F407-D8C946C7026B}"/>
-              </a:ext>
-            </a:extLst>
-          </p:cNvPr>
-          <p:cNvSpPr>
-            <a:spLocks noGrp="1"/>
-          </p:cNvSpPr>
-          <p:nvPr>
-            <p:ph type="ftr" sz="quarter" idx="11"/>
-          </p:nvPr>
-        </p:nvSpPr>
-        <p:spPr/>
-        <p:txBody>
-          <a:bodyPr/>
-          <a:lstStyle/>
-          <a:p>
-            <a:endParaRPr lang="pl-PL"/>
-          </a:p>
-        </p:txBody>
-      </p:sp>
-      <p:sp>
-        <p:nvSpPr>
-          <p:cNvPr id="6" name="Symbol zastępczy numeru slajdu 5">
-            <a:extLst>
-              <a:ext uri="{FF2B5EF4-FFF2-40B4-BE49-F238E27FC236}">
-                <a16:creationId xmlns:a16="http://schemas.microsoft.com/office/drawing/2014/main" id="{BAFEE438-352C-D242-180C-924AF8610EF2}"/>
-              </a:ext>
-            </a:extLst>
-          </p:cNvPr>
-          <p:cNvSpPr>
-            <a:spLocks noGrp="1"/>
-          </p:cNvSpPr>
-          <p:nvPr>
-            <p:ph type="sldNum" sz="quarter" idx="12"/>
-          </p:nvPr>
-        </p:nvSpPr>
-        <p:spPr/>
-        <p:txBody>
-          <a:bodyPr/>
-          <a:lstStyle/>
-          <a:p>
-            <a:fld id="{E4D5C528-8E18-4212-8660-D147A651E159}" type="slidenum">
-              <a:rPr lang="pl-PL" smtClean="0"/>
-              <a:t>‹#›</a:t>
-            </a:fld>
-            <a:endParaRPr lang="pl-PL"/>
-          </a:p>
-        </p:txBody>
-      </p:sp>
-    </p:spTree>
-    <p:extLst>
-      <p:ext uri="{BB962C8B-B14F-4D97-AF65-F5344CB8AC3E}">
-        <p14:creationId xmlns:p14="http://schemas.microsoft.com/office/powerpoint/2010/main" val="3024399222"/>
-      </p:ext>
-    </p:extLst>
-  </p:cSld>
-  <p:clrMapOvr>
-    <a:masterClrMapping/>
-  </p:clrMapOvr>
-</p:sldLayout>
-</file>
-
-<file path=ppt/slideLayouts/slideLayout4.xml><?xml version="1.0" encoding="utf-8"?>
-<p:sldLayout xmlns:a="http://schemas.openxmlformats.org/drawingml/2006/main" xmlns:r="http://schemas.openxmlformats.org/officeDocument/2006/relationships" xmlns:p="http://schemas.openxmlformats.org/presentationml/2006/main" type="twoObj" preserve="1">
-  <p:cSld name="Dwa elementy zawartości">
-    <p:spTree>
-      <p:nvGrpSpPr>
-        <p:cNvPr id="1" name=""/>
-        <p:cNvGrpSpPr/>
-        <p:nvPr/>
-      </p:nvGrpSpPr>
-      <p:grpSpPr>
-        <a:xfrm>
-          <a:off x="0" y="0"/>
-          <a:ext cx="0" cy="0"/>
-          <a:chOff x="0" y="0"/>
-          <a:chExt cx="0" cy="0"/>
-        </a:xfrm>
-      </p:grpSpPr>
-      <p:sp>
-        <p:nvSpPr>
-          <p:cNvPr id="2" name="Tytuł 1">
-            <a:extLst>
-              <a:ext uri="{FF2B5EF4-FFF2-40B4-BE49-F238E27FC236}">
-                <a16:creationId xmlns:a16="http://schemas.microsoft.com/office/drawing/2014/main" id="{CAE03817-2A93-FED3-FBDB-244CF85F2DC7}"/>
-              </a:ext>
-            </a:extLst>
-          </p:cNvPr>
-          <p:cNvSpPr>
-            <a:spLocks noGrp="1"/>
-          </p:cNvSpPr>
-          <p:nvPr>
-            <p:ph type="title"/>
-          </p:nvPr>
-        </p:nvSpPr>
-        <p:spPr/>
-        <p:txBody>
-          <a:bodyPr/>
-          <a:lstStyle/>
-          <a:p>
-            <a:r>
-              <a:rPr lang="pl-PL"/>
-              <a:t>Kliknij, aby edytować styl</a:t>
-            </a:r>
-          </a:p>
-        </p:txBody>
-      </p:sp>
-      <p:sp>
-        <p:nvSpPr>
-          <p:cNvPr id="3" name="Symbol zastępczy zawartości 2">
-            <a:extLst>
-              <a:ext uri="{FF2B5EF4-FFF2-40B4-BE49-F238E27FC236}">
-                <a16:creationId xmlns:a16="http://schemas.microsoft.com/office/drawing/2014/main" id="{5F3A88ED-75BC-0121-376D-5A3156FDF03E}"/>
-              </a:ext>
-            </a:extLst>
-          </p:cNvPr>
-          <p:cNvSpPr>
-            <a:spLocks noGrp="1"/>
-          </p:cNvSpPr>
-          <p:nvPr>
-            <p:ph sz="half" idx="1"/>
-          </p:nvPr>
-        </p:nvSpPr>
-        <p:spPr>
-          <a:xfrm>
-            <a:off x="838200" y="1825625"/>
-            <a:ext cx="5181600" cy="4351338"/>
-          </a:xfrm>
-        </p:spPr>
-        <p:txBody>
-          <a:bodyPr/>
-          <a:lstStyle/>
-          <a:p>
-            <a:pPr lvl="0"/>
-            <a:r>
-              <a:rPr lang="pl-PL"/>
-              <a:t>Kliknij, aby edytować style wzorca tekstu</a:t>
-            </a:r>
-          </a:p>
-          <a:p>
-            <a:pPr lvl="1"/>
-            <a:r>
-              <a:rPr lang="pl-PL"/>
-              <a:t>Drugi poziom</a:t>
-            </a:r>
-          </a:p>
-          <a:p>
-            <a:pPr lvl="2"/>
-            <a:r>
-              <a:rPr lang="pl-PL"/>
-              <a:t>Trzeci poziom</a:t>
-            </a:r>
-          </a:p>
-          <a:p>
-            <a:pPr lvl="3"/>
-            <a:r>
-              <a:rPr lang="pl-PL"/>
-              <a:t>Czwarty poziom</a:t>
-            </a:r>
-          </a:p>
-          <a:p>
-            <a:pPr lvl="4"/>
-            <a:r>
-              <a:rPr lang="pl-PL"/>
-              <a:t>Piąty poziom</a:t>
-            </a:r>
-          </a:p>
-        </p:txBody>
-      </p:sp>
-      <p:sp>
-        <p:nvSpPr>
-          <p:cNvPr id="4" name="Symbol zastępczy zawartości 3">
-            <a:extLst>
-              <a:ext uri="{FF2B5EF4-FFF2-40B4-BE49-F238E27FC236}">
-                <a16:creationId xmlns:a16="http://schemas.microsoft.com/office/drawing/2014/main" id="{25CDAD63-6655-BE50-0BF2-C7E9BCC77DBD}"/>
-              </a:ext>
-            </a:extLst>
-          </p:cNvPr>
-          <p:cNvSpPr>
-            <a:spLocks noGrp="1"/>
-          </p:cNvSpPr>
-          <p:nvPr>
-            <p:ph sz="half" idx="2"/>
-          </p:nvPr>
-        </p:nvSpPr>
-        <p:spPr>
-          <a:xfrm>
-            <a:off x="6172200" y="1825625"/>
-            <a:ext cx="5181600" cy="4351338"/>
-          </a:xfrm>
-        </p:spPr>
-        <p:txBody>
-          <a:bodyPr/>
-          <a:lstStyle/>
-          <a:p>
-            <a:pPr lvl="0"/>
-            <a:r>
-              <a:rPr lang="pl-PL"/>
-              <a:t>Kliknij, aby edytować style wzorca tekstu</a:t>
-            </a:r>
-          </a:p>
-          <a:p>
-            <a:pPr lvl="1"/>
-            <a:r>
-              <a:rPr lang="pl-PL"/>
-              <a:t>Drugi poziom</a:t>
-            </a:r>
-          </a:p>
-          <a:p>
-            <a:pPr lvl="2"/>
-            <a:r>
-              <a:rPr lang="pl-PL"/>
-              <a:t>Trzeci poziom</a:t>
-            </a:r>
-          </a:p>
-          <a:p>
-            <a:pPr lvl="3"/>
-            <a:r>
-              <a:rPr lang="pl-PL"/>
-              <a:t>Czwarty poziom</a:t>
-            </a:r>
-          </a:p>
-          <a:p>
-            <a:pPr lvl="4"/>
-            <a:r>
-              <a:rPr lang="pl-PL"/>
-              <a:t>Piąty poziom</a:t>
-            </a:r>
-          </a:p>
-        </p:txBody>
-      </p:sp>
-      <p:sp>
-        <p:nvSpPr>
-          <p:cNvPr id="5" name="Symbol zastępczy daty 4">
-            <a:extLst>
-              <a:ext uri="{FF2B5EF4-FFF2-40B4-BE49-F238E27FC236}">
-                <a16:creationId xmlns:a16="http://schemas.microsoft.com/office/drawing/2014/main" id="{7612F97F-AC7D-1CC2-FECC-A8AB38175702}"/>
-              </a:ext>
-            </a:extLst>
-          </p:cNvPr>
-          <p:cNvSpPr>
-            <a:spLocks noGrp="1"/>
-          </p:cNvSpPr>
-          <p:nvPr>
-            <p:ph type="dt" sz="half" idx="10"/>
-          </p:nvPr>
-        </p:nvSpPr>
-        <p:spPr/>
-        <p:txBody>
-          <a:bodyPr/>
-          <a:lstStyle/>
-          <a:p>
-            <a:fld id="{395FEE27-536F-479E-B304-98213E6B58CC}" type="datetimeFigureOut">
-              <a:rPr lang="pl-PL" smtClean="0"/>
-              <a:t>25.09.2026</a:t>
-            </a:fld>
-            <a:endParaRPr lang="pl-PL"/>
-          </a:p>
-        </p:txBody>
-      </p:sp>
-      <p:sp>
-        <p:nvSpPr>
-          <p:cNvPr id="6" name="Symbol zastępczy stopki 5">
-            <a:extLst>
-              <a:ext uri="{FF2B5EF4-FFF2-40B4-BE49-F238E27FC236}">
-                <a16:creationId xmlns:a16="http://schemas.microsoft.com/office/drawing/2014/main" id="{D0B73069-7046-BFD7-42A1-A34F11A7471A}"/>
-              </a:ext>
-            </a:extLst>
-          </p:cNvPr>
-          <p:cNvSpPr>
-            <a:spLocks noGrp="1"/>
-          </p:cNvSpPr>
-          <p:nvPr>
-            <p:ph type="ftr" sz="quarter" idx="11"/>
-          </p:nvPr>
-        </p:nvSpPr>
-        <p:spPr/>
-        <p:txBody>
-          <a:bodyPr/>
-          <a:lstStyle/>
-          <a:p>
-            <a:endParaRPr lang="pl-PL"/>
-          </a:p>
-        </p:txBody>
-      </p:sp>
-      <p:sp>
-        <p:nvSpPr>
-          <p:cNvPr id="7" name="Symbol zastępczy numeru slajdu 6">
-            <a:extLst>
-              <a:ext uri="{FF2B5EF4-FFF2-40B4-BE49-F238E27FC236}">
-                <a16:creationId xmlns:a16="http://schemas.microsoft.com/office/drawing/2014/main" id="{6DA65674-A0E6-87F0-365A-A5E3BFC7C023}"/>
-              </a:ext>
-            </a:extLst>
-          </p:cNvPr>
-          <p:cNvSpPr>
-            <a:spLocks noGrp="1"/>
-          </p:cNvSpPr>
-          <p:nvPr>
-            <p:ph type="sldNum" sz="quarter" idx="12"/>
-          </p:nvPr>
-        </p:nvSpPr>
-        <p:spPr/>
-        <p:txBody>
-          <a:bodyPr/>
-          <a:lstStyle/>
-          <a:p>
-            <a:fld id="{E4D5C528-8E18-4212-8660-D147A651E159}" type="slidenum">
-              <a:rPr lang="pl-PL" smtClean="0"/>
-              <a:t>‹#›</a:t>
-            </a:fld>
-            <a:endParaRPr lang="pl-PL"/>
-          </a:p>
-        </p:txBody>
-      </p:sp>
-    </p:spTree>
-    <p:extLst>
-      <p:ext uri="{BB962C8B-B14F-4D97-AF65-F5344CB8AC3E}">
-        <p14:creationId xmlns:p14="http://schemas.microsoft.com/office/powerpoint/2010/main" val="3024074622"/>
-      </p:ext>
-    </p:extLst>
-  </p:cSld>
-  <p:clrMapOvr>
-    <a:masterClrMapping/>
-  </p:clrMapOvr>
-</p:sldLayout>
-</file>
-
-<file path=ppt/slideLayouts/slideLayout5.xml><?xml version="1.0" encoding="utf-8"?>
-<p:sldLayout xmlns:a="http://schemas.openxmlformats.org/drawingml/2006/main" xmlns:r="http://schemas.openxmlformats.org/officeDocument/2006/relationships" xmlns:p="http://schemas.openxmlformats.org/presentationml/2006/main" type="twoTxTwoObj" preserve="1">
-  <p:cSld name="Porównanie">
-    <p:spTree>
-      <p:nvGrpSpPr>
-        <p:cNvPr id="1" name=""/>
-        <p:cNvGrpSpPr/>
-        <p:nvPr/>
-      </p:nvGrpSpPr>
-      <p:grpSpPr>
-        <a:xfrm>
-          <a:off x="0" y="0"/>
-          <a:ext cx="0" cy="0"/>
-          <a:chOff x="0" y="0"/>
-          <a:chExt cx="0" cy="0"/>
-        </a:xfrm>
-      </p:grpSpPr>
-      <p:sp>
-        <p:nvSpPr>
-          <p:cNvPr id="2" name="Tytuł 1">
-            <a:extLst>
-              <a:ext uri="{FF2B5EF4-FFF2-40B4-BE49-F238E27FC236}">
-                <a16:creationId xmlns:a16="http://schemas.microsoft.com/office/drawing/2014/main" id="{89313B9C-F8AD-859F-E1EB-A05D47D94BD8}"/>
-              </a:ext>
-            </a:extLst>
-          </p:cNvPr>
-          <p:cNvSpPr>
-            <a:spLocks noGrp="1"/>
-          </p:cNvSpPr>
-          <p:nvPr>
-            <p:ph type="title"/>
-          </p:nvPr>
-        </p:nvSpPr>
-        <p:spPr>
-          <a:xfrm>
-            <a:off x="839788" y="365125"/>
-            <a:ext cx="10515600" cy="1325563"/>
-          </a:xfrm>
-        </p:spPr>
-        <p:txBody>
-          <a:bodyPr/>
-          <a:lstStyle/>
-          <a:p>
-            <a:r>
-              <a:rPr lang="pl-PL"/>
-              <a:t>Kliknij, aby edytować styl</a:t>
-            </a:r>
-          </a:p>
-        </p:txBody>
-      </p:sp>
-      <p:sp>
-        <p:nvSpPr>
-          <p:cNvPr id="3" name="Symbol zastępczy tekstu 2">
-            <a:extLst>
-              <a:ext uri="{FF2B5EF4-FFF2-40B4-BE49-F238E27FC236}">
-                <a16:creationId xmlns:a16="http://schemas.microsoft.com/office/drawing/2014/main" id="{31C5EE98-2342-9422-2E20-B66E54842C0C}"/>
-              </a:ext>
-            </a:extLst>
-          </p:cNvPr>
-          <p:cNvSpPr>
-            <a:spLocks noGrp="1"/>
-          </p:cNvSpPr>
-          <p:nvPr>
-            <p:ph type="body" idx="1"/>
-          </p:nvPr>
-        </p:nvSpPr>
-        <p:spPr>
-          <a:xfrm>
-            <a:off x="839788" y="1681163"/>
-            <a:ext cx="5157787" cy="823912"/>
-          </a:xfrm>
-        </p:spPr>
-        <p:txBody>
-          <a:bodyPr anchor="b"/>
-          <a:lstStyle>
-            <a:lvl1pPr marL="0" indent="0">
-              <a:buNone/>
-              <a:defRPr sz="2400" b="1"/>
-            </a:lvl1pPr>
-            <a:lvl2pPr marL="457200" indent="0">
-              <a:buNone/>
-              <a:defRPr sz="2000" b="1"/>
-            </a:lvl2pPr>
-            <a:lvl3pPr marL="914400" indent="0">
-              <a:buNone/>
-              <a:defRPr sz="1800" b="1"/>
-            </a:lvl3pPr>
-            <a:lvl4pPr marL="1371600" indent="0">
-              <a:buNone/>
-              <a:defRPr sz="1600" b="1"/>
-            </a:lvl4pPr>
-            <a:lvl5pPr marL="1828800" indent="0">
-              <a:buNone/>
-              <a:defRPr sz="1600" b="1"/>
-            </a:lvl5pPr>
-            <a:lvl6pPr marL="2286000" indent="0">
-              <a:buNone/>
-              <a:defRPr sz="1600" b="1"/>
-            </a:lvl6pPr>
-            <a:lvl7pPr marL="2743200" indent="0">
-              <a:buNone/>
-              <a:defRPr sz="1600" b="1"/>
-            </a:lvl7pPr>
-            <a:lvl8pPr marL="3200400" indent="0">
-              <a:buNone/>
-              <a:defRPr sz="1600" b="1"/>
-            </a:lvl8pPr>
-            <a:lvl9pPr marL="3657600" indent="0">
-              <a:buNone/>
-              <a:defRPr sz="1600" b="1"/>
-            </a:lvl9pPr>
-          </a:lstStyle>
-          <a:p>
-            <a:pPr lvl="0"/>
-            <a:r>
-              <a:rPr lang="pl-PL"/>
-              <a:t>Kliknij, aby edytować style wzorca tekstu</a:t>
-            </a:r>
-          </a:p>
-        </p:txBody>
-      </p:sp>
-      <p:sp>
-        <p:nvSpPr>
-          <p:cNvPr id="4" name="Symbol zastępczy zawartości 3">
-            <a:extLst>
-              <a:ext uri="{FF2B5EF4-FFF2-40B4-BE49-F238E27FC236}">
-                <a16:creationId xmlns:a16="http://schemas.microsoft.com/office/drawing/2014/main" id="{B17E98A2-CF8A-3D91-D593-FE5EA52B891D}"/>
-              </a:ext>
-            </a:extLst>
-          </p:cNvPr>
-          <p:cNvSpPr>
-            <a:spLocks noGrp="1"/>
-          </p:cNvSpPr>
-          <p:nvPr>
-            <p:ph sz="half" idx="2"/>
-          </p:nvPr>
-        </p:nvSpPr>
-        <p:spPr>
-          <a:xfrm>
-            <a:off x="839788" y="2505075"/>
-            <a:ext cx="5157787" cy="3684588"/>
-          </a:xfrm>
-        </p:spPr>
-        <p:txBody>
-          <a:bodyPr/>
-          <a:lstStyle/>
-          <a:p>
-            <a:pPr lvl="0"/>
-            <a:r>
-              <a:rPr lang="pl-PL"/>
-              <a:t>Kliknij, aby edytować style wzorca tekstu</a:t>
-            </a:r>
-          </a:p>
-          <a:p>
-            <a:pPr lvl="1"/>
-            <a:r>
-              <a:rPr lang="pl-PL"/>
-              <a:t>Drugi poziom</a:t>
-            </a:r>
-          </a:p>
-          <a:p>
-            <a:pPr lvl="2"/>
-            <a:r>
-              <a:rPr lang="pl-PL"/>
-              <a:t>Trzeci poziom</a:t>
-            </a:r>
-          </a:p>
-          <a:p>
-            <a:pPr lvl="3"/>
-            <a:r>
-              <a:rPr lang="pl-PL"/>
-              <a:t>Czwarty poziom</a:t>
-            </a:r>
-          </a:p>
-          <a:p>
-            <a:pPr lvl="4"/>
-            <a:r>
-              <a:rPr lang="pl-PL"/>
-              <a:t>Piąty poziom</a:t>
-            </a:r>
-          </a:p>
-        </p:txBody>
-      </p:sp>
-      <p:sp>
-        <p:nvSpPr>
-          <p:cNvPr id="5" name="Symbol zastępczy tekstu 4">
-            <a:extLst>
-              <a:ext uri="{FF2B5EF4-FFF2-40B4-BE49-F238E27FC236}">
-                <a16:creationId xmlns:a16="http://schemas.microsoft.com/office/drawing/2014/main" id="{1C9D4037-DEF4-C410-AB67-0DF9860BD2FD}"/>
-              </a:ext>
-            </a:extLst>
-          </p:cNvPr>
-          <p:cNvSpPr>
-            <a:spLocks noGrp="1"/>
-          </p:cNvSpPr>
-          <p:nvPr>
-            <p:ph type="body" sz="quarter" idx="3"/>
-          </p:nvPr>
-        </p:nvSpPr>
-        <p:spPr>
-          <a:xfrm>
-            <a:off x="6172200" y="1681163"/>
-            <a:ext cx="5183188" cy="823912"/>
-          </a:xfrm>
-        </p:spPr>
-        <p:txBody>
-          <a:bodyPr anchor="b"/>
-          <a:lstStyle>
-            <a:lvl1pPr marL="0" indent="0">
-              <a:buNone/>
-              <a:defRPr sz="2400" b="1"/>
-            </a:lvl1pPr>
-            <a:lvl2pPr marL="457200" indent="0">
-              <a:buNone/>
-              <a:defRPr sz="2000" b="1"/>
-            </a:lvl2pPr>
-            <a:lvl3pPr marL="914400" indent="0">
-              <a:buNone/>
-              <a:defRPr sz="1800" b="1"/>
-            </a:lvl3pPr>
-            <a:lvl4pPr marL="1371600" indent="0">
-              <a:buNone/>
-              <a:defRPr sz="1600" b="1"/>
-            </a:lvl4pPr>
-            <a:lvl5pPr marL="1828800" indent="0">
-              <a:buNone/>
-              <a:defRPr sz="1600" b="1"/>
-            </a:lvl5pPr>
-            <a:lvl6pPr marL="2286000" indent="0">
-              <a:buNone/>
-              <a:defRPr sz="1600" b="1"/>
-            </a:lvl6pPr>
-            <a:lvl7pPr marL="2743200" indent="0">
-              <a:buNone/>
-              <a:defRPr sz="1600" b="1"/>
-            </a:lvl7pPr>
-            <a:lvl8pPr marL="3200400" indent="0">
-              <a:buNone/>
-              <a:defRPr sz="1600" b="1"/>
-            </a:lvl8pPr>
-            <a:lvl9pPr marL="3657600" indent="0">
-              <a:buNone/>
-              <a:defRPr sz="1600" b="1"/>
-            </a:lvl9pPr>
-          </a:lstStyle>
-          <a:p>
-            <a:pPr lvl="0"/>
-            <a:r>
-              <a:rPr lang="pl-PL"/>
-              <a:t>Kliknij, aby edytować style wzorca tekstu</a:t>
-            </a:r>
-          </a:p>
-        </p:txBody>
-      </p:sp>
-      <p:sp>
-        <p:nvSpPr>
-          <p:cNvPr id="6" name="Symbol zastępczy zawartości 5">
-            <a:extLst>
-              <a:ext uri="{FF2B5EF4-FFF2-40B4-BE49-F238E27FC236}">
-                <a16:creationId xmlns:a16="http://schemas.microsoft.com/office/drawing/2014/main" id="{63ED75DF-E629-FAE6-57CB-621947130096}"/>
-              </a:ext>
-            </a:extLst>
-          </p:cNvPr>
-          <p:cNvSpPr>
-            <a:spLocks noGrp="1"/>
-          </p:cNvSpPr>
-          <p:nvPr>
-            <p:ph sz="quarter" idx="4"/>
-          </p:nvPr>
-        </p:nvSpPr>
-        <p:spPr>
-          <a:xfrm>
-            <a:off x="6172200" y="2505075"/>
-            <a:ext cx="5183188" cy="3684588"/>
-          </a:xfrm>
-        </p:spPr>
-        <p:txBody>
-          <a:bodyPr/>
-          <a:lstStyle/>
-          <a:p>
-            <a:pPr lvl="0"/>
-            <a:r>
-              <a:rPr lang="pl-PL"/>
-              <a:t>Kliknij, aby edytować style wzorca tekstu</a:t>
-            </a:r>
-          </a:p>
-          <a:p>
-            <a:pPr lvl="1"/>
-            <a:r>
-              <a:rPr lang="pl-PL"/>
-              <a:t>Drugi poziom</a:t>
-            </a:r>
-          </a:p>
-          <a:p>
-            <a:pPr lvl="2"/>
-            <a:r>
-              <a:rPr lang="pl-PL"/>
-              <a:t>Trzeci poziom</a:t>
-            </a:r>
-          </a:p>
-          <a:p>
-            <a:pPr lvl="3"/>
-            <a:r>
-              <a:rPr lang="pl-PL"/>
-              <a:t>Czwarty poziom</a:t>
-            </a:r>
-          </a:p>
-          <a:p>
-            <a:pPr lvl="4"/>
-            <a:r>
-              <a:rPr lang="pl-PL"/>
-              <a:t>Piąty poziom</a:t>
-            </a:r>
-          </a:p>
-        </p:txBody>
-      </p:sp>
-      <p:sp>
-        <p:nvSpPr>
-          <p:cNvPr id="7" name="Symbol zastępczy daty 6">
-            <a:extLst>
-              <a:ext uri="{FF2B5EF4-FFF2-40B4-BE49-F238E27FC236}">
-                <a16:creationId xmlns:a16="http://schemas.microsoft.com/office/drawing/2014/main" id="{56EEE76A-F576-EE75-073C-0395AF0F6438}"/>
-              </a:ext>
-            </a:extLst>
-          </p:cNvPr>
-          <p:cNvSpPr>
-            <a:spLocks noGrp="1"/>
-          </p:cNvSpPr>
-          <p:nvPr>
-            <p:ph type="dt" sz="half" idx="10"/>
-          </p:nvPr>
-        </p:nvSpPr>
-        <p:spPr/>
-        <p:txBody>
-          <a:bodyPr/>
-          <a:lstStyle/>
-          <a:p>
-            <a:fld id="{395FEE27-536F-479E-B304-98213E6B58CC}" type="datetimeFigureOut">
-              <a:rPr lang="pl-PL" smtClean="0"/>
-              <a:t>25.09.2026</a:t>
-            </a:fld>
-            <a:endParaRPr lang="pl-PL"/>
-          </a:p>
-        </p:txBody>
-      </p:sp>
-      <p:sp>
-        <p:nvSpPr>
-          <p:cNvPr id="8" name="Symbol zastępczy stopki 7">
-            <a:extLst>
-              <a:ext uri="{FF2B5EF4-FFF2-40B4-BE49-F238E27FC236}">
-                <a16:creationId xmlns:a16="http://schemas.microsoft.com/office/drawing/2014/main" id="{5CBA82FD-645F-7F4C-B01D-0909733482DB}"/>
-              </a:ext>
-            </a:extLst>
-          </p:cNvPr>
-          <p:cNvSpPr>
-            <a:spLocks noGrp="1"/>
-          </p:cNvSpPr>
-          <p:nvPr>
-            <p:ph type="ftr" sz="quarter" idx="11"/>
-          </p:nvPr>
-        </p:nvSpPr>
-        <p:spPr/>
-        <p:txBody>
-          <a:bodyPr/>
-          <a:lstStyle/>
-          <a:p>
-            <a:endParaRPr lang="pl-PL"/>
-          </a:p>
-        </p:txBody>
-      </p:sp>
-      <p:sp>
-        <p:nvSpPr>
-          <p:cNvPr id="9" name="Symbol zastępczy numeru slajdu 8">
-            <a:extLst>
-              <a:ext uri="{FF2B5EF4-FFF2-40B4-BE49-F238E27FC236}">
-                <a16:creationId xmlns:a16="http://schemas.microsoft.com/office/drawing/2014/main" id="{81617355-7BF2-428A-3BCE-95BABBB9CF43}"/>
-              </a:ext>
-            </a:extLst>
-          </p:cNvPr>
-          <p:cNvSpPr>
-            <a:spLocks noGrp="1"/>
-          </p:cNvSpPr>
-          <p:nvPr>
-            <p:ph type="sldNum" sz="quarter" idx="12"/>
-          </p:nvPr>
-        </p:nvSpPr>
-        <p:spPr/>
-        <p:txBody>
-          <a:bodyPr/>
-          <a:lstStyle/>
-          <a:p>
-            <a:fld id="{E4D5C528-8E18-4212-8660-D147A651E159}" type="slidenum">
-              <a:rPr lang="pl-PL" smtClean="0"/>
-              <a:t>‹#›</a:t>
-            </a:fld>
-            <a:endParaRPr lang="pl-PL"/>
-          </a:p>
-        </p:txBody>
-      </p:sp>
-    </p:spTree>
-    <p:extLst>
-      <p:ext uri="{BB962C8B-B14F-4D97-AF65-F5344CB8AC3E}">
-        <p14:creationId xmlns:p14="http://schemas.microsoft.com/office/powerpoint/2010/main" val="1498646647"/>
-      </p:ext>
-    </p:extLst>
-  </p:cSld>
-  <p:clrMapOvr>
-    <a:masterClrMapping/>
-  </p:clrMapOvr>
-</p:sldLayout>
-</file>
-
-<file path=ppt/slideLayouts/slideLayout6.xml><?xml version="1.0" encoding="utf-8"?>
-<p:sldLayout xmlns:a="http://schemas.openxmlformats.org/drawingml/2006/main" xmlns:r="http://schemas.openxmlformats.org/officeDocument/2006/relationships" xmlns:p="http://schemas.openxmlformats.org/presentationml/2006/main" type="titleOnly" preserve="1">
-  <p:cSld name="Tylko tytuł">
-    <p:spTree>
-      <p:nvGrpSpPr>
-        <p:cNvPr id="1" name=""/>
-        <p:cNvGrpSpPr/>
-        <p:nvPr/>
-      </p:nvGrpSpPr>
-      <p:grpSpPr>
-        <a:xfrm>
-          <a:off x="0" y="0"/>
-          <a:ext cx="0" cy="0"/>
-          <a:chOff x="0" y="0"/>
-          <a:chExt cx="0" cy="0"/>
-        </a:xfrm>
-      </p:grpSpPr>
-      <p:sp>
-        <p:nvSpPr>
-          <p:cNvPr id="2" name="Tytuł 1">
-            <a:extLst>
-              <a:ext uri="{FF2B5EF4-FFF2-40B4-BE49-F238E27FC236}">
-                <a16:creationId xmlns:a16="http://schemas.microsoft.com/office/drawing/2014/main" id="{4809FE18-0AE9-7353-49BF-A33AB1E63D8E}"/>
-              </a:ext>
-            </a:extLst>
-          </p:cNvPr>
-          <p:cNvSpPr>
-            <a:spLocks noGrp="1"/>
-          </p:cNvSpPr>
-          <p:nvPr>
-            <p:ph type="title"/>
-          </p:nvPr>
-        </p:nvSpPr>
-        <p:spPr/>
-        <p:txBody>
-          <a:bodyPr/>
-          <a:lstStyle/>
-          <a:p>
-            <a:r>
-              <a:rPr lang="pl-PL"/>
-              <a:t>Kliknij, aby edytować styl</a:t>
-            </a:r>
-          </a:p>
-        </p:txBody>
-      </p:sp>
-      <p:sp>
-        <p:nvSpPr>
-          <p:cNvPr id="3" name="Symbol zastępczy daty 2">
-            <a:extLst>
-              <a:ext uri="{FF2B5EF4-FFF2-40B4-BE49-F238E27FC236}">
-                <a16:creationId xmlns:a16="http://schemas.microsoft.com/office/drawing/2014/main" id="{E894EE45-BE5D-2EC2-871B-F380B772A479}"/>
-              </a:ext>
-            </a:extLst>
-          </p:cNvPr>
-          <p:cNvSpPr>
-            <a:spLocks noGrp="1"/>
-          </p:cNvSpPr>
-          <p:nvPr>
-            <p:ph type="dt" sz="half" idx="10"/>
-          </p:nvPr>
-        </p:nvSpPr>
-        <p:spPr/>
-        <p:txBody>
-          <a:bodyPr/>
-          <a:lstStyle/>
-          <a:p>
-            <a:fld id="{395FEE27-536F-479E-B304-98213E6B58CC}" type="datetimeFigureOut">
-              <a:rPr lang="pl-PL" smtClean="0"/>
-              <a:t>25.09.2026</a:t>
-            </a:fld>
-            <a:endParaRPr lang="pl-PL"/>
-          </a:p>
-        </p:txBody>
-      </p:sp>
-      <p:sp>
-        <p:nvSpPr>
-          <p:cNvPr id="4" name="Symbol zastępczy stopki 3">
-            <a:extLst>
-              <a:ext uri="{FF2B5EF4-FFF2-40B4-BE49-F238E27FC236}">
-                <a16:creationId xmlns:a16="http://schemas.microsoft.com/office/drawing/2014/main" id="{5D5EF9C5-CB98-6ACD-ED22-B016DB1C931B}"/>
-              </a:ext>
-            </a:extLst>
-          </p:cNvPr>
-          <p:cNvSpPr>
-            <a:spLocks noGrp="1"/>
-          </p:cNvSpPr>
-          <p:nvPr>
-            <p:ph type="ftr" sz="quarter" idx="11"/>
-          </p:nvPr>
-        </p:nvSpPr>
-        <p:spPr/>
-        <p:txBody>
-          <a:bodyPr/>
-          <a:lstStyle/>
-          <a:p>
-            <a:endParaRPr lang="pl-PL"/>
-          </a:p>
-        </p:txBody>
-      </p:sp>
-      <p:sp>
-        <p:nvSpPr>
-          <p:cNvPr id="5" name="Symbol zastępczy numeru slajdu 4">
-            <a:extLst>
-              <a:ext uri="{FF2B5EF4-FFF2-40B4-BE49-F238E27FC236}">
-                <a16:creationId xmlns:a16="http://schemas.microsoft.com/office/drawing/2014/main" id="{790C3667-2BEB-9CC1-6881-1E0B3F115351}"/>
-              </a:ext>
-            </a:extLst>
-          </p:cNvPr>
-          <p:cNvSpPr>
-            <a:spLocks noGrp="1"/>
-          </p:cNvSpPr>
-          <p:nvPr>
-            <p:ph type="sldNum" sz="quarter" idx="12"/>
-          </p:nvPr>
-        </p:nvSpPr>
-        <p:spPr/>
-        <p:txBody>
-          <a:bodyPr/>
-          <a:lstStyle/>
-          <a:p>
-            <a:fld id="{E4D5C528-8E18-4212-8660-D147A651E159}" type="slidenum">
-              <a:rPr lang="pl-PL" smtClean="0"/>
-              <a:t>‹#›</a:t>
-            </a:fld>
-            <a:endParaRPr lang="pl-PL"/>
-          </a:p>
-        </p:txBody>
-      </p:sp>
-    </p:spTree>
-    <p:extLst>
-      <p:ext uri="{BB962C8B-B14F-4D97-AF65-F5344CB8AC3E}">
-        <p14:creationId xmlns:p14="http://schemas.microsoft.com/office/powerpoint/2010/main" val="2135974466"/>
-      </p:ext>
-    </p:extLst>
-  </p:cSld>
-  <p:clrMapOvr>
-    <a:masterClrMapping/>
-  </p:clrMapOvr>
-</p:sldLayout>
-</file>
-
-<file path=ppt/slideLayouts/slideLayout7.xml><?xml version="1.0" encoding="utf-8"?>
-<p:sldLayout xmlns:a="http://schemas.openxmlformats.org/drawingml/2006/main" xmlns:r="http://schemas.openxmlformats.org/officeDocument/2006/relationships" xmlns:p="http://schemas.openxmlformats.org/presentationml/2006/main" type="blank" preserve="1">
-  <p:cSld name="Pusty">
-    <p:spTree>
-      <p:nvGrpSpPr>
-        <p:cNvPr id="1" name=""/>
-        <p:cNvGrpSpPr/>
-        <p:nvPr/>
-      </p:nvGrpSpPr>
-      <p:grpSpPr>
-        <a:xfrm>
-          <a:off x="0" y="0"/>
-          <a:ext cx="0" cy="0"/>
-          <a:chOff x="0" y="0"/>
-          <a:chExt cx="0" cy="0"/>
-        </a:xfrm>
-      </p:grpSpPr>
-      <p:sp>
-        <p:nvSpPr>
-          <p:cNvPr id="2" name="Symbol zastępczy daty 1">
-            <a:extLst>
-              <a:ext uri="{FF2B5EF4-FFF2-40B4-BE49-F238E27FC236}">
-                <a16:creationId xmlns:a16="http://schemas.microsoft.com/office/drawing/2014/main" id="{FD3E4AFA-9D77-ECD2-3537-12712237DCD7}"/>
-              </a:ext>
-            </a:extLst>
-          </p:cNvPr>
-          <p:cNvSpPr>
-            <a:spLocks noGrp="1"/>
-          </p:cNvSpPr>
-          <p:nvPr>
-            <p:ph type="dt" sz="half" idx="10"/>
-          </p:nvPr>
-        </p:nvSpPr>
-        <p:spPr/>
-        <p:txBody>
-          <a:bodyPr/>
-          <a:lstStyle/>
-          <a:p>
-            <a:fld id="{395FEE27-536F-479E-B304-98213E6B58CC}" type="datetimeFigureOut">
-              <a:rPr lang="pl-PL" smtClean="0"/>
-              <a:t>25.09.2026</a:t>
-            </a:fld>
-            <a:endParaRPr lang="pl-PL"/>
-          </a:p>
-        </p:txBody>
-      </p:sp>
-      <p:sp>
-        <p:nvSpPr>
-          <p:cNvPr id="3" name="Symbol zastępczy stopki 2">
-            <a:extLst>
-              <a:ext uri="{FF2B5EF4-FFF2-40B4-BE49-F238E27FC236}">
-                <a16:creationId xmlns:a16="http://schemas.microsoft.com/office/drawing/2014/main" id="{125A8279-982E-2DEB-48C4-31346B2413BD}"/>
-              </a:ext>
-            </a:extLst>
-          </p:cNvPr>
-          <p:cNvSpPr>
-            <a:spLocks noGrp="1"/>
-          </p:cNvSpPr>
-          <p:nvPr>
-            <p:ph type="ftr" sz="quarter" idx="11"/>
-          </p:nvPr>
-        </p:nvSpPr>
-        <p:spPr/>
-        <p:txBody>
-          <a:bodyPr/>
-          <a:lstStyle/>
-          <a:p>
-            <a:endParaRPr lang="pl-PL"/>
-          </a:p>
-        </p:txBody>
-      </p:sp>
-      <p:sp>
-        <p:nvSpPr>
-          <p:cNvPr id="4" name="Symbol zastępczy numeru slajdu 3">
-            <a:extLst>
-              <a:ext uri="{FF2B5EF4-FFF2-40B4-BE49-F238E27FC236}">
-                <a16:creationId xmlns:a16="http://schemas.microsoft.com/office/drawing/2014/main" id="{A1C08BCF-AC92-55DE-F2F0-11494317EEEE}"/>
-              </a:ext>
-            </a:extLst>
-          </p:cNvPr>
-          <p:cNvSpPr>
-            <a:spLocks noGrp="1"/>
-          </p:cNvSpPr>
-          <p:nvPr>
-            <p:ph type="sldNum" sz="quarter" idx="12"/>
-          </p:nvPr>
-        </p:nvSpPr>
-        <p:spPr/>
-        <p:txBody>
-          <a:bodyPr/>
-          <a:lstStyle/>
-          <a:p>
-            <a:fld id="{E4D5C528-8E18-4212-8660-D147A651E159}" type="slidenum">
-              <a:rPr lang="pl-PL" smtClean="0"/>
-              <a:t>‹#›</a:t>
-            </a:fld>
-            <a:endParaRPr lang="pl-PL"/>
-          </a:p>
-        </p:txBody>
-      </p:sp>
-    </p:spTree>
-    <p:extLst>
-      <p:ext uri="{BB962C8B-B14F-4D97-AF65-F5344CB8AC3E}">
-        <p14:creationId xmlns:p14="http://schemas.microsoft.com/office/powerpoint/2010/main" val="3826010103"/>
-      </p:ext>
-    </p:extLst>
-  </p:cSld>
-  <p:clrMapOvr>
-    <a:masterClrMapping/>
-  </p:clrMapOvr>
-</p:sldLayout>
-</file>
-
-<file path=ppt/slideLayouts/slideLayout8.xml><?xml version="1.0" encoding="utf-8"?>
-<p:sldLayout xmlns:a="http://schemas.openxmlformats.org/drawingml/2006/main" xmlns:r="http://schemas.openxmlformats.org/officeDocument/2006/relationships" xmlns:p="http://schemas.openxmlformats.org/presentationml/2006/main" type="objTx" preserve="1">
-  <p:cSld name="Zawartość z podpisem">
-    <p:spTree>
-      <p:nvGrpSpPr>
-        <p:cNvPr id="1" name=""/>
-        <p:cNvGrpSpPr/>
-        <p:nvPr/>
-      </p:nvGrpSpPr>
-      <p:grpSpPr>
-        <a:xfrm>
-          <a:off x="0" y="0"/>
-          <a:ext cx="0" cy="0"/>
-          <a:chOff x="0" y="0"/>
-          <a:chExt cx="0" cy="0"/>
-        </a:xfrm>
-      </p:grpSpPr>
-      <p:sp>
-        <p:nvSpPr>
-          <p:cNvPr id="2" name="Tytuł 1">
-            <a:extLst>
-              <a:ext uri="{FF2B5EF4-FFF2-40B4-BE49-F238E27FC236}">
-                <a16:creationId xmlns:a16="http://schemas.microsoft.com/office/drawing/2014/main" id="{E7DAC369-5338-3B1B-F146-2A8E6A93841B}"/>
-              </a:ext>
-            </a:extLst>
-          </p:cNvPr>
-          <p:cNvSpPr>
-            <a:spLocks noGrp="1"/>
-          </p:cNvSpPr>
-          <p:nvPr>
-            <p:ph type="title"/>
-          </p:nvPr>
-        </p:nvSpPr>
-        <p:spPr>
-          <a:xfrm>
-            <a:off x="839788" y="457200"/>
-            <a:ext cx="3932237" cy="1600200"/>
-          </a:xfrm>
-        </p:spPr>
-        <p:txBody>
-          <a:bodyPr anchor="b"/>
-          <a:lstStyle>
-            <a:lvl1pPr>
-              <a:defRPr sz="3200"/>
-            </a:lvl1pPr>
-          </a:lstStyle>
-          <a:p>
-            <a:r>
-              <a:rPr lang="pl-PL"/>
-              <a:t>Kliknij, aby edytować styl</a:t>
-            </a:r>
-          </a:p>
-        </p:txBody>
-      </p:sp>
-      <p:sp>
-        <p:nvSpPr>
-          <p:cNvPr id="3" name="Symbol zastępczy zawartości 2">
-            <a:extLst>
-              <a:ext uri="{FF2B5EF4-FFF2-40B4-BE49-F238E27FC236}">
-                <a16:creationId xmlns:a16="http://schemas.microsoft.com/office/drawing/2014/main" id="{95DD4C74-DF6C-153A-26B1-74788DEE7673}"/>
-              </a:ext>
-            </a:extLst>
-          </p:cNvPr>
-          <p:cNvSpPr>
-            <a:spLocks noGrp="1"/>
-          </p:cNvSpPr>
-          <p:nvPr>
-            <p:ph idx="1"/>
-          </p:nvPr>
-        </p:nvSpPr>
-        <p:spPr>
-          <a:xfrm>
-            <a:off x="5183188" y="987425"/>
-            <a:ext cx="6172200" cy="4873625"/>
-          </a:xfrm>
-        </p:spPr>
-        <p:txBody>
-          <a:bodyPr/>
-          <a:lstStyle>
-            <a:lvl1pPr>
-              <a:defRPr sz="3200"/>
-            </a:lvl1pPr>
-            <a:lvl2pPr>
-              <a:defRPr sz="2800"/>
-            </a:lvl2pPr>
-            <a:lvl3pPr>
-              <a:defRPr sz="2400"/>
-            </a:lvl3pPr>
-            <a:lvl4pPr>
-              <a:defRPr sz="2000"/>
-            </a:lvl4pPr>
-            <a:lvl5pPr>
-              <a:defRPr sz="2000"/>
-            </a:lvl5pPr>
-            <a:lvl6pPr>
-              <a:defRPr sz="2000"/>
-            </a:lvl6pPr>
-            <a:lvl7pPr>
-              <a:defRPr sz="2000"/>
-            </a:lvl7pPr>
-            <a:lvl8pPr>
-              <a:defRPr sz="2000"/>
-            </a:lvl8pPr>
-            <a:lvl9pPr>
-              <a:defRPr sz="2000"/>
-            </a:lvl9pPr>
-          </a:lstStyle>
-          <a:p>
-            <a:pPr lvl="0"/>
-            <a:r>
-              <a:rPr lang="pl-PL"/>
-              <a:t>Kliknij, aby edytować style wzorca tekstu</a:t>
-            </a:r>
-          </a:p>
-          <a:p>
-            <a:pPr lvl="1"/>
-            <a:r>
-              <a:rPr lang="pl-PL"/>
-              <a:t>Drugi poziom</a:t>
-            </a:r>
-          </a:p>
-          <a:p>
-            <a:pPr lvl="2"/>
-            <a:r>
-              <a:rPr lang="pl-PL"/>
-              <a:t>Trzeci poziom</a:t>
-            </a:r>
-          </a:p>
-          <a:p>
-            <a:pPr lvl="3"/>
-            <a:r>
-              <a:rPr lang="pl-PL"/>
-              <a:t>Czwarty poziom</a:t>
-            </a:r>
-          </a:p>
-          <a:p>
-            <a:pPr lvl="4"/>
-            <a:r>
-              <a:rPr lang="pl-PL"/>
-              <a:t>Piąty poziom</a:t>
-            </a:r>
-          </a:p>
-        </p:txBody>
-      </p:sp>
-      <p:sp>
-        <p:nvSpPr>
-          <p:cNvPr id="4" name="Symbol zastępczy tekstu 3">
-            <a:extLst>
-              <a:ext uri="{FF2B5EF4-FFF2-40B4-BE49-F238E27FC236}">
-                <a16:creationId xmlns:a16="http://schemas.microsoft.com/office/drawing/2014/main" id="{1DD88DD2-39C9-E478-21A7-750DEB6C2779}"/>
-              </a:ext>
-            </a:extLst>
-          </p:cNvPr>
-          <p:cNvSpPr>
-            <a:spLocks noGrp="1"/>
-          </p:cNvSpPr>
-          <p:nvPr>
-            <p:ph type="body" sz="half" idx="2"/>
-          </p:nvPr>
-        </p:nvSpPr>
-        <p:spPr>
-          <a:xfrm>
-            <a:off x="839788" y="2057400"/>
-            <a:ext cx="3932237" cy="3811588"/>
-          </a:xfrm>
-        </p:spPr>
-        <p:txBody>
-          <a:bodyPr/>
-          <a:lstStyle>
-            <a:lvl1pPr marL="0" indent="0">
-              <a:buNone/>
-              <a:defRPr sz="1600"/>
-            </a:lvl1pPr>
-            <a:lvl2pPr marL="457200" indent="0">
-              <a:buNone/>
-              <a:defRPr sz="1400"/>
-            </a:lvl2pPr>
-            <a:lvl3pPr marL="914400" indent="0">
-              <a:buNone/>
-              <a:defRPr sz="1200"/>
-            </a:lvl3pPr>
-            <a:lvl4pPr marL="1371600" indent="0">
-              <a:buNone/>
-              <a:defRPr sz="1000"/>
-            </a:lvl4pPr>
-            <a:lvl5pPr marL="1828800" indent="0">
-              <a:buNone/>
-              <a:defRPr sz="1000"/>
-            </a:lvl5pPr>
-            <a:lvl6pPr marL="2286000" indent="0">
-              <a:buNone/>
-              <a:defRPr sz="1000"/>
-            </a:lvl6pPr>
-            <a:lvl7pPr marL="2743200" indent="0">
-              <a:buNone/>
-              <a:defRPr sz="1000"/>
-            </a:lvl7pPr>
-            <a:lvl8pPr marL="3200400" indent="0">
-              <a:buNone/>
-              <a:defRPr sz="1000"/>
-            </a:lvl8pPr>
-            <a:lvl9pPr marL="3657600" indent="0">
-              <a:buNone/>
-              <a:defRPr sz="1000"/>
-            </a:lvl9pPr>
-          </a:lstStyle>
-          <a:p>
-            <a:pPr lvl="0"/>
-            <a:r>
-              <a:rPr lang="pl-PL"/>
-              <a:t>Kliknij, aby edytować style wzorca tekstu</a:t>
-            </a:r>
-          </a:p>
-        </p:txBody>
-      </p:sp>
-      <p:sp>
-        <p:nvSpPr>
-          <p:cNvPr id="5" name="Symbol zastępczy daty 4">
-            <a:extLst>
-              <a:ext uri="{FF2B5EF4-FFF2-40B4-BE49-F238E27FC236}">
-                <a16:creationId xmlns:a16="http://schemas.microsoft.com/office/drawing/2014/main" id="{92B2F165-82F3-8DF9-B941-12FB976A97A7}"/>
-              </a:ext>
-            </a:extLst>
-          </p:cNvPr>
-          <p:cNvSpPr>
-            <a:spLocks noGrp="1"/>
-          </p:cNvSpPr>
-          <p:nvPr>
-            <p:ph type="dt" sz="half" idx="10"/>
-          </p:nvPr>
-        </p:nvSpPr>
-        <p:spPr/>
-        <p:txBody>
-          <a:bodyPr/>
-          <a:lstStyle/>
-          <a:p>
-            <a:fld id="{395FEE27-536F-479E-B304-98213E6B58CC}" type="datetimeFigureOut">
-              <a:rPr lang="pl-PL" smtClean="0"/>
-              <a:t>25.09.2026</a:t>
-            </a:fld>
-            <a:endParaRPr lang="pl-PL"/>
-          </a:p>
-        </p:txBody>
-      </p:sp>
-      <p:sp>
-        <p:nvSpPr>
-          <p:cNvPr id="6" name="Symbol zastępczy stopki 5">
-            <a:extLst>
-              <a:ext uri="{FF2B5EF4-FFF2-40B4-BE49-F238E27FC236}">
-                <a16:creationId xmlns:a16="http://schemas.microsoft.com/office/drawing/2014/main" id="{75428AA0-D2A3-75DF-BC05-640CF235B1A5}"/>
-              </a:ext>
-            </a:extLst>
-          </p:cNvPr>
-          <p:cNvSpPr>
-            <a:spLocks noGrp="1"/>
-          </p:cNvSpPr>
-          <p:nvPr>
-            <p:ph type="ftr" sz="quarter" idx="11"/>
-          </p:nvPr>
-        </p:nvSpPr>
-        <p:spPr/>
-        <p:txBody>
-          <a:bodyPr/>
-          <a:lstStyle/>
-          <a:p>
-            <a:endParaRPr lang="pl-PL"/>
-          </a:p>
-        </p:txBody>
-      </p:sp>
-      <p:sp>
-        <p:nvSpPr>
-          <p:cNvPr id="7" name="Symbol zastępczy numeru slajdu 6">
-            <a:extLst>
-              <a:ext uri="{FF2B5EF4-FFF2-40B4-BE49-F238E27FC236}">
-                <a16:creationId xmlns:a16="http://schemas.microsoft.com/office/drawing/2014/main" id="{7900F070-C41B-84CF-22B3-B7B938329F59}"/>
-              </a:ext>
-            </a:extLst>
-          </p:cNvPr>
-          <p:cNvSpPr>
-            <a:spLocks noGrp="1"/>
-          </p:cNvSpPr>
-          <p:nvPr>
-            <p:ph type="sldNum" sz="quarter" idx="12"/>
-          </p:nvPr>
-        </p:nvSpPr>
-        <p:spPr/>
-        <p:txBody>
-          <a:bodyPr/>
-          <a:lstStyle/>
-          <a:p>
-            <a:fld id="{E4D5C528-8E18-4212-8660-D147A651E159}" type="slidenum">
-              <a:rPr lang="pl-PL" smtClean="0"/>
-              <a:t>‹#›</a:t>
-            </a:fld>
-            <a:endParaRPr lang="pl-PL"/>
-          </a:p>
-        </p:txBody>
-      </p:sp>
-    </p:spTree>
-    <p:extLst>
-      <p:ext uri="{BB962C8B-B14F-4D97-AF65-F5344CB8AC3E}">
-        <p14:creationId xmlns:p14="http://schemas.microsoft.com/office/powerpoint/2010/main" val="1946526687"/>
-      </p:ext>
-    </p:extLst>
-  </p:cSld>
-  <p:clrMapOvr>
-    <a:masterClrMapping/>
-  </p:clrMapOvr>
-</p:sldLayout>
-</file>
-
-<file path=ppt/slideLayouts/slideLayout9.xml><?xml version="1.0" encoding="utf-8"?>
 <p:sldLayout xmlns:a="http://schemas.openxmlformats.org/drawingml/2006/main" xmlns:r="http://schemas.openxmlformats.org/officeDocument/2006/relationships" xmlns:p="http://schemas.openxmlformats.org/presentationml/2006/main" type="picTx" preserve="1">
   <p:cSld name="Obraz z podpisem">
     <p:spTree>
@@ -15206,7 +13357,7 @@
           <a:p>
             <a:fld id="{395FEE27-536F-479E-B304-98213E6B58CC}" type="datetimeFigureOut">
               <a:rPr lang="pl-PL" smtClean="0"/>
-              <a:t>25.09.2026</a:t>
+              <a:t>17.10.2026</a:t>
             </a:fld>
             <a:endParaRPr lang="pl-PL"/>
           </a:p>
@@ -15279,6 +13430,2473 @@
 </p:sldLayout>
 </file>
 
+<file path=ppt/slideLayouts/slideLayout11.xml><?xml version="1.0" encoding="utf-8"?>
+<p:sldLayout xmlns:a="http://schemas.openxmlformats.org/drawingml/2006/main" xmlns:r="http://schemas.openxmlformats.org/officeDocument/2006/relationships" xmlns:p="http://schemas.openxmlformats.org/presentationml/2006/main" type="vertTx" preserve="1">
+  <p:cSld name="Tytuł i tekst pionowy">
+    <p:spTree>
+      <p:nvGrpSpPr>
+        <p:cNvPr id="1" name=""/>
+        <p:cNvGrpSpPr/>
+        <p:nvPr/>
+      </p:nvGrpSpPr>
+      <p:grpSpPr>
+        <a:xfrm>
+          <a:off x="0" y="0"/>
+          <a:ext cx="0" cy="0"/>
+          <a:chOff x="0" y="0"/>
+          <a:chExt cx="0" cy="0"/>
+        </a:xfrm>
+      </p:grpSpPr>
+      <p:sp>
+        <p:nvSpPr>
+          <p:cNvPr id="2" name="Tytuł 1">
+            <a:extLst>
+              <a:ext uri="{FF2B5EF4-FFF2-40B4-BE49-F238E27FC236}">
+                <a16:creationId xmlns:a16="http://schemas.microsoft.com/office/drawing/2014/main" id="{474882DE-D6C2-ADAA-5CC4-9C86E558EADA}"/>
+              </a:ext>
+            </a:extLst>
+          </p:cNvPr>
+          <p:cNvSpPr>
+            <a:spLocks noGrp="1"/>
+          </p:cNvSpPr>
+          <p:nvPr>
+            <p:ph type="title"/>
+          </p:nvPr>
+        </p:nvSpPr>
+        <p:spPr/>
+        <p:txBody>
+          <a:bodyPr/>
+          <a:lstStyle/>
+          <a:p>
+            <a:r>
+              <a:rPr lang="pl-PL"/>
+              <a:t>Kliknij, aby edytować styl</a:t>
+            </a:r>
+          </a:p>
+        </p:txBody>
+      </p:sp>
+      <p:sp>
+        <p:nvSpPr>
+          <p:cNvPr id="3" name="Symbol zastępczy tytułu pionowego 2">
+            <a:extLst>
+              <a:ext uri="{FF2B5EF4-FFF2-40B4-BE49-F238E27FC236}">
+                <a16:creationId xmlns:a16="http://schemas.microsoft.com/office/drawing/2014/main" id="{8F2EAB83-76D1-C014-BDE4-459C3BEA27EE}"/>
+              </a:ext>
+            </a:extLst>
+          </p:cNvPr>
+          <p:cNvSpPr>
+            <a:spLocks noGrp="1"/>
+          </p:cNvSpPr>
+          <p:nvPr>
+            <p:ph type="body" orient="vert" idx="1"/>
+          </p:nvPr>
+        </p:nvSpPr>
+        <p:spPr/>
+        <p:txBody>
+          <a:bodyPr vert="eaVert"/>
+          <a:lstStyle/>
+          <a:p>
+            <a:pPr lvl="0"/>
+            <a:r>
+              <a:rPr lang="pl-PL"/>
+              <a:t>Kliknij, aby edytować style wzorca tekstu</a:t>
+            </a:r>
+          </a:p>
+          <a:p>
+            <a:pPr lvl="1"/>
+            <a:r>
+              <a:rPr lang="pl-PL"/>
+              <a:t>Drugi poziom</a:t>
+            </a:r>
+          </a:p>
+          <a:p>
+            <a:pPr lvl="2"/>
+            <a:r>
+              <a:rPr lang="pl-PL"/>
+              <a:t>Trzeci poziom</a:t>
+            </a:r>
+          </a:p>
+          <a:p>
+            <a:pPr lvl="3"/>
+            <a:r>
+              <a:rPr lang="pl-PL"/>
+              <a:t>Czwarty poziom</a:t>
+            </a:r>
+          </a:p>
+          <a:p>
+            <a:pPr lvl="4"/>
+            <a:r>
+              <a:rPr lang="pl-PL"/>
+              <a:t>Piąty poziom</a:t>
+            </a:r>
+          </a:p>
+        </p:txBody>
+      </p:sp>
+      <p:sp>
+        <p:nvSpPr>
+          <p:cNvPr id="4" name="Symbol zastępczy daty 3">
+            <a:extLst>
+              <a:ext uri="{FF2B5EF4-FFF2-40B4-BE49-F238E27FC236}">
+                <a16:creationId xmlns:a16="http://schemas.microsoft.com/office/drawing/2014/main" id="{64F553C6-CE96-31E2-9D0B-87F0804214E7}"/>
+              </a:ext>
+            </a:extLst>
+          </p:cNvPr>
+          <p:cNvSpPr>
+            <a:spLocks noGrp="1"/>
+          </p:cNvSpPr>
+          <p:nvPr>
+            <p:ph type="dt" sz="half" idx="10"/>
+          </p:nvPr>
+        </p:nvSpPr>
+        <p:spPr/>
+        <p:txBody>
+          <a:bodyPr/>
+          <a:lstStyle/>
+          <a:p>
+            <a:fld id="{395FEE27-536F-479E-B304-98213E6B58CC}" type="datetimeFigureOut">
+              <a:rPr lang="pl-PL" smtClean="0"/>
+              <a:t>17.10.2026</a:t>
+            </a:fld>
+            <a:endParaRPr lang="pl-PL"/>
+          </a:p>
+        </p:txBody>
+      </p:sp>
+      <p:sp>
+        <p:nvSpPr>
+          <p:cNvPr id="5" name="Symbol zastępczy stopki 4">
+            <a:extLst>
+              <a:ext uri="{FF2B5EF4-FFF2-40B4-BE49-F238E27FC236}">
+                <a16:creationId xmlns:a16="http://schemas.microsoft.com/office/drawing/2014/main" id="{9E984E3A-F428-9721-57D4-4DA6A60FA881}"/>
+              </a:ext>
+            </a:extLst>
+          </p:cNvPr>
+          <p:cNvSpPr>
+            <a:spLocks noGrp="1"/>
+          </p:cNvSpPr>
+          <p:nvPr>
+            <p:ph type="ftr" sz="quarter" idx="11"/>
+          </p:nvPr>
+        </p:nvSpPr>
+        <p:spPr/>
+        <p:txBody>
+          <a:bodyPr/>
+          <a:lstStyle/>
+          <a:p>
+            <a:endParaRPr lang="pl-PL"/>
+          </a:p>
+        </p:txBody>
+      </p:sp>
+      <p:sp>
+        <p:nvSpPr>
+          <p:cNvPr id="6" name="Symbol zastępczy numeru slajdu 5">
+            <a:extLst>
+              <a:ext uri="{FF2B5EF4-FFF2-40B4-BE49-F238E27FC236}">
+                <a16:creationId xmlns:a16="http://schemas.microsoft.com/office/drawing/2014/main" id="{BB3202D7-522C-85FA-AF9E-E3EECD96BF58}"/>
+              </a:ext>
+            </a:extLst>
+          </p:cNvPr>
+          <p:cNvSpPr>
+            <a:spLocks noGrp="1"/>
+          </p:cNvSpPr>
+          <p:nvPr>
+            <p:ph type="sldNum" sz="quarter" idx="12"/>
+          </p:nvPr>
+        </p:nvSpPr>
+        <p:spPr/>
+        <p:txBody>
+          <a:bodyPr/>
+          <a:lstStyle/>
+          <a:p>
+            <a:fld id="{E4D5C528-8E18-4212-8660-D147A651E159}" type="slidenum">
+              <a:rPr lang="pl-PL" smtClean="0"/>
+              <a:t>‹#›</a:t>
+            </a:fld>
+            <a:endParaRPr lang="pl-PL"/>
+          </a:p>
+        </p:txBody>
+      </p:sp>
+    </p:spTree>
+    <p:extLst>
+      <p:ext uri="{BB962C8B-B14F-4D97-AF65-F5344CB8AC3E}">
+        <p14:creationId xmlns:p14="http://schemas.microsoft.com/office/powerpoint/2010/main" val="1595716553"/>
+      </p:ext>
+    </p:extLst>
+  </p:cSld>
+  <p:clrMapOvr>
+    <a:masterClrMapping/>
+  </p:clrMapOvr>
+</p:sldLayout>
+</file>
+
+<file path=ppt/slideLayouts/slideLayout12.xml><?xml version="1.0" encoding="utf-8"?>
+<p:sldLayout xmlns:a="http://schemas.openxmlformats.org/drawingml/2006/main" xmlns:r="http://schemas.openxmlformats.org/officeDocument/2006/relationships" xmlns:p="http://schemas.openxmlformats.org/presentationml/2006/main" type="vertTitleAndTx" preserve="1">
+  <p:cSld name="Tytuł pionowy i tekst">
+    <p:spTree>
+      <p:nvGrpSpPr>
+        <p:cNvPr id="1" name=""/>
+        <p:cNvGrpSpPr/>
+        <p:nvPr/>
+      </p:nvGrpSpPr>
+      <p:grpSpPr>
+        <a:xfrm>
+          <a:off x="0" y="0"/>
+          <a:ext cx="0" cy="0"/>
+          <a:chOff x="0" y="0"/>
+          <a:chExt cx="0" cy="0"/>
+        </a:xfrm>
+      </p:grpSpPr>
+      <p:sp>
+        <p:nvSpPr>
+          <p:cNvPr id="2" name="Tytuł pionowy 1">
+            <a:extLst>
+              <a:ext uri="{FF2B5EF4-FFF2-40B4-BE49-F238E27FC236}">
+                <a16:creationId xmlns:a16="http://schemas.microsoft.com/office/drawing/2014/main" id="{C432D806-DFEC-1939-C6F7-E41DAFDFBA62}"/>
+              </a:ext>
+            </a:extLst>
+          </p:cNvPr>
+          <p:cNvSpPr>
+            <a:spLocks noGrp="1"/>
+          </p:cNvSpPr>
+          <p:nvPr>
+            <p:ph type="title" orient="vert"/>
+          </p:nvPr>
+        </p:nvSpPr>
+        <p:spPr>
+          <a:xfrm>
+            <a:off x="8724900" y="365125"/>
+            <a:ext cx="2628900" cy="5811838"/>
+          </a:xfrm>
+        </p:spPr>
+        <p:txBody>
+          <a:bodyPr vert="eaVert"/>
+          <a:lstStyle/>
+          <a:p>
+            <a:r>
+              <a:rPr lang="pl-PL"/>
+              <a:t>Kliknij, aby edytować styl</a:t>
+            </a:r>
+          </a:p>
+        </p:txBody>
+      </p:sp>
+      <p:sp>
+        <p:nvSpPr>
+          <p:cNvPr id="3" name="Symbol zastępczy tytułu pionowego 2">
+            <a:extLst>
+              <a:ext uri="{FF2B5EF4-FFF2-40B4-BE49-F238E27FC236}">
+                <a16:creationId xmlns:a16="http://schemas.microsoft.com/office/drawing/2014/main" id="{ED926729-E8F8-36B4-561D-2BCAA84B760A}"/>
+              </a:ext>
+            </a:extLst>
+          </p:cNvPr>
+          <p:cNvSpPr>
+            <a:spLocks noGrp="1"/>
+          </p:cNvSpPr>
+          <p:nvPr>
+            <p:ph type="body" orient="vert" idx="1"/>
+          </p:nvPr>
+        </p:nvSpPr>
+        <p:spPr>
+          <a:xfrm>
+            <a:off x="838200" y="365125"/>
+            <a:ext cx="7734300" cy="5811838"/>
+          </a:xfrm>
+        </p:spPr>
+        <p:txBody>
+          <a:bodyPr vert="eaVert"/>
+          <a:lstStyle/>
+          <a:p>
+            <a:pPr lvl="0"/>
+            <a:r>
+              <a:rPr lang="pl-PL"/>
+              <a:t>Kliknij, aby edytować style wzorca tekstu</a:t>
+            </a:r>
+          </a:p>
+          <a:p>
+            <a:pPr lvl="1"/>
+            <a:r>
+              <a:rPr lang="pl-PL"/>
+              <a:t>Drugi poziom</a:t>
+            </a:r>
+          </a:p>
+          <a:p>
+            <a:pPr lvl="2"/>
+            <a:r>
+              <a:rPr lang="pl-PL"/>
+              <a:t>Trzeci poziom</a:t>
+            </a:r>
+          </a:p>
+          <a:p>
+            <a:pPr lvl="3"/>
+            <a:r>
+              <a:rPr lang="pl-PL"/>
+              <a:t>Czwarty poziom</a:t>
+            </a:r>
+          </a:p>
+          <a:p>
+            <a:pPr lvl="4"/>
+            <a:r>
+              <a:rPr lang="pl-PL"/>
+              <a:t>Piąty poziom</a:t>
+            </a:r>
+          </a:p>
+        </p:txBody>
+      </p:sp>
+      <p:sp>
+        <p:nvSpPr>
+          <p:cNvPr id="4" name="Symbol zastępczy daty 3">
+            <a:extLst>
+              <a:ext uri="{FF2B5EF4-FFF2-40B4-BE49-F238E27FC236}">
+                <a16:creationId xmlns:a16="http://schemas.microsoft.com/office/drawing/2014/main" id="{E8D9FD4A-C811-CC77-4EAE-26EF19E68739}"/>
+              </a:ext>
+            </a:extLst>
+          </p:cNvPr>
+          <p:cNvSpPr>
+            <a:spLocks noGrp="1"/>
+          </p:cNvSpPr>
+          <p:nvPr>
+            <p:ph type="dt" sz="half" idx="10"/>
+          </p:nvPr>
+        </p:nvSpPr>
+        <p:spPr/>
+        <p:txBody>
+          <a:bodyPr/>
+          <a:lstStyle/>
+          <a:p>
+            <a:fld id="{395FEE27-536F-479E-B304-98213E6B58CC}" type="datetimeFigureOut">
+              <a:rPr lang="pl-PL" smtClean="0"/>
+              <a:t>17.10.2026</a:t>
+            </a:fld>
+            <a:endParaRPr lang="pl-PL"/>
+          </a:p>
+        </p:txBody>
+      </p:sp>
+      <p:sp>
+        <p:nvSpPr>
+          <p:cNvPr id="5" name="Symbol zastępczy stopki 4">
+            <a:extLst>
+              <a:ext uri="{FF2B5EF4-FFF2-40B4-BE49-F238E27FC236}">
+                <a16:creationId xmlns:a16="http://schemas.microsoft.com/office/drawing/2014/main" id="{4BF210D4-8811-A5CC-BFF8-ABF352F915AA}"/>
+              </a:ext>
+            </a:extLst>
+          </p:cNvPr>
+          <p:cNvSpPr>
+            <a:spLocks noGrp="1"/>
+          </p:cNvSpPr>
+          <p:nvPr>
+            <p:ph type="ftr" sz="quarter" idx="11"/>
+          </p:nvPr>
+        </p:nvSpPr>
+        <p:spPr/>
+        <p:txBody>
+          <a:bodyPr/>
+          <a:lstStyle/>
+          <a:p>
+            <a:endParaRPr lang="pl-PL"/>
+          </a:p>
+        </p:txBody>
+      </p:sp>
+      <p:sp>
+        <p:nvSpPr>
+          <p:cNvPr id="6" name="Symbol zastępczy numeru slajdu 5">
+            <a:extLst>
+              <a:ext uri="{FF2B5EF4-FFF2-40B4-BE49-F238E27FC236}">
+                <a16:creationId xmlns:a16="http://schemas.microsoft.com/office/drawing/2014/main" id="{7B9B824F-4746-C760-83D5-28C515466FF7}"/>
+              </a:ext>
+            </a:extLst>
+          </p:cNvPr>
+          <p:cNvSpPr>
+            <a:spLocks noGrp="1"/>
+          </p:cNvSpPr>
+          <p:nvPr>
+            <p:ph type="sldNum" sz="quarter" idx="12"/>
+          </p:nvPr>
+        </p:nvSpPr>
+        <p:spPr/>
+        <p:txBody>
+          <a:bodyPr/>
+          <a:lstStyle/>
+          <a:p>
+            <a:fld id="{E4D5C528-8E18-4212-8660-D147A651E159}" type="slidenum">
+              <a:rPr lang="pl-PL" smtClean="0"/>
+              <a:t>‹#›</a:t>
+            </a:fld>
+            <a:endParaRPr lang="pl-PL"/>
+          </a:p>
+        </p:txBody>
+      </p:sp>
+    </p:spTree>
+    <p:extLst>
+      <p:ext uri="{BB962C8B-B14F-4D97-AF65-F5344CB8AC3E}">
+        <p14:creationId xmlns:p14="http://schemas.microsoft.com/office/powerpoint/2010/main" val="2143279362"/>
+      </p:ext>
+    </p:extLst>
+  </p:cSld>
+  <p:clrMapOvr>
+    <a:masterClrMapping/>
+  </p:clrMapOvr>
+</p:sldLayout>
+</file>
+
+<file path=ppt/slideLayouts/slideLayout2.xml><?xml version="1.0" encoding="utf-8"?>
+<p:sldLayout xmlns:a="http://schemas.openxmlformats.org/drawingml/2006/main" xmlns:r="http://schemas.openxmlformats.org/officeDocument/2006/relationships" xmlns:p="http://schemas.openxmlformats.org/presentationml/2006/main" type="obj" preserve="1">
+  <p:cSld name="Tytuł i zawartość">
+    <p:spTree>
+      <p:nvGrpSpPr>
+        <p:cNvPr id="1" name=""/>
+        <p:cNvGrpSpPr/>
+        <p:nvPr/>
+      </p:nvGrpSpPr>
+      <p:grpSpPr>
+        <a:xfrm>
+          <a:off x="0" y="0"/>
+          <a:ext cx="0" cy="0"/>
+          <a:chOff x="0" y="0"/>
+          <a:chExt cx="0" cy="0"/>
+        </a:xfrm>
+      </p:grpSpPr>
+      <p:sp>
+        <p:nvSpPr>
+          <p:cNvPr id="2" name="Tytuł 1">
+            <a:extLst>
+              <a:ext uri="{FF2B5EF4-FFF2-40B4-BE49-F238E27FC236}">
+                <a16:creationId xmlns:a16="http://schemas.microsoft.com/office/drawing/2014/main" id="{874624C3-F21A-D57C-4779-71E4C7A0F489}"/>
+              </a:ext>
+            </a:extLst>
+          </p:cNvPr>
+          <p:cNvSpPr>
+            <a:spLocks noGrp="1"/>
+          </p:cNvSpPr>
+          <p:nvPr>
+            <p:ph type="title"/>
+          </p:nvPr>
+        </p:nvSpPr>
+        <p:spPr/>
+        <p:txBody>
+          <a:bodyPr/>
+          <a:lstStyle/>
+          <a:p>
+            <a:r>
+              <a:rPr lang="pl-PL"/>
+              <a:t>Kliknij, aby edytować styl</a:t>
+            </a:r>
+          </a:p>
+        </p:txBody>
+      </p:sp>
+      <p:sp>
+        <p:nvSpPr>
+          <p:cNvPr id="3" name="Symbol zastępczy zawartości 2">
+            <a:extLst>
+              <a:ext uri="{FF2B5EF4-FFF2-40B4-BE49-F238E27FC236}">
+                <a16:creationId xmlns:a16="http://schemas.microsoft.com/office/drawing/2014/main" id="{596DF078-20D2-95CF-5E14-A94DDEECB1B8}"/>
+              </a:ext>
+            </a:extLst>
+          </p:cNvPr>
+          <p:cNvSpPr>
+            <a:spLocks noGrp="1"/>
+          </p:cNvSpPr>
+          <p:nvPr>
+            <p:ph idx="1"/>
+          </p:nvPr>
+        </p:nvSpPr>
+        <p:spPr/>
+        <p:txBody>
+          <a:bodyPr lIns="0"/>
+          <a:lstStyle/>
+          <a:p>
+            <a:pPr lvl="0"/>
+            <a:r>
+              <a:rPr lang="pl-PL" dirty="0"/>
+              <a:t>Kliknij, aby edytować style wzorca tekstu</a:t>
+            </a:r>
+          </a:p>
+          <a:p>
+            <a:pPr lvl="1"/>
+            <a:r>
+              <a:rPr lang="pl-PL" dirty="0"/>
+              <a:t>Drugi poziom</a:t>
+            </a:r>
+          </a:p>
+          <a:p>
+            <a:pPr lvl="2"/>
+            <a:r>
+              <a:rPr lang="pl-PL" dirty="0"/>
+              <a:t>Trzeci poziom</a:t>
+            </a:r>
+          </a:p>
+          <a:p>
+            <a:pPr lvl="3"/>
+            <a:r>
+              <a:rPr lang="pl-PL" dirty="0"/>
+              <a:t>Czwarty poziom</a:t>
+            </a:r>
+          </a:p>
+          <a:p>
+            <a:pPr lvl="4"/>
+            <a:r>
+              <a:rPr lang="pl-PL" dirty="0"/>
+              <a:t>Piąty poziom</a:t>
+            </a:r>
+          </a:p>
+        </p:txBody>
+      </p:sp>
+      <p:sp>
+        <p:nvSpPr>
+          <p:cNvPr id="4" name="Symbol zastępczy daty 3">
+            <a:extLst>
+              <a:ext uri="{FF2B5EF4-FFF2-40B4-BE49-F238E27FC236}">
+                <a16:creationId xmlns:a16="http://schemas.microsoft.com/office/drawing/2014/main" id="{A6982C61-7CAE-31F3-18B7-2DFB504BBACE}"/>
+              </a:ext>
+            </a:extLst>
+          </p:cNvPr>
+          <p:cNvSpPr>
+            <a:spLocks noGrp="1"/>
+          </p:cNvSpPr>
+          <p:nvPr>
+            <p:ph type="dt" sz="half" idx="10"/>
+          </p:nvPr>
+        </p:nvSpPr>
+        <p:spPr/>
+        <p:txBody>
+          <a:bodyPr/>
+          <a:lstStyle/>
+          <a:p>
+            <a:fld id="{395FEE27-536F-479E-B304-98213E6B58CC}" type="datetimeFigureOut">
+              <a:rPr lang="pl-PL" smtClean="0"/>
+              <a:t>17.10.2026</a:t>
+            </a:fld>
+            <a:endParaRPr lang="pl-PL"/>
+          </a:p>
+        </p:txBody>
+      </p:sp>
+      <p:sp>
+        <p:nvSpPr>
+          <p:cNvPr id="5" name="Symbol zastępczy stopki 4">
+            <a:extLst>
+              <a:ext uri="{FF2B5EF4-FFF2-40B4-BE49-F238E27FC236}">
+                <a16:creationId xmlns:a16="http://schemas.microsoft.com/office/drawing/2014/main" id="{BFAC59E4-A4C2-4C9E-C116-F32B86275EC3}"/>
+              </a:ext>
+            </a:extLst>
+          </p:cNvPr>
+          <p:cNvSpPr>
+            <a:spLocks noGrp="1"/>
+          </p:cNvSpPr>
+          <p:nvPr>
+            <p:ph type="ftr" sz="quarter" idx="11"/>
+          </p:nvPr>
+        </p:nvSpPr>
+        <p:spPr/>
+        <p:txBody>
+          <a:bodyPr/>
+          <a:lstStyle/>
+          <a:p>
+            <a:endParaRPr lang="pl-PL"/>
+          </a:p>
+        </p:txBody>
+      </p:sp>
+      <p:sp>
+        <p:nvSpPr>
+          <p:cNvPr id="6" name="Symbol zastępczy numeru slajdu 5">
+            <a:extLst>
+              <a:ext uri="{FF2B5EF4-FFF2-40B4-BE49-F238E27FC236}">
+                <a16:creationId xmlns:a16="http://schemas.microsoft.com/office/drawing/2014/main" id="{38231EC9-AF99-43AE-4BF9-EFDF0851A123}"/>
+              </a:ext>
+            </a:extLst>
+          </p:cNvPr>
+          <p:cNvSpPr>
+            <a:spLocks noGrp="1"/>
+          </p:cNvSpPr>
+          <p:nvPr>
+            <p:ph type="sldNum" sz="quarter" idx="12"/>
+          </p:nvPr>
+        </p:nvSpPr>
+        <p:spPr/>
+        <p:txBody>
+          <a:bodyPr/>
+          <a:lstStyle/>
+          <a:p>
+            <a:fld id="{E4D5C528-8E18-4212-8660-D147A651E159}" type="slidenum">
+              <a:rPr lang="pl-PL" smtClean="0"/>
+              <a:t>‹#›</a:t>
+            </a:fld>
+            <a:endParaRPr lang="pl-PL"/>
+          </a:p>
+        </p:txBody>
+      </p:sp>
+    </p:spTree>
+    <p:extLst>
+      <p:ext uri="{BB962C8B-B14F-4D97-AF65-F5344CB8AC3E}">
+        <p14:creationId xmlns:p14="http://schemas.microsoft.com/office/powerpoint/2010/main" val="4080086671"/>
+      </p:ext>
+    </p:extLst>
+  </p:cSld>
+  <p:clrMapOvr>
+    <a:masterClrMapping/>
+  </p:clrMapOvr>
+  <p:extLst>
+    <p:ext uri="{DCECCB84-F9BA-43D5-87BE-67443E8EF086}">
+      <p15:sldGuideLst xmlns:p15="http://schemas.microsoft.com/office/powerpoint/2012/main">
+        <p15:guide id="1" orient="horz" pos="2160" userDrawn="1">
+          <p15:clr>
+            <a:srgbClr val="FBAE40"/>
+          </p15:clr>
+        </p15:guide>
+      </p15:sldGuideLst>
+    </p:ext>
+  </p:extLst>
+</p:sldLayout>
+</file>
+
+<file path=ppt/slideLayouts/slideLayout3.xml><?xml version="1.0" encoding="utf-8"?>
+<p:sldLayout xmlns:a="http://schemas.openxmlformats.org/drawingml/2006/main" xmlns:r="http://schemas.openxmlformats.org/officeDocument/2006/relationships" xmlns:p="http://schemas.openxmlformats.org/presentationml/2006/main" preserve="1" userDrawn="1">
+  <p:cSld name="Tytuł i podział 2/3 + 1/3">
+    <p:spTree>
+      <p:nvGrpSpPr>
+        <p:cNvPr id="1" name=""/>
+        <p:cNvGrpSpPr/>
+        <p:nvPr/>
+      </p:nvGrpSpPr>
+      <p:grpSpPr>
+        <a:xfrm>
+          <a:off x="0" y="0"/>
+          <a:ext cx="0" cy="0"/>
+          <a:chOff x="0" y="0"/>
+          <a:chExt cx="0" cy="0"/>
+        </a:xfrm>
+      </p:grpSpPr>
+      <p:sp>
+        <p:nvSpPr>
+          <p:cNvPr id="2" name="Tytuł 1">
+            <a:extLst>
+              <a:ext uri="{FF2B5EF4-FFF2-40B4-BE49-F238E27FC236}">
+                <a16:creationId xmlns:a16="http://schemas.microsoft.com/office/drawing/2014/main" id="{874624C3-F21A-D57C-4779-71E4C7A0F489}"/>
+              </a:ext>
+            </a:extLst>
+          </p:cNvPr>
+          <p:cNvSpPr>
+            <a:spLocks noGrp="1"/>
+          </p:cNvSpPr>
+          <p:nvPr>
+            <p:ph type="title"/>
+          </p:nvPr>
+        </p:nvSpPr>
+        <p:spPr/>
+        <p:txBody>
+          <a:bodyPr/>
+          <a:lstStyle/>
+          <a:p>
+            <a:r>
+              <a:rPr lang="pl-PL" dirty="0"/>
+              <a:t>Kliknij, aby edytować styl</a:t>
+            </a:r>
+          </a:p>
+        </p:txBody>
+      </p:sp>
+      <p:sp>
+        <p:nvSpPr>
+          <p:cNvPr id="3" name="Symbol zastępczy zawartości 2">
+            <a:extLst>
+              <a:ext uri="{FF2B5EF4-FFF2-40B4-BE49-F238E27FC236}">
+                <a16:creationId xmlns:a16="http://schemas.microsoft.com/office/drawing/2014/main" id="{596DF078-20D2-95CF-5E14-A94DDEECB1B8}"/>
+              </a:ext>
+            </a:extLst>
+          </p:cNvPr>
+          <p:cNvSpPr>
+            <a:spLocks noGrp="1"/>
+          </p:cNvSpPr>
+          <p:nvPr>
+            <p:ph idx="1"/>
+          </p:nvPr>
+        </p:nvSpPr>
+        <p:spPr>
+          <a:xfrm>
+            <a:off x="695326" y="1455421"/>
+            <a:ext cx="7115174" cy="4312920"/>
+          </a:xfrm>
+        </p:spPr>
+        <p:txBody>
+          <a:bodyPr/>
+          <a:lstStyle/>
+          <a:p>
+            <a:pPr lvl="0"/>
+            <a:r>
+              <a:rPr lang="pl-PL" dirty="0"/>
+              <a:t>Kliknij, aby edytować style wzorca tekstu</a:t>
+            </a:r>
+          </a:p>
+          <a:p>
+            <a:pPr lvl="1"/>
+            <a:r>
+              <a:rPr lang="pl-PL" dirty="0"/>
+              <a:t>Drugi poziom</a:t>
+            </a:r>
+          </a:p>
+          <a:p>
+            <a:pPr lvl="2"/>
+            <a:r>
+              <a:rPr lang="pl-PL" dirty="0"/>
+              <a:t>Trzeci poziom</a:t>
+            </a:r>
+          </a:p>
+          <a:p>
+            <a:pPr lvl="3"/>
+            <a:r>
+              <a:rPr lang="pl-PL" dirty="0"/>
+              <a:t>Czwarty poziom</a:t>
+            </a:r>
+          </a:p>
+          <a:p>
+            <a:pPr lvl="4"/>
+            <a:r>
+              <a:rPr lang="pl-PL" dirty="0"/>
+              <a:t>Piąty poziom</a:t>
+            </a:r>
+          </a:p>
+        </p:txBody>
+      </p:sp>
+      <p:sp>
+        <p:nvSpPr>
+          <p:cNvPr id="8" name="Prostokąt: zaokrąglone rogi 7">
+            <a:extLst>
+              <a:ext uri="{FF2B5EF4-FFF2-40B4-BE49-F238E27FC236}">
+                <a16:creationId xmlns:a16="http://schemas.microsoft.com/office/drawing/2014/main" id="{CC347789-C3DE-42BE-9182-991EB0BD702C}"/>
+              </a:ext>
+            </a:extLst>
+          </p:cNvPr>
+          <p:cNvSpPr/>
+          <p:nvPr userDrawn="1"/>
+        </p:nvSpPr>
+        <p:spPr>
+          <a:xfrm>
+            <a:off x="8070852" y="1449704"/>
+            <a:ext cx="3416299" cy="4312920"/>
+          </a:xfrm>
+          <a:prstGeom prst="roundRect">
+            <a:avLst>
+              <a:gd name="adj" fmla="val 6351"/>
+            </a:avLst>
+          </a:prstGeom>
+          <a:solidFill>
+            <a:schemeClr val="bg1"/>
+          </a:solidFill>
+          <a:ln w="12700">
+            <a:solidFill>
+              <a:schemeClr val="accent6"/>
+            </a:solidFill>
+          </a:ln>
+        </p:spPr>
+        <p:style>
+          <a:lnRef idx="2">
+            <a:schemeClr val="accent1">
+              <a:shade val="15000"/>
+            </a:schemeClr>
+          </a:lnRef>
+          <a:fillRef idx="1">
+            <a:schemeClr val="accent1"/>
+          </a:fillRef>
+          <a:effectRef idx="0">
+            <a:schemeClr val="accent1"/>
+          </a:effectRef>
+          <a:fontRef idx="minor">
+            <a:schemeClr val="lt1"/>
+          </a:fontRef>
+        </p:style>
+        <p:txBody>
+          <a:bodyPr rtlCol="0" anchor="ctr"/>
+          <a:lstStyle/>
+          <a:p>
+            <a:pPr algn="ctr"/>
+            <a:endParaRPr lang="pl-PL"/>
+          </a:p>
+        </p:txBody>
+      </p:sp>
+      <p:sp>
+        <p:nvSpPr>
+          <p:cNvPr id="4" name="Symbol zastępczy daty 3">
+            <a:extLst>
+              <a:ext uri="{FF2B5EF4-FFF2-40B4-BE49-F238E27FC236}">
+                <a16:creationId xmlns:a16="http://schemas.microsoft.com/office/drawing/2014/main" id="{A6982C61-7CAE-31F3-18B7-2DFB504BBACE}"/>
+              </a:ext>
+            </a:extLst>
+          </p:cNvPr>
+          <p:cNvSpPr>
+            <a:spLocks noGrp="1"/>
+          </p:cNvSpPr>
+          <p:nvPr>
+            <p:ph type="dt" sz="half" idx="10"/>
+          </p:nvPr>
+        </p:nvSpPr>
+        <p:spPr/>
+        <p:txBody>
+          <a:bodyPr/>
+          <a:lstStyle/>
+          <a:p>
+            <a:fld id="{395FEE27-536F-479E-B304-98213E6B58CC}" type="datetimeFigureOut">
+              <a:rPr lang="pl-PL" smtClean="0"/>
+              <a:t>17.10.2026</a:t>
+            </a:fld>
+            <a:endParaRPr lang="pl-PL"/>
+          </a:p>
+        </p:txBody>
+      </p:sp>
+      <p:sp>
+        <p:nvSpPr>
+          <p:cNvPr id="5" name="Symbol zastępczy stopki 4">
+            <a:extLst>
+              <a:ext uri="{FF2B5EF4-FFF2-40B4-BE49-F238E27FC236}">
+                <a16:creationId xmlns:a16="http://schemas.microsoft.com/office/drawing/2014/main" id="{BFAC59E4-A4C2-4C9E-C116-F32B86275EC3}"/>
+              </a:ext>
+            </a:extLst>
+          </p:cNvPr>
+          <p:cNvSpPr>
+            <a:spLocks noGrp="1"/>
+          </p:cNvSpPr>
+          <p:nvPr>
+            <p:ph type="ftr" sz="quarter" idx="11"/>
+          </p:nvPr>
+        </p:nvSpPr>
+        <p:spPr/>
+        <p:txBody>
+          <a:bodyPr/>
+          <a:lstStyle/>
+          <a:p>
+            <a:endParaRPr lang="pl-PL"/>
+          </a:p>
+        </p:txBody>
+      </p:sp>
+      <p:sp>
+        <p:nvSpPr>
+          <p:cNvPr id="6" name="Symbol zastępczy numeru slajdu 5">
+            <a:extLst>
+              <a:ext uri="{FF2B5EF4-FFF2-40B4-BE49-F238E27FC236}">
+                <a16:creationId xmlns:a16="http://schemas.microsoft.com/office/drawing/2014/main" id="{38231EC9-AF99-43AE-4BF9-EFDF0851A123}"/>
+              </a:ext>
+            </a:extLst>
+          </p:cNvPr>
+          <p:cNvSpPr>
+            <a:spLocks noGrp="1"/>
+          </p:cNvSpPr>
+          <p:nvPr>
+            <p:ph type="sldNum" sz="quarter" idx="12"/>
+          </p:nvPr>
+        </p:nvSpPr>
+        <p:spPr/>
+        <p:txBody>
+          <a:bodyPr/>
+          <a:lstStyle/>
+          <a:p>
+            <a:fld id="{E4D5C528-8E18-4212-8660-D147A651E159}" type="slidenum">
+              <a:rPr lang="pl-PL" smtClean="0"/>
+              <a:t>‹#›</a:t>
+            </a:fld>
+            <a:endParaRPr lang="pl-PL"/>
+          </a:p>
+        </p:txBody>
+      </p:sp>
+      <p:sp>
+        <p:nvSpPr>
+          <p:cNvPr id="7" name="Symbol zastępczy zawartości 2">
+            <a:extLst>
+              <a:ext uri="{FF2B5EF4-FFF2-40B4-BE49-F238E27FC236}">
+                <a16:creationId xmlns:a16="http://schemas.microsoft.com/office/drawing/2014/main" id="{C50A19FF-AD7D-1DC7-77BD-0F6C9DE66F0D}"/>
+              </a:ext>
+            </a:extLst>
+          </p:cNvPr>
+          <p:cNvSpPr>
+            <a:spLocks noGrp="1"/>
+          </p:cNvSpPr>
+          <p:nvPr>
+            <p:ph idx="13" hasCustomPrompt="1"/>
+          </p:nvPr>
+        </p:nvSpPr>
+        <p:spPr>
+          <a:xfrm>
+            <a:off x="8070851" y="1449704"/>
+            <a:ext cx="3416299" cy="4312920"/>
+          </a:xfrm>
+          <a:noFill/>
+          <a:ln>
+            <a:noFill/>
+          </a:ln>
+        </p:spPr>
+        <p:txBody>
+          <a:bodyPr lIns="180000" tIns="180000" rIns="180000" bIns="180000">
+            <a:normAutofit/>
+          </a:bodyPr>
+          <a:lstStyle>
+            <a:lvl1pPr marL="0" indent="0">
+              <a:lnSpc>
+                <a:spcPct val="100000"/>
+              </a:lnSpc>
+              <a:buFont typeface="Arial" panose="020B0604020202020204" pitchFamily="34" charset="0"/>
+              <a:buNone/>
+              <a:defRPr sz="1600"/>
+            </a:lvl1pPr>
+            <a:lvl2pPr>
+              <a:buNone/>
+              <a:defRPr/>
+            </a:lvl2pPr>
+            <a:lvl3pPr>
+              <a:buNone/>
+              <a:defRPr/>
+            </a:lvl3pPr>
+            <a:lvl4pPr>
+              <a:buNone/>
+              <a:defRPr/>
+            </a:lvl4pPr>
+            <a:lvl5pPr>
+              <a:buNone/>
+              <a:defRPr/>
+            </a:lvl5pPr>
+          </a:lstStyle>
+          <a:p>
+            <a:pPr lvl="0"/>
+            <a:r>
+              <a:rPr lang="pl-PL" dirty="0"/>
+              <a:t>Kliknij, aby edytować wzorzec</a:t>
+            </a:r>
+          </a:p>
+        </p:txBody>
+      </p:sp>
+    </p:spTree>
+    <p:extLst>
+      <p:ext uri="{BB962C8B-B14F-4D97-AF65-F5344CB8AC3E}">
+        <p14:creationId xmlns:p14="http://schemas.microsoft.com/office/powerpoint/2010/main" val="2641960251"/>
+      </p:ext>
+    </p:extLst>
+  </p:cSld>
+  <p:clrMapOvr>
+    <a:masterClrMapping/>
+  </p:clrMapOvr>
+  <p:extLst>
+    <p:ext uri="{DCECCB84-F9BA-43D5-87BE-67443E8EF086}">
+      <p15:sldGuideLst xmlns:p15="http://schemas.microsoft.com/office/powerpoint/2012/main">
+        <p15:guide id="1" orient="horz" pos="2160" userDrawn="1">
+          <p15:clr>
+            <a:srgbClr val="FBAE40"/>
+          </p15:clr>
+        </p15:guide>
+      </p15:sldGuideLst>
+    </p:ext>
+  </p:extLst>
+</p:sldLayout>
+</file>
+
+<file path=ppt/slideLayouts/slideLayout4.xml><?xml version="1.0" encoding="utf-8"?>
+<p:sldLayout xmlns:a="http://schemas.openxmlformats.org/drawingml/2006/main" xmlns:r="http://schemas.openxmlformats.org/officeDocument/2006/relationships" xmlns:p="http://schemas.openxmlformats.org/presentationml/2006/main" type="secHead" preserve="1">
+  <p:cSld name="Nagłówek sekcji">
+    <p:spTree>
+      <p:nvGrpSpPr>
+        <p:cNvPr id="1" name=""/>
+        <p:cNvGrpSpPr/>
+        <p:nvPr/>
+      </p:nvGrpSpPr>
+      <p:grpSpPr>
+        <a:xfrm>
+          <a:off x="0" y="0"/>
+          <a:ext cx="0" cy="0"/>
+          <a:chOff x="0" y="0"/>
+          <a:chExt cx="0" cy="0"/>
+        </a:xfrm>
+      </p:grpSpPr>
+      <p:sp>
+        <p:nvSpPr>
+          <p:cNvPr id="2" name="Tytuł 1">
+            <a:extLst>
+              <a:ext uri="{FF2B5EF4-FFF2-40B4-BE49-F238E27FC236}">
+                <a16:creationId xmlns:a16="http://schemas.microsoft.com/office/drawing/2014/main" id="{F1EC914C-3EFF-FC05-C5D4-D338B73FBFE7}"/>
+              </a:ext>
+            </a:extLst>
+          </p:cNvPr>
+          <p:cNvSpPr>
+            <a:spLocks noGrp="1"/>
+          </p:cNvSpPr>
+          <p:nvPr>
+            <p:ph type="title"/>
+          </p:nvPr>
+        </p:nvSpPr>
+        <p:spPr>
+          <a:xfrm>
+            <a:off x="831850" y="1709738"/>
+            <a:ext cx="10515600" cy="2852737"/>
+          </a:xfrm>
+        </p:spPr>
+        <p:txBody>
+          <a:bodyPr anchor="b"/>
+          <a:lstStyle>
+            <a:lvl1pPr>
+              <a:defRPr sz="6000"/>
+            </a:lvl1pPr>
+          </a:lstStyle>
+          <a:p>
+            <a:r>
+              <a:rPr lang="pl-PL"/>
+              <a:t>Kliknij, aby edytować styl</a:t>
+            </a:r>
+          </a:p>
+        </p:txBody>
+      </p:sp>
+      <p:sp>
+        <p:nvSpPr>
+          <p:cNvPr id="3" name="Symbol zastępczy tekstu 2">
+            <a:extLst>
+              <a:ext uri="{FF2B5EF4-FFF2-40B4-BE49-F238E27FC236}">
+                <a16:creationId xmlns:a16="http://schemas.microsoft.com/office/drawing/2014/main" id="{E9140809-F34E-A8C6-5D6F-B06FBB8793EC}"/>
+              </a:ext>
+            </a:extLst>
+          </p:cNvPr>
+          <p:cNvSpPr>
+            <a:spLocks noGrp="1"/>
+          </p:cNvSpPr>
+          <p:nvPr>
+            <p:ph type="body" idx="1"/>
+          </p:nvPr>
+        </p:nvSpPr>
+        <p:spPr>
+          <a:xfrm>
+            <a:off x="831850" y="4589463"/>
+            <a:ext cx="10515600" cy="1500187"/>
+          </a:xfrm>
+        </p:spPr>
+        <p:txBody>
+          <a:bodyPr/>
+          <a:lstStyle>
+            <a:lvl1pPr marL="0" indent="0">
+              <a:buNone/>
+              <a:defRPr sz="2400">
+                <a:solidFill>
+                  <a:schemeClr val="tx1">
+                    <a:tint val="82000"/>
+                  </a:schemeClr>
+                </a:solidFill>
+              </a:defRPr>
+            </a:lvl1pPr>
+            <a:lvl2pPr marL="457200" indent="0">
+              <a:buNone/>
+              <a:defRPr sz="2000">
+                <a:solidFill>
+                  <a:schemeClr val="tx1">
+                    <a:tint val="82000"/>
+                  </a:schemeClr>
+                </a:solidFill>
+              </a:defRPr>
+            </a:lvl2pPr>
+            <a:lvl3pPr marL="914400" indent="0">
+              <a:buNone/>
+              <a:defRPr sz="1800">
+                <a:solidFill>
+                  <a:schemeClr val="tx1">
+                    <a:tint val="82000"/>
+                  </a:schemeClr>
+                </a:solidFill>
+              </a:defRPr>
+            </a:lvl3pPr>
+            <a:lvl4pPr marL="1371600" indent="0">
+              <a:buNone/>
+              <a:defRPr sz="1600">
+                <a:solidFill>
+                  <a:schemeClr val="tx1">
+                    <a:tint val="82000"/>
+                  </a:schemeClr>
+                </a:solidFill>
+              </a:defRPr>
+            </a:lvl4pPr>
+            <a:lvl5pPr marL="1828800" indent="0">
+              <a:buNone/>
+              <a:defRPr sz="1600">
+                <a:solidFill>
+                  <a:schemeClr val="tx1">
+                    <a:tint val="82000"/>
+                  </a:schemeClr>
+                </a:solidFill>
+              </a:defRPr>
+            </a:lvl5pPr>
+            <a:lvl6pPr marL="2286000" indent="0">
+              <a:buNone/>
+              <a:defRPr sz="1600">
+                <a:solidFill>
+                  <a:schemeClr val="tx1">
+                    <a:tint val="82000"/>
+                  </a:schemeClr>
+                </a:solidFill>
+              </a:defRPr>
+            </a:lvl6pPr>
+            <a:lvl7pPr marL="2743200" indent="0">
+              <a:buNone/>
+              <a:defRPr sz="1600">
+                <a:solidFill>
+                  <a:schemeClr val="tx1">
+                    <a:tint val="82000"/>
+                  </a:schemeClr>
+                </a:solidFill>
+              </a:defRPr>
+            </a:lvl7pPr>
+            <a:lvl8pPr marL="3200400" indent="0">
+              <a:buNone/>
+              <a:defRPr sz="1600">
+                <a:solidFill>
+                  <a:schemeClr val="tx1">
+                    <a:tint val="82000"/>
+                  </a:schemeClr>
+                </a:solidFill>
+              </a:defRPr>
+            </a:lvl8pPr>
+            <a:lvl9pPr marL="3657600" indent="0">
+              <a:buNone/>
+              <a:defRPr sz="1600">
+                <a:solidFill>
+                  <a:schemeClr val="tx1">
+                    <a:tint val="82000"/>
+                  </a:schemeClr>
+                </a:solidFill>
+              </a:defRPr>
+            </a:lvl9pPr>
+          </a:lstStyle>
+          <a:p>
+            <a:pPr lvl="0"/>
+            <a:r>
+              <a:rPr lang="pl-PL"/>
+              <a:t>Kliknij, aby edytować style wzorca tekstu</a:t>
+            </a:r>
+          </a:p>
+        </p:txBody>
+      </p:sp>
+      <p:sp>
+        <p:nvSpPr>
+          <p:cNvPr id="4" name="Symbol zastępczy daty 3">
+            <a:extLst>
+              <a:ext uri="{FF2B5EF4-FFF2-40B4-BE49-F238E27FC236}">
+                <a16:creationId xmlns:a16="http://schemas.microsoft.com/office/drawing/2014/main" id="{01597F03-AA90-1517-F4C5-10CD3432EF64}"/>
+              </a:ext>
+            </a:extLst>
+          </p:cNvPr>
+          <p:cNvSpPr>
+            <a:spLocks noGrp="1"/>
+          </p:cNvSpPr>
+          <p:nvPr>
+            <p:ph type="dt" sz="half" idx="10"/>
+          </p:nvPr>
+        </p:nvSpPr>
+        <p:spPr/>
+        <p:txBody>
+          <a:bodyPr/>
+          <a:lstStyle/>
+          <a:p>
+            <a:fld id="{395FEE27-536F-479E-B304-98213E6B58CC}" type="datetimeFigureOut">
+              <a:rPr lang="pl-PL" smtClean="0"/>
+              <a:t>17.10.2026</a:t>
+            </a:fld>
+            <a:endParaRPr lang="pl-PL"/>
+          </a:p>
+        </p:txBody>
+      </p:sp>
+      <p:sp>
+        <p:nvSpPr>
+          <p:cNvPr id="5" name="Symbol zastępczy stopki 4">
+            <a:extLst>
+              <a:ext uri="{FF2B5EF4-FFF2-40B4-BE49-F238E27FC236}">
+                <a16:creationId xmlns:a16="http://schemas.microsoft.com/office/drawing/2014/main" id="{04E40038-BB1E-5A52-F407-D8C946C7026B}"/>
+              </a:ext>
+            </a:extLst>
+          </p:cNvPr>
+          <p:cNvSpPr>
+            <a:spLocks noGrp="1"/>
+          </p:cNvSpPr>
+          <p:nvPr>
+            <p:ph type="ftr" sz="quarter" idx="11"/>
+          </p:nvPr>
+        </p:nvSpPr>
+        <p:spPr/>
+        <p:txBody>
+          <a:bodyPr/>
+          <a:lstStyle/>
+          <a:p>
+            <a:endParaRPr lang="pl-PL"/>
+          </a:p>
+        </p:txBody>
+      </p:sp>
+      <p:sp>
+        <p:nvSpPr>
+          <p:cNvPr id="6" name="Symbol zastępczy numeru slajdu 5">
+            <a:extLst>
+              <a:ext uri="{FF2B5EF4-FFF2-40B4-BE49-F238E27FC236}">
+                <a16:creationId xmlns:a16="http://schemas.microsoft.com/office/drawing/2014/main" id="{BAFEE438-352C-D242-180C-924AF8610EF2}"/>
+              </a:ext>
+            </a:extLst>
+          </p:cNvPr>
+          <p:cNvSpPr>
+            <a:spLocks noGrp="1"/>
+          </p:cNvSpPr>
+          <p:nvPr>
+            <p:ph type="sldNum" sz="quarter" idx="12"/>
+          </p:nvPr>
+        </p:nvSpPr>
+        <p:spPr/>
+        <p:txBody>
+          <a:bodyPr/>
+          <a:lstStyle/>
+          <a:p>
+            <a:fld id="{E4D5C528-8E18-4212-8660-D147A651E159}" type="slidenum">
+              <a:rPr lang="pl-PL" smtClean="0"/>
+              <a:t>‹#›</a:t>
+            </a:fld>
+            <a:endParaRPr lang="pl-PL"/>
+          </a:p>
+        </p:txBody>
+      </p:sp>
+    </p:spTree>
+    <p:extLst>
+      <p:ext uri="{BB962C8B-B14F-4D97-AF65-F5344CB8AC3E}">
+        <p14:creationId xmlns:p14="http://schemas.microsoft.com/office/powerpoint/2010/main" val="3024399222"/>
+      </p:ext>
+    </p:extLst>
+  </p:cSld>
+  <p:clrMapOvr>
+    <a:masterClrMapping/>
+  </p:clrMapOvr>
+</p:sldLayout>
+</file>
+
+<file path=ppt/slideLayouts/slideLayout5.xml><?xml version="1.0" encoding="utf-8"?>
+<p:sldLayout xmlns:a="http://schemas.openxmlformats.org/drawingml/2006/main" xmlns:r="http://schemas.openxmlformats.org/officeDocument/2006/relationships" xmlns:p="http://schemas.openxmlformats.org/presentationml/2006/main" type="twoObj" preserve="1">
+  <p:cSld name="Dwa elementy zawartości">
+    <p:spTree>
+      <p:nvGrpSpPr>
+        <p:cNvPr id="1" name=""/>
+        <p:cNvGrpSpPr/>
+        <p:nvPr/>
+      </p:nvGrpSpPr>
+      <p:grpSpPr>
+        <a:xfrm>
+          <a:off x="0" y="0"/>
+          <a:ext cx="0" cy="0"/>
+          <a:chOff x="0" y="0"/>
+          <a:chExt cx="0" cy="0"/>
+        </a:xfrm>
+      </p:grpSpPr>
+      <p:sp>
+        <p:nvSpPr>
+          <p:cNvPr id="2" name="Tytuł 1">
+            <a:extLst>
+              <a:ext uri="{FF2B5EF4-FFF2-40B4-BE49-F238E27FC236}">
+                <a16:creationId xmlns:a16="http://schemas.microsoft.com/office/drawing/2014/main" id="{CAE03817-2A93-FED3-FBDB-244CF85F2DC7}"/>
+              </a:ext>
+            </a:extLst>
+          </p:cNvPr>
+          <p:cNvSpPr>
+            <a:spLocks noGrp="1"/>
+          </p:cNvSpPr>
+          <p:nvPr>
+            <p:ph type="title"/>
+          </p:nvPr>
+        </p:nvSpPr>
+        <p:spPr/>
+        <p:txBody>
+          <a:bodyPr/>
+          <a:lstStyle/>
+          <a:p>
+            <a:r>
+              <a:rPr lang="pl-PL"/>
+              <a:t>Kliknij, aby edytować styl</a:t>
+            </a:r>
+          </a:p>
+        </p:txBody>
+      </p:sp>
+      <p:sp>
+        <p:nvSpPr>
+          <p:cNvPr id="3" name="Symbol zastępczy zawartości 2">
+            <a:extLst>
+              <a:ext uri="{FF2B5EF4-FFF2-40B4-BE49-F238E27FC236}">
+                <a16:creationId xmlns:a16="http://schemas.microsoft.com/office/drawing/2014/main" id="{5F3A88ED-75BC-0121-376D-5A3156FDF03E}"/>
+              </a:ext>
+            </a:extLst>
+          </p:cNvPr>
+          <p:cNvSpPr>
+            <a:spLocks noGrp="1"/>
+          </p:cNvSpPr>
+          <p:nvPr>
+            <p:ph sz="half" idx="1"/>
+          </p:nvPr>
+        </p:nvSpPr>
+        <p:spPr>
+          <a:xfrm>
+            <a:off x="695325" y="1825625"/>
+            <a:ext cx="5324475" cy="4351338"/>
+          </a:xfrm>
+        </p:spPr>
+        <p:txBody>
+          <a:bodyPr/>
+          <a:lstStyle/>
+          <a:p>
+            <a:pPr lvl="0"/>
+            <a:r>
+              <a:rPr lang="pl-PL" dirty="0"/>
+              <a:t>Kliknij, aby edytować style wzorca tekstu</a:t>
+            </a:r>
+          </a:p>
+          <a:p>
+            <a:pPr lvl="1"/>
+            <a:r>
+              <a:rPr lang="pl-PL" dirty="0"/>
+              <a:t>Drugi poziom</a:t>
+            </a:r>
+          </a:p>
+          <a:p>
+            <a:pPr lvl="2"/>
+            <a:r>
+              <a:rPr lang="pl-PL" dirty="0"/>
+              <a:t>Trzeci poziom</a:t>
+            </a:r>
+          </a:p>
+          <a:p>
+            <a:pPr lvl="3"/>
+            <a:r>
+              <a:rPr lang="pl-PL" dirty="0"/>
+              <a:t>Czwarty poziom</a:t>
+            </a:r>
+          </a:p>
+          <a:p>
+            <a:pPr lvl="4"/>
+            <a:r>
+              <a:rPr lang="pl-PL" dirty="0"/>
+              <a:t>Piąty poziom</a:t>
+            </a:r>
+          </a:p>
+        </p:txBody>
+      </p:sp>
+      <p:sp>
+        <p:nvSpPr>
+          <p:cNvPr id="4" name="Symbol zastępczy zawartości 3">
+            <a:extLst>
+              <a:ext uri="{FF2B5EF4-FFF2-40B4-BE49-F238E27FC236}">
+                <a16:creationId xmlns:a16="http://schemas.microsoft.com/office/drawing/2014/main" id="{25CDAD63-6655-BE50-0BF2-C7E9BCC77DBD}"/>
+              </a:ext>
+            </a:extLst>
+          </p:cNvPr>
+          <p:cNvSpPr>
+            <a:spLocks noGrp="1"/>
+          </p:cNvSpPr>
+          <p:nvPr>
+            <p:ph sz="half" idx="2"/>
+          </p:nvPr>
+        </p:nvSpPr>
+        <p:spPr>
+          <a:xfrm>
+            <a:off x="6172199" y="1825625"/>
+            <a:ext cx="5324475" cy="4351338"/>
+          </a:xfrm>
+        </p:spPr>
+        <p:txBody>
+          <a:bodyPr/>
+          <a:lstStyle/>
+          <a:p>
+            <a:pPr lvl="0"/>
+            <a:r>
+              <a:rPr lang="pl-PL" dirty="0"/>
+              <a:t>Kliknij, aby edytować style wzorca tekstu</a:t>
+            </a:r>
+          </a:p>
+          <a:p>
+            <a:pPr lvl="1"/>
+            <a:r>
+              <a:rPr lang="pl-PL" dirty="0"/>
+              <a:t>Drugi poziom</a:t>
+            </a:r>
+          </a:p>
+          <a:p>
+            <a:pPr lvl="2"/>
+            <a:r>
+              <a:rPr lang="pl-PL" dirty="0"/>
+              <a:t>Trzeci poziom</a:t>
+            </a:r>
+          </a:p>
+          <a:p>
+            <a:pPr lvl="3"/>
+            <a:r>
+              <a:rPr lang="pl-PL" dirty="0"/>
+              <a:t>Czwarty poziom</a:t>
+            </a:r>
+          </a:p>
+          <a:p>
+            <a:pPr lvl="4"/>
+            <a:r>
+              <a:rPr lang="pl-PL" dirty="0"/>
+              <a:t>Piąty poziom</a:t>
+            </a:r>
+          </a:p>
+        </p:txBody>
+      </p:sp>
+      <p:sp>
+        <p:nvSpPr>
+          <p:cNvPr id="5" name="Symbol zastępczy daty 4">
+            <a:extLst>
+              <a:ext uri="{FF2B5EF4-FFF2-40B4-BE49-F238E27FC236}">
+                <a16:creationId xmlns:a16="http://schemas.microsoft.com/office/drawing/2014/main" id="{7612F97F-AC7D-1CC2-FECC-A8AB38175702}"/>
+              </a:ext>
+            </a:extLst>
+          </p:cNvPr>
+          <p:cNvSpPr>
+            <a:spLocks noGrp="1"/>
+          </p:cNvSpPr>
+          <p:nvPr>
+            <p:ph type="dt" sz="half" idx="10"/>
+          </p:nvPr>
+        </p:nvSpPr>
+        <p:spPr/>
+        <p:txBody>
+          <a:bodyPr/>
+          <a:lstStyle/>
+          <a:p>
+            <a:fld id="{395FEE27-536F-479E-B304-98213E6B58CC}" type="datetimeFigureOut">
+              <a:rPr lang="pl-PL" smtClean="0"/>
+              <a:t>17.10.2026</a:t>
+            </a:fld>
+            <a:endParaRPr lang="pl-PL"/>
+          </a:p>
+        </p:txBody>
+      </p:sp>
+      <p:sp>
+        <p:nvSpPr>
+          <p:cNvPr id="6" name="Symbol zastępczy stopki 5">
+            <a:extLst>
+              <a:ext uri="{FF2B5EF4-FFF2-40B4-BE49-F238E27FC236}">
+                <a16:creationId xmlns:a16="http://schemas.microsoft.com/office/drawing/2014/main" id="{D0B73069-7046-BFD7-42A1-A34F11A7471A}"/>
+              </a:ext>
+            </a:extLst>
+          </p:cNvPr>
+          <p:cNvSpPr>
+            <a:spLocks noGrp="1"/>
+          </p:cNvSpPr>
+          <p:nvPr>
+            <p:ph type="ftr" sz="quarter" idx="11"/>
+          </p:nvPr>
+        </p:nvSpPr>
+        <p:spPr/>
+        <p:txBody>
+          <a:bodyPr/>
+          <a:lstStyle/>
+          <a:p>
+            <a:endParaRPr lang="pl-PL"/>
+          </a:p>
+        </p:txBody>
+      </p:sp>
+      <p:sp>
+        <p:nvSpPr>
+          <p:cNvPr id="7" name="Symbol zastępczy numeru slajdu 6">
+            <a:extLst>
+              <a:ext uri="{FF2B5EF4-FFF2-40B4-BE49-F238E27FC236}">
+                <a16:creationId xmlns:a16="http://schemas.microsoft.com/office/drawing/2014/main" id="{6DA65674-A0E6-87F0-365A-A5E3BFC7C023}"/>
+              </a:ext>
+            </a:extLst>
+          </p:cNvPr>
+          <p:cNvSpPr>
+            <a:spLocks noGrp="1"/>
+          </p:cNvSpPr>
+          <p:nvPr>
+            <p:ph type="sldNum" sz="quarter" idx="12"/>
+          </p:nvPr>
+        </p:nvSpPr>
+        <p:spPr/>
+        <p:txBody>
+          <a:bodyPr/>
+          <a:lstStyle/>
+          <a:p>
+            <a:fld id="{E4D5C528-8E18-4212-8660-D147A651E159}" type="slidenum">
+              <a:rPr lang="pl-PL" smtClean="0"/>
+              <a:t>‹#›</a:t>
+            </a:fld>
+            <a:endParaRPr lang="pl-PL"/>
+          </a:p>
+        </p:txBody>
+      </p:sp>
+    </p:spTree>
+    <p:extLst>
+      <p:ext uri="{BB962C8B-B14F-4D97-AF65-F5344CB8AC3E}">
+        <p14:creationId xmlns:p14="http://schemas.microsoft.com/office/powerpoint/2010/main" val="3024074622"/>
+      </p:ext>
+    </p:extLst>
+  </p:cSld>
+  <p:clrMapOvr>
+    <a:masterClrMapping/>
+  </p:clrMapOvr>
+</p:sldLayout>
+</file>
+
+<file path=ppt/slideLayouts/slideLayout6.xml><?xml version="1.0" encoding="utf-8"?>
+<p:sldLayout xmlns:a="http://schemas.openxmlformats.org/drawingml/2006/main" xmlns:r="http://schemas.openxmlformats.org/officeDocument/2006/relationships" xmlns:p="http://schemas.openxmlformats.org/presentationml/2006/main" type="twoTxTwoObj" preserve="1">
+  <p:cSld name="Porównanie">
+    <p:spTree>
+      <p:nvGrpSpPr>
+        <p:cNvPr id="1" name=""/>
+        <p:cNvGrpSpPr/>
+        <p:nvPr/>
+      </p:nvGrpSpPr>
+      <p:grpSpPr>
+        <a:xfrm>
+          <a:off x="0" y="0"/>
+          <a:ext cx="0" cy="0"/>
+          <a:chOff x="0" y="0"/>
+          <a:chExt cx="0" cy="0"/>
+        </a:xfrm>
+      </p:grpSpPr>
+      <p:sp>
+        <p:nvSpPr>
+          <p:cNvPr id="2" name="Tytuł 1">
+            <a:extLst>
+              <a:ext uri="{FF2B5EF4-FFF2-40B4-BE49-F238E27FC236}">
+                <a16:creationId xmlns:a16="http://schemas.microsoft.com/office/drawing/2014/main" id="{89313B9C-F8AD-859F-E1EB-A05D47D94BD8}"/>
+              </a:ext>
+            </a:extLst>
+          </p:cNvPr>
+          <p:cNvSpPr>
+            <a:spLocks noGrp="1"/>
+          </p:cNvSpPr>
+          <p:nvPr>
+            <p:ph type="title"/>
+          </p:nvPr>
+        </p:nvSpPr>
+        <p:spPr>
+          <a:xfrm>
+            <a:off x="695325" y="365125"/>
+            <a:ext cx="10660063" cy="1325563"/>
+          </a:xfrm>
+        </p:spPr>
+        <p:txBody>
+          <a:bodyPr/>
+          <a:lstStyle/>
+          <a:p>
+            <a:r>
+              <a:rPr lang="pl-PL" dirty="0"/>
+              <a:t>Kliknij, aby edytować styl</a:t>
+            </a:r>
+          </a:p>
+        </p:txBody>
+      </p:sp>
+      <p:sp>
+        <p:nvSpPr>
+          <p:cNvPr id="3" name="Symbol zastępczy tekstu 2">
+            <a:extLst>
+              <a:ext uri="{FF2B5EF4-FFF2-40B4-BE49-F238E27FC236}">
+                <a16:creationId xmlns:a16="http://schemas.microsoft.com/office/drawing/2014/main" id="{31C5EE98-2342-9422-2E20-B66E54842C0C}"/>
+              </a:ext>
+            </a:extLst>
+          </p:cNvPr>
+          <p:cNvSpPr>
+            <a:spLocks noGrp="1"/>
+          </p:cNvSpPr>
+          <p:nvPr>
+            <p:ph type="body" idx="1"/>
+          </p:nvPr>
+        </p:nvSpPr>
+        <p:spPr>
+          <a:xfrm>
+            <a:off x="695326" y="1681163"/>
+            <a:ext cx="5302250" cy="823912"/>
+          </a:xfrm>
+        </p:spPr>
+        <p:txBody>
+          <a:bodyPr anchor="b"/>
+          <a:lstStyle>
+            <a:lvl1pPr marL="0" indent="0">
+              <a:buNone/>
+              <a:defRPr sz="2400" b="1"/>
+            </a:lvl1pPr>
+            <a:lvl2pPr marL="457200" indent="0">
+              <a:buNone/>
+              <a:defRPr sz="2000" b="1"/>
+            </a:lvl2pPr>
+            <a:lvl3pPr marL="914400" indent="0">
+              <a:buNone/>
+              <a:defRPr sz="1800" b="1"/>
+            </a:lvl3pPr>
+            <a:lvl4pPr marL="1371600" indent="0">
+              <a:buNone/>
+              <a:defRPr sz="1600" b="1"/>
+            </a:lvl4pPr>
+            <a:lvl5pPr marL="1828800" indent="0">
+              <a:buNone/>
+              <a:defRPr sz="1600" b="1"/>
+            </a:lvl5pPr>
+            <a:lvl6pPr marL="2286000" indent="0">
+              <a:buNone/>
+              <a:defRPr sz="1600" b="1"/>
+            </a:lvl6pPr>
+            <a:lvl7pPr marL="2743200" indent="0">
+              <a:buNone/>
+              <a:defRPr sz="1600" b="1"/>
+            </a:lvl7pPr>
+            <a:lvl8pPr marL="3200400" indent="0">
+              <a:buNone/>
+              <a:defRPr sz="1600" b="1"/>
+            </a:lvl8pPr>
+            <a:lvl9pPr marL="3657600" indent="0">
+              <a:buNone/>
+              <a:defRPr sz="1600" b="1"/>
+            </a:lvl9pPr>
+          </a:lstStyle>
+          <a:p>
+            <a:pPr lvl="0"/>
+            <a:r>
+              <a:rPr lang="pl-PL" dirty="0"/>
+              <a:t>Kliknij, aby edytować style wzorca tekstu</a:t>
+            </a:r>
+          </a:p>
+        </p:txBody>
+      </p:sp>
+      <p:sp>
+        <p:nvSpPr>
+          <p:cNvPr id="4" name="Symbol zastępczy zawartości 3">
+            <a:extLst>
+              <a:ext uri="{FF2B5EF4-FFF2-40B4-BE49-F238E27FC236}">
+                <a16:creationId xmlns:a16="http://schemas.microsoft.com/office/drawing/2014/main" id="{B17E98A2-CF8A-3D91-D593-FE5EA52B891D}"/>
+              </a:ext>
+            </a:extLst>
+          </p:cNvPr>
+          <p:cNvSpPr>
+            <a:spLocks noGrp="1"/>
+          </p:cNvSpPr>
+          <p:nvPr>
+            <p:ph sz="half" idx="2"/>
+          </p:nvPr>
+        </p:nvSpPr>
+        <p:spPr>
+          <a:xfrm>
+            <a:off x="695326" y="2505075"/>
+            <a:ext cx="5302250" cy="3684588"/>
+          </a:xfrm>
+        </p:spPr>
+        <p:txBody>
+          <a:bodyPr/>
+          <a:lstStyle/>
+          <a:p>
+            <a:pPr lvl="0"/>
+            <a:r>
+              <a:rPr lang="pl-PL" dirty="0"/>
+              <a:t>Kliknij, aby edytować style wzorca tekstu</a:t>
+            </a:r>
+          </a:p>
+          <a:p>
+            <a:pPr lvl="1"/>
+            <a:r>
+              <a:rPr lang="pl-PL" dirty="0"/>
+              <a:t>Drugi poziom</a:t>
+            </a:r>
+          </a:p>
+          <a:p>
+            <a:pPr lvl="2"/>
+            <a:r>
+              <a:rPr lang="pl-PL" dirty="0"/>
+              <a:t>Trzeci poziom</a:t>
+            </a:r>
+          </a:p>
+          <a:p>
+            <a:pPr lvl="3"/>
+            <a:r>
+              <a:rPr lang="pl-PL" dirty="0"/>
+              <a:t>Czwarty poziom</a:t>
+            </a:r>
+          </a:p>
+          <a:p>
+            <a:pPr lvl="4"/>
+            <a:r>
+              <a:rPr lang="pl-PL" dirty="0"/>
+              <a:t>Piąty poziom</a:t>
+            </a:r>
+          </a:p>
+        </p:txBody>
+      </p:sp>
+      <p:sp>
+        <p:nvSpPr>
+          <p:cNvPr id="5" name="Symbol zastępczy tekstu 4">
+            <a:extLst>
+              <a:ext uri="{FF2B5EF4-FFF2-40B4-BE49-F238E27FC236}">
+                <a16:creationId xmlns:a16="http://schemas.microsoft.com/office/drawing/2014/main" id="{1C9D4037-DEF4-C410-AB67-0DF9860BD2FD}"/>
+              </a:ext>
+            </a:extLst>
+          </p:cNvPr>
+          <p:cNvSpPr>
+            <a:spLocks noGrp="1"/>
+          </p:cNvSpPr>
+          <p:nvPr>
+            <p:ph type="body" sz="quarter" idx="3"/>
+          </p:nvPr>
+        </p:nvSpPr>
+        <p:spPr>
+          <a:xfrm>
+            <a:off x="6172200" y="1681163"/>
+            <a:ext cx="5302250" cy="823912"/>
+          </a:xfrm>
+        </p:spPr>
+        <p:txBody>
+          <a:bodyPr anchor="b"/>
+          <a:lstStyle>
+            <a:lvl1pPr marL="0" indent="0">
+              <a:buNone/>
+              <a:defRPr sz="2400" b="1"/>
+            </a:lvl1pPr>
+            <a:lvl2pPr marL="457200" indent="0">
+              <a:buNone/>
+              <a:defRPr sz="2000" b="1"/>
+            </a:lvl2pPr>
+            <a:lvl3pPr marL="914400" indent="0">
+              <a:buNone/>
+              <a:defRPr sz="1800" b="1"/>
+            </a:lvl3pPr>
+            <a:lvl4pPr marL="1371600" indent="0">
+              <a:buNone/>
+              <a:defRPr sz="1600" b="1"/>
+            </a:lvl4pPr>
+            <a:lvl5pPr marL="1828800" indent="0">
+              <a:buNone/>
+              <a:defRPr sz="1600" b="1"/>
+            </a:lvl5pPr>
+            <a:lvl6pPr marL="2286000" indent="0">
+              <a:buNone/>
+              <a:defRPr sz="1600" b="1"/>
+            </a:lvl6pPr>
+            <a:lvl7pPr marL="2743200" indent="0">
+              <a:buNone/>
+              <a:defRPr sz="1600" b="1"/>
+            </a:lvl7pPr>
+            <a:lvl8pPr marL="3200400" indent="0">
+              <a:buNone/>
+              <a:defRPr sz="1600" b="1"/>
+            </a:lvl8pPr>
+            <a:lvl9pPr marL="3657600" indent="0">
+              <a:buNone/>
+              <a:defRPr sz="1600" b="1"/>
+            </a:lvl9pPr>
+          </a:lstStyle>
+          <a:p>
+            <a:pPr lvl="0"/>
+            <a:r>
+              <a:rPr lang="pl-PL"/>
+              <a:t>Kliknij, aby edytować style wzorca tekstu</a:t>
+            </a:r>
+          </a:p>
+        </p:txBody>
+      </p:sp>
+      <p:sp>
+        <p:nvSpPr>
+          <p:cNvPr id="6" name="Symbol zastępczy zawartości 5">
+            <a:extLst>
+              <a:ext uri="{FF2B5EF4-FFF2-40B4-BE49-F238E27FC236}">
+                <a16:creationId xmlns:a16="http://schemas.microsoft.com/office/drawing/2014/main" id="{63ED75DF-E629-FAE6-57CB-621947130096}"/>
+              </a:ext>
+            </a:extLst>
+          </p:cNvPr>
+          <p:cNvSpPr>
+            <a:spLocks noGrp="1"/>
+          </p:cNvSpPr>
+          <p:nvPr>
+            <p:ph sz="quarter" idx="4"/>
+          </p:nvPr>
+        </p:nvSpPr>
+        <p:spPr>
+          <a:xfrm>
+            <a:off x="6172200" y="2505075"/>
+            <a:ext cx="5324474" cy="3684588"/>
+          </a:xfrm>
+        </p:spPr>
+        <p:txBody>
+          <a:bodyPr/>
+          <a:lstStyle/>
+          <a:p>
+            <a:pPr lvl="0"/>
+            <a:r>
+              <a:rPr lang="pl-PL"/>
+              <a:t>Kliknij, aby edytować style wzorca tekstu</a:t>
+            </a:r>
+          </a:p>
+          <a:p>
+            <a:pPr lvl="1"/>
+            <a:r>
+              <a:rPr lang="pl-PL"/>
+              <a:t>Drugi poziom</a:t>
+            </a:r>
+          </a:p>
+          <a:p>
+            <a:pPr lvl="2"/>
+            <a:r>
+              <a:rPr lang="pl-PL"/>
+              <a:t>Trzeci poziom</a:t>
+            </a:r>
+          </a:p>
+          <a:p>
+            <a:pPr lvl="3"/>
+            <a:r>
+              <a:rPr lang="pl-PL"/>
+              <a:t>Czwarty poziom</a:t>
+            </a:r>
+          </a:p>
+          <a:p>
+            <a:pPr lvl="4"/>
+            <a:r>
+              <a:rPr lang="pl-PL"/>
+              <a:t>Piąty poziom</a:t>
+            </a:r>
+          </a:p>
+        </p:txBody>
+      </p:sp>
+      <p:sp>
+        <p:nvSpPr>
+          <p:cNvPr id="7" name="Symbol zastępczy daty 6">
+            <a:extLst>
+              <a:ext uri="{FF2B5EF4-FFF2-40B4-BE49-F238E27FC236}">
+                <a16:creationId xmlns:a16="http://schemas.microsoft.com/office/drawing/2014/main" id="{56EEE76A-F576-EE75-073C-0395AF0F6438}"/>
+              </a:ext>
+            </a:extLst>
+          </p:cNvPr>
+          <p:cNvSpPr>
+            <a:spLocks noGrp="1"/>
+          </p:cNvSpPr>
+          <p:nvPr>
+            <p:ph type="dt" sz="half" idx="10"/>
+          </p:nvPr>
+        </p:nvSpPr>
+        <p:spPr/>
+        <p:txBody>
+          <a:bodyPr/>
+          <a:lstStyle/>
+          <a:p>
+            <a:fld id="{395FEE27-536F-479E-B304-98213E6B58CC}" type="datetimeFigureOut">
+              <a:rPr lang="pl-PL" smtClean="0"/>
+              <a:t>17.10.2026</a:t>
+            </a:fld>
+            <a:endParaRPr lang="pl-PL"/>
+          </a:p>
+        </p:txBody>
+      </p:sp>
+      <p:sp>
+        <p:nvSpPr>
+          <p:cNvPr id="8" name="Symbol zastępczy stopki 7">
+            <a:extLst>
+              <a:ext uri="{FF2B5EF4-FFF2-40B4-BE49-F238E27FC236}">
+                <a16:creationId xmlns:a16="http://schemas.microsoft.com/office/drawing/2014/main" id="{5CBA82FD-645F-7F4C-B01D-0909733482DB}"/>
+              </a:ext>
+            </a:extLst>
+          </p:cNvPr>
+          <p:cNvSpPr>
+            <a:spLocks noGrp="1"/>
+          </p:cNvSpPr>
+          <p:nvPr>
+            <p:ph type="ftr" sz="quarter" idx="11"/>
+          </p:nvPr>
+        </p:nvSpPr>
+        <p:spPr/>
+        <p:txBody>
+          <a:bodyPr/>
+          <a:lstStyle/>
+          <a:p>
+            <a:endParaRPr lang="pl-PL"/>
+          </a:p>
+        </p:txBody>
+      </p:sp>
+      <p:sp>
+        <p:nvSpPr>
+          <p:cNvPr id="9" name="Symbol zastępczy numeru slajdu 8">
+            <a:extLst>
+              <a:ext uri="{FF2B5EF4-FFF2-40B4-BE49-F238E27FC236}">
+                <a16:creationId xmlns:a16="http://schemas.microsoft.com/office/drawing/2014/main" id="{81617355-7BF2-428A-3BCE-95BABBB9CF43}"/>
+              </a:ext>
+            </a:extLst>
+          </p:cNvPr>
+          <p:cNvSpPr>
+            <a:spLocks noGrp="1"/>
+          </p:cNvSpPr>
+          <p:nvPr>
+            <p:ph type="sldNum" sz="quarter" idx="12"/>
+          </p:nvPr>
+        </p:nvSpPr>
+        <p:spPr/>
+        <p:txBody>
+          <a:bodyPr/>
+          <a:lstStyle/>
+          <a:p>
+            <a:fld id="{E4D5C528-8E18-4212-8660-D147A651E159}" type="slidenum">
+              <a:rPr lang="pl-PL" smtClean="0"/>
+              <a:t>‹#›</a:t>
+            </a:fld>
+            <a:endParaRPr lang="pl-PL"/>
+          </a:p>
+        </p:txBody>
+      </p:sp>
+    </p:spTree>
+    <p:extLst>
+      <p:ext uri="{BB962C8B-B14F-4D97-AF65-F5344CB8AC3E}">
+        <p14:creationId xmlns:p14="http://schemas.microsoft.com/office/powerpoint/2010/main" val="1498646647"/>
+      </p:ext>
+    </p:extLst>
+  </p:cSld>
+  <p:clrMapOvr>
+    <a:masterClrMapping/>
+  </p:clrMapOvr>
+</p:sldLayout>
+</file>
+
+<file path=ppt/slideLayouts/slideLayout7.xml><?xml version="1.0" encoding="utf-8"?>
+<p:sldLayout xmlns:a="http://schemas.openxmlformats.org/drawingml/2006/main" xmlns:r="http://schemas.openxmlformats.org/officeDocument/2006/relationships" xmlns:p="http://schemas.openxmlformats.org/presentationml/2006/main" type="titleOnly" preserve="1">
+  <p:cSld name="Tylko tytuł">
+    <p:spTree>
+      <p:nvGrpSpPr>
+        <p:cNvPr id="1" name=""/>
+        <p:cNvGrpSpPr/>
+        <p:nvPr/>
+      </p:nvGrpSpPr>
+      <p:grpSpPr>
+        <a:xfrm>
+          <a:off x="0" y="0"/>
+          <a:ext cx="0" cy="0"/>
+          <a:chOff x="0" y="0"/>
+          <a:chExt cx="0" cy="0"/>
+        </a:xfrm>
+      </p:grpSpPr>
+      <p:sp>
+        <p:nvSpPr>
+          <p:cNvPr id="2" name="Tytuł 1">
+            <a:extLst>
+              <a:ext uri="{FF2B5EF4-FFF2-40B4-BE49-F238E27FC236}">
+                <a16:creationId xmlns:a16="http://schemas.microsoft.com/office/drawing/2014/main" id="{4809FE18-0AE9-7353-49BF-A33AB1E63D8E}"/>
+              </a:ext>
+            </a:extLst>
+          </p:cNvPr>
+          <p:cNvSpPr>
+            <a:spLocks noGrp="1"/>
+          </p:cNvSpPr>
+          <p:nvPr>
+            <p:ph type="title"/>
+          </p:nvPr>
+        </p:nvSpPr>
+        <p:spPr/>
+        <p:txBody>
+          <a:bodyPr/>
+          <a:lstStyle/>
+          <a:p>
+            <a:r>
+              <a:rPr lang="pl-PL"/>
+              <a:t>Kliknij, aby edytować styl</a:t>
+            </a:r>
+          </a:p>
+        </p:txBody>
+      </p:sp>
+      <p:sp>
+        <p:nvSpPr>
+          <p:cNvPr id="3" name="Symbol zastępczy daty 2">
+            <a:extLst>
+              <a:ext uri="{FF2B5EF4-FFF2-40B4-BE49-F238E27FC236}">
+                <a16:creationId xmlns:a16="http://schemas.microsoft.com/office/drawing/2014/main" id="{E894EE45-BE5D-2EC2-871B-F380B772A479}"/>
+              </a:ext>
+            </a:extLst>
+          </p:cNvPr>
+          <p:cNvSpPr>
+            <a:spLocks noGrp="1"/>
+          </p:cNvSpPr>
+          <p:nvPr>
+            <p:ph type="dt" sz="half" idx="10"/>
+          </p:nvPr>
+        </p:nvSpPr>
+        <p:spPr/>
+        <p:txBody>
+          <a:bodyPr/>
+          <a:lstStyle/>
+          <a:p>
+            <a:fld id="{395FEE27-536F-479E-B304-98213E6B58CC}" type="datetimeFigureOut">
+              <a:rPr lang="pl-PL" smtClean="0"/>
+              <a:t>17.10.2026</a:t>
+            </a:fld>
+            <a:endParaRPr lang="pl-PL"/>
+          </a:p>
+        </p:txBody>
+      </p:sp>
+      <p:sp>
+        <p:nvSpPr>
+          <p:cNvPr id="4" name="Symbol zastępczy stopki 3">
+            <a:extLst>
+              <a:ext uri="{FF2B5EF4-FFF2-40B4-BE49-F238E27FC236}">
+                <a16:creationId xmlns:a16="http://schemas.microsoft.com/office/drawing/2014/main" id="{5D5EF9C5-CB98-6ACD-ED22-B016DB1C931B}"/>
+              </a:ext>
+            </a:extLst>
+          </p:cNvPr>
+          <p:cNvSpPr>
+            <a:spLocks noGrp="1"/>
+          </p:cNvSpPr>
+          <p:nvPr>
+            <p:ph type="ftr" sz="quarter" idx="11"/>
+          </p:nvPr>
+        </p:nvSpPr>
+        <p:spPr/>
+        <p:txBody>
+          <a:bodyPr/>
+          <a:lstStyle/>
+          <a:p>
+            <a:endParaRPr lang="pl-PL"/>
+          </a:p>
+        </p:txBody>
+      </p:sp>
+      <p:sp>
+        <p:nvSpPr>
+          <p:cNvPr id="5" name="Symbol zastępczy numeru slajdu 4">
+            <a:extLst>
+              <a:ext uri="{FF2B5EF4-FFF2-40B4-BE49-F238E27FC236}">
+                <a16:creationId xmlns:a16="http://schemas.microsoft.com/office/drawing/2014/main" id="{790C3667-2BEB-9CC1-6881-1E0B3F115351}"/>
+              </a:ext>
+            </a:extLst>
+          </p:cNvPr>
+          <p:cNvSpPr>
+            <a:spLocks noGrp="1"/>
+          </p:cNvSpPr>
+          <p:nvPr>
+            <p:ph type="sldNum" sz="quarter" idx="12"/>
+          </p:nvPr>
+        </p:nvSpPr>
+        <p:spPr/>
+        <p:txBody>
+          <a:bodyPr/>
+          <a:lstStyle/>
+          <a:p>
+            <a:fld id="{E4D5C528-8E18-4212-8660-D147A651E159}" type="slidenum">
+              <a:rPr lang="pl-PL" smtClean="0"/>
+              <a:t>‹#›</a:t>
+            </a:fld>
+            <a:endParaRPr lang="pl-PL"/>
+          </a:p>
+        </p:txBody>
+      </p:sp>
+    </p:spTree>
+    <p:extLst>
+      <p:ext uri="{BB962C8B-B14F-4D97-AF65-F5344CB8AC3E}">
+        <p14:creationId xmlns:p14="http://schemas.microsoft.com/office/powerpoint/2010/main" val="2135974466"/>
+      </p:ext>
+    </p:extLst>
+  </p:cSld>
+  <p:clrMapOvr>
+    <a:masterClrMapping/>
+  </p:clrMapOvr>
+</p:sldLayout>
+</file>
+
+<file path=ppt/slideLayouts/slideLayout8.xml><?xml version="1.0" encoding="utf-8"?>
+<p:sldLayout xmlns:a="http://schemas.openxmlformats.org/drawingml/2006/main" xmlns:r="http://schemas.openxmlformats.org/officeDocument/2006/relationships" xmlns:p="http://schemas.openxmlformats.org/presentationml/2006/main" type="blank" preserve="1">
+  <p:cSld name="Pusty">
+    <p:spTree>
+      <p:nvGrpSpPr>
+        <p:cNvPr id="1" name=""/>
+        <p:cNvGrpSpPr/>
+        <p:nvPr/>
+      </p:nvGrpSpPr>
+      <p:grpSpPr>
+        <a:xfrm>
+          <a:off x="0" y="0"/>
+          <a:ext cx="0" cy="0"/>
+          <a:chOff x="0" y="0"/>
+          <a:chExt cx="0" cy="0"/>
+        </a:xfrm>
+      </p:grpSpPr>
+      <p:sp>
+        <p:nvSpPr>
+          <p:cNvPr id="2" name="Symbol zastępczy daty 1">
+            <a:extLst>
+              <a:ext uri="{FF2B5EF4-FFF2-40B4-BE49-F238E27FC236}">
+                <a16:creationId xmlns:a16="http://schemas.microsoft.com/office/drawing/2014/main" id="{FD3E4AFA-9D77-ECD2-3537-12712237DCD7}"/>
+              </a:ext>
+            </a:extLst>
+          </p:cNvPr>
+          <p:cNvSpPr>
+            <a:spLocks noGrp="1"/>
+          </p:cNvSpPr>
+          <p:nvPr>
+            <p:ph type="dt" sz="half" idx="10"/>
+          </p:nvPr>
+        </p:nvSpPr>
+        <p:spPr/>
+        <p:txBody>
+          <a:bodyPr/>
+          <a:lstStyle/>
+          <a:p>
+            <a:fld id="{395FEE27-536F-479E-B304-98213E6B58CC}" type="datetimeFigureOut">
+              <a:rPr lang="pl-PL" smtClean="0"/>
+              <a:t>17.10.2026</a:t>
+            </a:fld>
+            <a:endParaRPr lang="pl-PL"/>
+          </a:p>
+        </p:txBody>
+      </p:sp>
+      <p:sp>
+        <p:nvSpPr>
+          <p:cNvPr id="3" name="Symbol zastępczy stopki 2">
+            <a:extLst>
+              <a:ext uri="{FF2B5EF4-FFF2-40B4-BE49-F238E27FC236}">
+                <a16:creationId xmlns:a16="http://schemas.microsoft.com/office/drawing/2014/main" id="{125A8279-982E-2DEB-48C4-31346B2413BD}"/>
+              </a:ext>
+            </a:extLst>
+          </p:cNvPr>
+          <p:cNvSpPr>
+            <a:spLocks noGrp="1"/>
+          </p:cNvSpPr>
+          <p:nvPr>
+            <p:ph type="ftr" sz="quarter" idx="11"/>
+          </p:nvPr>
+        </p:nvSpPr>
+        <p:spPr/>
+        <p:txBody>
+          <a:bodyPr/>
+          <a:lstStyle/>
+          <a:p>
+            <a:endParaRPr lang="pl-PL"/>
+          </a:p>
+        </p:txBody>
+      </p:sp>
+      <p:sp>
+        <p:nvSpPr>
+          <p:cNvPr id="4" name="Symbol zastępczy numeru slajdu 3">
+            <a:extLst>
+              <a:ext uri="{FF2B5EF4-FFF2-40B4-BE49-F238E27FC236}">
+                <a16:creationId xmlns:a16="http://schemas.microsoft.com/office/drawing/2014/main" id="{A1C08BCF-AC92-55DE-F2F0-11494317EEEE}"/>
+              </a:ext>
+            </a:extLst>
+          </p:cNvPr>
+          <p:cNvSpPr>
+            <a:spLocks noGrp="1"/>
+          </p:cNvSpPr>
+          <p:nvPr>
+            <p:ph type="sldNum" sz="quarter" idx="12"/>
+          </p:nvPr>
+        </p:nvSpPr>
+        <p:spPr/>
+        <p:txBody>
+          <a:bodyPr/>
+          <a:lstStyle/>
+          <a:p>
+            <a:fld id="{E4D5C528-8E18-4212-8660-D147A651E159}" type="slidenum">
+              <a:rPr lang="pl-PL" smtClean="0"/>
+              <a:t>‹#›</a:t>
+            </a:fld>
+            <a:endParaRPr lang="pl-PL"/>
+          </a:p>
+        </p:txBody>
+      </p:sp>
+    </p:spTree>
+    <p:extLst>
+      <p:ext uri="{BB962C8B-B14F-4D97-AF65-F5344CB8AC3E}">
+        <p14:creationId xmlns:p14="http://schemas.microsoft.com/office/powerpoint/2010/main" val="3826010103"/>
+      </p:ext>
+    </p:extLst>
+  </p:cSld>
+  <p:clrMapOvr>
+    <a:masterClrMapping/>
+  </p:clrMapOvr>
+</p:sldLayout>
+</file>
+
+<file path=ppt/slideLayouts/slideLayout9.xml><?xml version="1.0" encoding="utf-8"?>
+<p:sldLayout xmlns:a="http://schemas.openxmlformats.org/drawingml/2006/main" xmlns:r="http://schemas.openxmlformats.org/officeDocument/2006/relationships" xmlns:p="http://schemas.openxmlformats.org/presentationml/2006/main" type="objTx" preserve="1">
+  <p:cSld name="Zawartość z podpisem">
+    <p:spTree>
+      <p:nvGrpSpPr>
+        <p:cNvPr id="1" name=""/>
+        <p:cNvGrpSpPr/>
+        <p:nvPr/>
+      </p:nvGrpSpPr>
+      <p:grpSpPr>
+        <a:xfrm>
+          <a:off x="0" y="0"/>
+          <a:ext cx="0" cy="0"/>
+          <a:chOff x="0" y="0"/>
+          <a:chExt cx="0" cy="0"/>
+        </a:xfrm>
+      </p:grpSpPr>
+      <p:sp>
+        <p:nvSpPr>
+          <p:cNvPr id="2" name="Tytuł 1">
+            <a:extLst>
+              <a:ext uri="{FF2B5EF4-FFF2-40B4-BE49-F238E27FC236}">
+                <a16:creationId xmlns:a16="http://schemas.microsoft.com/office/drawing/2014/main" id="{E7DAC369-5338-3B1B-F146-2A8E6A93841B}"/>
+              </a:ext>
+            </a:extLst>
+          </p:cNvPr>
+          <p:cNvSpPr>
+            <a:spLocks noGrp="1"/>
+          </p:cNvSpPr>
+          <p:nvPr>
+            <p:ph type="title"/>
+          </p:nvPr>
+        </p:nvSpPr>
+        <p:spPr>
+          <a:xfrm>
+            <a:off x="839788" y="457200"/>
+            <a:ext cx="3932237" cy="1600200"/>
+          </a:xfrm>
+        </p:spPr>
+        <p:txBody>
+          <a:bodyPr anchor="b"/>
+          <a:lstStyle>
+            <a:lvl1pPr>
+              <a:defRPr sz="3200"/>
+            </a:lvl1pPr>
+          </a:lstStyle>
+          <a:p>
+            <a:r>
+              <a:rPr lang="pl-PL"/>
+              <a:t>Kliknij, aby edytować styl</a:t>
+            </a:r>
+          </a:p>
+        </p:txBody>
+      </p:sp>
+      <p:sp>
+        <p:nvSpPr>
+          <p:cNvPr id="3" name="Symbol zastępczy zawartości 2">
+            <a:extLst>
+              <a:ext uri="{FF2B5EF4-FFF2-40B4-BE49-F238E27FC236}">
+                <a16:creationId xmlns:a16="http://schemas.microsoft.com/office/drawing/2014/main" id="{95DD4C74-DF6C-153A-26B1-74788DEE7673}"/>
+              </a:ext>
+            </a:extLst>
+          </p:cNvPr>
+          <p:cNvSpPr>
+            <a:spLocks noGrp="1"/>
+          </p:cNvSpPr>
+          <p:nvPr>
+            <p:ph idx="1"/>
+          </p:nvPr>
+        </p:nvSpPr>
+        <p:spPr>
+          <a:xfrm>
+            <a:off x="5183188" y="987425"/>
+            <a:ext cx="6172200" cy="4873625"/>
+          </a:xfrm>
+        </p:spPr>
+        <p:txBody>
+          <a:bodyPr/>
+          <a:lstStyle>
+            <a:lvl1pPr>
+              <a:defRPr sz="3200"/>
+            </a:lvl1pPr>
+            <a:lvl2pPr>
+              <a:defRPr sz="2800"/>
+            </a:lvl2pPr>
+            <a:lvl3pPr>
+              <a:defRPr sz="2400"/>
+            </a:lvl3pPr>
+            <a:lvl4pPr>
+              <a:defRPr sz="2000"/>
+            </a:lvl4pPr>
+            <a:lvl5pPr>
+              <a:defRPr sz="2000"/>
+            </a:lvl5pPr>
+            <a:lvl6pPr>
+              <a:defRPr sz="2000"/>
+            </a:lvl6pPr>
+            <a:lvl7pPr>
+              <a:defRPr sz="2000"/>
+            </a:lvl7pPr>
+            <a:lvl8pPr>
+              <a:defRPr sz="2000"/>
+            </a:lvl8pPr>
+            <a:lvl9pPr>
+              <a:defRPr sz="2000"/>
+            </a:lvl9pPr>
+          </a:lstStyle>
+          <a:p>
+            <a:pPr lvl="0"/>
+            <a:r>
+              <a:rPr lang="pl-PL"/>
+              <a:t>Kliknij, aby edytować style wzorca tekstu</a:t>
+            </a:r>
+          </a:p>
+          <a:p>
+            <a:pPr lvl="1"/>
+            <a:r>
+              <a:rPr lang="pl-PL"/>
+              <a:t>Drugi poziom</a:t>
+            </a:r>
+          </a:p>
+          <a:p>
+            <a:pPr lvl="2"/>
+            <a:r>
+              <a:rPr lang="pl-PL"/>
+              <a:t>Trzeci poziom</a:t>
+            </a:r>
+          </a:p>
+          <a:p>
+            <a:pPr lvl="3"/>
+            <a:r>
+              <a:rPr lang="pl-PL"/>
+              <a:t>Czwarty poziom</a:t>
+            </a:r>
+          </a:p>
+          <a:p>
+            <a:pPr lvl="4"/>
+            <a:r>
+              <a:rPr lang="pl-PL"/>
+              <a:t>Piąty poziom</a:t>
+            </a:r>
+          </a:p>
+        </p:txBody>
+      </p:sp>
+      <p:sp>
+        <p:nvSpPr>
+          <p:cNvPr id="4" name="Symbol zastępczy tekstu 3">
+            <a:extLst>
+              <a:ext uri="{FF2B5EF4-FFF2-40B4-BE49-F238E27FC236}">
+                <a16:creationId xmlns:a16="http://schemas.microsoft.com/office/drawing/2014/main" id="{1DD88DD2-39C9-E478-21A7-750DEB6C2779}"/>
+              </a:ext>
+            </a:extLst>
+          </p:cNvPr>
+          <p:cNvSpPr>
+            <a:spLocks noGrp="1"/>
+          </p:cNvSpPr>
+          <p:nvPr>
+            <p:ph type="body" sz="half" idx="2"/>
+          </p:nvPr>
+        </p:nvSpPr>
+        <p:spPr>
+          <a:xfrm>
+            <a:off x="839788" y="2057400"/>
+            <a:ext cx="3932237" cy="3811588"/>
+          </a:xfrm>
+        </p:spPr>
+        <p:txBody>
+          <a:bodyPr/>
+          <a:lstStyle>
+            <a:lvl1pPr marL="0" indent="0">
+              <a:buNone/>
+              <a:defRPr sz="1600"/>
+            </a:lvl1pPr>
+            <a:lvl2pPr marL="457200" indent="0">
+              <a:buNone/>
+              <a:defRPr sz="1400"/>
+            </a:lvl2pPr>
+            <a:lvl3pPr marL="914400" indent="0">
+              <a:buNone/>
+              <a:defRPr sz="1200"/>
+            </a:lvl3pPr>
+            <a:lvl4pPr marL="1371600" indent="0">
+              <a:buNone/>
+              <a:defRPr sz="1000"/>
+            </a:lvl4pPr>
+            <a:lvl5pPr marL="1828800" indent="0">
+              <a:buNone/>
+              <a:defRPr sz="1000"/>
+            </a:lvl5pPr>
+            <a:lvl6pPr marL="2286000" indent="0">
+              <a:buNone/>
+              <a:defRPr sz="1000"/>
+            </a:lvl6pPr>
+            <a:lvl7pPr marL="2743200" indent="0">
+              <a:buNone/>
+              <a:defRPr sz="1000"/>
+            </a:lvl7pPr>
+            <a:lvl8pPr marL="3200400" indent="0">
+              <a:buNone/>
+              <a:defRPr sz="1000"/>
+            </a:lvl8pPr>
+            <a:lvl9pPr marL="3657600" indent="0">
+              <a:buNone/>
+              <a:defRPr sz="1000"/>
+            </a:lvl9pPr>
+          </a:lstStyle>
+          <a:p>
+            <a:pPr lvl="0"/>
+            <a:r>
+              <a:rPr lang="pl-PL"/>
+              <a:t>Kliknij, aby edytować style wzorca tekstu</a:t>
+            </a:r>
+          </a:p>
+        </p:txBody>
+      </p:sp>
+      <p:sp>
+        <p:nvSpPr>
+          <p:cNvPr id="5" name="Symbol zastępczy daty 4">
+            <a:extLst>
+              <a:ext uri="{FF2B5EF4-FFF2-40B4-BE49-F238E27FC236}">
+                <a16:creationId xmlns:a16="http://schemas.microsoft.com/office/drawing/2014/main" id="{92B2F165-82F3-8DF9-B941-12FB976A97A7}"/>
+              </a:ext>
+            </a:extLst>
+          </p:cNvPr>
+          <p:cNvSpPr>
+            <a:spLocks noGrp="1"/>
+          </p:cNvSpPr>
+          <p:nvPr>
+            <p:ph type="dt" sz="half" idx="10"/>
+          </p:nvPr>
+        </p:nvSpPr>
+        <p:spPr/>
+        <p:txBody>
+          <a:bodyPr/>
+          <a:lstStyle/>
+          <a:p>
+            <a:fld id="{395FEE27-536F-479E-B304-98213E6B58CC}" type="datetimeFigureOut">
+              <a:rPr lang="pl-PL" smtClean="0"/>
+              <a:t>17.10.2026</a:t>
+            </a:fld>
+            <a:endParaRPr lang="pl-PL"/>
+          </a:p>
+        </p:txBody>
+      </p:sp>
+      <p:sp>
+        <p:nvSpPr>
+          <p:cNvPr id="6" name="Symbol zastępczy stopki 5">
+            <a:extLst>
+              <a:ext uri="{FF2B5EF4-FFF2-40B4-BE49-F238E27FC236}">
+                <a16:creationId xmlns:a16="http://schemas.microsoft.com/office/drawing/2014/main" id="{75428AA0-D2A3-75DF-BC05-640CF235B1A5}"/>
+              </a:ext>
+            </a:extLst>
+          </p:cNvPr>
+          <p:cNvSpPr>
+            <a:spLocks noGrp="1"/>
+          </p:cNvSpPr>
+          <p:nvPr>
+            <p:ph type="ftr" sz="quarter" idx="11"/>
+          </p:nvPr>
+        </p:nvSpPr>
+        <p:spPr/>
+        <p:txBody>
+          <a:bodyPr/>
+          <a:lstStyle/>
+          <a:p>
+            <a:endParaRPr lang="pl-PL"/>
+          </a:p>
+        </p:txBody>
+      </p:sp>
+      <p:sp>
+        <p:nvSpPr>
+          <p:cNvPr id="7" name="Symbol zastępczy numeru slajdu 6">
+            <a:extLst>
+              <a:ext uri="{FF2B5EF4-FFF2-40B4-BE49-F238E27FC236}">
+                <a16:creationId xmlns:a16="http://schemas.microsoft.com/office/drawing/2014/main" id="{7900F070-C41B-84CF-22B3-B7B938329F59}"/>
+              </a:ext>
+            </a:extLst>
+          </p:cNvPr>
+          <p:cNvSpPr>
+            <a:spLocks noGrp="1"/>
+          </p:cNvSpPr>
+          <p:nvPr>
+            <p:ph type="sldNum" sz="quarter" idx="12"/>
+          </p:nvPr>
+        </p:nvSpPr>
+        <p:spPr/>
+        <p:txBody>
+          <a:bodyPr/>
+          <a:lstStyle/>
+          <a:p>
+            <a:fld id="{E4D5C528-8E18-4212-8660-D147A651E159}" type="slidenum">
+              <a:rPr lang="pl-PL" smtClean="0"/>
+              <a:t>‹#›</a:t>
+            </a:fld>
+            <a:endParaRPr lang="pl-PL"/>
+          </a:p>
+        </p:txBody>
+      </p:sp>
+    </p:spTree>
+    <p:extLst>
+      <p:ext uri="{BB962C8B-B14F-4D97-AF65-F5344CB8AC3E}">
+        <p14:creationId xmlns:p14="http://schemas.microsoft.com/office/powerpoint/2010/main" val="1946526687"/>
+      </p:ext>
+    </p:extLst>
+  </p:cSld>
+  <p:clrMapOvr>
+    <a:masterClrMapping/>
+  </p:clrMapOvr>
+</p:sldLayout>
+</file>
+
 <file path=ppt/slideMasters/slideMaster1.xml><?xml version="1.0" encoding="utf-8"?>
 <p:sldMaster xmlns:a="http://schemas.openxmlformats.org/drawingml/2006/main" xmlns:r="http://schemas.openxmlformats.org/officeDocument/2006/relationships" xmlns:p="http://schemas.openxmlformats.org/presentationml/2006/main">
   <p:cSld>
@@ -15322,15 +15940,15 @@
         </p:nvSpPr>
         <p:spPr>
           <a:xfrm>
-            <a:off x="838200" y="365125"/>
-            <a:ext cx="10515600" cy="1325563"/>
+            <a:off x="695325" y="365126"/>
+            <a:ext cx="10801349" cy="817632"/>
           </a:xfrm>
           <a:prstGeom prst="rect">
             <a:avLst/>
           </a:prstGeom>
         </p:spPr>
         <p:txBody>
-          <a:bodyPr vert="horz" lIns="91440" tIns="45720" rIns="91440" bIns="45720" rtlCol="0" anchor="ctr">
+          <a:bodyPr vert="horz" lIns="0" tIns="0" rIns="91440" bIns="45720" rtlCol="0" anchor="ctr">
             <a:normAutofit/>
           </a:bodyPr>
           <a:lstStyle/>
@@ -15360,50 +15978,50 @@
         </p:nvSpPr>
         <p:spPr>
           <a:xfrm>
-            <a:off x="838200" y="1825625"/>
-            <a:ext cx="10515600" cy="4351338"/>
+            <a:off x="695325" y="1490871"/>
+            <a:ext cx="10801349" cy="4277469"/>
           </a:xfrm>
           <a:prstGeom prst="rect">
             <a:avLst/>
           </a:prstGeom>
         </p:spPr>
         <p:txBody>
-          <a:bodyPr vert="horz" lIns="91440" tIns="45720" rIns="91440" bIns="45720" rtlCol="0">
+          <a:bodyPr vert="horz" lIns="0" tIns="45720" rIns="91440" bIns="45720" rtlCol="0">
             <a:normAutofit/>
           </a:bodyPr>
           <a:lstStyle/>
           <a:p>
             <a:pPr lvl="0"/>
             <a:r>
-              <a:rPr lang="pl-PL"/>
+              <a:rPr lang="pl-PL" dirty="0"/>
               <a:t>Kliknij, aby edytować style wzorca tekstu</a:t>
             </a:r>
           </a:p>
           <a:p>
             <a:pPr lvl="1"/>
             <a:r>
-              <a:rPr lang="pl-PL"/>
+              <a:rPr lang="pl-PL" dirty="0"/>
               <a:t>Drugi poziom</a:t>
             </a:r>
           </a:p>
           <a:p>
             <a:pPr lvl="2"/>
             <a:r>
-              <a:rPr lang="pl-PL"/>
+              <a:rPr lang="pl-PL" dirty="0"/>
               <a:t>Trzeci poziom</a:t>
             </a:r>
           </a:p>
           <a:p>
             <a:pPr lvl="3"/>
             <a:r>
-              <a:rPr lang="pl-PL"/>
+              <a:rPr lang="pl-PL" dirty="0"/>
               <a:t>Czwarty poziom</a:t>
             </a:r>
           </a:p>
           <a:p>
             <a:pPr lvl="4"/>
             <a:r>
-              <a:rPr lang="pl-PL"/>
+              <a:rPr lang="pl-PL" dirty="0"/>
               <a:t>Piąty poziom</a:t>
             </a:r>
           </a:p>
@@ -15427,8 +16045,8 @@
         </p:nvSpPr>
         <p:spPr>
           <a:xfrm>
-            <a:off x="838200" y="6356350"/>
-            <a:ext cx="2743200" cy="365125"/>
+            <a:off x="695326" y="6120352"/>
+            <a:ext cx="2886075" cy="365125"/>
           </a:xfrm>
           <a:prstGeom prst="rect">
             <a:avLst/>
@@ -15450,7 +16068,7 @@
           <a:p>
             <a:fld id="{395FEE27-536F-479E-B304-98213E6B58CC}" type="datetimeFigureOut">
               <a:rPr lang="pl-PL" smtClean="0"/>
-              <a:t>25.09.2026</a:t>
+              <a:t>17.10.2026</a:t>
             </a:fld>
             <a:endParaRPr lang="pl-PL"/>
           </a:p>
@@ -15474,7 +16092,7 @@
         </p:nvSpPr>
         <p:spPr>
           <a:xfrm>
-            <a:off x="4038600" y="6356350"/>
+            <a:off x="4038599" y="6113036"/>
             <a:ext cx="4114800" cy="365125"/>
           </a:xfrm>
           <a:prstGeom prst="rect">
@@ -15517,8 +16135,8 @@
         </p:nvSpPr>
         <p:spPr>
           <a:xfrm>
-            <a:off x="8610600" y="6356350"/>
-            <a:ext cx="2743200" cy="365125"/>
+            <a:off x="8610600" y="6127749"/>
+            <a:ext cx="2886075" cy="365125"/>
           </a:xfrm>
           <a:prstGeom prst="rect">
             <a:avLst/>
@@ -15564,7 +16182,7 @@
           <a:blip>
             <a:extLst>
               <a:ext uri="{96DAC541-7B7A-43D3-8B79-37D633B846F1}">
-                <asvg:svgBlip xmlns:asvg="http://schemas.microsoft.com/office/drawing/2016/SVG/main" r:embed="rId13"/>
+                <asvg:svgBlip xmlns:asvg="http://schemas.microsoft.com/office/drawing/2016/SVG/main" r:embed="rId14"/>
               </a:ext>
             </a:extLst>
           </a:blip>
@@ -15574,7 +16192,7 @@
         </p:blipFill>
         <p:spPr>
           <a:xfrm>
-            <a:off x="10836612" y="6249479"/>
+            <a:off x="11009305" y="6066916"/>
             <a:ext cx="517187" cy="471996"/>
           </a:xfrm>
           <a:prstGeom prst="rect">
@@ -15593,15 +16211,16 @@
   <p:sldLayoutIdLst>
     <p:sldLayoutId id="2147483649" r:id="rId1"/>
     <p:sldLayoutId id="2147483650" r:id="rId2"/>
-    <p:sldLayoutId id="2147483651" r:id="rId3"/>
-    <p:sldLayoutId id="2147483652" r:id="rId4"/>
-    <p:sldLayoutId id="2147483653" r:id="rId5"/>
-    <p:sldLayoutId id="2147483654" r:id="rId6"/>
-    <p:sldLayoutId id="2147483655" r:id="rId7"/>
-    <p:sldLayoutId id="2147483656" r:id="rId8"/>
-    <p:sldLayoutId id="2147483657" r:id="rId9"/>
-    <p:sldLayoutId id="2147483658" r:id="rId10"/>
-    <p:sldLayoutId id="2147483659" r:id="rId11"/>
+    <p:sldLayoutId id="2147483660" r:id="rId3"/>
+    <p:sldLayoutId id="2147483651" r:id="rId4"/>
+    <p:sldLayoutId id="2147483652" r:id="rId5"/>
+    <p:sldLayoutId id="2147483653" r:id="rId6"/>
+    <p:sldLayoutId id="2147483654" r:id="rId7"/>
+    <p:sldLayoutId id="2147483655" r:id="rId8"/>
+    <p:sldLayoutId id="2147483656" r:id="rId9"/>
+    <p:sldLayoutId id="2147483657" r:id="rId10"/>
+    <p:sldLayoutId id="2147483658" r:id="rId11"/>
+    <p:sldLayoutId id="2147483659" r:id="rId12"/>
   </p:sldLayoutIdLst>
   <p:txStyles>
     <p:titleStyle>
@@ -15613,7 +16232,7 @@
           <a:spcPct val="0"/>
         </a:spcBef>
         <a:buNone/>
-        <a:defRPr sz="4400" kern="1200">
+        <a:defRPr sz="4000" kern="1200">
           <a:solidFill>
             <a:schemeClr val="tx1"/>
           </a:solidFill>
@@ -15883,6 +16502,37 @@
       </a:lvl9pPr>
     </p:otherStyle>
   </p:txStyles>
+  <p:extLst>
+    <p:ext uri="{27BBF7A9-308A-43DC-89C8-2F10F3537804}">
+      <p15:sldGuideLst xmlns:p15="http://schemas.microsoft.com/office/powerpoint/2012/main">
+        <p15:guide id="1" orient="horz" pos="2160" userDrawn="1">
+          <p15:clr>
+            <a:srgbClr val="F26B43"/>
+          </p15:clr>
+        </p15:guide>
+        <p15:guide id="2" pos="438" userDrawn="1">
+          <p15:clr>
+            <a:srgbClr val="F26B43"/>
+          </p15:clr>
+        </p15:guide>
+        <p15:guide id="3" pos="7242" userDrawn="1">
+          <p15:clr>
+            <a:srgbClr val="F26B43"/>
+          </p15:clr>
+        </p15:guide>
+        <p15:guide id="4" orient="horz" pos="232" userDrawn="1">
+          <p15:clr>
+            <a:srgbClr val="F26B43"/>
+          </p15:clr>
+        </p15:guide>
+        <p15:guide id="5" orient="horz" pos="4088" userDrawn="1">
+          <p15:clr>
+            <a:srgbClr val="F26B43"/>
+          </p15:clr>
+        </p15:guide>
+      </p15:sldGuideLst>
+    </p:ext>
+  </p:extLst>
 </p:sldMaster>
 </file>
 
@@ -15921,8 +16571,8 @@
         </p:nvSpPr>
         <p:spPr>
           <a:xfrm>
-            <a:off x="762000" y="2058821"/>
-            <a:ext cx="5181600" cy="2119988"/>
+            <a:off x="695326" y="2414411"/>
+            <a:ext cx="5400000" cy="1781232"/>
           </a:xfrm>
         </p:spPr>
         <p:txBody>
@@ -15974,8 +16624,8 @@
         </p:nvSpPr>
         <p:spPr>
           <a:xfrm>
-            <a:off x="6096000" y="2058821"/>
-            <a:ext cx="5181600" cy="2119988"/>
+            <a:off x="6096000" y="2414411"/>
+            <a:ext cx="5400675" cy="1781232"/>
           </a:xfrm>
         </p:spPr>
         <p:txBody>
@@ -16052,7 +16702,7 @@
         </p:blipFill>
         <p:spPr>
           <a:xfrm>
-            <a:off x="2107692" y="458158"/>
+            <a:off x="2107018" y="557826"/>
             <a:ext cx="7976616" cy="1217315"/>
           </a:xfrm>
           <a:prstGeom prst="rect">
@@ -16076,7 +16726,7 @@
         </p:nvSpPr>
         <p:spPr>
           <a:xfrm>
-            <a:off x="838200" y="4320563"/>
+            <a:off x="837526" y="4834913"/>
             <a:ext cx="10515600" cy="937237"/>
           </a:xfrm>
           <a:prstGeom prst="rect">
@@ -16380,7 +17030,9 @@
         </p:nvSpPr>
         <p:spPr/>
         <p:txBody>
-          <a:bodyPr/>
+          <a:bodyPr>
+            <a:noAutofit/>
+          </a:bodyPr>
           <a:lstStyle/>
           <a:p>
             <a:r>
@@ -16829,37 +17481,6 @@
           <a:chExt cx="0" cy="0"/>
         </a:xfrm>
       </p:grpSpPr>
-      <p:graphicFrame>
-        <p:nvGraphicFramePr>
-          <p:cNvPr id="6" name="Symbol zastępczy zawartości 5">
-            <a:extLst>
-              <a:ext uri="{FF2B5EF4-FFF2-40B4-BE49-F238E27FC236}">
-                <a16:creationId xmlns:a16="http://schemas.microsoft.com/office/drawing/2014/main" id="{B5B9341C-F4A6-EF18-93EF-81A1EE233B74}"/>
-              </a:ext>
-            </a:extLst>
-          </p:cNvPr>
-          <p:cNvGraphicFramePr>
-            <a:graphicFrameLocks noGrp="1"/>
-          </p:cNvGraphicFramePr>
-          <p:nvPr>
-            <p:ph idx="1"/>
-            <p:extLst>
-              <p:ext uri="{D42A27DB-BD31-4B8C-83A1-F6EECF244321}">
-                <p14:modId xmlns:p14="http://schemas.microsoft.com/office/powerpoint/2010/main" val="330030672"/>
-              </p:ext>
-            </p:extLst>
-          </p:nvPr>
-        </p:nvGraphicFramePr>
-        <p:xfrm>
-          <a:off x="838200" y="1825625"/>
-          <a:ext cx="7062279" cy="4351338"/>
-        </p:xfrm>
-        <a:graphic>
-          <a:graphicData uri="http://schemas.openxmlformats.org/drawingml/2006/chart">
-            <c:chart xmlns:c="http://schemas.openxmlformats.org/drawingml/2006/chart" xmlns:r="http://schemas.openxmlformats.org/officeDocument/2006/relationships" r:id="rId2"/>
-          </a:graphicData>
-        </a:graphic>
-      </p:graphicFrame>
       <p:sp>
         <p:nvSpPr>
           <p:cNvPr id="2" name="Tytuł 1">
@@ -16890,6 +17511,94 @@
           </a:p>
         </p:txBody>
       </p:sp>
+      <p:graphicFrame>
+        <p:nvGraphicFramePr>
+          <p:cNvPr id="6" name="Symbol zastępczy zawartości 5">
+            <a:extLst>
+              <a:ext uri="{FF2B5EF4-FFF2-40B4-BE49-F238E27FC236}">
+                <a16:creationId xmlns:a16="http://schemas.microsoft.com/office/drawing/2014/main" id="{B5B9341C-F4A6-EF18-93EF-81A1EE233B74}"/>
+              </a:ext>
+            </a:extLst>
+          </p:cNvPr>
+          <p:cNvGraphicFramePr>
+            <a:graphicFrameLocks noGrp="1"/>
+          </p:cNvGraphicFramePr>
+          <p:nvPr>
+            <p:ph idx="1"/>
+            <p:extLst>
+              <p:ext uri="{D42A27DB-BD31-4B8C-83A1-F6EECF244321}">
+                <p14:modId xmlns:p14="http://schemas.microsoft.com/office/powerpoint/2010/main" val="2952152747"/>
+              </p:ext>
+            </p:extLst>
+          </p:nvPr>
+        </p:nvGraphicFramePr>
+        <p:xfrm>
+          <a:off x="695325" y="1455738"/>
+          <a:ext cx="7115175" cy="4313237"/>
+        </p:xfrm>
+        <a:graphic>
+          <a:graphicData uri="http://schemas.openxmlformats.org/drawingml/2006/chart">
+            <c:chart xmlns:c="http://schemas.openxmlformats.org/drawingml/2006/chart" xmlns:r="http://schemas.openxmlformats.org/officeDocument/2006/relationships" r:id="rId2"/>
+          </a:graphicData>
+        </a:graphic>
+      </p:graphicFrame>
+      <p:sp>
+        <p:nvSpPr>
+          <p:cNvPr id="3" name="Symbol zastępczy zawartości 2">
+            <a:extLst>
+              <a:ext uri="{FF2B5EF4-FFF2-40B4-BE49-F238E27FC236}">
+                <a16:creationId xmlns:a16="http://schemas.microsoft.com/office/drawing/2014/main" id="{1F557C64-7B04-9D97-E032-EF929C2BFFB4}"/>
+              </a:ext>
+            </a:extLst>
+          </p:cNvPr>
+          <p:cNvSpPr>
+            <a:spLocks noGrp="1"/>
+          </p:cNvSpPr>
+          <p:nvPr>
+            <p:ph idx="13"/>
+          </p:nvPr>
+        </p:nvSpPr>
+        <p:spPr/>
+        <p:txBody>
+          <a:bodyPr>
+            <a:normAutofit fontScale="92500"/>
+          </a:bodyPr>
+          <a:lstStyle/>
+          <a:p>
+            <a:r>
+              <a:rPr lang="pl-PL" dirty="0"/>
+              <a:t>Mediana miesięcznych wyświetleń strony Przedłużanie życia wynosi </a:t>
+            </a:r>
+            <a:r>
+              <a:rPr lang="pl-PL" b="1" u="sng" dirty="0"/>
+              <a:t>455</a:t>
+            </a:r>
+            <a:r>
+              <a:rPr lang="pl-PL" dirty="0"/>
+              <a:t>. </a:t>
+            </a:r>
+          </a:p>
+          <a:p>
+            <a:r>
+              <a:rPr lang="pl-PL" dirty="0"/>
+              <a:t>Jak to się stało, że w lipcu 2019 osiągnęła oglądalność większą niż strona Królowej Elżbiety w miesiącu Jej śmierci?</a:t>
+            </a:r>
+          </a:p>
+          <a:p>
+            <a:r>
+              <a:rPr lang="pl-PL" dirty="0"/>
+              <a:t>Ze względu na bardzo punktowy ruch wskazuje to na wejścia automatu nieprzedstawiającego się jako bot. Nie były one w 2019 rozpoznawane na podstawie zachowania. [9] Takie chochoły też się w danych zdarzają </a:t>
+            </a:r>
+            <a:r>
+              <a:rPr lang="pl-PL" dirty="0">
+                <a:sym typeface="Wingdings" panose="05000000000000000000" pitchFamily="2" charset="2"/>
+              </a:rPr>
+              <a:t></a:t>
+            </a:r>
+            <a:endParaRPr lang="pl-PL" dirty="0"/>
+          </a:p>
+        </p:txBody>
+      </p:sp>
       <p:sp>
         <p:nvSpPr>
           <p:cNvPr id="8" name="Symbol zastępczy zawartości 4">
@@ -16907,7 +17616,7 @@
         <p:spPr>
           <a:xfrm>
             <a:off x="7908583" y="1825625"/>
-            <a:ext cx="3453319" cy="4008982"/>
+            <a:ext cx="3588091" cy="4008982"/>
           </a:xfrm>
           <a:prstGeom prst="rect">
             <a:avLst/>
@@ -17082,54 +17791,12 @@
             </a:lvl9pPr>
           </a:lstStyle>
           <a:p>
-            <a:pPr marL="0" indent="0" algn="ctr">
+            <a:pPr marL="0" indent="0">
               <a:lnSpc>
                 <a:spcPct val="100000"/>
               </a:lnSpc>
               <a:buNone/>
             </a:pPr>
-            <a:r>
-              <a:rPr lang="pl-PL" sz="1600" dirty="0"/>
-              <a:t>Mediana miesięcznych wyświetleń strony Przedłużanie życia wynosi </a:t>
-            </a:r>
-            <a:r>
-              <a:rPr lang="pl-PL" sz="1600" b="1" u="sng" dirty="0"/>
-              <a:t>455</a:t>
-            </a:r>
-            <a:r>
-              <a:rPr lang="pl-PL" sz="1600" dirty="0"/>
-              <a:t>. </a:t>
-            </a:r>
-          </a:p>
-          <a:p>
-            <a:pPr marL="0" indent="0" algn="ctr">
-              <a:lnSpc>
-                <a:spcPct val="100000"/>
-              </a:lnSpc>
-              <a:buNone/>
-            </a:pPr>
-            <a:r>
-              <a:rPr lang="pl-PL" sz="1600" dirty="0"/>
-              <a:t>Jak to się stało, że w lipcu 2019 osiągnęła oglądalność większą niż strona Królowej Elżbiety w miesiącu Jej śmierci?</a:t>
-            </a:r>
-          </a:p>
-          <a:p>
-            <a:pPr marL="0" indent="0" algn="ctr">
-              <a:lnSpc>
-                <a:spcPct val="100000"/>
-              </a:lnSpc>
-              <a:buNone/>
-            </a:pPr>
-            <a:r>
-              <a:rPr lang="pl-PL" sz="1600" dirty="0"/>
-              <a:t>Ze względu na bardzo punktowy ruch wskazuje to na wejścia automatu nieprzedstawiającego się jako bot. Nie były one w 2019 rozpoznawane na podstawie zachowania. [9] Takie chochoły też się w danych zdarzają </a:t>
-            </a:r>
-            <a:r>
-              <a:rPr lang="pl-PL" sz="1600" dirty="0">
-                <a:sym typeface="Wingdings" panose="05000000000000000000" pitchFamily="2" charset="2"/>
-              </a:rPr>
-              <a:t></a:t>
-            </a:r>
             <a:endParaRPr lang="pl-PL" sz="1600" dirty="0"/>
           </a:p>
         </p:txBody>
@@ -17148,8 +17815,8 @@
         </p:nvSpPr>
         <p:spPr>
           <a:xfrm>
-            <a:off x="838200" y="6251110"/>
-            <a:ext cx="9426102" cy="276999"/>
+            <a:off x="695325" y="6251110"/>
+            <a:ext cx="9568977" cy="276999"/>
           </a:xfrm>
           <a:prstGeom prst="rect">
             <a:avLst/>
@@ -17218,6 +17885,58 @@
       </p:grpSpPr>
       <p:sp>
         <p:nvSpPr>
+          <p:cNvPr id="5" name="Prostokąt: zaokrąglone rogi 4">
+            <a:extLst>
+              <a:ext uri="{FF2B5EF4-FFF2-40B4-BE49-F238E27FC236}">
+                <a16:creationId xmlns:a16="http://schemas.microsoft.com/office/drawing/2014/main" id="{CE47D99B-5AB5-A1B6-D7CA-B9BE2403A4F2}"/>
+              </a:ext>
+            </a:extLst>
+          </p:cNvPr>
+          <p:cNvSpPr/>
+          <p:nvPr/>
+        </p:nvSpPr>
+        <p:spPr>
+          <a:xfrm>
+            <a:off x="8080374" y="1455421"/>
+            <a:ext cx="3416299" cy="4312920"/>
+          </a:xfrm>
+          <a:prstGeom prst="roundRect">
+            <a:avLst>
+              <a:gd name="adj" fmla="val 4121"/>
+            </a:avLst>
+          </a:prstGeom>
+          <a:solidFill>
+            <a:schemeClr val="bg1"/>
+          </a:solidFill>
+          <a:ln w="12700"/>
+        </p:spPr>
+        <p:style>
+          <a:lnRef idx="2">
+            <a:schemeClr val="accent1">
+              <a:shade val="15000"/>
+            </a:schemeClr>
+          </a:lnRef>
+          <a:fillRef idx="1">
+            <a:schemeClr val="accent1"/>
+          </a:fillRef>
+          <a:effectRef idx="0">
+            <a:schemeClr val="accent1"/>
+          </a:effectRef>
+          <a:fontRef idx="minor">
+            <a:schemeClr val="lt1"/>
+          </a:fontRef>
+        </p:style>
+        <p:txBody>
+          <a:bodyPr rtlCol="0" anchor="ctr"/>
+          <a:lstStyle/>
+          <a:p>
+            <a:pPr algn="ctr"/>
+            <a:endParaRPr lang="pl-PL"/>
+          </a:p>
+        </p:txBody>
+      </p:sp>
+      <p:sp>
+        <p:nvSpPr>
           <p:cNvPr id="2" name="Tytuł 1">
             <a:extLst>
               <a:ext uri="{FF2B5EF4-FFF2-40B4-BE49-F238E27FC236}">
@@ -17234,7 +17953,7 @@
         </p:nvSpPr>
         <p:spPr/>
         <p:txBody>
-          <a:bodyPr/>
+          <a:bodyPr tIns="0"/>
           <a:lstStyle/>
           <a:p>
             <a:r>
@@ -17260,14 +17979,14 @@
             <p:ph idx="1"/>
             <p:extLst>
               <p:ext uri="{D42A27DB-BD31-4B8C-83A1-F6EECF244321}">
-                <p14:modId xmlns:p14="http://schemas.microsoft.com/office/powerpoint/2010/main" val="849088822"/>
+                <p14:modId xmlns:p14="http://schemas.microsoft.com/office/powerpoint/2010/main" val="2059036917"/>
               </p:ext>
             </p:extLst>
           </p:nvPr>
         </p:nvGraphicFramePr>
         <p:xfrm>
-          <a:off x="838199" y="1825624"/>
-          <a:ext cx="7070387" cy="4351338"/>
+          <a:off x="695325" y="1455738"/>
+          <a:ext cx="7115175" cy="4313237"/>
         </p:xfrm>
         <a:graphic>
           <a:graphicData uri="http://schemas.openxmlformats.org/drawingml/2006/chart">
@@ -17275,6 +17994,113 @@
           </a:graphicData>
         </a:graphic>
       </p:graphicFrame>
+      <p:sp>
+        <p:nvSpPr>
+          <p:cNvPr id="4" name="Symbol zastępczy zawartości 3">
+            <a:extLst>
+              <a:ext uri="{FF2B5EF4-FFF2-40B4-BE49-F238E27FC236}">
+                <a16:creationId xmlns:a16="http://schemas.microsoft.com/office/drawing/2014/main" id="{AAB13062-29A3-4E92-B477-A13B6A55B72D}"/>
+              </a:ext>
+            </a:extLst>
+          </p:cNvPr>
+          <p:cNvSpPr>
+            <a:spLocks noGrp="1"/>
+          </p:cNvSpPr>
+          <p:nvPr>
+            <p:ph idx="13"/>
+          </p:nvPr>
+        </p:nvSpPr>
+        <p:spPr>
+          <a:noFill/>
+          <a:ln>
+            <a:noFill/>
+          </a:ln>
+        </p:spPr>
+        <p:txBody>
+          <a:bodyPr>
+            <a:normAutofit/>
+          </a:bodyPr>
+          <a:lstStyle/>
+          <a:p>
+            <a:pPr marL="0" indent="0">
+              <a:lnSpc>
+                <a:spcPct val="100000"/>
+              </a:lnSpc>
+              <a:buNone/>
+            </a:pPr>
+            <a:r>
+              <a:rPr lang="pl-PL" dirty="0">
+                <a:solidFill>
+                  <a:schemeClr val="tx2"/>
+                </a:solidFill>
+              </a:rPr>
+              <a:t>Choć Wikipedia zawiera informacje o niemal każdym aspekcie świata, najczęściej interesują nas </a:t>
+            </a:r>
+            <a:r>
+              <a:rPr lang="pl-PL" b="1" dirty="0">
+                <a:solidFill>
+                  <a:schemeClr val="tx2"/>
+                </a:solidFill>
+              </a:rPr>
+              <a:t>ludzie </a:t>
+            </a:r>
+            <a:br>
+              <a:rPr lang="pl-PL" b="1" dirty="0">
+                <a:solidFill>
+                  <a:schemeClr val="tx2"/>
+                </a:solidFill>
+              </a:rPr>
+            </a:br>
+            <a:r>
+              <a:rPr lang="pl-PL" b="1" dirty="0">
+                <a:solidFill>
+                  <a:schemeClr val="tx2"/>
+                </a:solidFill>
+              </a:rPr>
+              <a:t>i miejsca</a:t>
+            </a:r>
+            <a:r>
+              <a:rPr lang="pl-PL" dirty="0">
+                <a:solidFill>
+                  <a:schemeClr val="tx2"/>
+                </a:solidFill>
+              </a:rPr>
+              <a:t>. </a:t>
+            </a:r>
+          </a:p>
+          <a:p>
+            <a:pPr marL="0" indent="0">
+              <a:lnSpc>
+                <a:spcPct val="100000"/>
+              </a:lnSpc>
+              <a:buNone/>
+            </a:pPr>
+            <a:r>
+              <a:rPr lang="pl-PL" dirty="0">
+                <a:solidFill>
+                  <a:schemeClr val="tx2"/>
+                </a:solidFill>
+              </a:rPr>
+              <a:t>Biografie pozostają najpopularniejszą kategorią, jednak niewiele ustępują im artykuły geograficzne, opisujące kraje, miasta </a:t>
+            </a:r>
+            <a:br>
+              <a:rPr lang="pl-PL" dirty="0">
+                <a:solidFill>
+                  <a:schemeClr val="tx2"/>
+                </a:solidFill>
+              </a:rPr>
+            </a:br>
+            <a:r>
+              <a:rPr lang="pl-PL" dirty="0">
+                <a:solidFill>
+                  <a:schemeClr val="tx2"/>
+                </a:solidFill>
+              </a:rPr>
+              <a:t>i regiony z całego świata.</a:t>
+            </a:r>
+          </a:p>
+        </p:txBody>
+      </p:sp>
       <p:sp>
         <p:nvSpPr>
           <p:cNvPr id="8" name="pole tekstowe 7">
@@ -17289,8 +18115,8 @@
         </p:nvSpPr>
         <p:spPr>
           <a:xfrm>
-            <a:off x="838199" y="6251109"/>
-            <a:ext cx="9426102" cy="276999"/>
+            <a:off x="695325" y="6215875"/>
+            <a:ext cx="9568976" cy="276999"/>
           </a:xfrm>
           <a:prstGeom prst="rect">
             <a:avLst/>
@@ -17298,7 +18124,7 @@
           <a:noFill/>
         </p:spPr>
         <p:txBody>
-          <a:bodyPr wrap="square" rtlCol="0">
+          <a:bodyPr wrap="square" lIns="0" rtlCol="0">
             <a:spAutoFit/>
           </a:bodyPr>
           <a:lstStyle/>
@@ -17314,12 +18140,42 @@
           </a:p>
         </p:txBody>
       </p:sp>
+    </p:spTree>
+    <p:extLst>
+      <p:ext uri="{BB962C8B-B14F-4D97-AF65-F5344CB8AC3E}">
+        <p14:creationId xmlns:p14="http://schemas.microsoft.com/office/powerpoint/2010/main" val="4105226799"/>
+      </p:ext>
+    </p:extLst>
+  </p:cSld>
+  <p:clrMapOvr>
+    <a:masterClrMapping/>
+  </p:clrMapOvr>
+</p:sld>
+</file>
+
+<file path=ppt/slides/slide3.xml><?xml version="1.0" encoding="utf-8"?>
+<p:sld xmlns:a="http://schemas.openxmlformats.org/drawingml/2006/main" xmlns:r="http://schemas.openxmlformats.org/officeDocument/2006/relationships" xmlns:p="http://schemas.openxmlformats.org/presentationml/2006/main">
+  <p:cSld>
+    <p:spTree>
+      <p:nvGrpSpPr>
+        <p:cNvPr id="1" name=""/>
+        <p:cNvGrpSpPr/>
+        <p:nvPr/>
+      </p:nvGrpSpPr>
+      <p:grpSpPr>
+        <a:xfrm>
+          <a:off x="0" y="0"/>
+          <a:ext cx="0" cy="0"/>
+          <a:chOff x="0" y="0"/>
+          <a:chExt cx="0" cy="0"/>
+        </a:xfrm>
+      </p:grpSpPr>
       <p:sp>
         <p:nvSpPr>
-          <p:cNvPr id="9" name="Symbol zastępczy zawartości 4">
+          <p:cNvPr id="4" name="Symbol zastępczy zawartości 4">
             <a:extLst>
               <a:ext uri="{FF2B5EF4-FFF2-40B4-BE49-F238E27FC236}">
-                <a16:creationId xmlns:a16="http://schemas.microsoft.com/office/drawing/2014/main" id="{8FF34AFB-BB03-C486-2D94-7FC87E580460}"/>
+                <a16:creationId xmlns:a16="http://schemas.microsoft.com/office/drawing/2014/main" id="{6DBC4545-96B9-73B4-24E4-8DE4515B03DA}"/>
               </a:ext>
             </a:extLst>
           </p:cNvPr>
@@ -17330,8 +18186,8 @@
         </p:nvSpPr>
         <p:spPr>
           <a:xfrm>
-            <a:off x="7896426" y="2526889"/>
-            <a:ext cx="3453319" cy="3307715"/>
+            <a:off x="695325" y="5214026"/>
+            <a:ext cx="7027379" cy="817632"/>
           </a:xfrm>
           <a:prstGeom prst="rect">
             <a:avLst/>
@@ -17506,42 +18362,204 @@
             </a:lvl9pPr>
           </a:lstStyle>
           <a:p>
-            <a:pPr marL="0" indent="0" algn="ctr">
+            <a:pPr marL="0" indent="0">
               <a:lnSpc>
-                <a:spcPct val="100000"/>
+                <a:spcPct val="110000"/>
               </a:lnSpc>
               <a:buNone/>
             </a:pPr>
             <a:r>
-              <a:rPr lang="pl-PL" sz="1800" dirty="0">
+              <a:rPr lang="pl-PL" sz="1400" dirty="0">
                 <a:solidFill>
                   <a:schemeClr val="tx2"/>
                 </a:solidFill>
               </a:rPr>
-              <a:t>Choć Wikipedia zawiera informacje o niemal każdym aspekcie świata, najczęściej interesują nas ludzie i miejsca. Biografie pozostają najpopularniejszą kategorią, jednak niewiele ustępują im artykuły geograficzne, opisujące kraje, miasta i regiony </a:t>
+              <a:t>Wśród najpopularniejszych artykułów trudno znaleźć przypadkowe tematy. Dotyczą osób, państw lub wydarzeń, które regularnie pojawiają się </a:t>
             </a:r>
             <a:br>
-              <a:rPr lang="pl-PL" sz="1800" dirty="0">
+              <a:rPr lang="pl-PL" sz="1400" dirty="0">
                 <a:solidFill>
                   <a:schemeClr val="tx2"/>
                 </a:solidFill>
               </a:rPr>
             </a:br>
             <a:r>
-              <a:rPr lang="pl-PL" sz="1800" dirty="0">
+              <a:rPr lang="pl-PL" sz="1400" dirty="0">
                 <a:solidFill>
                   <a:schemeClr val="tx2"/>
                 </a:solidFill>
               </a:rPr>
-              <a:t>z całego świata.</a:t>
+              <a:t>w przestrzeni publicznej. [5]</a:t>
             </a:r>
           </a:p>
         </p:txBody>
       </p:sp>
+      <p:sp>
+        <p:nvSpPr>
+          <p:cNvPr id="9" name="Tytuł 8">
+            <a:extLst>
+              <a:ext uri="{FF2B5EF4-FFF2-40B4-BE49-F238E27FC236}">
+                <a16:creationId xmlns:a16="http://schemas.microsoft.com/office/drawing/2014/main" id="{C0DEE201-5A1F-4DAA-DD16-738368DEE7C9}"/>
+              </a:ext>
+            </a:extLst>
+          </p:cNvPr>
+          <p:cNvSpPr>
+            <a:spLocks noGrp="1"/>
+          </p:cNvSpPr>
+          <p:nvPr>
+            <p:ph type="title"/>
+          </p:nvPr>
+        </p:nvSpPr>
+        <p:spPr>
+          <a:xfrm>
+            <a:off x="695325" y="365126"/>
+            <a:ext cx="10801349" cy="817632"/>
+          </a:xfrm>
+        </p:spPr>
+        <p:txBody>
+          <a:bodyPr tIns="0">
+            <a:noAutofit/>
+          </a:bodyPr>
+          <a:lstStyle/>
+          <a:p>
+            <a:r>
+              <a:rPr lang="pl-PL" dirty="0"/>
+              <a:t>Czego szukamy najczęściej</a:t>
+            </a:r>
+          </a:p>
+        </p:txBody>
+      </p:sp>
+      <p:graphicFrame>
+        <p:nvGraphicFramePr>
+          <p:cNvPr id="18" name="Symbol zastępczy zawartości 17">
+            <a:extLst>
+              <a:ext uri="{FF2B5EF4-FFF2-40B4-BE49-F238E27FC236}">
+                <a16:creationId xmlns:a16="http://schemas.microsoft.com/office/drawing/2014/main" id="{1CED35B4-95D4-37AD-597F-EADF4B8D92C4}"/>
+              </a:ext>
+            </a:extLst>
+          </p:cNvPr>
+          <p:cNvGraphicFramePr>
+            <a:graphicFrameLocks noGrp="1"/>
+          </p:cNvGraphicFramePr>
+          <p:nvPr>
+            <p:ph idx="1"/>
+            <p:extLst>
+              <p:ext uri="{D42A27DB-BD31-4B8C-83A1-F6EECF244321}">
+                <p14:modId xmlns:p14="http://schemas.microsoft.com/office/powerpoint/2010/main" val="3210160099"/>
+              </p:ext>
+            </p:extLst>
+          </p:nvPr>
+        </p:nvGraphicFramePr>
+        <p:xfrm>
+          <a:off x="695325" y="1820767"/>
+          <a:ext cx="7027379" cy="3393259"/>
+        </p:xfrm>
+        <a:graphic>
+          <a:graphicData uri="http://schemas.openxmlformats.org/drawingml/2006/chart">
+            <c:chart xmlns:c="http://schemas.openxmlformats.org/drawingml/2006/chart" xmlns:r="http://schemas.openxmlformats.org/officeDocument/2006/relationships" r:id="rId2"/>
+          </a:graphicData>
+        </a:graphic>
+      </p:graphicFrame>
+      <p:pic>
+        <p:nvPicPr>
+          <p:cNvPr id="2" name="Obraz 1" descr="Ilustracja">
+            <a:extLst>
+              <a:ext uri="{FF2B5EF4-FFF2-40B4-BE49-F238E27FC236}">
+                <a16:creationId xmlns:a16="http://schemas.microsoft.com/office/drawing/2014/main" id="{442588CC-D45D-0187-38D5-7C1E4AE77A68}"/>
+              </a:ext>
+            </a:extLst>
+          </p:cNvPr>
+          <p:cNvPicPr>
+            <a:picLocks noChangeAspect="1"/>
+          </p:cNvPicPr>
+          <p:nvPr/>
+        </p:nvPicPr>
+        <p:blipFill>
+          <a:blip r:embed="rId3"/>
+          <a:stretch>
+            <a:fillRect/>
+          </a:stretch>
+        </p:blipFill>
+        <p:spPr>
+          <a:xfrm>
+            <a:off x="9194214" y="3892042"/>
+            <a:ext cx="2997786" cy="1990529"/>
+          </a:xfrm>
+          <a:prstGeom prst="roundRect">
+            <a:avLst>
+              <a:gd name="adj" fmla="val 10446"/>
+            </a:avLst>
+          </a:prstGeom>
+        </p:spPr>
+      </p:pic>
+      <p:pic>
+        <p:nvPicPr>
+          <p:cNvPr id="21" name="Obraz 20" descr="Ilustracja">
+            <a:extLst>
+              <a:ext uri="{FF2B5EF4-FFF2-40B4-BE49-F238E27FC236}">
+                <a16:creationId xmlns:a16="http://schemas.microsoft.com/office/drawing/2014/main" id="{2AA5B949-D598-B0A1-AE1D-03766D2755F4}"/>
+              </a:ext>
+            </a:extLst>
+          </p:cNvPr>
+          <p:cNvPicPr>
+            <a:picLocks noChangeAspect="1"/>
+          </p:cNvPicPr>
+          <p:nvPr/>
+        </p:nvPicPr>
+        <p:blipFill>
+          <a:blip r:embed="rId4"/>
+          <a:stretch>
+            <a:fillRect/>
+          </a:stretch>
+        </p:blipFill>
+        <p:spPr>
+          <a:xfrm>
+            <a:off x="8113325" y="1820767"/>
+            <a:ext cx="2161778" cy="2879488"/>
+          </a:xfrm>
+          <a:prstGeom prst="roundRect">
+            <a:avLst>
+              <a:gd name="adj" fmla="val 10498"/>
+            </a:avLst>
+          </a:prstGeom>
+        </p:spPr>
+      </p:pic>
+      <p:pic>
+        <p:nvPicPr>
+          <p:cNvPr id="19" name="Obraz 18" descr="Mapa opisywanego kraju">
+            <a:extLst>
+              <a:ext uri="{FF2B5EF4-FFF2-40B4-BE49-F238E27FC236}">
+                <a16:creationId xmlns:a16="http://schemas.microsoft.com/office/drawing/2014/main" id="{619B8E3E-16F0-0004-5A2C-28B6697D9C66}"/>
+              </a:ext>
+            </a:extLst>
+          </p:cNvPr>
+          <p:cNvPicPr>
+            <a:picLocks noChangeAspect="1"/>
+          </p:cNvPicPr>
+          <p:nvPr/>
+        </p:nvPicPr>
+        <p:blipFill>
+          <a:blip r:embed="rId5"/>
+          <a:stretch>
+            <a:fillRect/>
+          </a:stretch>
+        </p:blipFill>
+        <p:spPr>
+          <a:xfrm>
+            <a:off x="9626894" y="384849"/>
+            <a:ext cx="2565106" cy="2760054"/>
+          </a:xfrm>
+          <a:prstGeom prst="roundRect">
+            <a:avLst>
+              <a:gd name="adj" fmla="val 8126"/>
+            </a:avLst>
+          </a:prstGeom>
+        </p:spPr>
+      </p:pic>
     </p:spTree>
     <p:extLst>
       <p:ext uri="{BB962C8B-B14F-4D97-AF65-F5344CB8AC3E}">
-        <p14:creationId xmlns:p14="http://schemas.microsoft.com/office/powerpoint/2010/main" val="4105226799"/>
+        <p14:creationId xmlns:p14="http://schemas.microsoft.com/office/powerpoint/2010/main" val="680220519"/>
       </p:ext>
     </p:extLst>
   </p:cSld>
@@ -17551,7 +18569,7 @@
 </p:sld>
 </file>
 
-<file path=ppt/slides/slide3.xml><?xml version="1.0" encoding="utf-8"?>
+<file path=ppt/slides/slide4.xml><?xml version="1.0" encoding="utf-8"?>
 <p:sld xmlns:a="http://schemas.openxmlformats.org/drawingml/2006/main" xmlns:r="http://schemas.openxmlformats.org/officeDocument/2006/relationships" xmlns:p="http://schemas.openxmlformats.org/presentationml/2006/main">
   <p:cSld>
     <p:spTree>
@@ -17570,10 +18588,930 @@
       </p:grpSpPr>
       <p:sp>
         <p:nvSpPr>
-          <p:cNvPr id="4" name="Symbol zastępczy zawartości 4">
+          <p:cNvPr id="2" name="Tytuł 1">
             <a:extLst>
               <a:ext uri="{FF2B5EF4-FFF2-40B4-BE49-F238E27FC236}">
-                <a16:creationId xmlns:a16="http://schemas.microsoft.com/office/drawing/2014/main" id="{6DBC4545-96B9-73B4-24E4-8DE4515B03DA}"/>
+                <a16:creationId xmlns:a16="http://schemas.microsoft.com/office/drawing/2014/main" id="{E9460EE4-EA64-CC2B-6927-2112E5725B79}"/>
+              </a:ext>
+            </a:extLst>
+          </p:cNvPr>
+          <p:cNvSpPr>
+            <a:spLocks noGrp="1"/>
+          </p:cNvSpPr>
+          <p:nvPr>
+            <p:ph type="title"/>
+          </p:nvPr>
+        </p:nvSpPr>
+        <p:spPr/>
+        <p:txBody>
+          <a:bodyPr lIns="0">
+            <a:noAutofit/>
+          </a:bodyPr>
+          <a:lstStyle/>
+          <a:p>
+            <a:r>
+              <a:rPr lang="pl-PL" dirty="0"/>
+              <a:t>Kiedy szukamy informacji</a:t>
+            </a:r>
+          </a:p>
+        </p:txBody>
+      </p:sp>
+      <p:graphicFrame>
+        <p:nvGraphicFramePr>
+          <p:cNvPr id="9" name="Symbol zastępczy zawartości 8">
+            <a:extLst>
+              <a:ext uri="{FF2B5EF4-FFF2-40B4-BE49-F238E27FC236}">
+                <a16:creationId xmlns:a16="http://schemas.microsoft.com/office/drawing/2014/main" id="{CE68ED20-6441-CB02-9F64-0BE1D6B66068}"/>
+              </a:ext>
+            </a:extLst>
+          </p:cNvPr>
+          <p:cNvGraphicFramePr>
+            <a:graphicFrameLocks noGrp="1"/>
+          </p:cNvGraphicFramePr>
+          <p:nvPr>
+            <p:ph idx="1"/>
+            <p:extLst>
+              <p:ext uri="{D42A27DB-BD31-4B8C-83A1-F6EECF244321}">
+                <p14:modId xmlns:p14="http://schemas.microsoft.com/office/powerpoint/2010/main" val="612455224"/>
+              </p:ext>
+            </p:extLst>
+          </p:nvPr>
+        </p:nvGraphicFramePr>
+        <p:xfrm>
+          <a:off x="695325" y="1455738"/>
+          <a:ext cx="7019925" cy="4313237"/>
+        </p:xfrm>
+        <a:graphic>
+          <a:graphicData uri="http://schemas.openxmlformats.org/drawingml/2006/chart">
+            <c:chart xmlns:c="http://schemas.openxmlformats.org/drawingml/2006/chart" xmlns:r="http://schemas.openxmlformats.org/officeDocument/2006/relationships" r:id="rId2"/>
+          </a:graphicData>
+        </a:graphic>
+      </p:graphicFrame>
+      <p:sp>
+        <p:nvSpPr>
+          <p:cNvPr id="6" name="Symbol zastępczy zawartości 5">
+            <a:extLst>
+              <a:ext uri="{FF2B5EF4-FFF2-40B4-BE49-F238E27FC236}">
+                <a16:creationId xmlns:a16="http://schemas.microsoft.com/office/drawing/2014/main" id="{EB41B7B2-346D-8428-1ECC-9E405BADCF49}"/>
+              </a:ext>
+            </a:extLst>
+          </p:cNvPr>
+          <p:cNvSpPr>
+            <a:spLocks noGrp="1"/>
+          </p:cNvSpPr>
+          <p:nvPr>
+            <p:ph idx="13"/>
+          </p:nvPr>
+        </p:nvSpPr>
+        <p:spPr>
+          <a:noFill/>
+          <a:ln cap="flat">
+            <a:noFill/>
+          </a:ln>
+          <a:effectLst>
+            <a:softEdge rad="0"/>
+          </a:effectLst>
+        </p:spPr>
+        <p:txBody>
+          <a:bodyPr lIns="180000" tIns="180000" rIns="180000" bIns="180000">
+            <a:normAutofit/>
+          </a:bodyPr>
+          <a:lstStyle/>
+          <a:p>
+            <a:r>
+              <a:rPr lang="pl-PL" sz="1600" dirty="0">
+                <a:solidFill>
+                  <a:schemeClr val="tx2"/>
+                </a:solidFill>
+              </a:rPr>
+              <a:t>Zwiększenie ruchu na stronach Wikipedii powodują </a:t>
+            </a:r>
+            <a:r>
+              <a:rPr lang="pl-PL" sz="1600" b="1" dirty="0">
+                <a:solidFill>
+                  <a:schemeClr val="accent5"/>
+                </a:solidFill>
+              </a:rPr>
+              <a:t>wydarzenia wywołujące różne emocje. </a:t>
+            </a:r>
+            <a:r>
+              <a:rPr lang="pl-PL" sz="1600" dirty="0">
+                <a:solidFill>
+                  <a:schemeClr val="tx2"/>
+                </a:solidFill>
+              </a:rPr>
+              <a:t>Są to zarówno tragedie – śmierć, wojna czy katastrofa, oraz pozytywne jak sukcesy sportowe.</a:t>
+            </a:r>
+          </a:p>
+          <a:p>
+            <a:r>
+              <a:rPr lang="pl-PL" sz="1600" dirty="0">
+                <a:solidFill>
+                  <a:schemeClr val="tx2"/>
+                </a:solidFill>
+              </a:rPr>
+              <a:t>Na wzrost wyświetleń wpływają również szeroko komentowane </a:t>
+            </a:r>
+            <a:r>
+              <a:rPr lang="pl-PL" sz="1600" b="1" dirty="0">
+                <a:solidFill>
+                  <a:schemeClr val="accent2"/>
+                </a:solidFill>
+              </a:rPr>
+              <a:t>doniesienia medialne oraz nowe produkcje popkultury.</a:t>
+            </a:r>
+          </a:p>
+          <a:p>
+            <a:r>
+              <a:rPr lang="pl-PL" sz="1600" b="1" dirty="0">
+                <a:solidFill>
+                  <a:schemeClr val="tx2"/>
+                </a:solidFill>
+              </a:rPr>
+              <a:t>Za każdą kategorią kryją się konkretne historie.</a:t>
+            </a:r>
+          </a:p>
+        </p:txBody>
+      </p:sp>
+      <p:sp>
+        <p:nvSpPr>
+          <p:cNvPr id="5" name="pole tekstowe 4">
+            <a:extLst>
+              <a:ext uri="{FF2B5EF4-FFF2-40B4-BE49-F238E27FC236}">
+                <a16:creationId xmlns:a16="http://schemas.microsoft.com/office/drawing/2014/main" id="{9B841B65-AF2F-A5E9-49C9-16D3F6E1F5D2}"/>
+              </a:ext>
+            </a:extLst>
+          </p:cNvPr>
+          <p:cNvSpPr txBox="1"/>
+          <p:nvPr/>
+        </p:nvSpPr>
+        <p:spPr>
+          <a:xfrm>
+            <a:off x="695325" y="6251109"/>
+            <a:ext cx="9568976" cy="276999"/>
+          </a:xfrm>
+          <a:prstGeom prst="rect">
+            <a:avLst/>
+          </a:prstGeom>
+          <a:noFill/>
+        </p:spPr>
+        <p:txBody>
+          <a:bodyPr wrap="square" rtlCol="0">
+            <a:spAutoFit/>
+          </a:bodyPr>
+          <a:lstStyle/>
+          <a:p>
+            <a:r>
+              <a:rPr lang="pl-PL" sz="1200" dirty="0">
+                <a:solidFill>
+                  <a:schemeClr val="tx2"/>
+                </a:solidFill>
+              </a:rPr>
+              <a:t>Kategorie dopasowane przez model językowy</a:t>
+            </a:r>
+          </a:p>
+        </p:txBody>
+      </p:sp>
+    </p:spTree>
+    <p:extLst>
+      <p:ext uri="{BB962C8B-B14F-4D97-AF65-F5344CB8AC3E}">
+        <p14:creationId xmlns:p14="http://schemas.microsoft.com/office/powerpoint/2010/main" val="3735999873"/>
+      </p:ext>
+    </p:extLst>
+  </p:cSld>
+  <p:clrMapOvr>
+    <a:masterClrMapping/>
+  </p:clrMapOvr>
+</p:sld>
+</file>
+
+<file path=ppt/slides/slide5.xml><?xml version="1.0" encoding="utf-8"?>
+<p:sld xmlns:a="http://schemas.openxmlformats.org/drawingml/2006/main" xmlns:r="http://schemas.openxmlformats.org/officeDocument/2006/relationships" xmlns:p="http://schemas.openxmlformats.org/presentationml/2006/main">
+  <p:cSld>
+    <p:spTree>
+      <p:nvGrpSpPr>
+        <p:cNvPr id="1" name="">
+          <a:extLst>
+            <a:ext uri="{FF2B5EF4-FFF2-40B4-BE49-F238E27FC236}">
+              <a16:creationId xmlns:a16="http://schemas.microsoft.com/office/drawing/2014/main" id="{33655D46-B436-0687-F0BE-76004710B440}"/>
+            </a:ext>
+          </a:extLst>
+        </p:cNvPr>
+        <p:cNvGrpSpPr/>
+        <p:nvPr/>
+      </p:nvGrpSpPr>
+      <p:grpSpPr>
+        <a:xfrm>
+          <a:off x="0" y="0"/>
+          <a:ext cx="0" cy="0"/>
+          <a:chOff x="0" y="0"/>
+          <a:chExt cx="0" cy="0"/>
+        </a:xfrm>
+      </p:grpSpPr>
+      <p:sp>
+        <p:nvSpPr>
+          <p:cNvPr id="2" name="Tytuł 1">
+            <a:extLst>
+              <a:ext uri="{FF2B5EF4-FFF2-40B4-BE49-F238E27FC236}">
+                <a16:creationId xmlns:a16="http://schemas.microsoft.com/office/drawing/2014/main" id="{7A1D4BB3-9918-D94B-07CC-A46844FEA4F1}"/>
+              </a:ext>
+            </a:extLst>
+          </p:cNvPr>
+          <p:cNvSpPr>
+            <a:spLocks noGrp="1"/>
+          </p:cNvSpPr>
+          <p:nvPr>
+            <p:ph type="title"/>
+          </p:nvPr>
+        </p:nvSpPr>
+        <p:spPr/>
+        <p:txBody>
+          <a:bodyPr/>
+          <a:lstStyle/>
+          <a:p>
+            <a:r>
+              <a:rPr lang="pl-PL" dirty="0"/>
+              <a:t>Elżbieta II – śmierć i wesele</a:t>
+            </a:r>
+          </a:p>
+        </p:txBody>
+      </p:sp>
+      <p:graphicFrame>
+        <p:nvGraphicFramePr>
+          <p:cNvPr id="6" name="Symbol zastępczy zawartości 5">
+            <a:extLst>
+              <a:ext uri="{FF2B5EF4-FFF2-40B4-BE49-F238E27FC236}">
+                <a16:creationId xmlns:a16="http://schemas.microsoft.com/office/drawing/2014/main" id="{AEDA1524-37FE-05DD-A0C6-B5A1DD4D5089}"/>
+              </a:ext>
+            </a:extLst>
+          </p:cNvPr>
+          <p:cNvGraphicFramePr>
+            <a:graphicFrameLocks noGrp="1"/>
+          </p:cNvGraphicFramePr>
+          <p:nvPr>
+            <p:ph idx="1"/>
+            <p:extLst>
+              <p:ext uri="{D42A27DB-BD31-4B8C-83A1-F6EECF244321}">
+                <p14:modId xmlns:p14="http://schemas.microsoft.com/office/powerpoint/2010/main" val="1424739551"/>
+              </p:ext>
+            </p:extLst>
+          </p:nvPr>
+        </p:nvGraphicFramePr>
+        <p:xfrm>
+          <a:off x="695325" y="1455738"/>
+          <a:ext cx="7115175" cy="4313237"/>
+        </p:xfrm>
+        <a:graphic>
+          <a:graphicData uri="http://schemas.openxmlformats.org/drawingml/2006/chart">
+            <c:chart xmlns:c="http://schemas.openxmlformats.org/drawingml/2006/chart" xmlns:r="http://schemas.openxmlformats.org/officeDocument/2006/relationships" r:id="rId2"/>
+          </a:graphicData>
+        </a:graphic>
+      </p:graphicFrame>
+      <p:sp>
+        <p:nvSpPr>
+          <p:cNvPr id="3" name="Symbol zastępczy zawartości 2">
+            <a:extLst>
+              <a:ext uri="{FF2B5EF4-FFF2-40B4-BE49-F238E27FC236}">
+                <a16:creationId xmlns:a16="http://schemas.microsoft.com/office/drawing/2014/main" id="{1A7308BC-9B00-7067-1B51-FE82E258FC5B}"/>
+              </a:ext>
+            </a:extLst>
+          </p:cNvPr>
+          <p:cNvSpPr>
+            <a:spLocks noGrp="1"/>
+          </p:cNvSpPr>
+          <p:nvPr>
+            <p:ph idx="13"/>
+          </p:nvPr>
+        </p:nvSpPr>
+        <p:spPr>
+          <a:noFill/>
+          <a:ln cap="flat">
+            <a:noFill/>
+          </a:ln>
+        </p:spPr>
+        <p:txBody>
+          <a:bodyPr lIns="180000" tIns="180000" rIns="180000" bIns="180000"/>
+          <a:lstStyle/>
+          <a:p>
+            <a:r>
+              <a:rPr lang="pl-PL" dirty="0">
+                <a:solidFill>
+                  <a:schemeClr val="tx2"/>
+                </a:solidFill>
+              </a:rPr>
+              <a:t>Największe zainteresowanie stroną Elżbiety II wynika z Jej śmierci oraz śmierci Jej męża – Księcia Filipa. Mniejsze, acz znaczące skoki w ruchu generowane są przez tematy medialne, jak obchody rocznicy ślubu czy ślub Księcia Harry’ego z </a:t>
+            </a:r>
+            <a:r>
+              <a:rPr lang="pl-PL" dirty="0" err="1">
+                <a:solidFill>
+                  <a:schemeClr val="tx2"/>
+                </a:solidFill>
+              </a:rPr>
+              <a:t>Meghan</a:t>
+            </a:r>
+            <a:r>
+              <a:rPr lang="pl-PL" dirty="0">
+                <a:solidFill>
+                  <a:schemeClr val="tx2"/>
+                </a:solidFill>
+              </a:rPr>
+              <a:t> </a:t>
+            </a:r>
+            <a:r>
+              <a:rPr lang="pl-PL" dirty="0" err="1">
+                <a:solidFill>
+                  <a:schemeClr val="tx2"/>
+                </a:solidFill>
+              </a:rPr>
+              <a:t>Markle</a:t>
+            </a:r>
+            <a:r>
+              <a:rPr lang="pl-PL" dirty="0">
+                <a:solidFill>
+                  <a:schemeClr val="tx2"/>
+                </a:solidFill>
+              </a:rPr>
+              <a:t>.</a:t>
+            </a:r>
+          </a:p>
+        </p:txBody>
+      </p:sp>
+    </p:spTree>
+    <p:extLst>
+      <p:ext uri="{BB962C8B-B14F-4D97-AF65-F5344CB8AC3E}">
+        <p14:creationId xmlns:p14="http://schemas.microsoft.com/office/powerpoint/2010/main" val="841833921"/>
+      </p:ext>
+    </p:extLst>
+  </p:cSld>
+  <p:clrMapOvr>
+    <a:masterClrMapping/>
+  </p:clrMapOvr>
+</p:sld>
+</file>
+
+<file path=ppt/slides/slide6.xml><?xml version="1.0" encoding="utf-8"?>
+<p:sld xmlns:a="http://schemas.openxmlformats.org/drawingml/2006/main" xmlns:r="http://schemas.openxmlformats.org/officeDocument/2006/relationships" xmlns:p="http://schemas.openxmlformats.org/presentationml/2006/main">
+  <p:cSld>
+    <p:spTree>
+      <p:nvGrpSpPr>
+        <p:cNvPr id="1" name="">
+          <a:extLst>
+            <a:ext uri="{FF2B5EF4-FFF2-40B4-BE49-F238E27FC236}">
+              <a16:creationId xmlns:a16="http://schemas.microsoft.com/office/drawing/2014/main" id="{D9F64312-CD02-FC4C-F8DD-7C079AED7D60}"/>
+            </a:ext>
+          </a:extLst>
+        </p:cNvPr>
+        <p:cNvGrpSpPr/>
+        <p:nvPr/>
+      </p:nvGrpSpPr>
+      <p:grpSpPr>
+        <a:xfrm>
+          <a:off x="0" y="0"/>
+          <a:ext cx="0" cy="0"/>
+          <a:chOff x="0" y="0"/>
+          <a:chExt cx="0" cy="0"/>
+        </a:xfrm>
+      </p:grpSpPr>
+      <p:sp>
+        <p:nvSpPr>
+          <p:cNvPr id="2" name="Tytuł 1">
+            <a:extLst>
+              <a:ext uri="{FF2B5EF4-FFF2-40B4-BE49-F238E27FC236}">
+                <a16:creationId xmlns:a16="http://schemas.microsoft.com/office/drawing/2014/main" id="{2884AD0D-7CD0-3713-508A-FC0699E95381}"/>
+              </a:ext>
+            </a:extLst>
+          </p:cNvPr>
+          <p:cNvSpPr>
+            <a:spLocks noGrp="1"/>
+          </p:cNvSpPr>
+          <p:nvPr>
+            <p:ph type="title"/>
+          </p:nvPr>
+        </p:nvSpPr>
+        <p:spPr/>
+        <p:txBody>
+          <a:bodyPr>
+            <a:normAutofit/>
+          </a:bodyPr>
+          <a:lstStyle/>
+          <a:p>
+            <a:r>
+              <a:rPr lang="pl-PL" dirty="0"/>
+              <a:t>Sukcesy Igi Świątek</a:t>
+            </a:r>
+          </a:p>
+        </p:txBody>
+      </p:sp>
+      <p:graphicFrame>
+        <p:nvGraphicFramePr>
+          <p:cNvPr id="6" name="Symbol zastępczy zawartości 5">
+            <a:extLst>
+              <a:ext uri="{FF2B5EF4-FFF2-40B4-BE49-F238E27FC236}">
+                <a16:creationId xmlns:a16="http://schemas.microsoft.com/office/drawing/2014/main" id="{09D98903-2D8C-F765-284D-96F1B8D81EE6}"/>
+              </a:ext>
+            </a:extLst>
+          </p:cNvPr>
+          <p:cNvGraphicFramePr>
+            <a:graphicFrameLocks noGrp="1"/>
+          </p:cNvGraphicFramePr>
+          <p:nvPr>
+            <p:ph idx="1"/>
+            <p:extLst>
+              <p:ext uri="{D42A27DB-BD31-4B8C-83A1-F6EECF244321}">
+                <p14:modId xmlns:p14="http://schemas.microsoft.com/office/powerpoint/2010/main" val="2348663486"/>
+              </p:ext>
+            </p:extLst>
+          </p:nvPr>
+        </p:nvGraphicFramePr>
+        <p:xfrm>
+          <a:off x="695325" y="1455738"/>
+          <a:ext cx="7115175" cy="4313237"/>
+        </p:xfrm>
+        <a:graphic>
+          <a:graphicData uri="http://schemas.openxmlformats.org/drawingml/2006/chart">
+            <c:chart xmlns:c="http://schemas.openxmlformats.org/drawingml/2006/chart" xmlns:r="http://schemas.openxmlformats.org/officeDocument/2006/relationships" r:id="rId2"/>
+          </a:graphicData>
+        </a:graphic>
+      </p:graphicFrame>
+      <p:sp>
+        <p:nvSpPr>
+          <p:cNvPr id="3" name="Symbol zastępczy zawartości 2">
+            <a:extLst>
+              <a:ext uri="{FF2B5EF4-FFF2-40B4-BE49-F238E27FC236}">
+                <a16:creationId xmlns:a16="http://schemas.microsoft.com/office/drawing/2014/main" id="{3B1C6FFD-2A59-D2F9-6220-5455BF0BA04E}"/>
+              </a:ext>
+            </a:extLst>
+          </p:cNvPr>
+          <p:cNvSpPr>
+            <a:spLocks noGrp="1"/>
+          </p:cNvSpPr>
+          <p:nvPr>
+            <p:ph idx="13"/>
+          </p:nvPr>
+        </p:nvSpPr>
+        <p:spPr/>
+        <p:txBody>
+          <a:bodyPr/>
+          <a:lstStyle/>
+          <a:p>
+            <a:r>
+              <a:rPr lang="pl-PL" dirty="0">
+                <a:solidFill>
+                  <a:schemeClr val="tx2"/>
+                </a:solidFill>
+              </a:rPr>
+              <a:t>Pięć największych szczytów wyświetleń strony Igi Świątek pochodzi </a:t>
+            </a:r>
+            <a:br>
+              <a:rPr lang="pl-PL" dirty="0">
+                <a:solidFill>
+                  <a:schemeClr val="tx2"/>
+                </a:solidFill>
+              </a:rPr>
+            </a:br>
+            <a:r>
+              <a:rPr lang="pl-PL" dirty="0">
+                <a:solidFill>
+                  <a:schemeClr val="tx2"/>
+                </a:solidFill>
+              </a:rPr>
+              <a:t>z wygranych turniejów wielkoszlemowych – czterech Rolanda Garrosa </a:t>
+            </a:r>
+            <a:br>
+              <a:rPr lang="pl-PL" dirty="0">
+                <a:solidFill>
+                  <a:schemeClr val="tx2"/>
+                </a:solidFill>
+              </a:rPr>
+            </a:br>
+            <a:r>
+              <a:rPr lang="pl-PL" dirty="0">
+                <a:solidFill>
+                  <a:schemeClr val="tx2"/>
+                </a:solidFill>
+              </a:rPr>
+              <a:t>i Wimbledonu. </a:t>
+            </a:r>
+          </a:p>
+          <a:p>
+            <a:r>
+              <a:rPr lang="pl-PL" dirty="0">
+                <a:solidFill>
+                  <a:schemeClr val="tx2"/>
+                </a:solidFill>
+              </a:rPr>
+              <a:t>Ani spadek </a:t>
+            </a:r>
+            <a:br>
+              <a:rPr lang="pl-PL" dirty="0">
+                <a:solidFill>
+                  <a:schemeClr val="tx2"/>
+                </a:solidFill>
+              </a:rPr>
+            </a:br>
+            <a:r>
+              <a:rPr lang="pl-PL" dirty="0">
+                <a:solidFill>
+                  <a:schemeClr val="tx2"/>
+                </a:solidFill>
+              </a:rPr>
+              <a:t>z pierwszego miejsca klasyfikacji WTA, ani pozytywny wynik kontroli antydopingowej nie spowodowały takiego zainteresowania, jak spektakularne wygrane.</a:t>
+            </a:r>
+          </a:p>
+          <a:p>
+            <a:endParaRPr lang="pl-PL" dirty="0"/>
+          </a:p>
+        </p:txBody>
+      </p:sp>
+    </p:spTree>
+    <p:extLst>
+      <p:ext uri="{BB962C8B-B14F-4D97-AF65-F5344CB8AC3E}">
+        <p14:creationId xmlns:p14="http://schemas.microsoft.com/office/powerpoint/2010/main" val="899832204"/>
+      </p:ext>
+    </p:extLst>
+  </p:cSld>
+  <p:clrMapOvr>
+    <a:masterClrMapping/>
+  </p:clrMapOvr>
+</p:sld>
+</file>
+
+<file path=ppt/slides/slide7.xml><?xml version="1.0" encoding="utf-8"?>
+<p:sld xmlns:a="http://schemas.openxmlformats.org/drawingml/2006/main" xmlns:r="http://schemas.openxmlformats.org/officeDocument/2006/relationships" xmlns:p="http://schemas.openxmlformats.org/presentationml/2006/main">
+  <p:cSld>
+    <p:spTree>
+      <p:nvGrpSpPr>
+        <p:cNvPr id="1" name="">
+          <a:extLst>
+            <a:ext uri="{FF2B5EF4-FFF2-40B4-BE49-F238E27FC236}">
+              <a16:creationId xmlns:a16="http://schemas.microsoft.com/office/drawing/2014/main" id="{0178FECD-C453-A5D0-4CEB-90324FAE3610}"/>
+            </a:ext>
+          </a:extLst>
+        </p:cNvPr>
+        <p:cNvGrpSpPr/>
+        <p:nvPr/>
+      </p:nvGrpSpPr>
+      <p:grpSpPr>
+        <a:xfrm>
+          <a:off x="0" y="0"/>
+          <a:ext cx="0" cy="0"/>
+          <a:chOff x="0" y="0"/>
+          <a:chExt cx="0" cy="0"/>
+        </a:xfrm>
+      </p:grpSpPr>
+      <p:sp>
+        <p:nvSpPr>
+          <p:cNvPr id="2" name="Tytuł 1">
+            <a:extLst>
+              <a:ext uri="{FF2B5EF4-FFF2-40B4-BE49-F238E27FC236}">
+                <a16:creationId xmlns:a16="http://schemas.microsoft.com/office/drawing/2014/main" id="{FE77D155-CF86-1E32-3C60-1EA6CD5099C7}"/>
+              </a:ext>
+            </a:extLst>
+          </p:cNvPr>
+          <p:cNvSpPr>
+            <a:spLocks noGrp="1"/>
+          </p:cNvSpPr>
+          <p:nvPr>
+            <p:ph type="title"/>
+          </p:nvPr>
+        </p:nvSpPr>
+        <p:spPr/>
+        <p:txBody>
+          <a:bodyPr>
+            <a:normAutofit/>
+          </a:bodyPr>
+          <a:lstStyle/>
+          <a:p>
+            <a:r>
+              <a:rPr lang="pl-PL" dirty="0"/>
+              <a:t>Drugie życie </a:t>
+            </a:r>
+            <a:r>
+              <a:rPr lang="pl-PL" dirty="0" err="1"/>
+              <a:t>Freddiego</a:t>
+            </a:r>
+            <a:r>
+              <a:rPr lang="pl-PL" dirty="0"/>
+              <a:t> </a:t>
+            </a:r>
+            <a:r>
+              <a:rPr lang="pl-PL" dirty="0" err="1"/>
+              <a:t>Mercury’ego</a:t>
+            </a:r>
+            <a:endParaRPr lang="pl-PL" dirty="0"/>
+          </a:p>
+        </p:txBody>
+      </p:sp>
+      <p:graphicFrame>
+        <p:nvGraphicFramePr>
+          <p:cNvPr id="6" name="Symbol zastępczy zawartości 5">
+            <a:extLst>
+              <a:ext uri="{FF2B5EF4-FFF2-40B4-BE49-F238E27FC236}">
+                <a16:creationId xmlns:a16="http://schemas.microsoft.com/office/drawing/2014/main" id="{FA18856F-AC8A-DDEF-2221-BFA52CE49F8B}"/>
+              </a:ext>
+            </a:extLst>
+          </p:cNvPr>
+          <p:cNvGraphicFramePr>
+            <a:graphicFrameLocks noGrp="1"/>
+          </p:cNvGraphicFramePr>
+          <p:nvPr>
+            <p:ph idx="1"/>
+            <p:extLst>
+              <p:ext uri="{D42A27DB-BD31-4B8C-83A1-F6EECF244321}">
+                <p14:modId xmlns:p14="http://schemas.microsoft.com/office/powerpoint/2010/main" val="3813927340"/>
+              </p:ext>
+            </p:extLst>
+          </p:nvPr>
+        </p:nvGraphicFramePr>
+        <p:xfrm>
+          <a:off x="695325" y="1455738"/>
+          <a:ext cx="7115175" cy="4313237"/>
+        </p:xfrm>
+        <a:graphic>
+          <a:graphicData uri="http://schemas.openxmlformats.org/drawingml/2006/chart">
+            <c:chart xmlns:c="http://schemas.openxmlformats.org/drawingml/2006/chart" xmlns:r="http://schemas.openxmlformats.org/officeDocument/2006/relationships" r:id="rId2"/>
+          </a:graphicData>
+        </a:graphic>
+      </p:graphicFrame>
+      <p:sp>
+        <p:nvSpPr>
+          <p:cNvPr id="3" name="Symbol zastępczy zawartości 2">
+            <a:extLst>
+              <a:ext uri="{FF2B5EF4-FFF2-40B4-BE49-F238E27FC236}">
+                <a16:creationId xmlns:a16="http://schemas.microsoft.com/office/drawing/2014/main" id="{4D19FE4F-1F5F-7398-3D66-2D0C312E258E}"/>
+              </a:ext>
+            </a:extLst>
+          </p:cNvPr>
+          <p:cNvSpPr>
+            <a:spLocks noGrp="1"/>
+          </p:cNvSpPr>
+          <p:nvPr>
+            <p:ph idx="13"/>
+          </p:nvPr>
+        </p:nvSpPr>
+        <p:spPr/>
+        <p:txBody>
+          <a:bodyPr/>
+          <a:lstStyle/>
+          <a:p>
+            <a:r>
+              <a:rPr lang="pl-PL" dirty="0">
+                <a:solidFill>
+                  <a:schemeClr val="tx2"/>
+                </a:solidFill>
+              </a:rPr>
+              <a:t>Historia </a:t>
+            </a:r>
+            <a:r>
+              <a:rPr lang="pl-PL" dirty="0" err="1">
+                <a:solidFill>
+                  <a:schemeClr val="tx2"/>
+                </a:solidFill>
+              </a:rPr>
+              <a:t>Freddiego</a:t>
+            </a:r>
+            <a:r>
+              <a:rPr lang="pl-PL" dirty="0">
+                <a:solidFill>
+                  <a:schemeClr val="tx2"/>
+                </a:solidFill>
+              </a:rPr>
+              <a:t> </a:t>
+            </a:r>
+            <a:r>
+              <a:rPr lang="pl-PL" dirty="0" err="1">
+                <a:solidFill>
+                  <a:schemeClr val="tx2"/>
+                </a:solidFill>
+              </a:rPr>
+              <a:t>Mercury'ego</a:t>
+            </a:r>
+            <a:r>
+              <a:rPr lang="pl-PL" dirty="0">
+                <a:solidFill>
+                  <a:schemeClr val="tx2"/>
+                </a:solidFill>
+              </a:rPr>
+              <a:t> pokazuje, </a:t>
+            </a:r>
+            <a:br>
+              <a:rPr lang="pl-PL" dirty="0">
+                <a:solidFill>
+                  <a:schemeClr val="tx2"/>
+                </a:solidFill>
+              </a:rPr>
+            </a:br>
+            <a:r>
+              <a:rPr lang="pl-PL" dirty="0">
+                <a:solidFill>
+                  <a:schemeClr val="tx2"/>
+                </a:solidFill>
+              </a:rPr>
+              <a:t>że media potrafią nadać drugie życie znanym postaciom. </a:t>
+            </a:r>
+          </a:p>
+          <a:p>
+            <a:r>
+              <a:rPr lang="pl-PL" dirty="0">
+                <a:solidFill>
+                  <a:schemeClr val="tx2"/>
+                </a:solidFill>
+              </a:rPr>
+              <a:t>Premierze filmu i okrągłej rocznicy śmierci towarzyszył wyraźny wzrost zainteresowania jego biografią.</a:t>
+            </a:r>
+          </a:p>
+          <a:p>
+            <a:endParaRPr lang="pl-PL" dirty="0"/>
+          </a:p>
+        </p:txBody>
+      </p:sp>
+    </p:spTree>
+    <p:extLst>
+      <p:ext uri="{BB962C8B-B14F-4D97-AF65-F5344CB8AC3E}">
+        <p14:creationId xmlns:p14="http://schemas.microsoft.com/office/powerpoint/2010/main" val="1523644545"/>
+      </p:ext>
+    </p:extLst>
+  </p:cSld>
+  <p:clrMapOvr>
+    <a:masterClrMapping/>
+  </p:clrMapOvr>
+</p:sld>
+</file>
+
+<file path=ppt/slides/slide8.xml><?xml version="1.0" encoding="utf-8"?>
+<p:sld xmlns:a="http://schemas.openxmlformats.org/drawingml/2006/main" xmlns:r="http://schemas.openxmlformats.org/officeDocument/2006/relationships" xmlns:p="http://schemas.openxmlformats.org/presentationml/2006/main">
+  <p:cSld>
+    <p:spTree>
+      <p:nvGrpSpPr>
+        <p:cNvPr id="1" name=""/>
+        <p:cNvGrpSpPr/>
+        <p:nvPr/>
+      </p:nvGrpSpPr>
+      <p:grpSpPr>
+        <a:xfrm>
+          <a:off x="0" y="0"/>
+          <a:ext cx="0" cy="0"/>
+          <a:chOff x="0" y="0"/>
+          <a:chExt cx="0" cy="0"/>
+        </a:xfrm>
+      </p:grpSpPr>
+      <p:sp>
+        <p:nvSpPr>
+          <p:cNvPr id="2" name="Tytuł 1">
+            <a:extLst>
+              <a:ext uri="{FF2B5EF4-FFF2-40B4-BE49-F238E27FC236}">
+                <a16:creationId xmlns:a16="http://schemas.microsoft.com/office/drawing/2014/main" id="{DB22C4A2-1B90-4E31-AB1C-E2D45B1E1A94}"/>
+              </a:ext>
+            </a:extLst>
+          </p:cNvPr>
+          <p:cNvSpPr>
+            <a:spLocks noGrp="1"/>
+          </p:cNvSpPr>
+          <p:nvPr>
+            <p:ph type="title"/>
+          </p:nvPr>
+        </p:nvSpPr>
+        <p:spPr/>
+        <p:txBody>
+          <a:bodyPr>
+            <a:normAutofit/>
+          </a:bodyPr>
+          <a:lstStyle/>
+          <a:p>
+            <a:r>
+              <a:rPr lang="pl-PL" dirty="0"/>
+              <a:t>Piłka nożna a znajomość geografii</a:t>
+            </a:r>
+          </a:p>
+        </p:txBody>
+      </p:sp>
+      <p:graphicFrame>
+        <p:nvGraphicFramePr>
+          <p:cNvPr id="6" name="Symbol zastępczy zawartości 5">
+            <a:extLst>
+              <a:ext uri="{FF2B5EF4-FFF2-40B4-BE49-F238E27FC236}">
+                <a16:creationId xmlns:a16="http://schemas.microsoft.com/office/drawing/2014/main" id="{4B65AB7F-448F-7A38-A170-C9008F7743E3}"/>
+              </a:ext>
+            </a:extLst>
+          </p:cNvPr>
+          <p:cNvGraphicFramePr>
+            <a:graphicFrameLocks noGrp="1"/>
+          </p:cNvGraphicFramePr>
+          <p:nvPr>
+            <p:ph idx="1"/>
+            <p:extLst>
+              <p:ext uri="{D42A27DB-BD31-4B8C-83A1-F6EECF244321}">
+                <p14:modId xmlns:p14="http://schemas.microsoft.com/office/powerpoint/2010/main" val="829675981"/>
+              </p:ext>
+            </p:extLst>
+          </p:nvPr>
+        </p:nvGraphicFramePr>
+        <p:xfrm>
+          <a:off x="695325" y="1455738"/>
+          <a:ext cx="7115175" cy="4313237"/>
+        </p:xfrm>
+        <a:graphic>
+          <a:graphicData uri="http://schemas.openxmlformats.org/drawingml/2006/chart">
+            <c:chart xmlns:c="http://schemas.openxmlformats.org/drawingml/2006/chart" xmlns:r="http://schemas.openxmlformats.org/officeDocument/2006/relationships" r:id="rId2"/>
+          </a:graphicData>
+        </a:graphic>
+      </p:graphicFrame>
+      <p:sp>
+        <p:nvSpPr>
+          <p:cNvPr id="3" name="Symbol zastępczy zawartości 2">
+            <a:extLst>
+              <a:ext uri="{FF2B5EF4-FFF2-40B4-BE49-F238E27FC236}">
+                <a16:creationId xmlns:a16="http://schemas.microsoft.com/office/drawing/2014/main" id="{1623E0AF-E7E9-B8C5-B54A-95E7639FDD53}"/>
+              </a:ext>
+            </a:extLst>
+          </p:cNvPr>
+          <p:cNvSpPr>
+            <a:spLocks noGrp="1"/>
+          </p:cNvSpPr>
+          <p:nvPr>
+            <p:ph idx="13"/>
+          </p:nvPr>
+        </p:nvSpPr>
+        <p:spPr/>
+        <p:txBody>
+          <a:bodyPr/>
+          <a:lstStyle/>
+          <a:p>
+            <a:r>
+              <a:rPr lang="pl-PL" dirty="0">
+                <a:solidFill>
+                  <a:schemeClr val="tx2"/>
+                </a:solidFill>
+              </a:rPr>
+              <a:t>Duże imprezy sportowe sprawiają również, że chcemy lepiej poznać państwa, o których na co dzień wiemy niewiele.</a:t>
+            </a:r>
+          </a:p>
+          <a:p>
+            <a:r>
+              <a:rPr lang="pl-PL" dirty="0">
+                <a:solidFill>
+                  <a:schemeClr val="tx2"/>
+                </a:solidFill>
+              </a:rPr>
+              <a:t>Sporo osób odkryło Curaçao </a:t>
+            </a:r>
+            <a:br>
+              <a:rPr lang="pl-PL" dirty="0">
+                <a:solidFill>
+                  <a:schemeClr val="tx2"/>
+                </a:solidFill>
+              </a:rPr>
+            </a:br>
+            <a:r>
+              <a:rPr lang="pl-PL" dirty="0">
+                <a:solidFill>
+                  <a:schemeClr val="tx2"/>
+                </a:solidFill>
+              </a:rPr>
+              <a:t>i Republika Zielonego Przylądka dzięki ich pierwszemu udziałowi </a:t>
+            </a:r>
+            <a:br>
+              <a:rPr lang="pl-PL" dirty="0">
+                <a:solidFill>
+                  <a:schemeClr val="tx2"/>
+                </a:solidFill>
+              </a:rPr>
+            </a:br>
+            <a:r>
+              <a:rPr lang="pl-PL" dirty="0">
+                <a:solidFill>
+                  <a:schemeClr val="tx2"/>
+                </a:solidFill>
+              </a:rPr>
+              <a:t>w Mistrzostwach Świata </a:t>
+            </a:r>
+            <a:br>
+              <a:rPr lang="pl-PL" dirty="0">
+                <a:solidFill>
+                  <a:schemeClr val="tx2"/>
+                </a:solidFill>
+              </a:rPr>
+            </a:br>
+            <a:r>
+              <a:rPr lang="pl-PL" dirty="0">
+                <a:solidFill>
+                  <a:schemeClr val="tx2"/>
+                </a:solidFill>
+              </a:rPr>
+              <a:t>w Piłce Nożnej.</a:t>
+            </a:r>
+          </a:p>
+          <a:p>
+            <a:endParaRPr lang="pl-PL" dirty="0"/>
+          </a:p>
+        </p:txBody>
+      </p:sp>
+      <p:sp>
+        <p:nvSpPr>
+          <p:cNvPr id="8" name="Symbol zastępczy zawartości 4">
+            <a:extLst>
+              <a:ext uri="{FF2B5EF4-FFF2-40B4-BE49-F238E27FC236}">
+                <a16:creationId xmlns:a16="http://schemas.microsoft.com/office/drawing/2014/main" id="{2FF7C437-CEDE-316F-788D-277332313050}"/>
               </a:ext>
             </a:extLst>
           </p:cNvPr>
@@ -17584,8 +19522,8 @@
         </p:nvSpPr>
         <p:spPr>
           <a:xfrm>
-            <a:off x="838200" y="5214026"/>
-            <a:ext cx="7070386" cy="962936"/>
+            <a:off x="4719203" y="1853927"/>
+            <a:ext cx="3592143" cy="4008982"/>
           </a:xfrm>
           <a:prstGeom prst="rect">
             <a:avLst/>
@@ -17760,1835 +19698,17 @@
             </a:lvl9pPr>
           </a:lstStyle>
           <a:p>
-            <a:pPr marL="0" indent="0" algn="ctr">
-              <a:lnSpc>
-                <a:spcPct val="110000"/>
-              </a:lnSpc>
-              <a:buNone/>
-            </a:pPr>
-            <a:r>
-              <a:rPr lang="pl-PL" sz="1600" dirty="0">
-                <a:solidFill>
-                  <a:schemeClr val="tx2"/>
-                </a:solidFill>
-              </a:rPr>
-              <a:t>Wśród najpopularniejszych artykułów trudno znaleźć przypadkowe tematy. Dotyczą osób, państw lub wydarzeń, które regularnie pojawiają się w przestrzeni publicznej. [5]</a:t>
-            </a:r>
-          </a:p>
-        </p:txBody>
-      </p:sp>
-      <p:sp>
-        <p:nvSpPr>
-          <p:cNvPr id="9" name="Tytuł 8">
-            <a:extLst>
-              <a:ext uri="{FF2B5EF4-FFF2-40B4-BE49-F238E27FC236}">
-                <a16:creationId xmlns:a16="http://schemas.microsoft.com/office/drawing/2014/main" id="{C0DEE201-5A1F-4DAA-DD16-738368DEE7C9}"/>
-              </a:ext>
-            </a:extLst>
-          </p:cNvPr>
-          <p:cNvSpPr>
-            <a:spLocks noGrp="1"/>
-          </p:cNvSpPr>
-          <p:nvPr>
-            <p:ph type="title"/>
-          </p:nvPr>
-        </p:nvSpPr>
-        <p:spPr/>
-        <p:txBody>
-          <a:bodyPr/>
-          <a:lstStyle/>
-          <a:p>
-            <a:r>
-              <a:rPr lang="pl-PL" dirty="0"/>
-              <a:t>Czego szukamy najczęściej</a:t>
-            </a:r>
-          </a:p>
-        </p:txBody>
-      </p:sp>
-      <p:graphicFrame>
-        <p:nvGraphicFramePr>
-          <p:cNvPr id="18" name="Symbol zastępczy zawartości 17">
-            <a:extLst>
-              <a:ext uri="{FF2B5EF4-FFF2-40B4-BE49-F238E27FC236}">
-                <a16:creationId xmlns:a16="http://schemas.microsoft.com/office/drawing/2014/main" id="{1CED35B4-95D4-37AD-597F-EADF4B8D92C4}"/>
-              </a:ext>
-            </a:extLst>
-          </p:cNvPr>
-          <p:cNvGraphicFramePr>
-            <a:graphicFrameLocks noGrp="1"/>
-          </p:cNvGraphicFramePr>
-          <p:nvPr>
-            <p:ph idx="1"/>
-            <p:extLst>
-              <p:ext uri="{D42A27DB-BD31-4B8C-83A1-F6EECF244321}">
-                <p14:modId xmlns:p14="http://schemas.microsoft.com/office/powerpoint/2010/main" val="3615494878"/>
-              </p:ext>
-            </p:extLst>
-          </p:nvPr>
-        </p:nvGraphicFramePr>
-        <p:xfrm>
-          <a:off x="838198" y="1820767"/>
-          <a:ext cx="7070388" cy="3393259"/>
-        </p:xfrm>
-        <a:graphic>
-          <a:graphicData uri="http://schemas.openxmlformats.org/drawingml/2006/chart">
-            <c:chart xmlns:c="http://schemas.openxmlformats.org/drawingml/2006/chart" xmlns:r="http://schemas.openxmlformats.org/officeDocument/2006/relationships" r:id="rId2"/>
-          </a:graphicData>
-        </a:graphic>
-      </p:graphicFrame>
-      <p:pic>
-        <p:nvPicPr>
-          <p:cNvPr id="2" name="Obraz 1" descr="Ilustracja">
-            <a:extLst>
-              <a:ext uri="{FF2B5EF4-FFF2-40B4-BE49-F238E27FC236}">
-                <a16:creationId xmlns:a16="http://schemas.microsoft.com/office/drawing/2014/main" id="{442588CC-D45D-0187-38D5-7C1E4AE77A68}"/>
-              </a:ext>
-            </a:extLst>
-          </p:cNvPr>
-          <p:cNvPicPr>
-            <a:picLocks noChangeAspect="1"/>
-          </p:cNvPicPr>
-          <p:nvPr/>
-        </p:nvPicPr>
-        <p:blipFill>
-          <a:blip r:embed="rId3"/>
-          <a:stretch>
-            <a:fillRect/>
-          </a:stretch>
-        </p:blipFill>
-        <p:spPr>
-          <a:xfrm>
-            <a:off x="9096877" y="4200906"/>
-            <a:ext cx="2194547" cy="1457179"/>
-          </a:xfrm>
-          <a:prstGeom prst="rect">
-            <a:avLst/>
-          </a:prstGeom>
-        </p:spPr>
-      </p:pic>
-      <p:pic>
-        <p:nvPicPr>
-          <p:cNvPr id="21" name="Obraz 20" descr="Ilustracja">
-            <a:extLst>
-              <a:ext uri="{FF2B5EF4-FFF2-40B4-BE49-F238E27FC236}">
-                <a16:creationId xmlns:a16="http://schemas.microsoft.com/office/drawing/2014/main" id="{2AA5B949-D598-B0A1-AE1D-03766D2755F4}"/>
-              </a:ext>
-            </a:extLst>
-          </p:cNvPr>
-          <p:cNvPicPr>
-            <a:picLocks noChangeAspect="1"/>
-          </p:cNvPicPr>
-          <p:nvPr/>
-        </p:nvPicPr>
-        <p:blipFill>
-          <a:blip r:embed="rId4"/>
-          <a:stretch>
-            <a:fillRect/>
-          </a:stretch>
-        </p:blipFill>
-        <p:spPr>
-          <a:xfrm>
-            <a:off x="8398206" y="2984053"/>
-            <a:ext cx="1397343" cy="1861261"/>
-          </a:xfrm>
-          <a:prstGeom prst="rect">
-            <a:avLst/>
-          </a:prstGeom>
-        </p:spPr>
-      </p:pic>
-      <p:pic>
-        <p:nvPicPr>
-          <p:cNvPr id="19" name="Obraz 18" descr="Mapa opisywanego kraju">
-            <a:extLst>
-              <a:ext uri="{FF2B5EF4-FFF2-40B4-BE49-F238E27FC236}">
-                <a16:creationId xmlns:a16="http://schemas.microsoft.com/office/drawing/2014/main" id="{619B8E3E-16F0-0004-5A2C-28B6697D9C66}"/>
-              </a:ext>
-            </a:extLst>
-          </p:cNvPr>
-          <p:cNvPicPr>
-            <a:picLocks noChangeAspect="1"/>
-          </p:cNvPicPr>
-          <p:nvPr/>
-        </p:nvPicPr>
-        <p:blipFill>
-          <a:blip r:embed="rId5"/>
-          <a:stretch>
-            <a:fillRect/>
-          </a:stretch>
-        </p:blipFill>
-        <p:spPr>
-          <a:xfrm>
-            <a:off x="9624003" y="1820768"/>
-            <a:ext cx="1729796" cy="1861261"/>
-          </a:xfrm>
-          <a:prstGeom prst="rect">
-            <a:avLst/>
-          </a:prstGeom>
-        </p:spPr>
-      </p:pic>
-    </p:spTree>
-    <p:extLst>
-      <p:ext uri="{BB962C8B-B14F-4D97-AF65-F5344CB8AC3E}">
-        <p14:creationId xmlns:p14="http://schemas.microsoft.com/office/powerpoint/2010/main" val="680220519"/>
-      </p:ext>
-    </p:extLst>
-  </p:cSld>
-  <p:clrMapOvr>
-    <a:masterClrMapping/>
-  </p:clrMapOvr>
-</p:sld>
-</file>
-
-<file path=ppt/slides/slide4.xml><?xml version="1.0" encoding="utf-8"?>
-<p:sld xmlns:a="http://schemas.openxmlformats.org/drawingml/2006/main" xmlns:r="http://schemas.openxmlformats.org/officeDocument/2006/relationships" xmlns:p="http://schemas.openxmlformats.org/presentationml/2006/main">
-  <p:cSld>
-    <p:spTree>
-      <p:nvGrpSpPr>
-        <p:cNvPr id="1" name=""/>
-        <p:cNvGrpSpPr/>
-        <p:nvPr/>
-      </p:nvGrpSpPr>
-      <p:grpSpPr>
-        <a:xfrm>
-          <a:off x="0" y="0"/>
-          <a:ext cx="0" cy="0"/>
-          <a:chOff x="0" y="0"/>
-          <a:chExt cx="0" cy="0"/>
-        </a:xfrm>
-      </p:grpSpPr>
-      <p:graphicFrame>
-        <p:nvGraphicFramePr>
-          <p:cNvPr id="7" name="Wykres 6">
-            <a:extLst>
-              <a:ext uri="{FF2B5EF4-FFF2-40B4-BE49-F238E27FC236}">
-                <a16:creationId xmlns:a16="http://schemas.microsoft.com/office/drawing/2014/main" id="{F6814C3D-6579-8325-76B9-9092EF100786}"/>
-              </a:ext>
-            </a:extLst>
-          </p:cNvPr>
-          <p:cNvGraphicFramePr>
-            <a:graphicFrameLocks/>
-          </p:cNvGraphicFramePr>
-          <p:nvPr>
-            <p:extLst>
-              <p:ext uri="{D42A27DB-BD31-4B8C-83A1-F6EECF244321}">
-                <p14:modId xmlns:p14="http://schemas.microsoft.com/office/powerpoint/2010/main" val="1363344502"/>
-              </p:ext>
-            </p:extLst>
-          </p:nvPr>
-        </p:nvGraphicFramePr>
-        <p:xfrm>
-          <a:off x="838197" y="1825625"/>
-          <a:ext cx="7070387" cy="4351338"/>
-        </p:xfrm>
-        <a:graphic>
-          <a:graphicData uri="http://schemas.openxmlformats.org/drawingml/2006/chart">
-            <c:chart xmlns:c="http://schemas.openxmlformats.org/drawingml/2006/chart" xmlns:r="http://schemas.openxmlformats.org/officeDocument/2006/relationships" r:id="rId2"/>
-          </a:graphicData>
-        </a:graphic>
-      </p:graphicFrame>
-      <p:sp>
-        <p:nvSpPr>
-          <p:cNvPr id="2" name="Tytuł 1">
-            <a:extLst>
-              <a:ext uri="{FF2B5EF4-FFF2-40B4-BE49-F238E27FC236}">
-                <a16:creationId xmlns:a16="http://schemas.microsoft.com/office/drawing/2014/main" id="{E9460EE4-EA64-CC2B-6927-2112E5725B79}"/>
-              </a:ext>
-            </a:extLst>
-          </p:cNvPr>
-          <p:cNvSpPr>
-            <a:spLocks noGrp="1"/>
-          </p:cNvSpPr>
-          <p:nvPr>
-            <p:ph type="title"/>
-          </p:nvPr>
-        </p:nvSpPr>
-        <p:spPr/>
-        <p:txBody>
-          <a:bodyPr/>
-          <a:lstStyle/>
-          <a:p>
-            <a:r>
-              <a:rPr lang="pl-PL" dirty="0"/>
-              <a:t>Kiedy szukamy informacji</a:t>
-            </a:r>
-          </a:p>
-        </p:txBody>
-      </p:sp>
-      <p:sp>
-        <p:nvSpPr>
-          <p:cNvPr id="11" name="pole tekstowe 10">
-            <a:extLst>
-              <a:ext uri="{FF2B5EF4-FFF2-40B4-BE49-F238E27FC236}">
-                <a16:creationId xmlns:a16="http://schemas.microsoft.com/office/drawing/2014/main" id="{6408B14C-EEE3-F15A-BE30-968444DB9FBB}"/>
-              </a:ext>
-            </a:extLst>
-          </p:cNvPr>
-          <p:cNvSpPr txBox="1"/>
-          <p:nvPr/>
-        </p:nvSpPr>
-        <p:spPr>
-          <a:xfrm>
-            <a:off x="7908583" y="1825625"/>
-            <a:ext cx="3445216" cy="1815882"/>
-          </a:xfrm>
-          <a:prstGeom prst="rect">
-            <a:avLst/>
-          </a:prstGeom>
-          <a:noFill/>
-          <a:ln w="38100">
-            <a:solidFill>
-              <a:schemeClr val="accent5"/>
-            </a:solidFill>
-          </a:ln>
-        </p:spPr>
-        <p:txBody>
-          <a:bodyPr wrap="square" rtlCol="0">
-            <a:spAutoFit/>
-          </a:bodyPr>
-          <a:lstStyle/>
-          <a:p>
-            <a:pPr algn="ctr"/>
-            <a:r>
-              <a:rPr lang="pl-PL" sz="1600" dirty="0">
-                <a:solidFill>
-                  <a:schemeClr val="tx2"/>
-                </a:solidFill>
-              </a:rPr>
-              <a:t>Zwiększenie ruchu na stronach Wikipedii powodują wydarzenia wywołujące różne emocje. Są to zarówno tragedie – śmierć, wojna czy katastrofa, oraz pozytywne jak sukcesy sportowe.</a:t>
-            </a:r>
-          </a:p>
-        </p:txBody>
-      </p:sp>
-      <p:sp>
-        <p:nvSpPr>
-          <p:cNvPr id="13" name="pole tekstowe 12">
-            <a:extLst>
-              <a:ext uri="{FF2B5EF4-FFF2-40B4-BE49-F238E27FC236}">
-                <a16:creationId xmlns:a16="http://schemas.microsoft.com/office/drawing/2014/main" id="{B1DB5434-4B8C-EEA6-8442-37AEBEBCCCC8}"/>
-              </a:ext>
-            </a:extLst>
-          </p:cNvPr>
-          <p:cNvSpPr txBox="1"/>
-          <p:nvPr/>
-        </p:nvSpPr>
-        <p:spPr>
-          <a:xfrm>
-            <a:off x="7908583" y="4001294"/>
-            <a:ext cx="3445215" cy="1323439"/>
-          </a:xfrm>
-          <a:prstGeom prst="rect">
-            <a:avLst/>
-          </a:prstGeom>
-          <a:noFill/>
-          <a:ln w="38100">
-            <a:solidFill>
-              <a:schemeClr val="accent2"/>
-            </a:solidFill>
-          </a:ln>
-        </p:spPr>
-        <p:txBody>
-          <a:bodyPr wrap="square" rtlCol="0">
-            <a:spAutoFit/>
-          </a:bodyPr>
-          <a:lstStyle/>
-          <a:p>
-            <a:pPr algn="ctr"/>
-            <a:r>
-              <a:rPr lang="pl-PL" sz="1600" dirty="0">
-                <a:solidFill>
-                  <a:schemeClr val="tx2"/>
-                </a:solidFill>
-              </a:rPr>
-              <a:t>Na wzrost wyświetleń wpływają również szeroko komentowane doniesienia medialne oraz nowe produkcje popkultury.</a:t>
-            </a:r>
-          </a:p>
-        </p:txBody>
-      </p:sp>
-      <p:sp>
-        <p:nvSpPr>
-          <p:cNvPr id="4" name="pole tekstowe 3">
-            <a:extLst>
-              <a:ext uri="{FF2B5EF4-FFF2-40B4-BE49-F238E27FC236}">
-                <a16:creationId xmlns:a16="http://schemas.microsoft.com/office/drawing/2014/main" id="{FF2E79AD-B041-5ADB-B7D6-BE50C8AFBB59}"/>
-              </a:ext>
-            </a:extLst>
-          </p:cNvPr>
-          <p:cNvSpPr txBox="1"/>
-          <p:nvPr/>
-        </p:nvSpPr>
-        <p:spPr>
-          <a:xfrm>
-            <a:off x="7908583" y="5592188"/>
-            <a:ext cx="3445215" cy="584775"/>
-          </a:xfrm>
-          <a:prstGeom prst="rect">
-            <a:avLst/>
-          </a:prstGeom>
-          <a:noFill/>
-          <a:ln w="38100">
-            <a:solidFill>
-              <a:schemeClr val="accent6"/>
-            </a:solidFill>
-          </a:ln>
-        </p:spPr>
-        <p:txBody>
-          <a:bodyPr wrap="square" rtlCol="0">
-            <a:spAutoFit/>
-          </a:bodyPr>
-          <a:lstStyle/>
-          <a:p>
-            <a:pPr algn="ctr"/>
-            <a:r>
-              <a:rPr lang="pl-PL" sz="1600" dirty="0">
-                <a:solidFill>
-                  <a:schemeClr val="tx2"/>
-                </a:solidFill>
-              </a:rPr>
-              <a:t>Za każdą kategorią kryją się konkretne historie.</a:t>
-            </a:r>
-          </a:p>
-        </p:txBody>
-      </p:sp>
-      <p:sp>
-        <p:nvSpPr>
-          <p:cNvPr id="5" name="pole tekstowe 4">
-            <a:extLst>
-              <a:ext uri="{FF2B5EF4-FFF2-40B4-BE49-F238E27FC236}">
-                <a16:creationId xmlns:a16="http://schemas.microsoft.com/office/drawing/2014/main" id="{9B841B65-AF2F-A5E9-49C9-16D3F6E1F5D2}"/>
-              </a:ext>
-            </a:extLst>
-          </p:cNvPr>
-          <p:cNvSpPr txBox="1"/>
-          <p:nvPr/>
-        </p:nvSpPr>
-        <p:spPr>
-          <a:xfrm>
-            <a:off x="838199" y="6251109"/>
-            <a:ext cx="9426102" cy="276999"/>
-          </a:xfrm>
-          <a:prstGeom prst="rect">
-            <a:avLst/>
-          </a:prstGeom>
-          <a:noFill/>
-        </p:spPr>
-        <p:txBody>
-          <a:bodyPr wrap="square" rtlCol="0">
-            <a:spAutoFit/>
-          </a:bodyPr>
-          <a:lstStyle/>
-          <a:p>
-            <a:r>
-              <a:rPr lang="pl-PL" sz="1200" dirty="0">
-                <a:solidFill>
-                  <a:schemeClr val="tx2"/>
-                </a:solidFill>
-              </a:rPr>
-              <a:t>Kategorie dopasowane przez model językowy</a:t>
-            </a:r>
-          </a:p>
-        </p:txBody>
-      </p:sp>
-    </p:spTree>
-    <p:extLst>
-      <p:ext uri="{BB962C8B-B14F-4D97-AF65-F5344CB8AC3E}">
-        <p14:creationId xmlns:p14="http://schemas.microsoft.com/office/powerpoint/2010/main" val="3735999873"/>
-      </p:ext>
-    </p:extLst>
-  </p:cSld>
-  <p:clrMapOvr>
-    <a:masterClrMapping/>
-  </p:clrMapOvr>
-</p:sld>
-</file>
-
-<file path=ppt/slides/slide5.xml><?xml version="1.0" encoding="utf-8"?>
-<p:sld xmlns:a="http://schemas.openxmlformats.org/drawingml/2006/main" xmlns:r="http://schemas.openxmlformats.org/officeDocument/2006/relationships" xmlns:p="http://schemas.openxmlformats.org/presentationml/2006/main">
-  <p:cSld>
-    <p:spTree>
-      <p:nvGrpSpPr>
-        <p:cNvPr id="1" name="">
-          <a:extLst>
-            <a:ext uri="{FF2B5EF4-FFF2-40B4-BE49-F238E27FC236}">
-              <a16:creationId xmlns:a16="http://schemas.microsoft.com/office/drawing/2014/main" id="{33655D46-B436-0687-F0BE-76004710B440}"/>
-            </a:ext>
-          </a:extLst>
-        </p:cNvPr>
-        <p:cNvGrpSpPr/>
-        <p:nvPr/>
-      </p:nvGrpSpPr>
-      <p:grpSpPr>
-        <a:xfrm>
-          <a:off x="0" y="0"/>
-          <a:ext cx="0" cy="0"/>
-          <a:chOff x="0" y="0"/>
-          <a:chExt cx="0" cy="0"/>
-        </a:xfrm>
-      </p:grpSpPr>
-      <p:graphicFrame>
-        <p:nvGraphicFramePr>
-          <p:cNvPr id="6" name="Symbol zastępczy zawartości 5">
-            <a:extLst>
-              <a:ext uri="{FF2B5EF4-FFF2-40B4-BE49-F238E27FC236}">
-                <a16:creationId xmlns:a16="http://schemas.microsoft.com/office/drawing/2014/main" id="{AEDA1524-37FE-05DD-A0C6-B5A1DD4D5089}"/>
-              </a:ext>
-            </a:extLst>
-          </p:cNvPr>
-          <p:cNvGraphicFramePr>
-            <a:graphicFrameLocks noGrp="1"/>
-          </p:cNvGraphicFramePr>
-          <p:nvPr>
-            <p:ph idx="1"/>
-            <p:extLst>
-              <p:ext uri="{D42A27DB-BD31-4B8C-83A1-F6EECF244321}">
-                <p14:modId xmlns:p14="http://schemas.microsoft.com/office/powerpoint/2010/main" val="1298990601"/>
-              </p:ext>
-            </p:extLst>
-          </p:nvPr>
-        </p:nvGraphicFramePr>
-        <p:xfrm>
-          <a:off x="838200" y="1825625"/>
-          <a:ext cx="7062279" cy="4351338"/>
-        </p:xfrm>
-        <a:graphic>
-          <a:graphicData uri="http://schemas.openxmlformats.org/drawingml/2006/chart">
-            <c:chart xmlns:c="http://schemas.openxmlformats.org/drawingml/2006/chart" xmlns:r="http://schemas.openxmlformats.org/officeDocument/2006/relationships" r:id="rId2"/>
-          </a:graphicData>
-        </a:graphic>
-      </p:graphicFrame>
-      <p:sp>
-        <p:nvSpPr>
-          <p:cNvPr id="2" name="Tytuł 1">
-            <a:extLst>
-              <a:ext uri="{FF2B5EF4-FFF2-40B4-BE49-F238E27FC236}">
-                <a16:creationId xmlns:a16="http://schemas.microsoft.com/office/drawing/2014/main" id="{7A1D4BB3-9918-D94B-07CC-A46844FEA4F1}"/>
-              </a:ext>
-            </a:extLst>
-          </p:cNvPr>
-          <p:cNvSpPr>
-            <a:spLocks noGrp="1"/>
-          </p:cNvSpPr>
-          <p:nvPr>
-            <p:ph type="title"/>
-          </p:nvPr>
-        </p:nvSpPr>
-        <p:spPr/>
-        <p:txBody>
-          <a:bodyPr/>
-          <a:lstStyle/>
-          <a:p>
-            <a:r>
-              <a:rPr lang="pl-PL" dirty="0"/>
-              <a:t>Elżbieta II – śmierć i wesele</a:t>
-            </a:r>
-          </a:p>
-        </p:txBody>
-      </p:sp>
-      <p:sp>
-        <p:nvSpPr>
-          <p:cNvPr id="8" name="Symbol zastępczy zawartości 4">
-            <a:extLst>
-              <a:ext uri="{FF2B5EF4-FFF2-40B4-BE49-F238E27FC236}">
-                <a16:creationId xmlns:a16="http://schemas.microsoft.com/office/drawing/2014/main" id="{3CD9D0DB-9DFC-5821-4BF0-47CA446729DD}"/>
-              </a:ext>
-            </a:extLst>
-          </p:cNvPr>
-          <p:cNvSpPr txBox="1">
-            <a:spLocks/>
-          </p:cNvSpPr>
-          <p:nvPr/>
-        </p:nvSpPr>
-        <p:spPr>
-          <a:xfrm>
-            <a:off x="7908583" y="1825625"/>
-            <a:ext cx="3453319" cy="4008982"/>
-          </a:xfrm>
-          <a:prstGeom prst="rect">
-            <a:avLst/>
-          </a:prstGeom>
-        </p:spPr>
-        <p:txBody>
-          <a:bodyPr vert="horz" lIns="91440" tIns="45720" rIns="91440" bIns="45720" rtlCol="0">
-            <a:normAutofit/>
-          </a:bodyPr>
-          <a:lstStyle>
-            <a:lvl1pPr marL="228600" indent="-228600" algn="l" defTabSz="914400" rtl="0" eaLnBrk="1" latinLnBrk="0" hangingPunct="1">
-              <a:lnSpc>
-                <a:spcPct val="90000"/>
-              </a:lnSpc>
-              <a:spcBef>
-                <a:spcPts val="1000"/>
-              </a:spcBef>
-              <a:buFont typeface="Arial" panose="020B0604020202020204" pitchFamily="34" charset="0"/>
-              <a:buChar char="•"/>
-              <a:defRPr sz="2800" kern="1200">
-                <a:solidFill>
-                  <a:schemeClr val="tx1"/>
-                </a:solidFill>
-                <a:latin typeface="+mn-lt"/>
-                <a:ea typeface="+mn-ea"/>
-                <a:cs typeface="+mn-cs"/>
-              </a:defRPr>
-            </a:lvl1pPr>
-            <a:lvl2pPr marL="685800" indent="-228600" algn="l" defTabSz="914400" rtl="0" eaLnBrk="1" latinLnBrk="0" hangingPunct="1">
-              <a:lnSpc>
-                <a:spcPct val="90000"/>
-              </a:lnSpc>
-              <a:spcBef>
-                <a:spcPts val="500"/>
-              </a:spcBef>
-              <a:buFont typeface="Arial" panose="020B0604020202020204" pitchFamily="34" charset="0"/>
-              <a:buChar char="•"/>
-              <a:defRPr sz="2400" kern="1200">
-                <a:solidFill>
-                  <a:schemeClr val="tx1"/>
-                </a:solidFill>
-                <a:latin typeface="+mn-lt"/>
-                <a:ea typeface="+mn-ea"/>
-                <a:cs typeface="+mn-cs"/>
-              </a:defRPr>
-            </a:lvl2pPr>
-            <a:lvl3pPr marL="1143000" indent="-228600" algn="l" defTabSz="914400" rtl="0" eaLnBrk="1" latinLnBrk="0" hangingPunct="1">
-              <a:lnSpc>
-                <a:spcPct val="90000"/>
-              </a:lnSpc>
-              <a:spcBef>
-                <a:spcPts val="500"/>
-              </a:spcBef>
-              <a:buFont typeface="Arial" panose="020B0604020202020204" pitchFamily="34" charset="0"/>
-              <a:buChar char="•"/>
-              <a:defRPr sz="2000" kern="1200">
-                <a:solidFill>
-                  <a:schemeClr val="tx1"/>
-                </a:solidFill>
-                <a:latin typeface="+mn-lt"/>
-                <a:ea typeface="+mn-ea"/>
-                <a:cs typeface="+mn-cs"/>
-              </a:defRPr>
-            </a:lvl3pPr>
-            <a:lvl4pPr marL="1600200" indent="-228600" algn="l" defTabSz="914400" rtl="0" eaLnBrk="1" latinLnBrk="0" hangingPunct="1">
-              <a:lnSpc>
-                <a:spcPct val="90000"/>
-              </a:lnSpc>
-              <a:spcBef>
-                <a:spcPts val="500"/>
-              </a:spcBef>
-              <a:buFont typeface="Arial" panose="020B0604020202020204" pitchFamily="34" charset="0"/>
-              <a:buChar char="•"/>
-              <a:defRPr sz="1800" kern="1200">
-                <a:solidFill>
-                  <a:schemeClr val="tx1"/>
-                </a:solidFill>
-                <a:latin typeface="+mn-lt"/>
-                <a:ea typeface="+mn-ea"/>
-                <a:cs typeface="+mn-cs"/>
-              </a:defRPr>
-            </a:lvl4pPr>
-            <a:lvl5pPr marL="2057400" indent="-228600" algn="l" defTabSz="914400" rtl="0" eaLnBrk="1" latinLnBrk="0" hangingPunct="1">
-              <a:lnSpc>
-                <a:spcPct val="90000"/>
-              </a:lnSpc>
-              <a:spcBef>
-                <a:spcPts val="500"/>
-              </a:spcBef>
-              <a:buFont typeface="Arial" panose="020B0604020202020204" pitchFamily="34" charset="0"/>
-              <a:buChar char="•"/>
-              <a:defRPr sz="1800" kern="1200">
-                <a:solidFill>
-                  <a:schemeClr val="tx1"/>
-                </a:solidFill>
-                <a:latin typeface="+mn-lt"/>
-                <a:ea typeface="+mn-ea"/>
-                <a:cs typeface="+mn-cs"/>
-              </a:defRPr>
-            </a:lvl5pPr>
-            <a:lvl6pPr marL="2514600" indent="-228600" algn="l" defTabSz="914400" rtl="0" eaLnBrk="1" latinLnBrk="0" hangingPunct="1">
-              <a:lnSpc>
-                <a:spcPct val="90000"/>
-              </a:lnSpc>
-              <a:spcBef>
-                <a:spcPts val="500"/>
-              </a:spcBef>
-              <a:buFont typeface="Arial" panose="020B0604020202020204" pitchFamily="34" charset="0"/>
-              <a:buChar char="•"/>
-              <a:defRPr sz="1800" kern="1200">
-                <a:solidFill>
-                  <a:schemeClr val="tx1"/>
-                </a:solidFill>
-                <a:latin typeface="+mn-lt"/>
-                <a:ea typeface="+mn-ea"/>
-                <a:cs typeface="+mn-cs"/>
-              </a:defRPr>
-            </a:lvl6pPr>
-            <a:lvl7pPr marL="2971800" indent="-228600" algn="l" defTabSz="914400" rtl="0" eaLnBrk="1" latinLnBrk="0" hangingPunct="1">
-              <a:lnSpc>
-                <a:spcPct val="90000"/>
-              </a:lnSpc>
-              <a:spcBef>
-                <a:spcPts val="500"/>
-              </a:spcBef>
-              <a:buFont typeface="Arial" panose="020B0604020202020204" pitchFamily="34" charset="0"/>
-              <a:buChar char="•"/>
-              <a:defRPr sz="1800" kern="1200">
-                <a:solidFill>
-                  <a:schemeClr val="tx1"/>
-                </a:solidFill>
-                <a:latin typeface="+mn-lt"/>
-                <a:ea typeface="+mn-ea"/>
-                <a:cs typeface="+mn-cs"/>
-              </a:defRPr>
-            </a:lvl7pPr>
-            <a:lvl8pPr marL="3429000" indent="-228600" algn="l" defTabSz="914400" rtl="0" eaLnBrk="1" latinLnBrk="0" hangingPunct="1">
-              <a:lnSpc>
-                <a:spcPct val="90000"/>
-              </a:lnSpc>
-              <a:spcBef>
-                <a:spcPts val="500"/>
-              </a:spcBef>
-              <a:buFont typeface="Arial" panose="020B0604020202020204" pitchFamily="34" charset="0"/>
-              <a:buChar char="•"/>
-              <a:defRPr sz="1800" kern="1200">
-                <a:solidFill>
-                  <a:schemeClr val="tx1"/>
-                </a:solidFill>
-                <a:latin typeface="+mn-lt"/>
-                <a:ea typeface="+mn-ea"/>
-                <a:cs typeface="+mn-cs"/>
-              </a:defRPr>
-            </a:lvl8pPr>
-            <a:lvl9pPr marL="3886200" indent="-228600" algn="l" defTabSz="914400" rtl="0" eaLnBrk="1" latinLnBrk="0" hangingPunct="1">
-              <a:lnSpc>
-                <a:spcPct val="90000"/>
-              </a:lnSpc>
-              <a:spcBef>
-                <a:spcPts val="500"/>
-              </a:spcBef>
-              <a:buFont typeface="Arial" panose="020B0604020202020204" pitchFamily="34" charset="0"/>
-              <a:buChar char="•"/>
-              <a:defRPr sz="1800" kern="1200">
-                <a:solidFill>
-                  <a:schemeClr val="tx1"/>
-                </a:solidFill>
-                <a:latin typeface="+mn-lt"/>
-                <a:ea typeface="+mn-ea"/>
-                <a:cs typeface="+mn-cs"/>
-              </a:defRPr>
-            </a:lvl9pPr>
-          </a:lstStyle>
-          <a:p>
-            <a:pPr marL="0" indent="0" algn="ctr">
-              <a:lnSpc>
-                <a:spcPct val="100000"/>
-              </a:lnSpc>
-              <a:buFont typeface="Arial" panose="020B0604020202020204" pitchFamily="34" charset="0"/>
-              <a:buNone/>
-            </a:pPr>
-            <a:r>
-              <a:rPr lang="pl-PL" sz="1800" dirty="0">
-                <a:solidFill>
-                  <a:schemeClr val="tx2"/>
-                </a:solidFill>
-              </a:rPr>
-              <a:t>Największe zainteresowanie stroną Elżbiety II wynika z Jej śmierci oraz śmierci Jej męża – Księcia Filipa. Mniejsze, acz znaczące skoki w ruchu generowane są przez tematy medialne, jak obchody rocznicy ślubu czy ślub Księcia Harry’ego </a:t>
-            </a:r>
-            <a:br>
-              <a:rPr lang="pl-PL" sz="1800" dirty="0">
-                <a:solidFill>
-                  <a:schemeClr val="tx2"/>
-                </a:solidFill>
-              </a:rPr>
-            </a:br>
-            <a:r>
-              <a:rPr lang="pl-PL" sz="1800" dirty="0">
-                <a:solidFill>
-                  <a:schemeClr val="tx2"/>
-                </a:solidFill>
-              </a:rPr>
-              <a:t>z </a:t>
-            </a:r>
-            <a:r>
-              <a:rPr lang="pl-PL" sz="1800" dirty="0" err="1">
-                <a:solidFill>
-                  <a:schemeClr val="tx2"/>
-                </a:solidFill>
-              </a:rPr>
-              <a:t>Meghan</a:t>
-            </a:r>
-            <a:r>
-              <a:rPr lang="pl-PL" sz="1800" dirty="0">
-                <a:solidFill>
-                  <a:schemeClr val="tx2"/>
-                </a:solidFill>
-              </a:rPr>
-              <a:t> </a:t>
-            </a:r>
-            <a:r>
-              <a:rPr lang="pl-PL" sz="1800" dirty="0" err="1">
-                <a:solidFill>
-                  <a:schemeClr val="tx2"/>
-                </a:solidFill>
-              </a:rPr>
-              <a:t>Markle</a:t>
-            </a:r>
-            <a:r>
-              <a:rPr lang="pl-PL" sz="1800" dirty="0">
-                <a:solidFill>
-                  <a:schemeClr val="tx2"/>
-                </a:solidFill>
-              </a:rPr>
-              <a:t>.</a:t>
-            </a:r>
-          </a:p>
-        </p:txBody>
-      </p:sp>
-    </p:spTree>
-    <p:extLst>
-      <p:ext uri="{BB962C8B-B14F-4D97-AF65-F5344CB8AC3E}">
-        <p14:creationId xmlns:p14="http://schemas.microsoft.com/office/powerpoint/2010/main" val="841833921"/>
-      </p:ext>
-    </p:extLst>
-  </p:cSld>
-  <p:clrMapOvr>
-    <a:masterClrMapping/>
-  </p:clrMapOvr>
-</p:sld>
-</file>
-
-<file path=ppt/slides/slide6.xml><?xml version="1.0" encoding="utf-8"?>
-<p:sld xmlns:a="http://schemas.openxmlformats.org/drawingml/2006/main" xmlns:r="http://schemas.openxmlformats.org/officeDocument/2006/relationships" xmlns:p="http://schemas.openxmlformats.org/presentationml/2006/main">
-  <p:cSld>
-    <p:spTree>
-      <p:nvGrpSpPr>
-        <p:cNvPr id="1" name="">
-          <a:extLst>
-            <a:ext uri="{FF2B5EF4-FFF2-40B4-BE49-F238E27FC236}">
-              <a16:creationId xmlns:a16="http://schemas.microsoft.com/office/drawing/2014/main" id="{D9F64312-CD02-FC4C-F8DD-7C079AED7D60}"/>
-            </a:ext>
-          </a:extLst>
-        </p:cNvPr>
-        <p:cNvGrpSpPr/>
-        <p:nvPr/>
-      </p:nvGrpSpPr>
-      <p:grpSpPr>
-        <a:xfrm>
-          <a:off x="0" y="0"/>
-          <a:ext cx="0" cy="0"/>
-          <a:chOff x="0" y="0"/>
-          <a:chExt cx="0" cy="0"/>
-        </a:xfrm>
-      </p:grpSpPr>
-      <p:graphicFrame>
-        <p:nvGraphicFramePr>
-          <p:cNvPr id="6" name="Symbol zastępczy zawartości 5">
-            <a:extLst>
-              <a:ext uri="{FF2B5EF4-FFF2-40B4-BE49-F238E27FC236}">
-                <a16:creationId xmlns:a16="http://schemas.microsoft.com/office/drawing/2014/main" id="{09D98903-2D8C-F765-284D-96F1B8D81EE6}"/>
-              </a:ext>
-            </a:extLst>
-          </p:cNvPr>
-          <p:cNvGraphicFramePr>
-            <a:graphicFrameLocks noGrp="1"/>
-          </p:cNvGraphicFramePr>
-          <p:nvPr>
-            <p:ph idx="1"/>
-            <p:extLst>
-              <p:ext uri="{D42A27DB-BD31-4B8C-83A1-F6EECF244321}">
-                <p14:modId xmlns:p14="http://schemas.microsoft.com/office/powerpoint/2010/main" val="2053739901"/>
-              </p:ext>
-            </p:extLst>
-          </p:nvPr>
-        </p:nvGraphicFramePr>
-        <p:xfrm>
-          <a:off x="838199" y="1825625"/>
-          <a:ext cx="7070383" cy="4351338"/>
-        </p:xfrm>
-        <a:graphic>
-          <a:graphicData uri="http://schemas.openxmlformats.org/drawingml/2006/chart">
-            <c:chart xmlns:c="http://schemas.openxmlformats.org/drawingml/2006/chart" xmlns:r="http://schemas.openxmlformats.org/officeDocument/2006/relationships" r:id="rId2"/>
-          </a:graphicData>
-        </a:graphic>
-      </p:graphicFrame>
-      <p:sp>
-        <p:nvSpPr>
-          <p:cNvPr id="2" name="Tytuł 1">
-            <a:extLst>
-              <a:ext uri="{FF2B5EF4-FFF2-40B4-BE49-F238E27FC236}">
-                <a16:creationId xmlns:a16="http://schemas.microsoft.com/office/drawing/2014/main" id="{2884AD0D-7CD0-3713-508A-FC0699E95381}"/>
-              </a:ext>
-            </a:extLst>
-          </p:cNvPr>
-          <p:cNvSpPr>
-            <a:spLocks noGrp="1"/>
-          </p:cNvSpPr>
-          <p:nvPr>
-            <p:ph type="title"/>
-          </p:nvPr>
-        </p:nvSpPr>
-        <p:spPr/>
-        <p:txBody>
-          <a:bodyPr>
-            <a:normAutofit/>
-          </a:bodyPr>
-          <a:lstStyle/>
-          <a:p>
-            <a:r>
-              <a:rPr lang="pl-PL" dirty="0"/>
-              <a:t>Sukcesy Igi Świątek</a:t>
-            </a:r>
-          </a:p>
-        </p:txBody>
-      </p:sp>
-      <p:sp>
-        <p:nvSpPr>
-          <p:cNvPr id="8" name="Symbol zastępczy zawartości 4">
-            <a:extLst>
-              <a:ext uri="{FF2B5EF4-FFF2-40B4-BE49-F238E27FC236}">
-                <a16:creationId xmlns:a16="http://schemas.microsoft.com/office/drawing/2014/main" id="{9B69F184-3F92-17F2-114A-2CE5AD94E7BB}"/>
-              </a:ext>
-            </a:extLst>
-          </p:cNvPr>
-          <p:cNvSpPr txBox="1">
-            <a:spLocks/>
-          </p:cNvSpPr>
-          <p:nvPr/>
-        </p:nvSpPr>
-        <p:spPr>
-          <a:xfrm>
-            <a:off x="7904531" y="1825625"/>
-            <a:ext cx="3453319" cy="4351338"/>
-          </a:xfrm>
-          <a:prstGeom prst="rect">
-            <a:avLst/>
-          </a:prstGeom>
-        </p:spPr>
-        <p:txBody>
-          <a:bodyPr vert="horz" lIns="91440" tIns="45720" rIns="91440" bIns="45720" rtlCol="0">
-            <a:normAutofit/>
-          </a:bodyPr>
-          <a:lstStyle>
-            <a:lvl1pPr marL="228600" indent="-228600" algn="l" defTabSz="914400" rtl="0" eaLnBrk="1" latinLnBrk="0" hangingPunct="1">
-              <a:lnSpc>
-                <a:spcPct val="90000"/>
-              </a:lnSpc>
-              <a:spcBef>
-                <a:spcPts val="1000"/>
-              </a:spcBef>
-              <a:buFont typeface="Arial" panose="020B0604020202020204" pitchFamily="34" charset="0"/>
-              <a:buChar char="•"/>
-              <a:defRPr sz="2800" kern="1200">
-                <a:solidFill>
-                  <a:schemeClr val="tx1"/>
-                </a:solidFill>
-                <a:latin typeface="+mn-lt"/>
-                <a:ea typeface="+mn-ea"/>
-                <a:cs typeface="+mn-cs"/>
-              </a:defRPr>
-            </a:lvl1pPr>
-            <a:lvl2pPr marL="685800" indent="-228600" algn="l" defTabSz="914400" rtl="0" eaLnBrk="1" latinLnBrk="0" hangingPunct="1">
-              <a:lnSpc>
-                <a:spcPct val="90000"/>
-              </a:lnSpc>
-              <a:spcBef>
-                <a:spcPts val="500"/>
-              </a:spcBef>
-              <a:buFont typeface="Arial" panose="020B0604020202020204" pitchFamily="34" charset="0"/>
-              <a:buChar char="•"/>
-              <a:defRPr sz="2400" kern="1200">
-                <a:solidFill>
-                  <a:schemeClr val="tx1"/>
-                </a:solidFill>
-                <a:latin typeface="+mn-lt"/>
-                <a:ea typeface="+mn-ea"/>
-                <a:cs typeface="+mn-cs"/>
-              </a:defRPr>
-            </a:lvl2pPr>
-            <a:lvl3pPr marL="1143000" indent="-228600" algn="l" defTabSz="914400" rtl="0" eaLnBrk="1" latinLnBrk="0" hangingPunct="1">
-              <a:lnSpc>
-                <a:spcPct val="90000"/>
-              </a:lnSpc>
-              <a:spcBef>
-                <a:spcPts val="500"/>
-              </a:spcBef>
-              <a:buFont typeface="Arial" panose="020B0604020202020204" pitchFamily="34" charset="0"/>
-              <a:buChar char="•"/>
-              <a:defRPr sz="2000" kern="1200">
-                <a:solidFill>
-                  <a:schemeClr val="tx1"/>
-                </a:solidFill>
-                <a:latin typeface="+mn-lt"/>
-                <a:ea typeface="+mn-ea"/>
-                <a:cs typeface="+mn-cs"/>
-              </a:defRPr>
-            </a:lvl3pPr>
-            <a:lvl4pPr marL="1600200" indent="-228600" algn="l" defTabSz="914400" rtl="0" eaLnBrk="1" latinLnBrk="0" hangingPunct="1">
-              <a:lnSpc>
-                <a:spcPct val="90000"/>
-              </a:lnSpc>
-              <a:spcBef>
-                <a:spcPts val="500"/>
-              </a:spcBef>
-              <a:buFont typeface="Arial" panose="020B0604020202020204" pitchFamily="34" charset="0"/>
-              <a:buChar char="•"/>
-              <a:defRPr sz="1800" kern="1200">
-                <a:solidFill>
-                  <a:schemeClr val="tx1"/>
-                </a:solidFill>
-                <a:latin typeface="+mn-lt"/>
-                <a:ea typeface="+mn-ea"/>
-                <a:cs typeface="+mn-cs"/>
-              </a:defRPr>
-            </a:lvl4pPr>
-            <a:lvl5pPr marL="2057400" indent="-228600" algn="l" defTabSz="914400" rtl="0" eaLnBrk="1" latinLnBrk="0" hangingPunct="1">
-              <a:lnSpc>
-                <a:spcPct val="90000"/>
-              </a:lnSpc>
-              <a:spcBef>
-                <a:spcPts val="500"/>
-              </a:spcBef>
-              <a:buFont typeface="Arial" panose="020B0604020202020204" pitchFamily="34" charset="0"/>
-              <a:buChar char="•"/>
-              <a:defRPr sz="1800" kern="1200">
-                <a:solidFill>
-                  <a:schemeClr val="tx1"/>
-                </a:solidFill>
-                <a:latin typeface="+mn-lt"/>
-                <a:ea typeface="+mn-ea"/>
-                <a:cs typeface="+mn-cs"/>
-              </a:defRPr>
-            </a:lvl5pPr>
-            <a:lvl6pPr marL="2514600" indent="-228600" algn="l" defTabSz="914400" rtl="0" eaLnBrk="1" latinLnBrk="0" hangingPunct="1">
-              <a:lnSpc>
-                <a:spcPct val="90000"/>
-              </a:lnSpc>
-              <a:spcBef>
-                <a:spcPts val="500"/>
-              </a:spcBef>
-              <a:buFont typeface="Arial" panose="020B0604020202020204" pitchFamily="34" charset="0"/>
-              <a:buChar char="•"/>
-              <a:defRPr sz="1800" kern="1200">
-                <a:solidFill>
-                  <a:schemeClr val="tx1"/>
-                </a:solidFill>
-                <a:latin typeface="+mn-lt"/>
-                <a:ea typeface="+mn-ea"/>
-                <a:cs typeface="+mn-cs"/>
-              </a:defRPr>
-            </a:lvl6pPr>
-            <a:lvl7pPr marL="2971800" indent="-228600" algn="l" defTabSz="914400" rtl="0" eaLnBrk="1" latinLnBrk="0" hangingPunct="1">
-              <a:lnSpc>
-                <a:spcPct val="90000"/>
-              </a:lnSpc>
-              <a:spcBef>
-                <a:spcPts val="500"/>
-              </a:spcBef>
-              <a:buFont typeface="Arial" panose="020B0604020202020204" pitchFamily="34" charset="0"/>
-              <a:buChar char="•"/>
-              <a:defRPr sz="1800" kern="1200">
-                <a:solidFill>
-                  <a:schemeClr val="tx1"/>
-                </a:solidFill>
-                <a:latin typeface="+mn-lt"/>
-                <a:ea typeface="+mn-ea"/>
-                <a:cs typeface="+mn-cs"/>
-              </a:defRPr>
-            </a:lvl7pPr>
-            <a:lvl8pPr marL="3429000" indent="-228600" algn="l" defTabSz="914400" rtl="0" eaLnBrk="1" latinLnBrk="0" hangingPunct="1">
-              <a:lnSpc>
-                <a:spcPct val="90000"/>
-              </a:lnSpc>
-              <a:spcBef>
-                <a:spcPts val="500"/>
-              </a:spcBef>
-              <a:buFont typeface="Arial" panose="020B0604020202020204" pitchFamily="34" charset="0"/>
-              <a:buChar char="•"/>
-              <a:defRPr sz="1800" kern="1200">
-                <a:solidFill>
-                  <a:schemeClr val="tx1"/>
-                </a:solidFill>
-                <a:latin typeface="+mn-lt"/>
-                <a:ea typeface="+mn-ea"/>
-                <a:cs typeface="+mn-cs"/>
-              </a:defRPr>
-            </a:lvl8pPr>
-            <a:lvl9pPr marL="3886200" indent="-228600" algn="l" defTabSz="914400" rtl="0" eaLnBrk="1" latinLnBrk="0" hangingPunct="1">
-              <a:lnSpc>
-                <a:spcPct val="90000"/>
-              </a:lnSpc>
-              <a:spcBef>
-                <a:spcPts val="500"/>
-              </a:spcBef>
-              <a:buFont typeface="Arial" panose="020B0604020202020204" pitchFamily="34" charset="0"/>
-              <a:buChar char="•"/>
-              <a:defRPr sz="1800" kern="1200">
-                <a:solidFill>
-                  <a:schemeClr val="tx1"/>
-                </a:solidFill>
-                <a:latin typeface="+mn-lt"/>
-                <a:ea typeface="+mn-ea"/>
-                <a:cs typeface="+mn-cs"/>
-              </a:defRPr>
-            </a:lvl9pPr>
-          </a:lstStyle>
-          <a:p>
-            <a:pPr marL="0" indent="0" algn="ctr">
+            <a:pPr marL="0" indent="0">
               <a:lnSpc>
                 <a:spcPct val="100000"/>
               </a:lnSpc>
               <a:buNone/>
             </a:pPr>
-            <a:r>
-              <a:rPr lang="pl-PL" sz="1800" dirty="0">
-                <a:solidFill>
-                  <a:schemeClr val="tx2"/>
-                </a:solidFill>
-              </a:rPr>
-              <a:t>Pięć największych szczytów wyświetleń strony Igi Świątek pochodzi </a:t>
-            </a:r>
-            <a:br>
-              <a:rPr lang="pl-PL" sz="1800" dirty="0">
-                <a:solidFill>
-                  <a:schemeClr val="tx2"/>
-                </a:solidFill>
-              </a:rPr>
-            </a:br>
-            <a:r>
-              <a:rPr lang="pl-PL" sz="1800" dirty="0">
-                <a:solidFill>
-                  <a:schemeClr val="tx2"/>
-                </a:solidFill>
-              </a:rPr>
-              <a:t>z wygranych turniejów wielkoszlemowych – czterech Rolanda Garrosa </a:t>
-            </a:r>
-            <a:br>
-              <a:rPr lang="pl-PL" sz="1800" dirty="0">
-                <a:solidFill>
-                  <a:schemeClr val="tx2"/>
-                </a:solidFill>
-              </a:rPr>
-            </a:br>
-            <a:r>
-              <a:rPr lang="pl-PL" sz="1800" dirty="0">
-                <a:solidFill>
-                  <a:schemeClr val="tx2"/>
-                </a:solidFill>
-              </a:rPr>
-              <a:t>i Wimbledonu. Ani spadek </a:t>
-            </a:r>
-            <a:br>
-              <a:rPr lang="pl-PL" sz="1800" dirty="0">
-                <a:solidFill>
-                  <a:schemeClr val="tx2"/>
-                </a:solidFill>
-              </a:rPr>
-            </a:br>
-            <a:r>
-              <a:rPr lang="pl-PL" sz="1800" dirty="0">
-                <a:solidFill>
-                  <a:schemeClr val="tx2"/>
-                </a:solidFill>
-              </a:rPr>
-              <a:t>z pierwszego miejsca klasyfikacji WTA, ani pozytywny wynik kontroli antydopingowej nie spowodowały takiego zainteresowania, jak spektakularne wygrane.</a:t>
-            </a:r>
-          </a:p>
-        </p:txBody>
-      </p:sp>
-    </p:spTree>
-    <p:extLst>
-      <p:ext uri="{BB962C8B-B14F-4D97-AF65-F5344CB8AC3E}">
-        <p14:creationId xmlns:p14="http://schemas.microsoft.com/office/powerpoint/2010/main" val="899832204"/>
-      </p:ext>
-    </p:extLst>
-  </p:cSld>
-  <p:clrMapOvr>
-    <a:masterClrMapping/>
-  </p:clrMapOvr>
-</p:sld>
-</file>
-
-<file path=ppt/slides/slide7.xml><?xml version="1.0" encoding="utf-8"?>
-<p:sld xmlns:a="http://schemas.openxmlformats.org/drawingml/2006/main" xmlns:r="http://schemas.openxmlformats.org/officeDocument/2006/relationships" xmlns:p="http://schemas.openxmlformats.org/presentationml/2006/main">
-  <p:cSld>
-    <p:spTree>
-      <p:nvGrpSpPr>
-        <p:cNvPr id="1" name="">
-          <a:extLst>
-            <a:ext uri="{FF2B5EF4-FFF2-40B4-BE49-F238E27FC236}">
-              <a16:creationId xmlns:a16="http://schemas.microsoft.com/office/drawing/2014/main" id="{0178FECD-C453-A5D0-4CEB-90324FAE3610}"/>
-            </a:ext>
-          </a:extLst>
-        </p:cNvPr>
-        <p:cNvGrpSpPr/>
-        <p:nvPr/>
-      </p:nvGrpSpPr>
-      <p:grpSpPr>
-        <a:xfrm>
-          <a:off x="0" y="0"/>
-          <a:ext cx="0" cy="0"/>
-          <a:chOff x="0" y="0"/>
-          <a:chExt cx="0" cy="0"/>
-        </a:xfrm>
-      </p:grpSpPr>
-      <p:graphicFrame>
-        <p:nvGraphicFramePr>
-          <p:cNvPr id="6" name="Symbol zastępczy zawartości 5">
-            <a:extLst>
-              <a:ext uri="{FF2B5EF4-FFF2-40B4-BE49-F238E27FC236}">
-                <a16:creationId xmlns:a16="http://schemas.microsoft.com/office/drawing/2014/main" id="{FA18856F-AC8A-DDEF-2221-BFA52CE49F8B}"/>
-              </a:ext>
-            </a:extLst>
-          </p:cNvPr>
-          <p:cNvGraphicFramePr>
-            <a:graphicFrameLocks noGrp="1"/>
-          </p:cNvGraphicFramePr>
-          <p:nvPr>
-            <p:ph idx="1"/>
-            <p:extLst>
-              <p:ext uri="{D42A27DB-BD31-4B8C-83A1-F6EECF244321}">
-                <p14:modId xmlns:p14="http://schemas.microsoft.com/office/powerpoint/2010/main" val="2812293934"/>
-              </p:ext>
-            </p:extLst>
-          </p:nvPr>
-        </p:nvGraphicFramePr>
-        <p:xfrm>
-          <a:off x="838199" y="1825625"/>
-          <a:ext cx="7062279" cy="4351338"/>
-        </p:xfrm>
-        <a:graphic>
-          <a:graphicData uri="http://schemas.openxmlformats.org/drawingml/2006/chart">
-            <c:chart xmlns:c="http://schemas.openxmlformats.org/drawingml/2006/chart" xmlns:r="http://schemas.openxmlformats.org/officeDocument/2006/relationships" r:id="rId2"/>
-          </a:graphicData>
-        </a:graphic>
-      </p:graphicFrame>
-      <p:sp>
-        <p:nvSpPr>
-          <p:cNvPr id="2" name="Tytuł 1">
-            <a:extLst>
-              <a:ext uri="{FF2B5EF4-FFF2-40B4-BE49-F238E27FC236}">
-                <a16:creationId xmlns:a16="http://schemas.microsoft.com/office/drawing/2014/main" id="{FE77D155-CF86-1E32-3C60-1EA6CD5099C7}"/>
-              </a:ext>
-            </a:extLst>
-          </p:cNvPr>
-          <p:cNvSpPr>
-            <a:spLocks noGrp="1"/>
-          </p:cNvSpPr>
-          <p:nvPr>
-            <p:ph type="title"/>
-          </p:nvPr>
-        </p:nvSpPr>
-        <p:spPr>
-          <a:xfrm>
-            <a:off x="838200" y="365125"/>
-            <a:ext cx="10796080" cy="1325563"/>
-          </a:xfrm>
-        </p:spPr>
-        <p:txBody>
-          <a:bodyPr>
-            <a:normAutofit/>
-          </a:bodyPr>
-          <a:lstStyle/>
-          <a:p>
-            <a:r>
-              <a:rPr lang="pl-PL" dirty="0"/>
-              <a:t>Drugie życie </a:t>
-            </a:r>
-            <a:r>
-              <a:rPr lang="pl-PL" dirty="0" err="1"/>
-              <a:t>Freddiego</a:t>
-            </a:r>
-            <a:r>
-              <a:rPr lang="pl-PL" dirty="0"/>
-              <a:t> </a:t>
-            </a:r>
-            <a:r>
-              <a:rPr lang="pl-PL" dirty="0" err="1"/>
-              <a:t>Mercury’ego</a:t>
-            </a:r>
-            <a:endParaRPr lang="pl-PL" dirty="0"/>
-          </a:p>
-        </p:txBody>
-      </p:sp>
-      <p:sp>
-        <p:nvSpPr>
-          <p:cNvPr id="8" name="Symbol zastępczy zawartości 4">
-            <a:extLst>
-              <a:ext uri="{FF2B5EF4-FFF2-40B4-BE49-F238E27FC236}">
-                <a16:creationId xmlns:a16="http://schemas.microsoft.com/office/drawing/2014/main" id="{44FA4A5A-2D15-6902-72CC-6462164612AC}"/>
-              </a:ext>
-            </a:extLst>
-          </p:cNvPr>
-          <p:cNvSpPr txBox="1">
-            <a:spLocks/>
-          </p:cNvSpPr>
-          <p:nvPr/>
-        </p:nvSpPr>
-        <p:spPr>
-          <a:xfrm>
-            <a:off x="7900478" y="1825625"/>
-            <a:ext cx="3453319" cy="4008982"/>
-          </a:xfrm>
-          <a:prstGeom prst="rect">
-            <a:avLst/>
-          </a:prstGeom>
-        </p:spPr>
-        <p:txBody>
-          <a:bodyPr vert="horz" lIns="91440" tIns="45720" rIns="91440" bIns="45720" rtlCol="0">
-            <a:normAutofit/>
-          </a:bodyPr>
-          <a:lstStyle>
-            <a:lvl1pPr marL="228600" indent="-228600" algn="l" defTabSz="914400" rtl="0" eaLnBrk="1" latinLnBrk="0" hangingPunct="1">
-              <a:lnSpc>
-                <a:spcPct val="90000"/>
-              </a:lnSpc>
-              <a:spcBef>
-                <a:spcPts val="1000"/>
-              </a:spcBef>
-              <a:buFont typeface="Arial" panose="020B0604020202020204" pitchFamily="34" charset="0"/>
-              <a:buChar char="•"/>
-              <a:defRPr sz="2800" kern="1200">
-                <a:solidFill>
-                  <a:schemeClr val="tx1"/>
-                </a:solidFill>
-                <a:latin typeface="+mn-lt"/>
-                <a:ea typeface="+mn-ea"/>
-                <a:cs typeface="+mn-cs"/>
-              </a:defRPr>
-            </a:lvl1pPr>
-            <a:lvl2pPr marL="685800" indent="-228600" algn="l" defTabSz="914400" rtl="0" eaLnBrk="1" latinLnBrk="0" hangingPunct="1">
-              <a:lnSpc>
-                <a:spcPct val="90000"/>
-              </a:lnSpc>
-              <a:spcBef>
-                <a:spcPts val="500"/>
-              </a:spcBef>
-              <a:buFont typeface="Arial" panose="020B0604020202020204" pitchFamily="34" charset="0"/>
-              <a:buChar char="•"/>
-              <a:defRPr sz="2400" kern="1200">
-                <a:solidFill>
-                  <a:schemeClr val="tx1"/>
-                </a:solidFill>
-                <a:latin typeface="+mn-lt"/>
-                <a:ea typeface="+mn-ea"/>
-                <a:cs typeface="+mn-cs"/>
-              </a:defRPr>
-            </a:lvl2pPr>
-            <a:lvl3pPr marL="1143000" indent="-228600" algn="l" defTabSz="914400" rtl="0" eaLnBrk="1" latinLnBrk="0" hangingPunct="1">
-              <a:lnSpc>
-                <a:spcPct val="90000"/>
-              </a:lnSpc>
-              <a:spcBef>
-                <a:spcPts val="500"/>
-              </a:spcBef>
-              <a:buFont typeface="Arial" panose="020B0604020202020204" pitchFamily="34" charset="0"/>
-              <a:buChar char="•"/>
-              <a:defRPr sz="2000" kern="1200">
-                <a:solidFill>
-                  <a:schemeClr val="tx1"/>
-                </a:solidFill>
-                <a:latin typeface="+mn-lt"/>
-                <a:ea typeface="+mn-ea"/>
-                <a:cs typeface="+mn-cs"/>
-              </a:defRPr>
-            </a:lvl3pPr>
-            <a:lvl4pPr marL="1600200" indent="-228600" algn="l" defTabSz="914400" rtl="0" eaLnBrk="1" latinLnBrk="0" hangingPunct="1">
-              <a:lnSpc>
-                <a:spcPct val="90000"/>
-              </a:lnSpc>
-              <a:spcBef>
-                <a:spcPts val="500"/>
-              </a:spcBef>
-              <a:buFont typeface="Arial" panose="020B0604020202020204" pitchFamily="34" charset="0"/>
-              <a:buChar char="•"/>
-              <a:defRPr sz="1800" kern="1200">
-                <a:solidFill>
-                  <a:schemeClr val="tx1"/>
-                </a:solidFill>
-                <a:latin typeface="+mn-lt"/>
-                <a:ea typeface="+mn-ea"/>
-                <a:cs typeface="+mn-cs"/>
-              </a:defRPr>
-            </a:lvl4pPr>
-            <a:lvl5pPr marL="2057400" indent="-228600" algn="l" defTabSz="914400" rtl="0" eaLnBrk="1" latinLnBrk="0" hangingPunct="1">
-              <a:lnSpc>
-                <a:spcPct val="90000"/>
-              </a:lnSpc>
-              <a:spcBef>
-                <a:spcPts val="500"/>
-              </a:spcBef>
-              <a:buFont typeface="Arial" panose="020B0604020202020204" pitchFamily="34" charset="0"/>
-              <a:buChar char="•"/>
-              <a:defRPr sz="1800" kern="1200">
-                <a:solidFill>
-                  <a:schemeClr val="tx1"/>
-                </a:solidFill>
-                <a:latin typeface="+mn-lt"/>
-                <a:ea typeface="+mn-ea"/>
-                <a:cs typeface="+mn-cs"/>
-              </a:defRPr>
-            </a:lvl5pPr>
-            <a:lvl6pPr marL="2514600" indent="-228600" algn="l" defTabSz="914400" rtl="0" eaLnBrk="1" latinLnBrk="0" hangingPunct="1">
-              <a:lnSpc>
-                <a:spcPct val="90000"/>
-              </a:lnSpc>
-              <a:spcBef>
-                <a:spcPts val="500"/>
-              </a:spcBef>
-              <a:buFont typeface="Arial" panose="020B0604020202020204" pitchFamily="34" charset="0"/>
-              <a:buChar char="•"/>
-              <a:defRPr sz="1800" kern="1200">
-                <a:solidFill>
-                  <a:schemeClr val="tx1"/>
-                </a:solidFill>
-                <a:latin typeface="+mn-lt"/>
-                <a:ea typeface="+mn-ea"/>
-                <a:cs typeface="+mn-cs"/>
-              </a:defRPr>
-            </a:lvl6pPr>
-            <a:lvl7pPr marL="2971800" indent="-228600" algn="l" defTabSz="914400" rtl="0" eaLnBrk="1" latinLnBrk="0" hangingPunct="1">
-              <a:lnSpc>
-                <a:spcPct val="90000"/>
-              </a:lnSpc>
-              <a:spcBef>
-                <a:spcPts val="500"/>
-              </a:spcBef>
-              <a:buFont typeface="Arial" panose="020B0604020202020204" pitchFamily="34" charset="0"/>
-              <a:buChar char="•"/>
-              <a:defRPr sz="1800" kern="1200">
-                <a:solidFill>
-                  <a:schemeClr val="tx1"/>
-                </a:solidFill>
-                <a:latin typeface="+mn-lt"/>
-                <a:ea typeface="+mn-ea"/>
-                <a:cs typeface="+mn-cs"/>
-              </a:defRPr>
-            </a:lvl7pPr>
-            <a:lvl8pPr marL="3429000" indent="-228600" algn="l" defTabSz="914400" rtl="0" eaLnBrk="1" latinLnBrk="0" hangingPunct="1">
-              <a:lnSpc>
-                <a:spcPct val="90000"/>
-              </a:lnSpc>
-              <a:spcBef>
-                <a:spcPts val="500"/>
-              </a:spcBef>
-              <a:buFont typeface="Arial" panose="020B0604020202020204" pitchFamily="34" charset="0"/>
-              <a:buChar char="•"/>
-              <a:defRPr sz="1800" kern="1200">
-                <a:solidFill>
-                  <a:schemeClr val="tx1"/>
-                </a:solidFill>
-                <a:latin typeface="+mn-lt"/>
-                <a:ea typeface="+mn-ea"/>
-                <a:cs typeface="+mn-cs"/>
-              </a:defRPr>
-            </a:lvl8pPr>
-            <a:lvl9pPr marL="3886200" indent="-228600" algn="l" defTabSz="914400" rtl="0" eaLnBrk="1" latinLnBrk="0" hangingPunct="1">
-              <a:lnSpc>
-                <a:spcPct val="90000"/>
-              </a:lnSpc>
-              <a:spcBef>
-                <a:spcPts val="500"/>
-              </a:spcBef>
-              <a:buFont typeface="Arial" panose="020B0604020202020204" pitchFamily="34" charset="0"/>
-              <a:buChar char="•"/>
-              <a:defRPr sz="1800" kern="1200">
-                <a:solidFill>
-                  <a:schemeClr val="tx1"/>
-                </a:solidFill>
-                <a:latin typeface="+mn-lt"/>
-                <a:ea typeface="+mn-ea"/>
-                <a:cs typeface="+mn-cs"/>
-              </a:defRPr>
-            </a:lvl9pPr>
-          </a:lstStyle>
-          <a:p>
-            <a:pPr marL="0" indent="0" algn="ctr">
-              <a:lnSpc>
-                <a:spcPct val="100000"/>
-              </a:lnSpc>
-              <a:buNone/>
-            </a:pPr>
-            <a:r>
-              <a:rPr lang="pl-PL" sz="1800" dirty="0">
-                <a:solidFill>
-                  <a:schemeClr val="tx2"/>
-                </a:solidFill>
-              </a:rPr>
-              <a:t>Historia </a:t>
-            </a:r>
-            <a:r>
-              <a:rPr lang="pl-PL" sz="1800" dirty="0" err="1">
-                <a:solidFill>
-                  <a:schemeClr val="tx2"/>
-                </a:solidFill>
-              </a:rPr>
-              <a:t>Freddiego</a:t>
-            </a:r>
-            <a:r>
-              <a:rPr lang="pl-PL" sz="1800" dirty="0">
-                <a:solidFill>
-                  <a:schemeClr val="tx2"/>
-                </a:solidFill>
-              </a:rPr>
-              <a:t> </a:t>
-            </a:r>
-            <a:r>
-              <a:rPr lang="pl-PL" sz="1800" dirty="0" err="1">
-                <a:solidFill>
-                  <a:schemeClr val="tx2"/>
-                </a:solidFill>
-              </a:rPr>
-              <a:t>Mercury'ego</a:t>
-            </a:r>
-            <a:r>
-              <a:rPr lang="pl-PL" sz="1800" dirty="0">
-                <a:solidFill>
-                  <a:schemeClr val="tx2"/>
-                </a:solidFill>
-              </a:rPr>
-              <a:t> pokazuje, </a:t>
-            </a:r>
-            <a:br>
-              <a:rPr lang="pl-PL" sz="1800" dirty="0">
-                <a:solidFill>
-                  <a:schemeClr val="tx2"/>
-                </a:solidFill>
-              </a:rPr>
-            </a:br>
-            <a:r>
-              <a:rPr lang="pl-PL" sz="1800" dirty="0">
-                <a:solidFill>
-                  <a:schemeClr val="tx2"/>
-                </a:solidFill>
-              </a:rPr>
-              <a:t>że media potrafią nadać drugie życie znanym postaciom. Premierze filmu i okrągłej rocznicy śmierci towarzyszył wyraźny wzrost zainteresowania jego biografią.</a:t>
-            </a:r>
-          </a:p>
-        </p:txBody>
-      </p:sp>
-    </p:spTree>
-    <p:extLst>
-      <p:ext uri="{BB962C8B-B14F-4D97-AF65-F5344CB8AC3E}">
-        <p14:creationId xmlns:p14="http://schemas.microsoft.com/office/powerpoint/2010/main" val="1523644545"/>
-      </p:ext>
-    </p:extLst>
-  </p:cSld>
-  <p:clrMapOvr>
-    <a:masterClrMapping/>
-  </p:clrMapOvr>
-</p:sld>
-</file>
-
-<file path=ppt/slides/slide8.xml><?xml version="1.0" encoding="utf-8"?>
-<p:sld xmlns:a="http://schemas.openxmlformats.org/drawingml/2006/main" xmlns:r="http://schemas.openxmlformats.org/officeDocument/2006/relationships" xmlns:p="http://schemas.openxmlformats.org/presentationml/2006/main">
-  <p:cSld>
-    <p:spTree>
-      <p:nvGrpSpPr>
-        <p:cNvPr id="1" name=""/>
-        <p:cNvGrpSpPr/>
-        <p:nvPr/>
-      </p:nvGrpSpPr>
-      <p:grpSpPr>
-        <a:xfrm>
-          <a:off x="0" y="0"/>
-          <a:ext cx="0" cy="0"/>
-          <a:chOff x="0" y="0"/>
-          <a:chExt cx="0" cy="0"/>
-        </a:xfrm>
-      </p:grpSpPr>
-      <p:graphicFrame>
-        <p:nvGraphicFramePr>
-          <p:cNvPr id="6" name="Symbol zastępczy zawartości 5">
-            <a:extLst>
-              <a:ext uri="{FF2B5EF4-FFF2-40B4-BE49-F238E27FC236}">
-                <a16:creationId xmlns:a16="http://schemas.microsoft.com/office/drawing/2014/main" id="{4B65AB7F-448F-7A38-A170-C9008F7743E3}"/>
-              </a:ext>
-            </a:extLst>
-          </p:cNvPr>
-          <p:cNvGraphicFramePr>
-            <a:graphicFrameLocks noGrp="1"/>
-          </p:cNvGraphicFramePr>
-          <p:nvPr>
-            <p:ph idx="1"/>
-            <p:extLst>
-              <p:ext uri="{D42A27DB-BD31-4B8C-83A1-F6EECF244321}">
-                <p14:modId xmlns:p14="http://schemas.microsoft.com/office/powerpoint/2010/main" val="3406864906"/>
-              </p:ext>
-            </p:extLst>
-          </p:nvPr>
-        </p:nvGraphicFramePr>
-        <p:xfrm>
-          <a:off x="838199" y="1825625"/>
-          <a:ext cx="7070383" cy="4351338"/>
-        </p:xfrm>
-        <a:graphic>
-          <a:graphicData uri="http://schemas.openxmlformats.org/drawingml/2006/chart">
-            <c:chart xmlns:c="http://schemas.openxmlformats.org/drawingml/2006/chart" xmlns:r="http://schemas.openxmlformats.org/officeDocument/2006/relationships" r:id="rId2"/>
-          </a:graphicData>
-        </a:graphic>
-      </p:graphicFrame>
-      <p:sp>
-        <p:nvSpPr>
-          <p:cNvPr id="2" name="Tytuł 1">
-            <a:extLst>
-              <a:ext uri="{FF2B5EF4-FFF2-40B4-BE49-F238E27FC236}">
-                <a16:creationId xmlns:a16="http://schemas.microsoft.com/office/drawing/2014/main" id="{DB22C4A2-1B90-4E31-AB1C-E2D45B1E1A94}"/>
-              </a:ext>
-            </a:extLst>
-          </p:cNvPr>
-          <p:cNvSpPr>
-            <a:spLocks noGrp="1"/>
-          </p:cNvSpPr>
-          <p:nvPr>
-            <p:ph type="title"/>
-          </p:nvPr>
-        </p:nvSpPr>
-        <p:spPr/>
-        <p:txBody>
-          <a:bodyPr>
-            <a:normAutofit/>
-          </a:bodyPr>
-          <a:lstStyle/>
-          <a:p>
-            <a:r>
-              <a:rPr lang="pl-PL" dirty="0"/>
-              <a:t>Piłka nożna a znajomość geografii</a:t>
-            </a:r>
-          </a:p>
-        </p:txBody>
-      </p:sp>
-      <p:sp>
-        <p:nvSpPr>
-          <p:cNvPr id="8" name="Symbol zastępczy zawartości 4">
-            <a:extLst>
-              <a:ext uri="{FF2B5EF4-FFF2-40B4-BE49-F238E27FC236}">
-                <a16:creationId xmlns:a16="http://schemas.microsoft.com/office/drawing/2014/main" id="{2FF7C437-CEDE-316F-788D-277332313050}"/>
-              </a:ext>
-            </a:extLst>
-          </p:cNvPr>
-          <p:cNvSpPr txBox="1">
-            <a:spLocks/>
-          </p:cNvSpPr>
-          <p:nvPr/>
-        </p:nvSpPr>
-        <p:spPr>
-          <a:xfrm>
-            <a:off x="7904531" y="1825625"/>
-            <a:ext cx="3453319" cy="4008982"/>
-          </a:xfrm>
-          <a:prstGeom prst="rect">
-            <a:avLst/>
-          </a:prstGeom>
-        </p:spPr>
-        <p:txBody>
-          <a:bodyPr vert="horz" lIns="91440" tIns="45720" rIns="91440" bIns="45720" rtlCol="0">
-            <a:normAutofit/>
-          </a:bodyPr>
-          <a:lstStyle>
-            <a:lvl1pPr marL="228600" indent="-228600" algn="l" defTabSz="914400" rtl="0" eaLnBrk="1" latinLnBrk="0" hangingPunct="1">
-              <a:lnSpc>
-                <a:spcPct val="90000"/>
-              </a:lnSpc>
-              <a:spcBef>
-                <a:spcPts val="1000"/>
-              </a:spcBef>
-              <a:buFont typeface="Arial" panose="020B0604020202020204" pitchFamily="34" charset="0"/>
-              <a:buChar char="•"/>
-              <a:defRPr sz="2800" kern="1200">
-                <a:solidFill>
-                  <a:schemeClr val="tx1"/>
-                </a:solidFill>
-                <a:latin typeface="+mn-lt"/>
-                <a:ea typeface="+mn-ea"/>
-                <a:cs typeface="+mn-cs"/>
-              </a:defRPr>
-            </a:lvl1pPr>
-            <a:lvl2pPr marL="685800" indent="-228600" algn="l" defTabSz="914400" rtl="0" eaLnBrk="1" latinLnBrk="0" hangingPunct="1">
-              <a:lnSpc>
-                <a:spcPct val="90000"/>
-              </a:lnSpc>
-              <a:spcBef>
-                <a:spcPts val="500"/>
-              </a:spcBef>
-              <a:buFont typeface="Arial" panose="020B0604020202020204" pitchFamily="34" charset="0"/>
-              <a:buChar char="•"/>
-              <a:defRPr sz="2400" kern="1200">
-                <a:solidFill>
-                  <a:schemeClr val="tx1"/>
-                </a:solidFill>
-                <a:latin typeface="+mn-lt"/>
-                <a:ea typeface="+mn-ea"/>
-                <a:cs typeface="+mn-cs"/>
-              </a:defRPr>
-            </a:lvl2pPr>
-            <a:lvl3pPr marL="1143000" indent="-228600" algn="l" defTabSz="914400" rtl="0" eaLnBrk="1" latinLnBrk="0" hangingPunct="1">
-              <a:lnSpc>
-                <a:spcPct val="90000"/>
-              </a:lnSpc>
-              <a:spcBef>
-                <a:spcPts val="500"/>
-              </a:spcBef>
-              <a:buFont typeface="Arial" panose="020B0604020202020204" pitchFamily="34" charset="0"/>
-              <a:buChar char="•"/>
-              <a:defRPr sz="2000" kern="1200">
-                <a:solidFill>
-                  <a:schemeClr val="tx1"/>
-                </a:solidFill>
-                <a:latin typeface="+mn-lt"/>
-                <a:ea typeface="+mn-ea"/>
-                <a:cs typeface="+mn-cs"/>
-              </a:defRPr>
-            </a:lvl3pPr>
-            <a:lvl4pPr marL="1600200" indent="-228600" algn="l" defTabSz="914400" rtl="0" eaLnBrk="1" latinLnBrk="0" hangingPunct="1">
-              <a:lnSpc>
-                <a:spcPct val="90000"/>
-              </a:lnSpc>
-              <a:spcBef>
-                <a:spcPts val="500"/>
-              </a:spcBef>
-              <a:buFont typeface="Arial" panose="020B0604020202020204" pitchFamily="34" charset="0"/>
-              <a:buChar char="•"/>
-              <a:defRPr sz="1800" kern="1200">
-                <a:solidFill>
-                  <a:schemeClr val="tx1"/>
-                </a:solidFill>
-                <a:latin typeface="+mn-lt"/>
-                <a:ea typeface="+mn-ea"/>
-                <a:cs typeface="+mn-cs"/>
-              </a:defRPr>
-            </a:lvl4pPr>
-            <a:lvl5pPr marL="2057400" indent="-228600" algn="l" defTabSz="914400" rtl="0" eaLnBrk="1" latinLnBrk="0" hangingPunct="1">
-              <a:lnSpc>
-                <a:spcPct val="90000"/>
-              </a:lnSpc>
-              <a:spcBef>
-                <a:spcPts val="500"/>
-              </a:spcBef>
-              <a:buFont typeface="Arial" panose="020B0604020202020204" pitchFamily="34" charset="0"/>
-              <a:buChar char="•"/>
-              <a:defRPr sz="1800" kern="1200">
-                <a:solidFill>
-                  <a:schemeClr val="tx1"/>
-                </a:solidFill>
-                <a:latin typeface="+mn-lt"/>
-                <a:ea typeface="+mn-ea"/>
-                <a:cs typeface="+mn-cs"/>
-              </a:defRPr>
-            </a:lvl5pPr>
-            <a:lvl6pPr marL="2514600" indent="-228600" algn="l" defTabSz="914400" rtl="0" eaLnBrk="1" latinLnBrk="0" hangingPunct="1">
-              <a:lnSpc>
-                <a:spcPct val="90000"/>
-              </a:lnSpc>
-              <a:spcBef>
-                <a:spcPts val="500"/>
-              </a:spcBef>
-              <a:buFont typeface="Arial" panose="020B0604020202020204" pitchFamily="34" charset="0"/>
-              <a:buChar char="•"/>
-              <a:defRPr sz="1800" kern="1200">
-                <a:solidFill>
-                  <a:schemeClr val="tx1"/>
-                </a:solidFill>
-                <a:latin typeface="+mn-lt"/>
-                <a:ea typeface="+mn-ea"/>
-                <a:cs typeface="+mn-cs"/>
-              </a:defRPr>
-            </a:lvl6pPr>
-            <a:lvl7pPr marL="2971800" indent="-228600" algn="l" defTabSz="914400" rtl="0" eaLnBrk="1" latinLnBrk="0" hangingPunct="1">
-              <a:lnSpc>
-                <a:spcPct val="90000"/>
-              </a:lnSpc>
-              <a:spcBef>
-                <a:spcPts val="500"/>
-              </a:spcBef>
-              <a:buFont typeface="Arial" panose="020B0604020202020204" pitchFamily="34" charset="0"/>
-              <a:buChar char="•"/>
-              <a:defRPr sz="1800" kern="1200">
-                <a:solidFill>
-                  <a:schemeClr val="tx1"/>
-                </a:solidFill>
-                <a:latin typeface="+mn-lt"/>
-                <a:ea typeface="+mn-ea"/>
-                <a:cs typeface="+mn-cs"/>
-              </a:defRPr>
-            </a:lvl7pPr>
-            <a:lvl8pPr marL="3429000" indent="-228600" algn="l" defTabSz="914400" rtl="0" eaLnBrk="1" latinLnBrk="0" hangingPunct="1">
-              <a:lnSpc>
-                <a:spcPct val="90000"/>
-              </a:lnSpc>
-              <a:spcBef>
-                <a:spcPts val="500"/>
-              </a:spcBef>
-              <a:buFont typeface="Arial" panose="020B0604020202020204" pitchFamily="34" charset="0"/>
-              <a:buChar char="•"/>
-              <a:defRPr sz="1800" kern="1200">
-                <a:solidFill>
-                  <a:schemeClr val="tx1"/>
-                </a:solidFill>
-                <a:latin typeface="+mn-lt"/>
-                <a:ea typeface="+mn-ea"/>
-                <a:cs typeface="+mn-cs"/>
-              </a:defRPr>
-            </a:lvl8pPr>
-            <a:lvl9pPr marL="3886200" indent="-228600" algn="l" defTabSz="914400" rtl="0" eaLnBrk="1" latinLnBrk="0" hangingPunct="1">
-              <a:lnSpc>
-                <a:spcPct val="90000"/>
-              </a:lnSpc>
-              <a:spcBef>
-                <a:spcPts val="500"/>
-              </a:spcBef>
-              <a:buFont typeface="Arial" panose="020B0604020202020204" pitchFamily="34" charset="0"/>
-              <a:buChar char="•"/>
-              <a:defRPr sz="1800" kern="1200">
-                <a:solidFill>
-                  <a:schemeClr val="tx1"/>
-                </a:solidFill>
-                <a:latin typeface="+mn-lt"/>
-                <a:ea typeface="+mn-ea"/>
-                <a:cs typeface="+mn-cs"/>
-              </a:defRPr>
-            </a:lvl9pPr>
-          </a:lstStyle>
-          <a:p>
-            <a:pPr marL="0" indent="0" algn="ctr">
-              <a:lnSpc>
-                <a:spcPct val="100000"/>
-              </a:lnSpc>
-              <a:buNone/>
-            </a:pPr>
-            <a:r>
-              <a:rPr lang="pl-PL" sz="1800" dirty="0">
-                <a:solidFill>
-                  <a:schemeClr val="tx2"/>
-                </a:solidFill>
-              </a:rPr>
-              <a:t>Duże imprezy sportowe sprawiają również, że chcemy lepiej poznać państwa, o których na co dzień wiemy niewiele. Sporo osób odkryło Curaçao i Republika Zielonego Przylądka dzięki ich pierwszemu udziałowi </a:t>
-            </a:r>
-            <a:br>
-              <a:rPr lang="pl-PL" sz="1800" dirty="0">
-                <a:solidFill>
-                  <a:schemeClr val="tx2"/>
-                </a:solidFill>
-              </a:rPr>
-            </a:br>
-            <a:r>
-              <a:rPr lang="pl-PL" sz="1800" dirty="0">
-                <a:solidFill>
-                  <a:schemeClr val="tx2"/>
-                </a:solidFill>
-              </a:rPr>
-              <a:t>w Mistrzostwach Świata </a:t>
-            </a:r>
-            <a:br>
-              <a:rPr lang="pl-PL" sz="1800" dirty="0">
-                <a:solidFill>
-                  <a:schemeClr val="tx2"/>
-                </a:solidFill>
-              </a:rPr>
-            </a:br>
-            <a:r>
-              <a:rPr lang="pl-PL" sz="1800" dirty="0">
-                <a:solidFill>
-                  <a:schemeClr val="tx2"/>
-                </a:solidFill>
-              </a:rPr>
-              <a:t>w Piłce Nożnej.</a:t>
-            </a:r>
+            <a:endParaRPr lang="pl-PL" sz="1800" dirty="0">
+              <a:solidFill>
+                <a:schemeClr val="tx2"/>
+              </a:solidFill>
+            </a:endParaRPr>
           </a:p>
         </p:txBody>
       </p:sp>
@@ -19640,7 +19760,9 @@
         </p:nvSpPr>
         <p:spPr/>
         <p:txBody>
-          <a:bodyPr/>
+          <a:bodyPr>
+            <a:noAutofit/>
+          </a:bodyPr>
           <a:lstStyle/>
           <a:p>
             <a:r>
@@ -20260,4 +20382,319 @@
     </a:ext>
   </a:extLst>
 </a:theme>
+</file>
+
+<file path=ppt/theme/theme3.xml><?xml version="1.0" encoding="utf-8"?>
+<a:theme xmlns:a="http://schemas.openxmlformats.org/drawingml/2006/main" name="Motyw pakietu Office">
+  <a:themeElements>
+    <a:clrScheme name="Pakiet Office">
+      <a:dk1>
+        <a:sysClr val="windowText" lastClr="000000"/>
+      </a:dk1>
+      <a:lt1>
+        <a:sysClr val="window" lastClr="FFFFFF"/>
+      </a:lt1>
+      <a:dk2>
+        <a:srgbClr val="0E2841"/>
+      </a:dk2>
+      <a:lt2>
+        <a:srgbClr val="E8E8E8"/>
+      </a:lt2>
+      <a:accent1>
+        <a:srgbClr val="156082"/>
+      </a:accent1>
+      <a:accent2>
+        <a:srgbClr val="E97132"/>
+      </a:accent2>
+      <a:accent3>
+        <a:srgbClr val="196B24"/>
+      </a:accent3>
+      <a:accent4>
+        <a:srgbClr val="0F9ED5"/>
+      </a:accent4>
+      <a:accent5>
+        <a:srgbClr val="A02B93"/>
+      </a:accent5>
+      <a:accent6>
+        <a:srgbClr val="4EA72E"/>
+      </a:accent6>
+      <a:hlink>
+        <a:srgbClr val="467886"/>
+      </a:hlink>
+      <a:folHlink>
+        <a:srgbClr val="96607D"/>
+      </a:folHlink>
+    </a:clrScheme>
+    <a:fontScheme name="Pakiet Office">
+      <a:majorFont>
+        <a:latin typeface="Aptos Display" panose="02110004020202020204"/>
+        <a:ea typeface=""/>
+        <a:cs typeface=""/>
+        <a:font script="Jpan" typeface="游ゴシック Light"/>
+        <a:font script="Hang" typeface="맑은 고딕"/>
+        <a:font script="Hans" typeface="等线 Light"/>
+        <a:font script="Hant" typeface="新細明體"/>
+        <a:font script="Arab" typeface="Times New Roman"/>
+        <a:font script="Hebr" typeface="Times New Roman"/>
+        <a:font script="Thai" typeface="Angsana New"/>
+        <a:font script="Ethi" typeface="Nyala"/>
+        <a:font script="Beng" typeface="Vrinda"/>
+        <a:font script="Gujr" typeface="Shruti"/>
+        <a:font script="Khmr" typeface="MoolBoran"/>
+        <a:font script="Knda" typeface="Tunga"/>
+        <a:font script="Guru" typeface="Raavi"/>
+        <a:font script="Cans" typeface="Euphemia"/>
+        <a:font script="Cher" typeface="Plantagenet Cherokee"/>
+        <a:font script="Yiii" typeface="Microsoft Yi Baiti"/>
+        <a:font script="Tibt" typeface="Microsoft Himalaya"/>
+        <a:font script="Thaa" typeface="MV Boli"/>
+        <a:font script="Deva" typeface="Mangal"/>
+        <a:font script="Telu" typeface="Gautami"/>
+        <a:font script="Taml" typeface="Latha"/>
+        <a:font script="Syrc" typeface="Estrangelo Edessa"/>
+        <a:font script="Orya" typeface="Kalinga"/>
+        <a:font script="Mlym" typeface="Kartika"/>
+        <a:font script="Laoo" typeface="DokChampa"/>
+        <a:font script="Sinh" typeface="Iskoola Pota"/>
+        <a:font script="Mong" typeface="Mongolian Baiti"/>
+        <a:font script="Viet" typeface="Times New Roman"/>
+        <a:font script="Uigh" typeface="Microsoft Uighur"/>
+        <a:font script="Geor" typeface="Sylfaen"/>
+        <a:font script="Armn" typeface="Arial"/>
+        <a:font script="Bugi" typeface="Leelawadee UI"/>
+        <a:font script="Bopo" typeface="Microsoft JhengHei"/>
+        <a:font script="Java" typeface="Javanese Text"/>
+        <a:font script="Lisu" typeface="Segoe UI"/>
+        <a:font script="Mymr" typeface="Myanmar Text"/>
+        <a:font script="Nkoo" typeface="Ebrima"/>
+        <a:font script="Olck" typeface="Nirmala UI"/>
+        <a:font script="Osma" typeface="Ebrima"/>
+        <a:font script="Phag" typeface="Phagspa"/>
+        <a:font script="Syrn" typeface="Estrangelo Edessa"/>
+        <a:font script="Syrj" typeface="Estrangelo Edessa"/>
+        <a:font script="Syre" typeface="Estrangelo Edessa"/>
+        <a:font script="Sora" typeface="Nirmala UI"/>
+        <a:font script="Tale" typeface="Microsoft Tai Le"/>
+        <a:font script="Talu" typeface="Microsoft New Tai Lue"/>
+        <a:font script="Tfng" typeface="Ebrima"/>
+      </a:majorFont>
+      <a:minorFont>
+        <a:latin typeface="Aptos" panose="02110004020202020204"/>
+        <a:ea typeface=""/>
+        <a:cs typeface=""/>
+        <a:font script="Jpan" typeface="游ゴシック"/>
+        <a:font script="Hang" typeface="맑은 고딕"/>
+        <a:font script="Hans" typeface="等线"/>
+        <a:font script="Hant" typeface="新細明體"/>
+        <a:font script="Arab" typeface="Arial"/>
+        <a:font script="Hebr" typeface="Arial"/>
+        <a:font script="Thai" typeface="Cordia New"/>
+        <a:font script="Ethi" typeface="Nyala"/>
+        <a:font script="Beng" typeface="Vrinda"/>
+        <a:font script="Gujr" typeface="Shruti"/>
+        <a:font script="Khmr" typeface="DaunPenh"/>
+        <a:font script="Knda" typeface="Tunga"/>
+        <a:font script="Guru" typeface="Raavi"/>
+        <a:font script="Cans" typeface="Euphemia"/>
+        <a:font script="Cher" typeface="Plantagenet Cherokee"/>
+        <a:font script="Yiii" typeface="Microsoft Yi Baiti"/>
+        <a:font script="Tibt" typeface="Microsoft Himalaya"/>
+        <a:font script="Thaa" typeface="MV Boli"/>
+        <a:font script="Deva" typeface="Mangal"/>
+        <a:font script="Telu" typeface="Gautami"/>
+        <a:font script="Taml" typeface="Latha"/>
+        <a:font script="Syrc" typeface="Estrangelo Edessa"/>
+        <a:font script="Orya" typeface="Kalinga"/>
+        <a:font script="Mlym" typeface="Kartika"/>
+        <a:font script="Laoo" typeface="DokChampa"/>
+        <a:font script="Sinh" typeface="Iskoola Pota"/>
+        <a:font script="Mong" typeface="Mongolian Baiti"/>
+        <a:font script="Viet" typeface="Arial"/>
+        <a:font script="Uigh" typeface="Microsoft Uighur"/>
+        <a:font script="Geor" typeface="Sylfaen"/>
+        <a:font script="Armn" typeface="Arial"/>
+        <a:font script="Bugi" typeface="Leelawadee UI"/>
+        <a:font script="Bopo" typeface="Microsoft JhengHei"/>
+        <a:font script="Java" typeface="Javanese Text"/>
+        <a:font script="Lisu" typeface="Segoe UI"/>
+        <a:font script="Mymr" typeface="Myanmar Text"/>
+        <a:font script="Nkoo" typeface="Ebrima"/>
+        <a:font script="Olck" typeface="Nirmala UI"/>
+        <a:font script="Osma" typeface="Ebrima"/>
+        <a:font script="Phag" typeface="Phagspa"/>
+        <a:font script="Syrn" typeface="Estrangelo Edessa"/>
+        <a:font script="Syrj" typeface="Estrangelo Edessa"/>
+        <a:font script="Syre" typeface="Estrangelo Edessa"/>
+        <a:font script="Sora" typeface="Nirmala UI"/>
+        <a:font script="Tale" typeface="Microsoft Tai Le"/>
+        <a:font script="Talu" typeface="Microsoft New Tai Lue"/>
+        <a:font script="Tfng" typeface="Ebrima"/>
+      </a:minorFont>
+    </a:fontScheme>
+    <a:fmtScheme name="Pakiet Office">
+      <a:fillStyleLst>
+        <a:solidFill>
+          <a:schemeClr val="phClr"/>
+        </a:solidFill>
+        <a:gradFill rotWithShape="1">
+          <a:gsLst>
+            <a:gs pos="0">
+              <a:schemeClr val="phClr">
+                <a:lumMod val="110000"/>
+                <a:satMod val="105000"/>
+                <a:tint val="67000"/>
+              </a:schemeClr>
+            </a:gs>
+            <a:gs pos="50000">
+              <a:schemeClr val="phClr">
+                <a:lumMod val="105000"/>
+                <a:satMod val="103000"/>
+                <a:tint val="73000"/>
+              </a:schemeClr>
+            </a:gs>
+            <a:gs pos="100000">
+              <a:schemeClr val="phClr">
+                <a:lumMod val="105000"/>
+                <a:satMod val="109000"/>
+                <a:tint val="81000"/>
+              </a:schemeClr>
+            </a:gs>
+          </a:gsLst>
+          <a:lin ang="5400000" scaled="0"/>
+        </a:gradFill>
+        <a:gradFill rotWithShape="1">
+          <a:gsLst>
+            <a:gs pos="0">
+              <a:schemeClr val="phClr">
+                <a:satMod val="103000"/>
+                <a:lumMod val="102000"/>
+                <a:tint val="94000"/>
+              </a:schemeClr>
+            </a:gs>
+            <a:gs pos="50000">
+              <a:schemeClr val="phClr">
+                <a:satMod val="110000"/>
+                <a:lumMod val="100000"/>
+                <a:shade val="100000"/>
+              </a:schemeClr>
+            </a:gs>
+            <a:gs pos="100000">
+              <a:schemeClr val="phClr">
+                <a:lumMod val="99000"/>
+                <a:satMod val="120000"/>
+                <a:shade val="78000"/>
+              </a:schemeClr>
+            </a:gs>
+          </a:gsLst>
+          <a:lin ang="5400000" scaled="0"/>
+        </a:gradFill>
+      </a:fillStyleLst>
+      <a:lnStyleLst>
+        <a:ln w="12700" cap="flat" cmpd="sng" algn="ctr">
+          <a:solidFill>
+            <a:schemeClr val="phClr"/>
+          </a:solidFill>
+          <a:prstDash val="solid"/>
+          <a:miter lim="800000"/>
+        </a:ln>
+        <a:ln w="19050" cap="flat" cmpd="sng" algn="ctr">
+          <a:solidFill>
+            <a:schemeClr val="phClr"/>
+          </a:solidFill>
+          <a:prstDash val="solid"/>
+          <a:miter lim="800000"/>
+        </a:ln>
+        <a:ln w="25400" cap="flat" cmpd="sng" algn="ctr">
+          <a:solidFill>
+            <a:schemeClr val="phClr"/>
+          </a:solidFill>
+          <a:prstDash val="solid"/>
+          <a:miter lim="800000"/>
+        </a:ln>
+      </a:lnStyleLst>
+      <a:effectStyleLst>
+        <a:effectStyle>
+          <a:effectLst/>
+        </a:effectStyle>
+        <a:effectStyle>
+          <a:effectLst/>
+        </a:effectStyle>
+        <a:effectStyle>
+          <a:effectLst>
+            <a:outerShdw blurRad="57150" dist="19050" dir="5400000" algn="ctr" rotWithShape="0">
+              <a:srgbClr val="000000">
+                <a:alpha val="63000"/>
+              </a:srgbClr>
+            </a:outerShdw>
+          </a:effectLst>
+        </a:effectStyle>
+      </a:effectStyleLst>
+      <a:bgFillStyleLst>
+        <a:solidFill>
+          <a:schemeClr val="phClr"/>
+        </a:solidFill>
+        <a:solidFill>
+          <a:schemeClr val="phClr">
+            <a:tint val="95000"/>
+            <a:satMod val="170000"/>
+          </a:schemeClr>
+        </a:solidFill>
+        <a:gradFill rotWithShape="1">
+          <a:gsLst>
+            <a:gs pos="0">
+              <a:schemeClr val="phClr">
+                <a:tint val="93000"/>
+                <a:satMod val="150000"/>
+                <a:shade val="98000"/>
+                <a:lumMod val="102000"/>
+              </a:schemeClr>
+            </a:gs>
+            <a:gs pos="50000">
+              <a:schemeClr val="phClr">
+                <a:tint val="98000"/>
+                <a:satMod val="130000"/>
+                <a:shade val="90000"/>
+                <a:lumMod val="103000"/>
+              </a:schemeClr>
+            </a:gs>
+            <a:gs pos="100000">
+              <a:schemeClr val="phClr">
+                <a:shade val="63000"/>
+                <a:satMod val="120000"/>
+              </a:schemeClr>
+            </a:gs>
+          </a:gsLst>
+          <a:lin ang="5400000" scaled="0"/>
+        </a:gradFill>
+      </a:bgFillStyleLst>
+    </a:fmtScheme>
+  </a:themeElements>
+  <a:objectDefaults>
+    <a:lnDef>
+      <a:spPr/>
+      <a:bodyPr/>
+      <a:lstStyle/>
+      <a:style>
+        <a:lnRef idx="2">
+          <a:schemeClr val="accent1"/>
+        </a:lnRef>
+        <a:fillRef idx="0">
+          <a:schemeClr val="accent1"/>
+        </a:fillRef>
+        <a:effectRef idx="1">
+          <a:schemeClr val="accent1"/>
+        </a:effectRef>
+        <a:fontRef idx="minor">
+          <a:schemeClr val="tx1"/>
+        </a:fontRef>
+      </a:style>
+    </a:lnDef>
+  </a:objectDefaults>
+  <a:extraClrSchemeLst/>
+  <a:extLst>
+    <a:ext uri="{05A4C25C-085E-4340-85A3-A5531E510DB2}">
+      <thm15:themeFamily xmlns:thm15="http://schemas.microsoft.com/office/thememl/2012/main" name="Office Theme" id="{2E142A2C-CD16-42D6-873A-C26D2A0506FA}" vid="{1BDDFF52-6CD6-40A5-AB3C-68EB2F1E4D0A}"/>
+    </a:ext>
+  </a:extLst>
+</a:theme>
 </file>
--- a/storytelling/Wikipedia_25_Marcinos.pptx
+++ b/storytelling/Wikipedia_25_Marcinos.pptx
@@ -5,10 +5,10 @@
     <p:sldMasterId id="2147483648" r:id="rId1"/>
   </p:sldMasterIdLst>
   <p:notesMasterIdLst>
-    <p:notesMasterId r:id="rId14"/>
+    <p:notesMasterId r:id="rId15"/>
   </p:notesMasterIdLst>
   <p:handoutMasterIdLst>
-    <p:handoutMasterId r:id="rId15"/>
+    <p:handoutMasterId r:id="rId16"/>
   </p:handoutMasterIdLst>
   <p:sldIdLst>
     <p:sldId id="256" r:id="rId2"/>
@@ -20,9 +20,10 @@
     <p:sldId id="264" r:id="rId8"/>
     <p:sldId id="260" r:id="rId9"/>
     <p:sldId id="266" r:id="rId10"/>
-    <p:sldId id="267" r:id="rId11"/>
-    <p:sldId id="259" r:id="rId12"/>
-    <p:sldId id="265" r:id="rId13"/>
+    <p:sldId id="268" r:id="rId11"/>
+    <p:sldId id="267" r:id="rId12"/>
+    <p:sldId id="259" r:id="rId13"/>
+    <p:sldId id="265" r:id="rId14"/>
   </p:sldIdLst>
   <p:sldSz cx="12192000" cy="6858000"/>
   <p:notesSz cx="6858000" cy="9144000"/>
@@ -135,6 +136,7 @@
             <p14:sldId id="264"/>
             <p14:sldId id="260"/>
             <p14:sldId id="266"/>
+            <p14:sldId id="268"/>
             <p14:sldId id="267"/>
             <p14:sldId id="259"/>
             <p14:sldId id="265"/>
@@ -144,6 +146,9 @@
     </p:ext>
     <p:ext uri="{EFAFB233-063F-42B5-8137-9DF3F51BA10A}">
       <p15:sldGuideLst xmlns:p15="http://schemas.microsoft.com/office/powerpoint/2012/main"/>
+    </p:ext>
+    <p:ext uri="{2D200454-40CA-4A62-9FC3-DE9A4176ACB9}">
+      <p15:notesGuideLst xmlns:p15="http://schemas.microsoft.com/office/powerpoint/2012/main"/>
     </p:ext>
   </p:extLst>
 </p:presentation>
@@ -166,7 +171,7 @@
     <c:title>
       <c:tx>
         <c:rich>
-          <a:bodyPr rot="0" spcFirstLastPara="1" vertOverflow="ellipsis" wrap="square" anchor="t" anchorCtr="0"/>
+          <a:bodyPr rot="0" spcFirstLastPara="1" vertOverflow="ellipsis" vert="horz" wrap="square" anchor="t" anchorCtr="0"/>
           <a:lstStyle/>
           <a:p>
             <a:pPr algn="l">
@@ -211,7 +216,7 @@
         <a:effectLst/>
       </c:spPr>
       <c:txPr>
-        <a:bodyPr rot="0" spcFirstLastPara="1" vertOverflow="ellipsis" wrap="square" anchor="t" anchorCtr="0"/>
+        <a:bodyPr rot="0" spcFirstLastPara="1" vertOverflow="ellipsis" vert="horz" wrap="square" anchor="t" anchorCtr="0"/>
         <a:lstStyle/>
         <a:p>
           <a:pPr algn="l">
@@ -595,7 +600,7 @@
                   <a:schemeClr val="tx1"/>
                 </a:solidFill>
               </a:rPr>
-              <a:t>Suma wyświetleń w latach 2018 – 2026 [mln] [4]</a:t>
+              <a:t>Suma wyświetleń w latach 2018 – 2026 [mln]</a:t>
             </a:r>
             <a:endParaRPr lang="en-US" sz="1800" dirty="0">
               <a:solidFill>
@@ -961,7 +966,7 @@
           <c:showPercent val="0"/>
           <c:showBubbleSize val="0"/>
         </c:dLbls>
-        <c:gapWidth val="182"/>
+        <c:gapWidth val="120"/>
         <c:axId val="1154764064"/>
         <c:axId val="1813308464"/>
       </c:barChart>
@@ -1025,7 +1030,12 @@
         <c:majorGridlines>
           <c:spPr>
             <a:ln w="9525" cap="flat" cmpd="sng" algn="ctr">
-              <a:noFill/>
+              <a:solidFill>
+                <a:schemeClr val="accent6">
+                  <a:alpha val="50000"/>
+                </a:schemeClr>
+              </a:solidFill>
+              <a:prstDash val="sysDot"/>
               <a:round/>
             </a:ln>
             <a:effectLst/>
@@ -1186,15 +1196,7 @@
                   <a:schemeClr val="tx1"/>
                 </a:solidFill>
               </a:rPr>
-              <a:t> ruchu[mln] </a:t>
-            </a:r>
-            <a:r>
-              <a:rPr lang="pl-PL" sz="1800" dirty="0">
-                <a:solidFill>
-                  <a:schemeClr val="tx1"/>
-                </a:solidFill>
-              </a:rPr>
-              <a:t>[6]</a:t>
+              <a:t> ruchu[mln]</a:t>
             </a:r>
             <a:endParaRPr lang="en-US" sz="1800" dirty="0">
               <a:solidFill>
@@ -1676,7 +1678,7 @@
           <c:showPercent val="0"/>
           <c:showBubbleSize val="0"/>
         </c:dLbls>
-        <c:gapWidth val="219"/>
+        <c:gapWidth val="120"/>
         <c:axId val="287888656"/>
         <c:axId val="413498544"/>
       </c:barChart>
@@ -1735,6 +1737,20 @@
         </c:scaling>
         <c:delete val="0"/>
         <c:axPos val="b"/>
+        <c:majorGridlines>
+          <c:spPr>
+            <a:ln w="9525" cap="flat" cmpd="sng" algn="ctr">
+              <a:solidFill>
+                <a:schemeClr val="accent6">
+                  <a:alpha val="50000"/>
+                </a:schemeClr>
+              </a:solidFill>
+              <a:prstDash val="sysDot"/>
+              <a:round/>
+            </a:ln>
+            <a:effectLst/>
+          </c:spPr>
+        </c:majorGridlines>
         <c:numFmt formatCode="General" sourceLinked="1"/>
         <c:majorTickMark val="none"/>
         <c:minorTickMark val="none"/>
@@ -1849,7 +1865,10 @@
           <a:bodyPr rot="0" spcFirstLastPara="1" vertOverflow="ellipsis" vert="horz" wrap="square" anchor="ctr" anchorCtr="1"/>
           <a:lstStyle/>
           <a:p>
-            <a:pPr algn="l">
+            <a:pPr algn="l" defTabSz="927100">
+              <a:tabLst>
+                <a:tab pos="4124325" algn="l"/>
+              </a:tabLst>
               <a:defRPr sz="1862" b="0" i="0" u="none" strike="noStrike" kern="1200" spc="0" baseline="0">
                 <a:solidFill>
                   <a:schemeClr val="tx1"/>
@@ -1889,7 +1908,7 @@
                   <a:schemeClr val="tx1"/>
                 </a:solidFill>
               </a:rPr>
-              <a:t> [mln][4][8]</a:t>
+              <a:t> [mln]</a:t>
             </a:r>
             <a:endParaRPr lang="en-US" sz="1800" dirty="0">
               <a:solidFill>
@@ -1919,7 +1938,10 @@
         <a:bodyPr rot="0" spcFirstLastPara="1" vertOverflow="ellipsis" vert="horz" wrap="square" anchor="ctr" anchorCtr="1"/>
         <a:lstStyle/>
         <a:p>
-          <a:pPr algn="l">
+          <a:pPr algn="l" defTabSz="927100">
+            <a:tabLst>
+              <a:tab pos="4124325" algn="l"/>
+            </a:tabLst>
             <a:defRPr sz="1862" b="0" i="0" u="none" strike="noStrike" kern="1200" spc="0" baseline="0">
               <a:solidFill>
                 <a:schemeClr val="tx1"/>
@@ -3346,7 +3368,7 @@
                   <a:schemeClr val="tx1"/>
                 </a:solidFill>
               </a:rPr>
-              <a:t> [tys.][4]</a:t>
+              <a:t> [tys.]</a:t>
             </a:r>
             <a:endParaRPr lang="en-US" sz="1800" dirty="0">
               <a:solidFill>
@@ -3397,8 +3419,8 @@
           <c:layoutTarget val="inner"/>
           <c:xMode val="edge"/>
           <c:yMode val="edge"/>
-          <c:x val="5.3603301286851403E-2"/>
-          <c:y val="0.13158215048234079"/>
+          <c:x val="6.4278109814586426E-2"/>
+          <c:y val="0.12569330180558128"/>
           <c:w val="0.94418872912625051"/>
           <c:h val="0.75608435149749476"/>
         </c:manualLayout>
@@ -3432,6 +3454,721 @@
           <c:marker>
             <c:symbol val="none"/>
           </c:marker>
+          <c:dLbls>
+            <c:dLbl>
+              <c:idx val="33"/>
+              <c:layout>
+                <c:manualLayout>
+                  <c:x val="4.8192771084337352E-2"/>
+                  <c:y val="-7.5082820628683281E-2"/>
+                </c:manualLayout>
+              </c:layout>
+              <c:tx>
+                <c:rich>
+                  <a:bodyPr rot="0" spcFirstLastPara="1" vertOverflow="clip" horzOverflow="clip" vert="horz" wrap="square" lIns="38100" tIns="19050" rIns="38100" bIns="19050" anchor="ctr" anchorCtr="1">
+                    <a:noAutofit/>
+                  </a:bodyPr>
+                  <a:lstStyle/>
+                  <a:p>
+                    <a:pPr>
+                      <a:defRPr sz="1197" b="0" i="0" u="none" strike="noStrike" kern="1200" baseline="0">
+                        <a:solidFill>
+                          <a:schemeClr val="dk1">
+                            <a:lumMod val="65000"/>
+                            <a:lumOff val="35000"/>
+                          </a:schemeClr>
+                        </a:solidFill>
+                        <a:latin typeface="+mn-lt"/>
+                        <a:ea typeface="+mn-ea"/>
+                        <a:cs typeface="+mn-cs"/>
+                      </a:defRPr>
+                    </a:pPr>
+                    <a:r>
+                      <a:rPr lang="en-US" dirty="0" err="1"/>
+                      <a:t>Pierwsza</a:t>
+                    </a:r>
+                    <a:r>
+                      <a:rPr lang="en-US" dirty="0"/>
+                      <a:t> </a:t>
+                    </a:r>
+                    <a:r>
+                      <a:rPr lang="en-US" dirty="0" err="1"/>
+                      <a:t>wygrana</a:t>
+                    </a:r>
+                    <a:r>
+                      <a:rPr lang="en-US" dirty="0"/>
+                      <a:t> Rolanda Garrosa</a:t>
+                    </a:r>
+                  </a:p>
+                </c:rich>
+              </c:tx>
+              <c:spPr>
+                <a:solidFill>
+                  <a:prstClr val="white"/>
+                </a:solidFill>
+                <a:ln>
+                  <a:solidFill>
+                    <a:srgbClr val="000000">
+                      <a:lumMod val="25000"/>
+                      <a:lumOff val="75000"/>
+                    </a:srgbClr>
+                  </a:solidFill>
+                </a:ln>
+                <a:effectLst/>
+              </c:spPr>
+              <c:txPr>
+                <a:bodyPr rot="0" spcFirstLastPara="1" vertOverflow="clip" horzOverflow="clip" vert="horz" wrap="square" lIns="38100" tIns="19050" rIns="38100" bIns="19050" anchor="ctr" anchorCtr="1">
+                  <a:noAutofit/>
+                </a:bodyPr>
+                <a:lstStyle/>
+                <a:p>
+                  <a:pPr>
+                    <a:defRPr sz="1197" b="0" i="0" u="none" strike="noStrike" kern="1200" baseline="0">
+                      <a:solidFill>
+                        <a:schemeClr val="dk1">
+                          <a:lumMod val="65000"/>
+                          <a:lumOff val="35000"/>
+                        </a:schemeClr>
+                      </a:solidFill>
+                      <a:latin typeface="+mn-lt"/>
+                      <a:ea typeface="+mn-ea"/>
+                      <a:cs typeface="+mn-cs"/>
+                    </a:defRPr>
+                  </a:pPr>
+                  <a:endParaRPr lang="pl-PL"/>
+                </a:p>
+              </c:txPr>
+              <c:showLegendKey val="0"/>
+              <c:showVal val="1"/>
+              <c:showCatName val="1"/>
+              <c:showSerName val="0"/>
+              <c:showPercent val="0"/>
+              <c:showBubbleSize val="0"/>
+              <c:extLst>
+                <c:ext xmlns:c15="http://schemas.microsoft.com/office/drawing/2012/chart" uri="{CE6537A1-D6FC-4f65-9D91-7224C49458BB}">
+                  <c15:spPr xmlns:c15="http://schemas.microsoft.com/office/drawing/2012/chart">
+                    <a:prstGeom prst="wedgeRectCallout">
+                      <a:avLst/>
+                    </a:prstGeom>
+                    <a:noFill/>
+                    <a:ln>
+                      <a:noFill/>
+                    </a:ln>
+                  </c15:spPr>
+                  <c15:layout>
+                    <c:manualLayout>
+                      <c:w val="0.23830390679076763"/>
+                      <c:h val="0.11255583683437752"/>
+                    </c:manualLayout>
+                  </c15:layout>
+                  <c15:showDataLabelsRange val="0"/>
+                </c:ext>
+                <c:ext xmlns:c16="http://schemas.microsoft.com/office/drawing/2014/chart" uri="{C3380CC4-5D6E-409C-BE32-E72D297353CC}">
+                  <c16:uniqueId val="{00000001-0E4A-4E4E-B9CD-2ED98FD21E61}"/>
+                </c:ext>
+              </c:extLst>
+            </c:dLbl>
+            <c:dLbl>
+              <c:idx val="53"/>
+              <c:layout>
+                <c:manualLayout>
+                  <c:x val="-7.1396697902722656E-3"/>
+                  <c:y val="-0.15311006559574636"/>
+                </c:manualLayout>
+              </c:layout>
+              <c:tx>
+                <c:rich>
+                  <a:bodyPr rot="0" spcFirstLastPara="1" vertOverflow="clip" horzOverflow="clip" vert="horz" wrap="square" lIns="38100" tIns="19050" rIns="38100" bIns="19050" anchor="ctr" anchorCtr="0">
+                    <a:spAutoFit/>
+                  </a:bodyPr>
+                  <a:lstStyle/>
+                  <a:p>
+                    <a:pPr marL="0" marR="0" lvl="0" indent="0" algn="ctr" defTabSz="914400" rtl="0" eaLnBrk="1" fontAlgn="auto" latinLnBrk="0" hangingPunct="1">
+                      <a:lnSpc>
+                        <a:spcPct val="100000"/>
+                      </a:lnSpc>
+                      <a:spcBef>
+                        <a:spcPts val="0"/>
+                      </a:spcBef>
+                      <a:spcAft>
+                        <a:spcPts val="0"/>
+                      </a:spcAft>
+                      <a:buClrTx/>
+                      <a:buSzTx/>
+                      <a:buFontTx/>
+                      <a:buNone/>
+                      <a:tabLst/>
+                      <a:defRPr sz="1197" b="0" i="0" u="none" strike="noStrike" kern="1200" baseline="0">
+                        <a:solidFill>
+                          <a:srgbClr val="000000">
+                            <a:lumMod val="65000"/>
+                            <a:lumOff val="35000"/>
+                          </a:srgbClr>
+                        </a:solidFill>
+                        <a:latin typeface="+mn-lt"/>
+                        <a:ea typeface="+mn-ea"/>
+                        <a:cs typeface="+mn-cs"/>
+                      </a:defRPr>
+                    </a:pPr>
+                    <a:r>
+                      <a:rPr lang="en-US" sz="1197" b="0" i="0" u="none" strike="noStrike" kern="1200" baseline="0" dirty="0" err="1">
+                        <a:solidFill>
+                          <a:srgbClr val="000000">
+                            <a:lumMod val="65000"/>
+                            <a:lumOff val="35000"/>
+                          </a:srgbClr>
+                        </a:solidFill>
+                      </a:rPr>
+                      <a:t>Wygrana</a:t>
+                    </a:r>
+                    <a:r>
+                      <a:rPr lang="en-US" sz="1197" b="0" i="0" u="none" strike="noStrike" kern="1200" baseline="0" dirty="0">
+                        <a:solidFill>
+                          <a:srgbClr val="000000">
+                            <a:lumMod val="65000"/>
+                            <a:lumOff val="35000"/>
+                          </a:srgbClr>
+                        </a:solidFill>
+                      </a:rPr>
+                      <a:t> Rolanda </a:t>
+                    </a:r>
+                    <a:r>
+                      <a:rPr lang="en-US" sz="1197" b="0" i="0" u="none" strike="noStrike" kern="1200" baseline="0" dirty="0" err="1">
+                        <a:solidFill>
+                          <a:srgbClr val="000000">
+                            <a:lumMod val="65000"/>
+                            <a:lumOff val="35000"/>
+                          </a:srgbClr>
+                        </a:solidFill>
+                      </a:rPr>
+                      <a:t>Garrosa</a:t>
+                    </a:r>
+                    <a:endParaRPr lang="en-US" sz="1197" b="0" i="0" u="none" strike="noStrike" kern="1200" baseline="0" dirty="0">
+                      <a:solidFill>
+                        <a:srgbClr val="000000">
+                          <a:lumMod val="65000"/>
+                          <a:lumOff val="35000"/>
+                        </a:srgbClr>
+                      </a:solidFill>
+                    </a:endParaRPr>
+                  </a:p>
+                </c:rich>
+              </c:tx>
+              <c:spPr>
+                <a:solidFill>
+                  <a:prstClr val="white"/>
+                </a:solidFill>
+                <a:ln>
+                  <a:solidFill>
+                    <a:srgbClr val="000000">
+                      <a:lumMod val="25000"/>
+                      <a:lumOff val="75000"/>
+                    </a:srgbClr>
+                  </a:solidFill>
+                </a:ln>
+                <a:effectLst/>
+              </c:spPr>
+              <c:txPr>
+                <a:bodyPr rot="0" spcFirstLastPara="1" vertOverflow="clip" horzOverflow="clip" vert="horz" wrap="square" lIns="38100" tIns="19050" rIns="38100" bIns="19050" anchor="ctr" anchorCtr="0">
+                  <a:spAutoFit/>
+                </a:bodyPr>
+                <a:lstStyle/>
+                <a:p>
+                  <a:pPr marL="0" marR="0" lvl="0" indent="0" algn="ctr" defTabSz="914400" rtl="0" eaLnBrk="1" fontAlgn="auto" latinLnBrk="0" hangingPunct="1">
+                    <a:lnSpc>
+                      <a:spcPct val="100000"/>
+                    </a:lnSpc>
+                    <a:spcBef>
+                      <a:spcPts val="0"/>
+                    </a:spcBef>
+                    <a:spcAft>
+                      <a:spcPts val="0"/>
+                    </a:spcAft>
+                    <a:buClrTx/>
+                    <a:buSzTx/>
+                    <a:buFontTx/>
+                    <a:buNone/>
+                    <a:tabLst/>
+                    <a:defRPr sz="1197" b="0" i="0" u="none" strike="noStrike" kern="1200" baseline="0">
+                      <a:solidFill>
+                        <a:srgbClr val="000000">
+                          <a:lumMod val="65000"/>
+                          <a:lumOff val="35000"/>
+                        </a:srgbClr>
+                      </a:solidFill>
+                      <a:latin typeface="+mn-lt"/>
+                      <a:ea typeface="+mn-ea"/>
+                      <a:cs typeface="+mn-cs"/>
+                    </a:defRPr>
+                  </a:pPr>
+                  <a:endParaRPr lang="pl-PL"/>
+                </a:p>
+              </c:txPr>
+              <c:showLegendKey val="0"/>
+              <c:showVal val="1"/>
+              <c:showCatName val="1"/>
+              <c:showSerName val="0"/>
+              <c:showPercent val="0"/>
+              <c:showBubbleSize val="0"/>
+              <c:extLst>
+                <c:ext xmlns:c15="http://schemas.microsoft.com/office/drawing/2012/chart" uri="{CE6537A1-D6FC-4f65-9D91-7224C49458BB}">
+                  <c15:spPr xmlns:c15="http://schemas.microsoft.com/office/drawing/2012/chart">
+                    <a:prstGeom prst="wedgeRectCallout">
+                      <a:avLst/>
+                    </a:prstGeom>
+                    <a:noFill/>
+                    <a:ln>
+                      <a:noFill/>
+                    </a:ln>
+                  </c15:spPr>
+                  <c15:showDataLabelsRange val="0"/>
+                </c:ext>
+                <c:ext xmlns:c16="http://schemas.microsoft.com/office/drawing/2014/chart" uri="{C3380CC4-5D6E-409C-BE32-E72D297353CC}">
+                  <c16:uniqueId val="{00000003-0E4A-4E4E-B9CD-2ED98FD21E61}"/>
+                </c:ext>
+              </c:extLst>
+            </c:dLbl>
+            <c:dLbl>
+              <c:idx val="65"/>
+              <c:layout>
+                <c:manualLayout>
+                  <c:x val="-8.9245872378402494E-2"/>
+                  <c:y val="-0.13249909522708814"/>
+                </c:manualLayout>
+              </c:layout>
+              <c:tx>
+                <c:rich>
+                  <a:bodyPr rot="0" spcFirstLastPara="1" vertOverflow="clip" horzOverflow="clip" vert="horz" wrap="square" lIns="38100" tIns="19050" rIns="38100" bIns="19050" anchor="ctr" anchorCtr="0">
+                    <a:spAutoFit/>
+                  </a:bodyPr>
+                  <a:lstStyle/>
+                  <a:p>
+                    <a:pPr marL="0" marR="0" lvl="0" indent="0" algn="ctr" defTabSz="914400" rtl="0" eaLnBrk="1" fontAlgn="auto" latinLnBrk="0" hangingPunct="1">
+                      <a:lnSpc>
+                        <a:spcPct val="100000"/>
+                      </a:lnSpc>
+                      <a:spcBef>
+                        <a:spcPts val="0"/>
+                      </a:spcBef>
+                      <a:spcAft>
+                        <a:spcPts val="0"/>
+                      </a:spcAft>
+                      <a:buClrTx/>
+                      <a:buSzTx/>
+                      <a:buFontTx/>
+                      <a:buNone/>
+                      <a:tabLst/>
+                      <a:defRPr sz="1197" b="0" i="0" u="none" strike="noStrike" kern="1200" baseline="0">
+                        <a:solidFill>
+                          <a:srgbClr val="000000">
+                            <a:lumMod val="65000"/>
+                            <a:lumOff val="35000"/>
+                          </a:srgbClr>
+                        </a:solidFill>
+                        <a:latin typeface="+mn-lt"/>
+                        <a:ea typeface="+mn-ea"/>
+                        <a:cs typeface="+mn-cs"/>
+                      </a:defRPr>
+                    </a:pPr>
+                    <a:r>
+                      <a:rPr lang="en-US" sz="1197" b="0" i="0" u="none" strike="noStrike" kern="1200" baseline="0" dirty="0" err="1">
+                        <a:solidFill>
+                          <a:srgbClr val="000000">
+                            <a:lumMod val="65000"/>
+                            <a:lumOff val="35000"/>
+                          </a:srgbClr>
+                        </a:solidFill>
+                      </a:rPr>
+                      <a:t>Wygrana</a:t>
+                    </a:r>
+                    <a:r>
+                      <a:rPr lang="en-US" sz="1197" b="0" i="0" u="none" strike="noStrike" kern="1200" baseline="0" dirty="0">
+                        <a:solidFill>
+                          <a:srgbClr val="000000">
+                            <a:lumMod val="65000"/>
+                            <a:lumOff val="35000"/>
+                          </a:srgbClr>
+                        </a:solidFill>
+                      </a:rPr>
+                      <a:t> Rolanda </a:t>
+                    </a:r>
+                    <a:r>
+                      <a:rPr lang="en-US" sz="1197" b="0" i="0" u="none" strike="noStrike" kern="1200" baseline="0" dirty="0" err="1">
+                        <a:solidFill>
+                          <a:srgbClr val="000000">
+                            <a:lumMod val="65000"/>
+                            <a:lumOff val="35000"/>
+                          </a:srgbClr>
+                        </a:solidFill>
+                      </a:rPr>
+                      <a:t>Garrosa</a:t>
+                    </a:r>
+                    <a:endParaRPr lang="en-US" sz="1197" b="0" i="0" u="none" strike="noStrike" kern="1200" baseline="0" dirty="0">
+                      <a:solidFill>
+                        <a:srgbClr val="000000">
+                          <a:lumMod val="65000"/>
+                          <a:lumOff val="35000"/>
+                        </a:srgbClr>
+                      </a:solidFill>
+                    </a:endParaRPr>
+                  </a:p>
+                </c:rich>
+              </c:tx>
+              <c:spPr>
+                <a:solidFill>
+                  <a:prstClr val="white"/>
+                </a:solidFill>
+                <a:ln>
+                  <a:solidFill>
+                    <a:srgbClr val="000000">
+                      <a:lumMod val="25000"/>
+                      <a:lumOff val="75000"/>
+                    </a:srgbClr>
+                  </a:solidFill>
+                </a:ln>
+                <a:effectLst/>
+              </c:spPr>
+              <c:txPr>
+                <a:bodyPr rot="0" spcFirstLastPara="1" vertOverflow="clip" horzOverflow="clip" vert="horz" wrap="square" lIns="38100" tIns="19050" rIns="38100" bIns="19050" anchor="ctr" anchorCtr="0">
+                  <a:spAutoFit/>
+                </a:bodyPr>
+                <a:lstStyle/>
+                <a:p>
+                  <a:pPr marL="0" marR="0" lvl="0" indent="0" algn="ctr" defTabSz="914400" rtl="0" eaLnBrk="1" fontAlgn="auto" latinLnBrk="0" hangingPunct="1">
+                    <a:lnSpc>
+                      <a:spcPct val="100000"/>
+                    </a:lnSpc>
+                    <a:spcBef>
+                      <a:spcPts val="0"/>
+                    </a:spcBef>
+                    <a:spcAft>
+                      <a:spcPts val="0"/>
+                    </a:spcAft>
+                    <a:buClrTx/>
+                    <a:buSzTx/>
+                    <a:buFontTx/>
+                    <a:buNone/>
+                    <a:tabLst/>
+                    <a:defRPr sz="1197" b="0" i="0" u="none" strike="noStrike" kern="1200" baseline="0">
+                      <a:solidFill>
+                        <a:srgbClr val="000000">
+                          <a:lumMod val="65000"/>
+                          <a:lumOff val="35000"/>
+                        </a:srgbClr>
+                      </a:solidFill>
+                      <a:latin typeface="+mn-lt"/>
+                      <a:ea typeface="+mn-ea"/>
+                      <a:cs typeface="+mn-cs"/>
+                    </a:defRPr>
+                  </a:pPr>
+                  <a:endParaRPr lang="pl-PL"/>
+                </a:p>
+              </c:txPr>
+              <c:showLegendKey val="0"/>
+              <c:showVal val="1"/>
+              <c:showCatName val="1"/>
+              <c:showSerName val="0"/>
+              <c:showPercent val="0"/>
+              <c:showBubbleSize val="0"/>
+              <c:extLst>
+                <c:ext xmlns:c15="http://schemas.microsoft.com/office/drawing/2012/chart" uri="{CE6537A1-D6FC-4f65-9D91-7224C49458BB}">
+                  <c15:spPr xmlns:c15="http://schemas.microsoft.com/office/drawing/2012/chart">
+                    <a:prstGeom prst="wedgeRectCallout">
+                      <a:avLst/>
+                    </a:prstGeom>
+                    <a:noFill/>
+                    <a:ln>
+                      <a:noFill/>
+                    </a:ln>
+                  </c15:spPr>
+                  <c15:layout>
+                    <c:manualLayout>
+                      <c:w val="0.24901341147617592"/>
+                      <c:h val="9.5676866353506654E-2"/>
+                    </c:manualLayout>
+                  </c15:layout>
+                  <c15:showDataLabelsRange val="0"/>
+                </c:ext>
+                <c:ext xmlns:c16="http://schemas.microsoft.com/office/drawing/2014/chart" uri="{C3380CC4-5D6E-409C-BE32-E72D297353CC}">
+                  <c16:uniqueId val="{00000004-0E4A-4E4E-B9CD-2ED98FD21E61}"/>
+                </c:ext>
+              </c:extLst>
+            </c:dLbl>
+            <c:dLbl>
+              <c:idx val="77"/>
+              <c:layout>
+                <c:manualLayout>
+                  <c:x val="-0.17670682730923701"/>
+                  <c:y val="-0.16488776294926524"/>
+                </c:manualLayout>
+              </c:layout>
+              <c:tx>
+                <c:rich>
+                  <a:bodyPr rot="0" spcFirstLastPara="1" vertOverflow="clip" horzOverflow="clip" vert="horz" wrap="square" lIns="38100" tIns="19050" rIns="38100" bIns="19050" anchor="ctr" anchorCtr="0">
+                    <a:spAutoFit/>
+                  </a:bodyPr>
+                  <a:lstStyle/>
+                  <a:p>
+                    <a:pPr marL="0" marR="0" lvl="0" indent="0" algn="ctr" defTabSz="914400" rtl="0" eaLnBrk="1" fontAlgn="auto" latinLnBrk="0" hangingPunct="1">
+                      <a:lnSpc>
+                        <a:spcPct val="100000"/>
+                      </a:lnSpc>
+                      <a:spcBef>
+                        <a:spcPts val="0"/>
+                      </a:spcBef>
+                      <a:spcAft>
+                        <a:spcPts val="0"/>
+                      </a:spcAft>
+                      <a:buClrTx/>
+                      <a:buSzTx/>
+                      <a:buFontTx/>
+                      <a:buNone/>
+                      <a:tabLst/>
+                      <a:defRPr sz="1197" b="0" i="0" u="none" strike="noStrike" kern="1200" baseline="0">
+                        <a:solidFill>
+                          <a:srgbClr val="000000">
+                            <a:lumMod val="65000"/>
+                            <a:lumOff val="35000"/>
+                          </a:srgbClr>
+                        </a:solidFill>
+                        <a:latin typeface="+mn-lt"/>
+                        <a:ea typeface="+mn-ea"/>
+                        <a:cs typeface="+mn-cs"/>
+                      </a:defRPr>
+                    </a:pPr>
+                    <a:r>
+                      <a:rPr lang="en-US" dirty="0" err="1"/>
+                      <a:t>Kolejne</a:t>
+                    </a:r>
+                    <a:r>
+                      <a:rPr lang="en-US" baseline="0" dirty="0"/>
+                      <a:t> </a:t>
+                    </a:r>
+                    <a:r>
+                      <a:rPr lang="en-US" sz="1197" b="0" i="0" u="none" strike="noStrike" kern="1200" baseline="0" dirty="0" err="1">
+                        <a:solidFill>
+                          <a:srgbClr val="000000">
+                            <a:lumMod val="65000"/>
+                            <a:lumOff val="35000"/>
+                          </a:srgbClr>
+                        </a:solidFill>
+                      </a:rPr>
+                      <a:t>wygrane</a:t>
+                    </a:r>
+                    <a:r>
+                      <a:rPr lang="en-US" sz="1197" b="0" i="0" u="none" strike="noStrike" kern="1200" baseline="0" dirty="0">
+                        <a:solidFill>
+                          <a:srgbClr val="000000">
+                            <a:lumMod val="65000"/>
+                            <a:lumOff val="35000"/>
+                          </a:srgbClr>
+                        </a:solidFill>
+                      </a:rPr>
+                      <a:t> Rolanda </a:t>
+                    </a:r>
+                    <a:r>
+                      <a:rPr lang="en-US" sz="1197" b="0" i="0" u="none" strike="noStrike" kern="1200" baseline="0" dirty="0" err="1">
+                        <a:solidFill>
+                          <a:srgbClr val="000000">
+                            <a:lumMod val="65000"/>
+                            <a:lumOff val="35000"/>
+                          </a:srgbClr>
+                        </a:solidFill>
+                      </a:rPr>
+                      <a:t>Garrosa</a:t>
+                    </a:r>
+                    <a:endParaRPr lang="en-US" sz="1197" b="0" i="0" u="none" strike="noStrike" kern="1200" baseline="0" dirty="0">
+                      <a:solidFill>
+                        <a:srgbClr val="000000">
+                          <a:lumMod val="65000"/>
+                          <a:lumOff val="35000"/>
+                        </a:srgbClr>
+                      </a:solidFill>
+                    </a:endParaRPr>
+                  </a:p>
+                </c:rich>
+              </c:tx>
+              <c:spPr>
+                <a:solidFill>
+                  <a:prstClr val="white"/>
+                </a:solidFill>
+                <a:ln>
+                  <a:solidFill>
+                    <a:srgbClr val="000000">
+                      <a:lumMod val="25000"/>
+                      <a:lumOff val="75000"/>
+                    </a:srgbClr>
+                  </a:solidFill>
+                </a:ln>
+                <a:effectLst/>
+              </c:spPr>
+              <c:txPr>
+                <a:bodyPr rot="0" spcFirstLastPara="1" vertOverflow="clip" horzOverflow="clip" vert="horz" wrap="square" lIns="38100" tIns="19050" rIns="38100" bIns="19050" anchor="ctr" anchorCtr="0">
+                  <a:spAutoFit/>
+                </a:bodyPr>
+                <a:lstStyle/>
+                <a:p>
+                  <a:pPr marL="0" marR="0" lvl="0" indent="0" algn="ctr" defTabSz="914400" rtl="0" eaLnBrk="1" fontAlgn="auto" latinLnBrk="0" hangingPunct="1">
+                    <a:lnSpc>
+                      <a:spcPct val="100000"/>
+                    </a:lnSpc>
+                    <a:spcBef>
+                      <a:spcPts val="0"/>
+                    </a:spcBef>
+                    <a:spcAft>
+                      <a:spcPts val="0"/>
+                    </a:spcAft>
+                    <a:buClrTx/>
+                    <a:buSzTx/>
+                    <a:buFontTx/>
+                    <a:buNone/>
+                    <a:tabLst/>
+                    <a:defRPr sz="1197" b="0" i="0" u="none" strike="noStrike" kern="1200" baseline="0">
+                      <a:solidFill>
+                        <a:srgbClr val="000000">
+                          <a:lumMod val="65000"/>
+                          <a:lumOff val="35000"/>
+                        </a:srgbClr>
+                      </a:solidFill>
+                      <a:latin typeface="+mn-lt"/>
+                      <a:ea typeface="+mn-ea"/>
+                      <a:cs typeface="+mn-cs"/>
+                    </a:defRPr>
+                  </a:pPr>
+                  <a:endParaRPr lang="pl-PL"/>
+                </a:p>
+              </c:txPr>
+              <c:showLegendKey val="0"/>
+              <c:showVal val="1"/>
+              <c:showCatName val="1"/>
+              <c:showSerName val="0"/>
+              <c:showPercent val="0"/>
+              <c:showBubbleSize val="0"/>
+              <c:extLst>
+                <c:ext xmlns:c15="http://schemas.microsoft.com/office/drawing/2012/chart" uri="{CE6537A1-D6FC-4f65-9D91-7224C49458BB}">
+                  <c15:spPr xmlns:c15="http://schemas.microsoft.com/office/drawing/2012/chart">
+                    <a:prstGeom prst="wedgeRectCallout">
+                      <a:avLst/>
+                    </a:prstGeom>
+                    <a:noFill/>
+                    <a:ln>
+                      <a:noFill/>
+                    </a:ln>
+                  </c15:spPr>
+                  <c15:layout>
+                    <c:manualLayout>
+                      <c:w val="0.27848886359084635"/>
+                      <c:h val="9.5676866353506654E-2"/>
+                    </c:manualLayout>
+                  </c15:layout>
+                  <c15:showDataLabelsRange val="0"/>
+                </c:ext>
+                <c:ext xmlns:c16="http://schemas.microsoft.com/office/drawing/2014/chart" uri="{C3380CC4-5D6E-409C-BE32-E72D297353CC}">
+                  <c16:uniqueId val="{00000005-0E4A-4E4E-B9CD-2ED98FD21E61}"/>
+                </c:ext>
+              </c:extLst>
+            </c:dLbl>
+            <c:dLbl>
+              <c:idx val="90"/>
+              <c:layout>
+                <c:manualLayout>
+                  <c:x val="-7.1396697902721996E-3"/>
+                  <c:y val="-0.13838794390384768"/>
+                </c:manualLayout>
+              </c:layout>
+              <c:tx>
+                <c:rich>
+                  <a:bodyPr/>
+                  <a:lstStyle/>
+                  <a:p>
+                    <a:r>
+                      <a:rPr lang="en-US" dirty="0" err="1"/>
+                      <a:t>Wygrana</a:t>
+                    </a:r>
+                    <a:r>
+                      <a:rPr lang="en-US" dirty="0"/>
+                      <a:t> </a:t>
+                    </a:r>
+                    <a:r>
+                      <a:rPr lang="en-US" dirty="0" err="1"/>
+                      <a:t>Wimbledonu</a:t>
+                    </a:r>
+                    <a:endParaRPr lang="en-US" dirty="0"/>
+                  </a:p>
+                </c:rich>
+              </c:tx>
+              <c:showLegendKey val="0"/>
+              <c:showVal val="1"/>
+              <c:showCatName val="1"/>
+              <c:showSerName val="0"/>
+              <c:showPercent val="0"/>
+              <c:showBubbleSize val="0"/>
+              <c:extLst>
+                <c:ext xmlns:c15="http://schemas.microsoft.com/office/drawing/2012/chart" uri="{CE6537A1-D6FC-4f65-9D91-7224C49458BB}">
+                  <c15:showDataLabelsRange val="0"/>
+                </c:ext>
+                <c:ext xmlns:c16="http://schemas.microsoft.com/office/drawing/2014/chart" uri="{C3380CC4-5D6E-409C-BE32-E72D297353CC}">
+                  <c16:uniqueId val="{00000002-0E4A-4E4E-B9CD-2ED98FD21E61}"/>
+                </c:ext>
+              </c:extLst>
+            </c:dLbl>
+            <c:spPr>
+              <a:solidFill>
+                <a:prstClr val="white"/>
+              </a:solidFill>
+              <a:ln>
+                <a:solidFill>
+                  <a:srgbClr val="000000">
+                    <a:lumMod val="25000"/>
+                    <a:lumOff val="75000"/>
+                  </a:srgbClr>
+                </a:solidFill>
+              </a:ln>
+              <a:effectLst/>
+            </c:spPr>
+            <c:txPr>
+              <a:bodyPr rot="0" spcFirstLastPara="1" vertOverflow="clip" horzOverflow="clip" vert="horz" wrap="square" lIns="38100" tIns="19050" rIns="38100" bIns="19050" anchor="ctr" anchorCtr="1">
+                <a:spAutoFit/>
+              </a:bodyPr>
+              <a:lstStyle/>
+              <a:p>
+                <a:pPr>
+                  <a:defRPr sz="1197" b="0" i="0" u="none" strike="noStrike" kern="1200" baseline="0">
+                    <a:solidFill>
+                      <a:schemeClr val="dk1">
+                        <a:lumMod val="65000"/>
+                        <a:lumOff val="35000"/>
+                      </a:schemeClr>
+                    </a:solidFill>
+                    <a:latin typeface="+mn-lt"/>
+                    <a:ea typeface="+mn-ea"/>
+                    <a:cs typeface="+mn-cs"/>
+                  </a:defRPr>
+                </a:pPr>
+                <a:endParaRPr lang="pl-PL"/>
+              </a:p>
+            </c:txPr>
+            <c:showLegendKey val="0"/>
+            <c:showVal val="0"/>
+            <c:showCatName val="0"/>
+            <c:showSerName val="0"/>
+            <c:showPercent val="0"/>
+            <c:showBubbleSize val="0"/>
+            <c:extLst>
+              <c:ext xmlns:c15="http://schemas.microsoft.com/office/drawing/2012/chart" uri="{CE6537A1-D6FC-4f65-9D91-7224C49458BB}">
+                <c15:spPr xmlns:c15="http://schemas.microsoft.com/office/drawing/2012/chart">
+                  <a:prstGeom prst="wedgeRectCallout">
+                    <a:avLst/>
+                  </a:prstGeom>
+                  <a:noFill/>
+                  <a:ln>
+                    <a:noFill/>
+                  </a:ln>
+                </c15:spPr>
+                <c15:showLeaderLines val="0"/>
+              </c:ext>
+            </c:extLst>
+          </c:dLbls>
           <c:cat>
             <c:numRef>
               <c:f>Arkusz1!$A$2:$A$105</c:f>
@@ -4312,7 +5049,7 @@
                   <a:schemeClr val="tx1"/>
                 </a:solidFill>
               </a:rPr>
-              <a:t>[tys.][4]</a:t>
+              <a:t>[tys.]</a:t>
             </a:r>
             <a:endParaRPr lang="en-US" sz="1800" dirty="0">
               <a:solidFill>
@@ -5384,7 +6121,7 @@
                   <a:schemeClr val="tx1"/>
                 </a:solidFill>
               </a:rPr>
-              <a:t>Republika Zielonego Przylądka oraz Curaçao [tys.][4]</a:t>
+              <a:t>Republika Zielonego Przylądka oraz Curaçao [tys.]</a:t>
             </a:r>
             <a:endParaRPr lang="en-US" sz="1800" dirty="0">
               <a:solidFill>
@@ -6994,7 +7731,7 @@
                   <a:schemeClr val="tx1"/>
                 </a:solidFill>
               </a:rPr>
-              <a:t>[mln][4]</a:t>
+              <a:t>[mln]</a:t>
             </a:r>
             <a:endParaRPr lang="en-US" sz="1800" dirty="0">
               <a:solidFill>
@@ -12355,7 +13092,7 @@
           <a:p>
             <a:fld id="{3A47170D-57BC-4138-8517-84641EEC49C6}" type="datetimeFigureOut">
               <a:rPr lang="pl-PL" smtClean="0"/>
-              <a:t>17.10.2026</a:t>
+              <a:t>01.11.2026</a:t>
             </a:fld>
             <a:endParaRPr lang="pl-PL"/>
           </a:p>
@@ -12548,7 +13285,7 @@
           <a:p>
             <a:fld id="{E5935C60-06B4-43D2-8FB6-7E8AA44FCC6B}" type="datetimeFigureOut">
               <a:rPr lang="pl-PL" smtClean="0"/>
-              <a:t>17.10.2026</a:t>
+              <a:t>01.11.2026</a:t>
             </a:fld>
             <a:endParaRPr lang="pl-PL"/>
           </a:p>
@@ -12922,6 +13659,90 @@
 </p:notes>
 </file>
 
+<file path=ppt/notesSlides/notesSlide2.xml><?xml version="1.0" encoding="utf-8"?>
+<p:notes xmlns:a="http://schemas.openxmlformats.org/drawingml/2006/main" xmlns:r="http://schemas.openxmlformats.org/officeDocument/2006/relationships" xmlns:p="http://schemas.openxmlformats.org/presentationml/2006/main">
+  <p:cSld>
+    <p:spTree>
+      <p:nvGrpSpPr>
+        <p:cNvPr id="1" name=""/>
+        <p:cNvGrpSpPr/>
+        <p:nvPr/>
+      </p:nvGrpSpPr>
+      <p:grpSpPr>
+        <a:xfrm>
+          <a:off x="0" y="0"/>
+          <a:ext cx="0" cy="0"/>
+          <a:chOff x="0" y="0"/>
+          <a:chExt cx="0" cy="0"/>
+        </a:xfrm>
+      </p:grpSpPr>
+      <p:sp>
+        <p:nvSpPr>
+          <p:cNvPr id="2" name="Symbol zastępczy obrazu slajdu 1"/>
+          <p:cNvSpPr>
+            <a:spLocks noGrp="1" noRot="1" noChangeAspect="1"/>
+          </p:cNvSpPr>
+          <p:nvPr>
+            <p:ph type="sldImg"/>
+          </p:nvPr>
+        </p:nvSpPr>
+        <p:spPr/>
+      </p:sp>
+      <p:sp>
+        <p:nvSpPr>
+          <p:cNvPr id="3" name="Symbol zastępczy notatek 2"/>
+          <p:cNvSpPr>
+            <a:spLocks noGrp="1"/>
+          </p:cNvSpPr>
+          <p:nvPr>
+            <p:ph type="body" idx="1"/>
+          </p:nvPr>
+        </p:nvSpPr>
+        <p:spPr/>
+        <p:txBody>
+          <a:bodyPr/>
+          <a:lstStyle/>
+          <a:p>
+            <a:endParaRPr lang="pl-PL" dirty="0"/>
+          </a:p>
+        </p:txBody>
+      </p:sp>
+      <p:sp>
+        <p:nvSpPr>
+          <p:cNvPr id="4" name="Symbol zastępczy numeru slajdu 3"/>
+          <p:cNvSpPr>
+            <a:spLocks noGrp="1"/>
+          </p:cNvSpPr>
+          <p:nvPr>
+            <p:ph type="sldNum" sz="quarter" idx="5"/>
+          </p:nvPr>
+        </p:nvSpPr>
+        <p:spPr/>
+        <p:txBody>
+          <a:bodyPr/>
+          <a:lstStyle/>
+          <a:p>
+            <a:fld id="{1795FADB-00C8-4FB2-BB50-76DE30578D93}" type="slidenum">
+              <a:rPr lang="pl-PL" smtClean="0"/>
+              <a:t>6</a:t>
+            </a:fld>
+            <a:endParaRPr lang="pl-PL"/>
+          </a:p>
+        </p:txBody>
+      </p:sp>
+    </p:spTree>
+    <p:extLst>
+      <p:ext uri="{BB962C8B-B14F-4D97-AF65-F5344CB8AC3E}">
+        <p14:creationId xmlns:p14="http://schemas.microsoft.com/office/powerpoint/2010/main" val="1143670020"/>
+      </p:ext>
+    </p:extLst>
+  </p:cSld>
+  <p:clrMapOvr>
+    <a:masterClrMapping/>
+  </p:clrMapOvr>
+</p:notes>
+</file>
+
 <file path=ppt/slideLayouts/slideLayout1.xml><?xml version="1.0" encoding="utf-8"?>
 <p:sldLayout xmlns:a="http://schemas.openxmlformats.org/drawingml/2006/main" xmlns:r="http://schemas.openxmlformats.org/officeDocument/2006/relationships" xmlns:p="http://schemas.openxmlformats.org/presentationml/2006/main" type="title" preserve="1">
   <p:cSld name="Slajd tytułowy">
@@ -13069,7 +13890,7 @@
           <a:p>
             <a:fld id="{395FEE27-536F-479E-B304-98213E6B58CC}" type="datetimeFigureOut">
               <a:rPr lang="pl-PL" smtClean="0"/>
-              <a:t>17.10.2026</a:t>
+              <a:t>01.11.2026</a:t>
             </a:fld>
             <a:endParaRPr lang="pl-PL"/>
           </a:p>
@@ -13357,7 +14178,7 @@
           <a:p>
             <a:fld id="{395FEE27-536F-479E-B304-98213E6B58CC}" type="datetimeFigureOut">
               <a:rPr lang="pl-PL" smtClean="0"/>
-              <a:t>17.10.2026</a:t>
+              <a:t>01.11.2026</a:t>
             </a:fld>
             <a:endParaRPr lang="pl-PL"/>
           </a:p>
@@ -13555,7 +14376,7 @@
           <a:p>
             <a:fld id="{395FEE27-536F-479E-B304-98213E6B58CC}" type="datetimeFigureOut">
               <a:rPr lang="pl-PL" smtClean="0"/>
-              <a:t>17.10.2026</a:t>
+              <a:t>01.11.2026</a:t>
             </a:fld>
             <a:endParaRPr lang="pl-PL"/>
           </a:p>
@@ -13763,7 +14584,7 @@
           <a:p>
             <a:fld id="{395FEE27-536F-479E-B304-98213E6B58CC}" type="datetimeFigureOut">
               <a:rPr lang="pl-PL" smtClean="0"/>
-              <a:t>17.10.2026</a:t>
+              <a:t>01.11.2026</a:t>
             </a:fld>
             <a:endParaRPr lang="pl-PL"/>
           </a:p>
@@ -13961,7 +14782,7 @@
           <a:p>
             <a:fld id="{395FEE27-536F-479E-B304-98213E6B58CC}" type="datetimeFigureOut">
               <a:rPr lang="pl-PL" smtClean="0"/>
-              <a:t>17.10.2026</a:t>
+              <a:t>01.11.2026</a:t>
             </a:fld>
             <a:endParaRPr lang="pl-PL"/>
           </a:p>
@@ -14167,7 +14988,7 @@
         <p:spPr>
           <a:xfrm>
             <a:off x="8070852" y="1449704"/>
-            <a:ext cx="3416299" cy="4312920"/>
+            <a:ext cx="3416299" cy="4174809"/>
           </a:xfrm>
           <a:prstGeom prst="roundRect">
             <a:avLst>
@@ -14231,7 +15052,7 @@
           <a:p>
             <a:fld id="{395FEE27-536F-479E-B304-98213E6B58CC}" type="datetimeFigureOut">
               <a:rPr lang="pl-PL" smtClean="0"/>
-              <a:t>17.10.2026</a:t>
+              <a:t>01.11.2026</a:t>
             </a:fld>
             <a:endParaRPr lang="pl-PL"/>
           </a:p>
@@ -14310,7 +15131,7 @@
         <p:spPr>
           <a:xfrm>
             <a:off x="8070851" y="1449704"/>
-            <a:ext cx="3416299" cy="4312920"/>
+            <a:ext cx="3416299" cy="4174809"/>
           </a:xfrm>
           <a:noFill/>
           <a:ln>
@@ -14369,7 +15190,12 @@
   <p:extLst>
     <p:ext uri="{DCECCB84-F9BA-43D5-87BE-67443E8EF086}">
       <p15:sldGuideLst xmlns:p15="http://schemas.microsoft.com/office/powerpoint/2012/main">
-        <p15:guide id="1" orient="horz" pos="2160" userDrawn="1">
+        <p15:guide id="1" orient="horz" pos="3543" userDrawn="1">
+          <p15:clr>
+            <a:srgbClr val="FBAE40"/>
+          </p15:clr>
+        </p15:guide>
+        <p15:guide id="2" orient="horz" pos="2260" userDrawn="1">
           <p15:clr>
             <a:srgbClr val="FBAE40"/>
           </p15:clr>
@@ -14582,7 +15408,7 @@
           <a:p>
             <a:fld id="{395FEE27-536F-479E-B304-98213E6B58CC}" type="datetimeFigureOut">
               <a:rPr lang="pl-PL" smtClean="0"/>
-              <a:t>17.10.2026</a:t>
+              <a:t>01.11.2026</a:t>
             </a:fld>
             <a:endParaRPr lang="pl-PL"/>
           </a:p>
@@ -14847,7 +15673,7 @@
           <a:p>
             <a:fld id="{395FEE27-536F-479E-B304-98213E6B58CC}" type="datetimeFigureOut">
               <a:rPr lang="pl-PL" smtClean="0"/>
-              <a:t>17.10.2026</a:t>
+              <a:t>01.11.2026</a:t>
             </a:fld>
             <a:endParaRPr lang="pl-PL"/>
           </a:p>
@@ -15259,7 +16085,7 @@
           <a:p>
             <a:fld id="{395FEE27-536F-479E-B304-98213E6B58CC}" type="datetimeFigureOut">
               <a:rPr lang="pl-PL" smtClean="0"/>
-              <a:t>17.10.2026</a:t>
+              <a:t>01.11.2026</a:t>
             </a:fld>
             <a:endParaRPr lang="pl-PL"/>
           </a:p>
@@ -15400,7 +16226,7 @@
           <a:p>
             <a:fld id="{395FEE27-536F-479E-B304-98213E6B58CC}" type="datetimeFigureOut">
               <a:rPr lang="pl-PL" smtClean="0"/>
-              <a:t>17.10.2026</a:t>
+              <a:t>01.11.2026</a:t>
             </a:fld>
             <a:endParaRPr lang="pl-PL"/>
           </a:p>
@@ -15513,7 +16339,7 @@
           <a:p>
             <a:fld id="{395FEE27-536F-479E-B304-98213E6B58CC}" type="datetimeFigureOut">
               <a:rPr lang="pl-PL" smtClean="0"/>
-              <a:t>17.10.2026</a:t>
+              <a:t>01.11.2026</a:t>
             </a:fld>
             <a:endParaRPr lang="pl-PL"/>
           </a:p>
@@ -15824,7 +16650,7 @@
           <a:p>
             <a:fld id="{395FEE27-536F-479E-B304-98213E6B58CC}" type="datetimeFigureOut">
               <a:rPr lang="pl-PL" smtClean="0"/>
-              <a:t>17.10.2026</a:t>
+              <a:t>01.11.2026</a:t>
             </a:fld>
             <a:endParaRPr lang="pl-PL"/>
           </a:p>
@@ -16068,7 +16894,7 @@
           <a:p>
             <a:fld id="{395FEE27-536F-479E-B304-98213E6B58CC}" type="datetimeFigureOut">
               <a:rPr lang="pl-PL" smtClean="0"/>
-              <a:t>17.10.2026</a:t>
+              <a:t>01.11.2026</a:t>
             </a:fld>
             <a:endParaRPr lang="pl-PL"/>
           </a:p>
@@ -16726,8 +17552,8 @@
         </p:nvSpPr>
         <p:spPr>
           <a:xfrm>
-            <a:off x="837526" y="4834913"/>
-            <a:ext cx="10515600" cy="937237"/>
+            <a:off x="695325" y="4834913"/>
+            <a:ext cx="10801349" cy="937237"/>
           </a:xfrm>
           <a:prstGeom prst="rect">
             <a:avLst/>
@@ -16911,7 +17737,14 @@
             </a:pPr>
             <a:r>
               <a:rPr lang="pl-PL" sz="2400" dirty="0"/>
-              <a:t>Przez ostatnie 25 lat zadaliśmy miliardy pytań w polskiej Wikipedii. Sprawdźmy, czego dotyczą, kiedy się pojawiają i dlaczego.</a:t>
+              <a:t>Przez 25 lat Wikipedia nie była tylko encyklopedią. </a:t>
+            </a:r>
+            <a:br>
+              <a:rPr lang="pl-PL" sz="2400" dirty="0"/>
+            </a:br>
+            <a:r>
+              <a:rPr lang="pl-PL" sz="2400" dirty="0"/>
+              <a:t>Była miejscem, do którego trafialiśmy, gdy działo się coś ważnego.</a:t>
             </a:r>
           </a:p>
         </p:txBody>
@@ -16930,6 +17763,135 @@
 </file>
 
 <file path=ppt/slides/slide10.xml><?xml version="1.0" encoding="utf-8"?>
+<p:sld xmlns:a="http://schemas.openxmlformats.org/drawingml/2006/main" xmlns:r="http://schemas.openxmlformats.org/officeDocument/2006/relationships" xmlns:p="http://schemas.openxmlformats.org/presentationml/2006/main" show="0">
+  <p:cSld>
+    <p:spTree>
+      <p:nvGrpSpPr>
+        <p:cNvPr id="1" name="">
+          <a:extLst>
+            <a:ext uri="{FF2B5EF4-FFF2-40B4-BE49-F238E27FC236}">
+              <a16:creationId xmlns:a16="http://schemas.microsoft.com/office/drawing/2014/main" id="{21897F48-AF87-1935-680A-A761D3CA20C5}"/>
+            </a:ext>
+          </a:extLst>
+        </p:cNvPr>
+        <p:cNvGrpSpPr/>
+        <p:nvPr/>
+      </p:nvGrpSpPr>
+      <p:grpSpPr>
+        <a:xfrm>
+          <a:off x="0" y="0"/>
+          <a:ext cx="0" cy="0"/>
+          <a:chOff x="0" y="0"/>
+          <a:chExt cx="0" cy="0"/>
+        </a:xfrm>
+      </p:grpSpPr>
+      <p:sp>
+        <p:nvSpPr>
+          <p:cNvPr id="2" name="Tytuł 1">
+            <a:extLst>
+              <a:ext uri="{FF2B5EF4-FFF2-40B4-BE49-F238E27FC236}">
+                <a16:creationId xmlns:a16="http://schemas.microsoft.com/office/drawing/2014/main" id="{DE7A4FF8-5762-F565-D0C2-521912B3ACD8}"/>
+              </a:ext>
+            </a:extLst>
+          </p:cNvPr>
+          <p:cNvSpPr>
+            <a:spLocks noGrp="1"/>
+          </p:cNvSpPr>
+          <p:nvPr>
+            <p:ph type="title"/>
+          </p:nvPr>
+        </p:nvSpPr>
+        <p:spPr/>
+        <p:txBody>
+          <a:bodyPr>
+            <a:noAutofit/>
+          </a:bodyPr>
+          <a:lstStyle/>
+          <a:p>
+            <a:r>
+              <a:rPr lang="pl-PL" dirty="0"/>
+              <a:t>Dlaczego otwieramy Wikipedię?</a:t>
+            </a:r>
+          </a:p>
+        </p:txBody>
+      </p:sp>
+      <p:sp>
+        <p:nvSpPr>
+          <p:cNvPr id="3" name="Symbol zastępczy zawartości 2">
+            <a:extLst>
+              <a:ext uri="{FF2B5EF4-FFF2-40B4-BE49-F238E27FC236}">
+                <a16:creationId xmlns:a16="http://schemas.microsoft.com/office/drawing/2014/main" id="{D38FDE60-81F8-8812-1058-CE3E9E55C7D3}"/>
+              </a:ext>
+            </a:extLst>
+          </p:cNvPr>
+          <p:cNvSpPr>
+            <a:spLocks noGrp="1"/>
+          </p:cNvSpPr>
+          <p:nvPr>
+            <p:ph idx="1"/>
+          </p:nvPr>
+        </p:nvSpPr>
+        <p:spPr/>
+        <p:txBody>
+          <a:bodyPr/>
+          <a:lstStyle/>
+          <a:p>
+            <a:pPr marL="0" indent="0">
+              <a:buNone/>
+            </a:pPr>
+            <a:r>
+              <a:rPr lang="pl-PL" dirty="0">
+                <a:solidFill>
+                  <a:schemeClr val="tx2"/>
+                </a:solidFill>
+              </a:rPr>
+              <a:t>Analiza powyższych przykładów pokazuje, że Wikipedia nie jest tylko encyklopedią. </a:t>
+            </a:r>
+          </a:p>
+          <a:p>
+            <a:pPr marL="0" indent="0">
+              <a:buNone/>
+            </a:pPr>
+            <a:r>
+              <a:rPr lang="pl-PL" dirty="0">
+                <a:solidFill>
+                  <a:schemeClr val="tx2"/>
+                </a:solidFill>
+              </a:rPr>
+              <a:t>Jest miejscem do którego udajemy się, by zrozumieć świat wokół nas. By zgłębić wydarzenia wywołujące smutek, strach, ciekawość czy ekscytację.</a:t>
+            </a:r>
+          </a:p>
+          <a:p>
+            <a:pPr marL="0" indent="0">
+              <a:buNone/>
+            </a:pPr>
+            <a:endParaRPr lang="pl-PL" dirty="0"/>
+          </a:p>
+          <a:p>
+            <a:pPr marL="0" indent="0">
+              <a:buNone/>
+            </a:pPr>
+            <a:r>
+              <a:rPr lang="pl-PL" b="1" dirty="0"/>
+              <a:t>Wikipedia odpowiada na nasze emocje. Od 25 lat.</a:t>
+            </a:r>
+          </a:p>
+        </p:txBody>
+      </p:sp>
+    </p:spTree>
+    <p:extLst>
+      <p:ext uri="{BB962C8B-B14F-4D97-AF65-F5344CB8AC3E}">
+        <p14:creationId xmlns:p14="http://schemas.microsoft.com/office/powerpoint/2010/main" val="769765417"/>
+      </p:ext>
+    </p:extLst>
+  </p:cSld>
+  <p:clrMapOvr>
+    <a:masterClrMapping/>
+  </p:clrMapOvr>
+</p:sld>
+</file>
+
+<file path=ppt/slides/slide11.xml><?xml version="1.0" encoding="utf-8"?>
 <p:sld xmlns:a="http://schemas.openxmlformats.org/drawingml/2006/main" xmlns:r="http://schemas.openxmlformats.org/officeDocument/2006/relationships" xmlns:p="http://schemas.openxmlformats.org/presentationml/2006/main">
   <p:cSld>
     <p:spTree>
@@ -16995,7 +17957,7 @@
 </p:sld>
 </file>
 
-<file path=ppt/slides/slide11.xml><?xml version="1.0" encoding="utf-8"?>
+<file path=ppt/slides/slide12.xml><?xml version="1.0" encoding="utf-8"?>
 <p:sld xmlns:a="http://schemas.openxmlformats.org/drawingml/2006/main" xmlns:r="http://schemas.openxmlformats.org/officeDocument/2006/relationships" xmlns:p="http://schemas.openxmlformats.org/presentationml/2006/main">
   <p:cSld>
     <p:spTree>
@@ -17458,7 +18420,7 @@
 </p:sld>
 </file>
 
-<file path=ppt/slides/slide12.xml><?xml version="1.0" encoding="utf-8"?>
+<file path=ppt/slides/slide13.xml><?xml version="1.0" encoding="utf-8"?>
 <p:sld xmlns:a="http://schemas.openxmlformats.org/drawingml/2006/main" xmlns:r="http://schemas.openxmlformats.org/officeDocument/2006/relationships" xmlns:p="http://schemas.openxmlformats.org/presentationml/2006/main">
   <p:cSld>
     <p:spTree>
@@ -17527,7 +18489,7 @@
             <p:ph idx="1"/>
             <p:extLst>
               <p:ext uri="{D42A27DB-BD31-4B8C-83A1-F6EECF244321}">
-                <p14:modId xmlns:p14="http://schemas.microsoft.com/office/powerpoint/2010/main" val="2952152747"/>
+                <p14:modId xmlns:p14="http://schemas.microsoft.com/office/powerpoint/2010/main" val="1656004559"/>
               </p:ext>
             </p:extLst>
           </p:nvPr>
@@ -17570,12 +18532,20 @@
               <a:t>Mediana miesięcznych wyświetleń strony Przedłużanie życia wynosi </a:t>
             </a:r>
             <a:r>
-              <a:rPr lang="pl-PL" b="1" u="sng" dirty="0"/>
+              <a:rPr lang="pl-PL" b="1" u="sng" dirty="0">
+                <a:latin typeface="Montserrat" pitchFamily="2" charset="-18"/>
+              </a:rPr>
               <a:t>455</a:t>
             </a:r>
             <a:r>
+              <a:rPr lang="pl-PL" dirty="0">
+                <a:latin typeface="Montserrat" pitchFamily="2" charset="-18"/>
+              </a:rPr>
+              <a:t>.</a:t>
+            </a:r>
+            <a:r>
               <a:rPr lang="pl-PL" dirty="0"/>
-              <a:t>. </a:t>
+              <a:t> </a:t>
             </a:r>
           </a:p>
           <a:p>
@@ -17867,7 +18837,7 @@
 </file>
 
 <file path=ppt/slides/slide2.xml><?xml version="1.0" encoding="utf-8"?>
-<p:sld xmlns:a="http://schemas.openxmlformats.org/drawingml/2006/main" xmlns:r="http://schemas.openxmlformats.org/officeDocument/2006/relationships" xmlns:p="http://schemas.openxmlformats.org/presentationml/2006/main">
+<p:sld xmlns:a="http://schemas.openxmlformats.org/drawingml/2006/main" xmlns:r="http://schemas.openxmlformats.org/officeDocument/2006/relationships" xmlns:p="http://schemas.openxmlformats.org/presentationml/2006/main" show="0">
   <p:cSld>
     <p:spTree>
       <p:nvGrpSpPr>
@@ -17898,7 +18868,7 @@
         <p:spPr>
           <a:xfrm>
             <a:off x="8080374" y="1455421"/>
-            <a:ext cx="3416299" cy="4312920"/>
+            <a:ext cx="3416299" cy="4169092"/>
           </a:xfrm>
           <a:prstGeom prst="roundRect">
             <a:avLst>
@@ -18389,7 +19359,7 @@
                   <a:schemeClr val="tx2"/>
                 </a:solidFill>
               </a:rPr>
-              <a:t>w przestrzeni publicznej. [5]</a:t>
+              <a:t>w przestrzeni publicznej. [4][5]</a:t>
             </a:r>
           </a:p>
         </p:txBody>
@@ -18445,7 +19415,7 @@
             <p:ph idx="1"/>
             <p:extLst>
               <p:ext uri="{D42A27DB-BD31-4B8C-83A1-F6EECF244321}">
-                <p14:modId xmlns:p14="http://schemas.microsoft.com/office/powerpoint/2010/main" val="3210160099"/>
+                <p14:modId xmlns:p14="http://schemas.microsoft.com/office/powerpoint/2010/main" val="3002254639"/>
               </p:ext>
             </p:extLst>
           </p:nvPr>
@@ -18632,7 +19602,7 @@
             <p:ph idx="1"/>
             <p:extLst>
               <p:ext uri="{D42A27DB-BD31-4B8C-83A1-F6EECF244321}">
-                <p14:modId xmlns:p14="http://schemas.microsoft.com/office/powerpoint/2010/main" val="612455224"/>
+                <p14:modId xmlns:p14="http://schemas.microsoft.com/office/powerpoint/2010/main" val="1362658393"/>
               </p:ext>
             </p:extLst>
           </p:nvPr>
@@ -18691,6 +19661,7 @@
                 <a:solidFill>
                   <a:schemeClr val="accent5"/>
                 </a:solidFill>
+                <a:latin typeface="Montserrat" pitchFamily="2" charset="-18"/>
               </a:rPr>
               <a:t>wydarzenia wywołujące różne emocje. </a:t>
             </a:r>
@@ -18717,6 +19688,7 @@
                 <a:solidFill>
                   <a:schemeClr val="accent2"/>
                 </a:solidFill>
+                <a:latin typeface="Montserrat" pitchFamily="2" charset="-18"/>
               </a:rPr>
               <a:t>doniesienia medialne oraz nowe produkcje popkultury.</a:t>
             </a:r>
@@ -18727,6 +19699,7 @@
                 <a:solidFill>
                   <a:schemeClr val="tx2"/>
                 </a:solidFill>
+                <a:latin typeface="Montserrat" pitchFamily="2" charset="-18"/>
               </a:rPr>
               <a:t>Za każdą kategorią kryją się konkretne historie.</a:t>
             </a:r>
@@ -18767,7 +19740,7 @@
                   <a:schemeClr val="tx2"/>
                 </a:solidFill>
               </a:rPr>
-              <a:t>Kategorie dopasowane przez model językowy</a:t>
+              <a:t>Kategorie dopasowane przez model językowy [6]</a:t>
             </a:r>
           </a:p>
         </p:txBody>
@@ -18852,7 +19825,7 @@
             <p:ph idx="1"/>
             <p:extLst>
               <p:ext uri="{D42A27DB-BD31-4B8C-83A1-F6EECF244321}">
-                <p14:modId xmlns:p14="http://schemas.microsoft.com/office/powerpoint/2010/main" val="1424739551"/>
+                <p14:modId xmlns:p14="http://schemas.microsoft.com/office/powerpoint/2010/main" val="1554790411"/>
               </p:ext>
             </p:extLst>
           </p:nvPr>
@@ -18932,6 +19905,51 @@
                 </a:solidFill>
               </a:rPr>
               <a:t>.</a:t>
+            </a:r>
+          </a:p>
+        </p:txBody>
+      </p:sp>
+      <p:sp>
+        <p:nvSpPr>
+          <p:cNvPr id="5" name="pole tekstowe 4">
+            <a:extLst>
+              <a:ext uri="{FF2B5EF4-FFF2-40B4-BE49-F238E27FC236}">
+                <a16:creationId xmlns:a16="http://schemas.microsoft.com/office/drawing/2014/main" id="{5053E86D-93C9-BD0A-6FF4-6E65101A571A}"/>
+              </a:ext>
+            </a:extLst>
+          </p:cNvPr>
+          <p:cNvSpPr txBox="1"/>
+          <p:nvPr/>
+        </p:nvSpPr>
+        <p:spPr>
+          <a:xfrm>
+            <a:off x="695325" y="6251109"/>
+            <a:ext cx="9568976" cy="276999"/>
+          </a:xfrm>
+          <a:prstGeom prst="rect">
+            <a:avLst/>
+          </a:prstGeom>
+          <a:noFill/>
+        </p:spPr>
+        <p:txBody>
+          <a:bodyPr wrap="square" rtlCol="0">
+            <a:spAutoFit/>
+          </a:bodyPr>
+          <a:lstStyle/>
+          <a:p>
+            <a:r>
+              <a:rPr lang="pl-PL" sz="1200" dirty="0">
+                <a:solidFill>
+                  <a:schemeClr val="tx2"/>
+                </a:solidFill>
+              </a:rPr>
+              <a:t>Na podstawie </a:t>
+            </a:r>
+            <a:r>
+              <a:rPr lang="pl-PL" sz="1200" dirty="0">
+                <a:latin typeface="Aptos" panose="020B0004020202020204" pitchFamily="34" charset="0"/>
+              </a:rPr>
+              <a:t>https://pageviews.wmcloud.org/ [4][8]  </a:t>
             </a:r>
           </a:p>
         </p:txBody>
@@ -19018,7 +20036,7 @@
             <p:ph idx="1"/>
             <p:extLst>
               <p:ext uri="{D42A27DB-BD31-4B8C-83A1-F6EECF244321}">
-                <p14:modId xmlns:p14="http://schemas.microsoft.com/office/powerpoint/2010/main" val="2348663486"/>
+                <p14:modId xmlns:p14="http://schemas.microsoft.com/office/powerpoint/2010/main" val="2569581845"/>
               </p:ext>
             </p:extLst>
           </p:nvPr>
@@ -19029,7 +20047,7 @@
         </p:xfrm>
         <a:graphic>
           <a:graphicData uri="http://schemas.openxmlformats.org/drawingml/2006/chart">
-            <c:chart xmlns:c="http://schemas.openxmlformats.org/drawingml/2006/chart" xmlns:r="http://schemas.openxmlformats.org/officeDocument/2006/relationships" r:id="rId2"/>
+            <c:chart xmlns:c="http://schemas.openxmlformats.org/drawingml/2006/chart" xmlns:r="http://schemas.openxmlformats.org/officeDocument/2006/relationships" r:id="rId3"/>
           </a:graphicData>
         </a:graphic>
       </p:graphicFrame>
@@ -19120,6 +20138,51 @@
           </a:p>
           <a:p>
             <a:endParaRPr lang="pl-PL" dirty="0"/>
+          </a:p>
+        </p:txBody>
+      </p:sp>
+      <p:sp>
+        <p:nvSpPr>
+          <p:cNvPr id="5" name="pole tekstowe 4">
+            <a:extLst>
+              <a:ext uri="{FF2B5EF4-FFF2-40B4-BE49-F238E27FC236}">
+                <a16:creationId xmlns:a16="http://schemas.microsoft.com/office/drawing/2014/main" id="{900168F3-3B2A-A2A5-4D31-54DD250344D0}"/>
+              </a:ext>
+            </a:extLst>
+          </p:cNvPr>
+          <p:cNvSpPr txBox="1"/>
+          <p:nvPr/>
+        </p:nvSpPr>
+        <p:spPr>
+          <a:xfrm>
+            <a:off x="695325" y="6251109"/>
+            <a:ext cx="9568976" cy="276999"/>
+          </a:xfrm>
+          <a:prstGeom prst="rect">
+            <a:avLst/>
+          </a:prstGeom>
+          <a:noFill/>
+        </p:spPr>
+        <p:txBody>
+          <a:bodyPr wrap="square" rtlCol="0">
+            <a:spAutoFit/>
+          </a:bodyPr>
+          <a:lstStyle/>
+          <a:p>
+            <a:r>
+              <a:rPr lang="pl-PL" sz="1200" dirty="0">
+                <a:solidFill>
+                  <a:schemeClr val="tx2"/>
+                </a:solidFill>
+              </a:rPr>
+              <a:t>Na podstawie </a:t>
+            </a:r>
+            <a:r>
+              <a:rPr lang="pl-PL" sz="1200" dirty="0">
+                <a:latin typeface="Aptos" panose="020B0004020202020204" pitchFamily="34" charset="0"/>
+              </a:rPr>
+              <a:t>https://pageviews.wmcloud.org/ [4]  </a:t>
+            </a:r>
           </a:p>
         </p:txBody>
       </p:sp>
@@ -19218,7 +20281,7 @@
             <p:ph idx="1"/>
             <p:extLst>
               <p:ext uri="{D42A27DB-BD31-4B8C-83A1-F6EECF244321}">
-                <p14:modId xmlns:p14="http://schemas.microsoft.com/office/powerpoint/2010/main" val="3813927340"/>
+                <p14:modId xmlns:p14="http://schemas.microsoft.com/office/powerpoint/2010/main" val="3375241789"/>
               </p:ext>
             </p:extLst>
           </p:nvPr>
@@ -19322,6 +20385,51 @@
           </a:p>
           <a:p>
             <a:endParaRPr lang="pl-PL" dirty="0"/>
+          </a:p>
+        </p:txBody>
+      </p:sp>
+      <p:sp>
+        <p:nvSpPr>
+          <p:cNvPr id="5" name="pole tekstowe 4">
+            <a:extLst>
+              <a:ext uri="{FF2B5EF4-FFF2-40B4-BE49-F238E27FC236}">
+                <a16:creationId xmlns:a16="http://schemas.microsoft.com/office/drawing/2014/main" id="{CE784E70-FF9A-68BD-887E-BC2C1A63DE80}"/>
+              </a:ext>
+            </a:extLst>
+          </p:cNvPr>
+          <p:cNvSpPr txBox="1"/>
+          <p:nvPr/>
+        </p:nvSpPr>
+        <p:spPr>
+          <a:xfrm>
+            <a:off x="695325" y="6251109"/>
+            <a:ext cx="9568976" cy="276999"/>
+          </a:xfrm>
+          <a:prstGeom prst="rect">
+            <a:avLst/>
+          </a:prstGeom>
+          <a:noFill/>
+        </p:spPr>
+        <p:txBody>
+          <a:bodyPr wrap="square" rtlCol="0">
+            <a:spAutoFit/>
+          </a:bodyPr>
+          <a:lstStyle/>
+          <a:p>
+            <a:r>
+              <a:rPr lang="pl-PL" sz="1200" dirty="0">
+                <a:solidFill>
+                  <a:schemeClr val="tx2"/>
+                </a:solidFill>
+              </a:rPr>
+              <a:t>Na podstawie </a:t>
+            </a:r>
+            <a:r>
+              <a:rPr lang="pl-PL" sz="1200" dirty="0">
+                <a:latin typeface="Aptos" panose="020B0004020202020204" pitchFamily="34" charset="0"/>
+              </a:rPr>
+              <a:t>https://pageviews.wmcloud.org/ [4] </a:t>
+            </a:r>
           </a:p>
         </p:txBody>
       </p:sp>
@@ -19401,7 +20509,7 @@
             <p:ph idx="1"/>
             <p:extLst>
               <p:ext uri="{D42A27DB-BD31-4B8C-83A1-F6EECF244321}">
-                <p14:modId xmlns:p14="http://schemas.microsoft.com/office/powerpoint/2010/main" val="829675981"/>
+                <p14:modId xmlns:p14="http://schemas.microsoft.com/office/powerpoint/2010/main" val="2651078881"/>
               </p:ext>
             </p:extLst>
           </p:nvPr>
@@ -19712,6 +20820,51 @@
           </a:p>
         </p:txBody>
       </p:sp>
+      <p:sp>
+        <p:nvSpPr>
+          <p:cNvPr id="5" name="pole tekstowe 4">
+            <a:extLst>
+              <a:ext uri="{FF2B5EF4-FFF2-40B4-BE49-F238E27FC236}">
+                <a16:creationId xmlns:a16="http://schemas.microsoft.com/office/drawing/2014/main" id="{AC9DEECA-28D9-00F8-F31C-EB2CB9AC30EC}"/>
+              </a:ext>
+            </a:extLst>
+          </p:cNvPr>
+          <p:cNvSpPr txBox="1"/>
+          <p:nvPr/>
+        </p:nvSpPr>
+        <p:spPr>
+          <a:xfrm>
+            <a:off x="695325" y="6251109"/>
+            <a:ext cx="9568976" cy="276999"/>
+          </a:xfrm>
+          <a:prstGeom prst="rect">
+            <a:avLst/>
+          </a:prstGeom>
+          <a:noFill/>
+        </p:spPr>
+        <p:txBody>
+          <a:bodyPr wrap="square" rtlCol="0">
+            <a:spAutoFit/>
+          </a:bodyPr>
+          <a:lstStyle/>
+          <a:p>
+            <a:r>
+              <a:rPr lang="pl-PL" sz="1200" dirty="0">
+                <a:solidFill>
+                  <a:schemeClr val="tx2"/>
+                </a:solidFill>
+              </a:rPr>
+              <a:t>Na podstawie </a:t>
+            </a:r>
+            <a:r>
+              <a:rPr lang="pl-PL" sz="1200" dirty="0">
+                <a:latin typeface="Aptos" panose="020B0004020202020204" pitchFamily="34" charset="0"/>
+              </a:rPr>
+              <a:t>https://pageviews.wmcloud.org/ [4]  </a:t>
+            </a:r>
+          </a:p>
+        </p:txBody>
+      </p:sp>
     </p:spTree>
     <p:extLst>
       <p:ext uri="{BB962C8B-B14F-4D97-AF65-F5344CB8AC3E}">
@@ -19744,36 +20897,6 @@
       </p:grpSpPr>
       <p:sp>
         <p:nvSpPr>
-          <p:cNvPr id="2" name="Tytuł 1">
-            <a:extLst>
-              <a:ext uri="{FF2B5EF4-FFF2-40B4-BE49-F238E27FC236}">
-                <a16:creationId xmlns:a16="http://schemas.microsoft.com/office/drawing/2014/main" id="{9B06FA26-7517-0D14-088B-3B65931650DB}"/>
-              </a:ext>
-            </a:extLst>
-          </p:cNvPr>
-          <p:cNvSpPr>
-            <a:spLocks noGrp="1"/>
-          </p:cNvSpPr>
-          <p:nvPr>
-            <p:ph type="title"/>
-          </p:nvPr>
-        </p:nvSpPr>
-        <p:spPr/>
-        <p:txBody>
-          <a:bodyPr>
-            <a:noAutofit/>
-          </a:bodyPr>
-          <a:lstStyle/>
-          <a:p>
-            <a:r>
-              <a:rPr lang="pl-PL" dirty="0"/>
-              <a:t>Dlaczego otwieramy Wikipedię?</a:t>
-            </a:r>
-          </a:p>
-        </p:txBody>
-      </p:sp>
-      <p:sp>
-        <p:nvSpPr>
           <p:cNvPr id="3" name="Symbol zastępczy zawartości 2">
             <a:extLst>
               <a:ext uri="{FF2B5EF4-FFF2-40B4-BE49-F238E27FC236}">
@@ -19790,51 +20913,83 @@
         </p:nvSpPr>
         <p:spPr/>
         <p:txBody>
-          <a:bodyPr/>
+          <a:bodyPr>
+            <a:normAutofit/>
+          </a:bodyPr>
           <a:lstStyle/>
           <a:p>
-            <a:pPr marL="0" indent="0">
+            <a:pPr fontAlgn="t">
               <a:buNone/>
             </a:pPr>
-            <a:r>
-              <a:rPr lang="pl-PL" dirty="0">
-                <a:solidFill>
-                  <a:schemeClr val="tx2"/>
-                </a:solidFill>
-              </a:rPr>
-              <a:t>Analiza powyższych przykładów pokazuje, że Wikipedia nie jest tylko encyklopedią. </a:t>
-            </a:r>
+            <a:endParaRPr lang="pl-PL" sz="4000" dirty="0"/>
           </a:p>
           <a:p>
-            <a:pPr marL="0" indent="0">
+            <a:pPr fontAlgn="t">
               <a:buNone/>
             </a:pPr>
             <a:r>
-              <a:rPr lang="pl-PL" dirty="0">
-                <a:solidFill>
-                  <a:schemeClr val="tx2"/>
-                </a:solidFill>
-              </a:rPr>
-              <a:t>Jest miejscem do którego udajemy się, by zrozumieć świat wokół nas. By zgłębić wydarzenia wywołujące smutek, strach, ciekawość czy ekscytację.</a:t>
+              <a:rPr lang="pl-PL" sz="4000" dirty="0"/>
+              <a:t>Nie otwieramy Wikipedii tylko po wiedzę.</a:t>
             </a:r>
           </a:p>
           <a:p>
-            <a:pPr marL="0" indent="0">
+            <a:pPr marL="0" indent="0" fontAlgn="t">
               <a:buNone/>
             </a:pPr>
-            <a:endParaRPr lang="pl-PL" dirty="0"/>
+            <a:r>
+              <a:rPr lang="pl-PL" sz="4000" dirty="0"/>
+              <a:t>Otwieramy ją wtedy, gdy dzieje się coś ważnego.</a:t>
+            </a:r>
           </a:p>
           <a:p>
-            <a:pPr marL="0" indent="0">
+            <a:pPr fontAlgn="t">
               <a:buNone/>
             </a:pPr>
             <a:r>
-              <a:rPr lang="pl-PL" b="1" dirty="0"/>
-              <a:t>Wikipedia odpowiada na nasze emocje. Od 25 lat.</a:t>
+              <a:rPr lang="pl-PL" sz="4000" b="1" dirty="0">
+                <a:latin typeface="Montserrat" pitchFamily="2" charset="-18"/>
+              </a:rPr>
+              <a:t>Od 25 lat.</a:t>
             </a:r>
           </a:p>
         </p:txBody>
       </p:sp>
+      <p:pic>
+        <p:nvPicPr>
+          <p:cNvPr id="7" name="Obraz 6">
+            <a:extLst>
+              <a:ext uri="{FF2B5EF4-FFF2-40B4-BE49-F238E27FC236}">
+                <a16:creationId xmlns:a16="http://schemas.microsoft.com/office/drawing/2014/main" id="{C5AE2DDD-F83E-5B49-400C-A739A05D938B}"/>
+              </a:ext>
+            </a:extLst>
+          </p:cNvPr>
+          <p:cNvPicPr>
+            <a:picLocks noChangeAspect="1"/>
+          </p:cNvPicPr>
+          <p:nvPr/>
+        </p:nvPicPr>
+        <p:blipFill>
+          <a:blip r:embed="rId2">
+            <a:extLst>
+              <a:ext uri="{28A0092B-C50C-407E-A947-70E740481C1C}">
+                <a14:useLocalDpi xmlns:a14="http://schemas.microsoft.com/office/drawing/2010/main" val="0"/>
+              </a:ext>
+            </a:extLst>
+          </a:blip>
+          <a:stretch>
+            <a:fillRect/>
+          </a:stretch>
+        </p:blipFill>
+        <p:spPr>
+          <a:xfrm>
+            <a:off x="2843513" y="360196"/>
+            <a:ext cx="6504972" cy="992727"/>
+          </a:xfrm>
+          <a:prstGeom prst="rect">
+            <a:avLst/>
+          </a:prstGeom>
+        </p:spPr>
+      </p:pic>
     </p:spTree>
     <p:extLst>
       <p:ext uri="{BB962C8B-B14F-4D97-AF65-F5344CB8AC3E}">

--- a/storytelling/Wikipedia_25_Marcinos.pptx
+++ b/storytelling/Wikipedia_25_Marcinos.pptx
@@ -5,25 +5,23 @@
     <p:sldMasterId id="2147483648" r:id="rId1"/>
   </p:sldMasterIdLst>
   <p:notesMasterIdLst>
-    <p:notesMasterId r:id="rId15"/>
+    <p:notesMasterId r:id="rId13"/>
   </p:notesMasterIdLst>
   <p:handoutMasterIdLst>
-    <p:handoutMasterId r:id="rId16"/>
+    <p:handoutMasterId r:id="rId14"/>
   </p:handoutMasterIdLst>
   <p:sldIdLst>
     <p:sldId id="256" r:id="rId2"/>
-    <p:sldId id="258" r:id="rId3"/>
-    <p:sldId id="257" r:id="rId4"/>
-    <p:sldId id="261" r:id="rId5"/>
-    <p:sldId id="262" r:id="rId6"/>
-    <p:sldId id="263" r:id="rId7"/>
-    <p:sldId id="264" r:id="rId8"/>
-    <p:sldId id="260" r:id="rId9"/>
-    <p:sldId id="266" r:id="rId10"/>
-    <p:sldId id="268" r:id="rId11"/>
-    <p:sldId id="267" r:id="rId12"/>
-    <p:sldId id="259" r:id="rId13"/>
-    <p:sldId id="265" r:id="rId14"/>
+    <p:sldId id="257" r:id="rId3"/>
+    <p:sldId id="261" r:id="rId4"/>
+    <p:sldId id="262" r:id="rId5"/>
+    <p:sldId id="263" r:id="rId6"/>
+    <p:sldId id="264" r:id="rId7"/>
+    <p:sldId id="260" r:id="rId8"/>
+    <p:sldId id="266" r:id="rId9"/>
+    <p:sldId id="267" r:id="rId10"/>
+    <p:sldId id="259" r:id="rId11"/>
+    <p:sldId id="265" r:id="rId12"/>
   </p:sldIdLst>
   <p:sldSz cx="12192000" cy="6858000"/>
   <p:notesSz cx="6858000" cy="9144000"/>
@@ -128,7 +126,6 @@
         <p14:section name="Sekcja domyślna" id="{E1507DD5-B280-4770-AC0C-A345241EDAA4}">
           <p14:sldIdLst>
             <p14:sldId id="256"/>
-            <p14:sldId id="258"/>
             <p14:sldId id="257"/>
             <p14:sldId id="261"/>
             <p14:sldId id="262"/>
@@ -136,7 +133,6 @@
             <p14:sldId id="264"/>
             <p14:sldId id="260"/>
             <p14:sldId id="266"/>
-            <p14:sldId id="268"/>
             <p14:sldId id="267"/>
             <p14:sldId id="259"/>
             <p14:sldId id="265"/>
@@ -155,416 +151,6 @@
 </file>
 
 <file path=ppt/charts/chart1.xml><?xml version="1.0" encoding="utf-8"?>
-<c:chartSpace xmlns:c="http://schemas.openxmlformats.org/drawingml/2006/chart" xmlns:a="http://schemas.openxmlformats.org/drawingml/2006/main" xmlns:r="http://schemas.openxmlformats.org/officeDocument/2006/relationships" xmlns:c16r2="http://schemas.microsoft.com/office/drawing/2015/06/chart">
-  <c:date1904 val="0"/>
-  <c:lang val="pl-PL"/>
-  <c:roundedCorners val="0"/>
-  <mc:AlternateContent xmlns:mc="http://schemas.openxmlformats.org/markup-compatibility/2006">
-    <mc:Choice xmlns:c14="http://schemas.microsoft.com/office/drawing/2007/8/2/chart" Requires="c14">
-      <c14:style val="102"/>
-    </mc:Choice>
-    <mc:Fallback>
-      <c:style val="2"/>
-    </mc:Fallback>
-  </mc:AlternateContent>
-  <c:chart>
-    <c:title>
-      <c:tx>
-        <c:rich>
-          <a:bodyPr rot="0" spcFirstLastPara="1" vertOverflow="ellipsis" vert="horz" wrap="square" anchor="t" anchorCtr="0"/>
-          <a:lstStyle/>
-          <a:p>
-            <a:pPr algn="l">
-              <a:defRPr sz="1862" b="0" i="0" u="none" strike="noStrike" kern="1200" spc="0" baseline="0">
-                <a:solidFill>
-                  <a:schemeClr val="tx1"/>
-                </a:solidFill>
-                <a:latin typeface="+mn-lt"/>
-                <a:ea typeface="+mn-ea"/>
-                <a:cs typeface="+mn-cs"/>
-              </a:defRPr>
-            </a:pPr>
-            <a:r>
-              <a:rPr lang="pl-PL" sz="1800" dirty="0"/>
-              <a:t>Suma wyświetleń w latach 2018 – 2026 </a:t>
-            </a:r>
-            <a:br>
-              <a:rPr lang="pl-PL" sz="1800" dirty="0"/>
-            </a:br>
-            <a:r>
-              <a:rPr lang="pl-PL" sz="1800" dirty="0"/>
-              <a:t>wg kategorii [mln][3]</a:t>
-            </a:r>
-            <a:endParaRPr lang="en-US" sz="1800" dirty="0"/>
-          </a:p>
-        </c:rich>
-      </c:tx>
-      <c:layout>
-        <c:manualLayout>
-          <c:xMode val="edge"/>
-          <c:yMode val="edge"/>
-          <c:x val="4.2546637366927385E-4"/>
-          <c:y val="2.9186424957105147E-3"/>
-        </c:manualLayout>
-      </c:layout>
-      <c:overlay val="0"/>
-      <c:spPr>
-        <a:noFill/>
-        <a:ln>
-          <a:noFill/>
-        </a:ln>
-        <a:effectLst/>
-      </c:spPr>
-      <c:txPr>
-        <a:bodyPr rot="0" spcFirstLastPara="1" vertOverflow="ellipsis" vert="horz" wrap="square" anchor="t" anchorCtr="0"/>
-        <a:lstStyle/>
-        <a:p>
-          <a:pPr algn="l">
-            <a:defRPr sz="1862" b="0" i="0" u="none" strike="noStrike" kern="1200" spc="0" baseline="0">
-              <a:solidFill>
-                <a:schemeClr val="tx1"/>
-              </a:solidFill>
-              <a:latin typeface="+mn-lt"/>
-              <a:ea typeface="+mn-ea"/>
-              <a:cs typeface="+mn-cs"/>
-            </a:defRPr>
-          </a:pPr>
-          <a:endParaRPr lang="en-US"/>
-        </a:p>
-      </c:txPr>
-    </c:title>
-    <c:autoTitleDeleted val="0"/>
-    <c:plotArea>
-      <c:layout>
-        <c:manualLayout>
-          <c:layoutTarget val="inner"/>
-          <c:xMode val="edge"/>
-          <c:yMode val="edge"/>
-          <c:x val="0.2530082714213458"/>
-          <c:y val="0.24478882668966837"/>
-          <c:w val="0.65362840086863538"/>
-          <c:h val="0.60066146468105885"/>
-        </c:manualLayout>
-      </c:layout>
-      <c:barChart>
-        <c:barDir val="bar"/>
-        <c:grouping val="clustered"/>
-        <c:varyColors val="0"/>
-        <c:ser>
-          <c:idx val="0"/>
-          <c:order val="0"/>
-          <c:tx>
-            <c:strRef>
-              <c:f>Arkusz1!$B$1</c:f>
-              <c:strCache>
-                <c:ptCount val="1"/>
-                <c:pt idx="0">
-                  <c:v>Suma elementów views</c:v>
-                </c:pt>
-              </c:strCache>
-            </c:strRef>
-          </c:tx>
-          <c:spPr>
-            <a:solidFill>
-              <a:schemeClr val="accent1"/>
-            </a:solidFill>
-            <a:ln>
-              <a:noFill/>
-            </a:ln>
-            <a:effectLst/>
-          </c:spPr>
-          <c:invertIfNegative val="0"/>
-          <c:dPt>
-            <c:idx val="6"/>
-            <c:invertIfNegative val="0"/>
-            <c:bubble3D val="0"/>
-            <c:spPr>
-              <a:solidFill>
-                <a:schemeClr val="accent1"/>
-              </a:solidFill>
-              <a:ln>
-                <a:noFill/>
-              </a:ln>
-              <a:effectLst/>
-            </c:spPr>
-            <c:extLst>
-              <c:ext xmlns:c16="http://schemas.microsoft.com/office/drawing/2014/chart" uri="{C3380CC4-5D6E-409C-BE32-E72D297353CC}">
-                <c16:uniqueId val="{00000002-97B9-4781-8620-6CC20A140C86}"/>
-              </c:ext>
-            </c:extLst>
-          </c:dPt>
-          <c:dPt>
-            <c:idx val="8"/>
-            <c:invertIfNegative val="0"/>
-            <c:bubble3D val="0"/>
-            <c:spPr>
-              <a:solidFill>
-                <a:schemeClr val="accent2"/>
-              </a:solidFill>
-              <a:ln>
-                <a:noFill/>
-              </a:ln>
-              <a:effectLst/>
-            </c:spPr>
-            <c:extLst>
-              <c:ext xmlns:c16="http://schemas.microsoft.com/office/drawing/2014/chart" uri="{C3380CC4-5D6E-409C-BE32-E72D297353CC}">
-                <c16:uniqueId val="{00000003-0B81-472E-BD9B-7FD7699A811B}"/>
-              </c:ext>
-            </c:extLst>
-          </c:dPt>
-          <c:dPt>
-            <c:idx val="9"/>
-            <c:invertIfNegative val="0"/>
-            <c:bubble3D val="0"/>
-            <c:spPr>
-              <a:solidFill>
-                <a:schemeClr val="accent2"/>
-              </a:solidFill>
-              <a:ln>
-                <a:noFill/>
-              </a:ln>
-              <a:effectLst/>
-            </c:spPr>
-            <c:extLst>
-              <c:ext xmlns:c16="http://schemas.microsoft.com/office/drawing/2014/chart" uri="{C3380CC4-5D6E-409C-BE32-E72D297353CC}">
-                <c16:uniqueId val="{00000002-0B81-472E-BD9B-7FD7699A811B}"/>
-              </c:ext>
-            </c:extLst>
-          </c:dPt>
-          <c:cat>
-            <c:strRef>
-              <c:f>Arkusz1!$A$2:$A$11</c:f>
-              <c:strCache>
-                <c:ptCount val="10"/>
-                <c:pt idx="0">
-                  <c:v>Religioznawstwo</c:v>
-                </c:pt>
-                <c:pt idx="1">
-                  <c:v>Nauki ścisłe i przyrodnicze</c:v>
-                </c:pt>
-                <c:pt idx="2">
-                  <c:v>Nauki społeczne i humanistyczne</c:v>
-                </c:pt>
-                <c:pt idx="3">
-                  <c:v>Technika</c:v>
-                </c:pt>
-                <c:pt idx="4">
-                  <c:v>Kultura i sztuka</c:v>
-                </c:pt>
-                <c:pt idx="5">
-                  <c:v>Polska</c:v>
-                </c:pt>
-                <c:pt idx="6">
-                  <c:v>Społeczeństwo</c:v>
-                </c:pt>
-                <c:pt idx="7">
-                  <c:v>Historia</c:v>
-                </c:pt>
-                <c:pt idx="8">
-                  <c:v>Geografia</c:v>
-                </c:pt>
-                <c:pt idx="9">
-                  <c:v>Biografie</c:v>
-                </c:pt>
-              </c:strCache>
-            </c:strRef>
-          </c:cat>
-          <c:val>
-            <c:numRef>
-              <c:f>Arkusz1!$B$2:$B$11</c:f>
-              <c:numCache>
-                <c:formatCode>General</c:formatCode>
-                <c:ptCount val="10"/>
-                <c:pt idx="0">
-                  <c:v>5035096</c:v>
-                </c:pt>
-                <c:pt idx="1">
-                  <c:v>5914590</c:v>
-                </c:pt>
-                <c:pt idx="2">
-                  <c:v>6971370</c:v>
-                </c:pt>
-                <c:pt idx="3">
-                  <c:v>17063985</c:v>
-                </c:pt>
-                <c:pt idx="4">
-                  <c:v>34928645</c:v>
-                </c:pt>
-                <c:pt idx="5">
-                  <c:v>45299589</c:v>
-                </c:pt>
-                <c:pt idx="6">
-                  <c:v>72148628</c:v>
-                </c:pt>
-                <c:pt idx="7">
-                  <c:v>87604519</c:v>
-                </c:pt>
-                <c:pt idx="8">
-                  <c:v>215531958</c:v>
-                </c:pt>
-                <c:pt idx="9">
-                  <c:v>270629303</c:v>
-                </c:pt>
-              </c:numCache>
-            </c:numRef>
-          </c:val>
-          <c:extLst>
-            <c:ext xmlns:c16="http://schemas.microsoft.com/office/drawing/2014/chart" uri="{C3380CC4-5D6E-409C-BE32-E72D297353CC}">
-              <c16:uniqueId val="{00000000-D951-4C40-909C-701ED36B4C0F}"/>
-            </c:ext>
-          </c:extLst>
-        </c:ser>
-        <c:dLbls>
-          <c:showLegendKey val="0"/>
-          <c:showVal val="0"/>
-          <c:showCatName val="0"/>
-          <c:showSerName val="0"/>
-          <c:showPercent val="0"/>
-          <c:showBubbleSize val="0"/>
-        </c:dLbls>
-        <c:gapWidth val="182"/>
-        <c:axId val="1416327088"/>
-        <c:axId val="942990160"/>
-      </c:barChart>
-      <c:catAx>
-        <c:axId val="1416327088"/>
-        <c:scaling>
-          <c:orientation val="minMax"/>
-        </c:scaling>
-        <c:delete val="0"/>
-        <c:axPos val="l"/>
-        <c:numFmt formatCode="General" sourceLinked="1"/>
-        <c:majorTickMark val="none"/>
-        <c:minorTickMark val="none"/>
-        <c:tickLblPos val="nextTo"/>
-        <c:spPr>
-          <a:noFill/>
-          <a:ln w="9525" cap="flat" cmpd="sng" algn="ctr">
-            <a:solidFill>
-              <a:schemeClr val="tx1">
-                <a:lumMod val="15000"/>
-                <a:lumOff val="85000"/>
-              </a:schemeClr>
-            </a:solidFill>
-            <a:round/>
-          </a:ln>
-          <a:effectLst/>
-        </c:spPr>
-        <c:txPr>
-          <a:bodyPr rot="-60000000" spcFirstLastPara="1" vertOverflow="ellipsis" vert="horz" wrap="square" anchor="ctr" anchorCtr="1"/>
-          <a:lstStyle/>
-          <a:p>
-            <a:pPr>
-              <a:defRPr sz="1197" b="0" i="0" u="none" strike="noStrike" kern="1200" baseline="0">
-                <a:solidFill>
-                  <a:schemeClr val="tx2"/>
-                </a:solidFill>
-                <a:latin typeface="+mn-lt"/>
-                <a:ea typeface="+mn-ea"/>
-                <a:cs typeface="+mn-cs"/>
-              </a:defRPr>
-            </a:pPr>
-            <a:endParaRPr lang="pl-PL"/>
-          </a:p>
-        </c:txPr>
-        <c:crossAx val="942990160"/>
-        <c:crosses val="autoZero"/>
-        <c:auto val="1"/>
-        <c:lblAlgn val="ctr"/>
-        <c:lblOffset val="100"/>
-        <c:noMultiLvlLbl val="0"/>
-      </c:catAx>
-      <c:valAx>
-        <c:axId val="942990160"/>
-        <c:scaling>
-          <c:orientation val="minMax"/>
-        </c:scaling>
-        <c:delete val="0"/>
-        <c:axPos val="b"/>
-        <c:numFmt formatCode="0" sourceLinked="0"/>
-        <c:majorTickMark val="none"/>
-        <c:minorTickMark val="none"/>
-        <c:tickLblPos val="high"/>
-        <c:spPr>
-          <a:noFill/>
-          <a:ln w="19050">
-            <a:noFill/>
-          </a:ln>
-          <a:effectLst/>
-        </c:spPr>
-        <c:txPr>
-          <a:bodyPr rot="-60000000" spcFirstLastPara="1" vertOverflow="ellipsis" vert="horz" wrap="square" anchor="ctr" anchorCtr="1"/>
-          <a:lstStyle/>
-          <a:p>
-            <a:pPr>
-              <a:defRPr sz="1197" b="0" i="0" u="none" strike="noStrike" kern="1200" baseline="0">
-                <a:solidFill>
-                  <a:schemeClr val="tx2"/>
-                </a:solidFill>
-                <a:latin typeface="+mn-lt"/>
-                <a:ea typeface="+mn-ea"/>
-                <a:cs typeface="+mn-cs"/>
-              </a:defRPr>
-            </a:pPr>
-            <a:endParaRPr lang="pl-PL"/>
-          </a:p>
-        </c:txPr>
-        <c:crossAx val="1416327088"/>
-        <c:crosses val="autoZero"/>
-        <c:crossBetween val="between"/>
-        <c:dispUnits>
-          <c:builtInUnit val="millions"/>
-        </c:dispUnits>
-      </c:valAx>
-      <c:spPr>
-        <a:noFill/>
-        <a:ln>
-          <a:noFill/>
-        </a:ln>
-        <a:effectLst/>
-      </c:spPr>
-    </c:plotArea>
-    <c:plotVisOnly val="1"/>
-    <c:dispBlanksAs val="gap"/>
-    <c:showDLblsOverMax val="0"/>
-    <c:extLst>
-      <c:ext xmlns:c16r3="http://schemas.microsoft.com/office/drawing/2017/03/chart" uri="{56B9EC1D-385E-4148-901F-78D8002777C0}">
-        <c16r3:dataDisplayOptions16>
-          <c16r3:dispNaAsBlank val="1"/>
-        </c16r3:dataDisplayOptions16>
-      </c:ext>
-    </c:extLst>
-  </c:chart>
-  <c:spPr>
-    <a:solidFill>
-      <a:schemeClr val="bg2"/>
-    </a:solidFill>
-    <a:ln>
-      <a:noFill/>
-    </a:ln>
-    <a:effectLst/>
-  </c:spPr>
-  <c:txPr>
-    <a:bodyPr/>
-    <a:lstStyle/>
-    <a:p>
-      <a:pPr>
-        <a:defRPr>
-          <a:solidFill>
-            <a:schemeClr val="tx1"/>
-          </a:solidFill>
-        </a:defRPr>
-      </a:pPr>
-      <a:endParaRPr lang="pl-PL"/>
-    </a:p>
-  </c:txPr>
-  <c:externalData r:id="rId3">
-    <c:autoUpdate val="0"/>
-  </c:externalData>
-</c:chartSpace>
-</file>
-
-<file path=ppt/charts/chart2.xml><?xml version="1.0" encoding="utf-8"?>
 <c:chartSpace xmlns:c="http://schemas.openxmlformats.org/drawingml/2006/chart" xmlns:a="http://schemas.openxmlformats.org/drawingml/2006/main" xmlns:r="http://schemas.openxmlformats.org/officeDocument/2006/relationships" xmlns:c16r2="http://schemas.microsoft.com/office/drawing/2015/06/chart">
   <c:date1904 val="0"/>
   <c:lang val="pl-PL"/>
@@ -1124,7 +710,7 @@
 </c:chartSpace>
 </file>
 
-<file path=ppt/charts/chart3.xml><?xml version="1.0" encoding="utf-8"?>
+<file path=ppt/charts/chart2.xml><?xml version="1.0" encoding="utf-8"?>
 <c:chartSpace xmlns:c="http://schemas.openxmlformats.org/drawingml/2006/chart" xmlns:a="http://schemas.openxmlformats.org/drawingml/2006/main" xmlns:r="http://schemas.openxmlformats.org/officeDocument/2006/relationships" xmlns:c16r2="http://schemas.microsoft.com/office/drawing/2015/06/chart">
   <c:date1904 val="0"/>
   <c:lang val="pl-PL"/>
@@ -1845,7 +1431,7 @@
 </c:chartSpace>
 </file>
 
-<file path=ppt/charts/chart4.xml><?xml version="1.0" encoding="utf-8"?>
+<file path=ppt/charts/chart3.xml><?xml version="1.0" encoding="utf-8"?>
 <c:chartSpace xmlns:c="http://schemas.openxmlformats.org/drawingml/2006/chart" xmlns:a="http://schemas.openxmlformats.org/drawingml/2006/main" xmlns:r="http://schemas.openxmlformats.org/officeDocument/2006/relationships" xmlns:c16r2="http://schemas.microsoft.com/office/drawing/2015/06/chart">
   <c:date1904 val="0"/>
   <c:lang val="pl-PL"/>
@@ -3316,7 +2902,7 @@
 </c:chartSpace>
 </file>
 
-<file path=ppt/charts/chart5.xml><?xml version="1.0" encoding="utf-8"?>
+<file path=ppt/charts/chart4.xml><?xml version="1.0" encoding="utf-8"?>
 <c:chartSpace xmlns:c="http://schemas.openxmlformats.org/drawingml/2006/chart" xmlns:a="http://schemas.openxmlformats.org/drawingml/2006/main" xmlns:r="http://schemas.openxmlformats.org/officeDocument/2006/relationships" xmlns:c16r2="http://schemas.microsoft.com/office/drawing/2015/06/chart">
   <c:date1904 val="0"/>
   <c:lang val="pl-PL"/>
@@ -4965,7 +4551,7 @@
 </c:chartSpace>
 </file>
 
-<file path=ppt/charts/chart6.xml><?xml version="1.0" encoding="utf-8"?>
+<file path=ppt/charts/chart5.xml><?xml version="1.0" encoding="utf-8"?>
 <c:chartSpace xmlns:c="http://schemas.openxmlformats.org/drawingml/2006/chart" xmlns:a="http://schemas.openxmlformats.org/drawingml/2006/main" xmlns:r="http://schemas.openxmlformats.org/officeDocument/2006/relationships" xmlns:c16r2="http://schemas.microsoft.com/office/drawing/2015/06/chart">
   <c:date1904 val="0"/>
   <c:lang val="pl-PL"/>
@@ -5919,6 +5505,1616 @@
           <c:extLst>
             <c:ext xmlns:c16="http://schemas.microsoft.com/office/drawing/2014/chart" uri="{C3380CC4-5D6E-409C-BE32-E72D297353CC}">
               <c16:uniqueId val="{00000000-298A-42B4-BA2C-8AEEEEF9E6BE}"/>
+            </c:ext>
+          </c:extLst>
+        </c:ser>
+        <c:dLbls>
+          <c:showLegendKey val="0"/>
+          <c:showVal val="0"/>
+          <c:showCatName val="0"/>
+          <c:showSerName val="0"/>
+          <c:showPercent val="0"/>
+          <c:showBubbleSize val="0"/>
+        </c:dLbls>
+        <c:smooth val="0"/>
+        <c:axId val="1462609072"/>
+        <c:axId val="1473956560"/>
+      </c:lineChart>
+      <c:dateAx>
+        <c:axId val="1462609072"/>
+        <c:scaling>
+          <c:orientation val="minMax"/>
+        </c:scaling>
+        <c:delete val="0"/>
+        <c:axPos val="b"/>
+        <c:numFmt formatCode="yyyy" sourceLinked="0"/>
+        <c:majorTickMark val="in"/>
+        <c:minorTickMark val="none"/>
+        <c:tickLblPos val="nextTo"/>
+        <c:spPr>
+          <a:noFill/>
+          <a:ln w="9525" cap="flat" cmpd="sng" algn="ctr">
+            <a:solidFill>
+              <a:schemeClr val="tx1">
+                <a:lumMod val="15000"/>
+                <a:lumOff val="85000"/>
+              </a:schemeClr>
+            </a:solidFill>
+            <a:round/>
+          </a:ln>
+          <a:effectLst/>
+        </c:spPr>
+        <c:txPr>
+          <a:bodyPr rot="-60000000" spcFirstLastPara="1" vertOverflow="ellipsis" vert="horz" wrap="square" anchor="ctr" anchorCtr="1"/>
+          <a:lstStyle/>
+          <a:p>
+            <a:pPr>
+              <a:defRPr sz="1197" b="0" i="0" u="none" strike="noStrike" kern="1200" baseline="0">
+                <a:solidFill>
+                  <a:schemeClr val="tx2"/>
+                </a:solidFill>
+                <a:latin typeface="+mn-lt"/>
+                <a:ea typeface="+mn-ea"/>
+                <a:cs typeface="+mn-cs"/>
+              </a:defRPr>
+            </a:pPr>
+            <a:endParaRPr lang="pl-PL"/>
+          </a:p>
+        </c:txPr>
+        <c:crossAx val="1473956560"/>
+        <c:crosses val="autoZero"/>
+        <c:auto val="1"/>
+        <c:lblOffset val="100"/>
+        <c:baseTimeUnit val="months"/>
+        <c:majorUnit val="12"/>
+        <c:majorTimeUnit val="months"/>
+      </c:dateAx>
+      <c:valAx>
+        <c:axId val="1473956560"/>
+        <c:scaling>
+          <c:orientation val="minMax"/>
+        </c:scaling>
+        <c:delete val="0"/>
+        <c:axPos val="l"/>
+        <c:numFmt formatCode="General" sourceLinked="1"/>
+        <c:majorTickMark val="none"/>
+        <c:minorTickMark val="none"/>
+        <c:tickLblPos val="nextTo"/>
+        <c:spPr>
+          <a:noFill/>
+          <a:ln>
+            <a:noFill/>
+          </a:ln>
+          <a:effectLst/>
+        </c:spPr>
+        <c:txPr>
+          <a:bodyPr rot="-60000000" spcFirstLastPara="1" vertOverflow="ellipsis" vert="horz" wrap="square" anchor="ctr" anchorCtr="1"/>
+          <a:lstStyle/>
+          <a:p>
+            <a:pPr>
+              <a:defRPr sz="1197" b="0" i="0" u="none" strike="noStrike" kern="1200" baseline="0">
+                <a:solidFill>
+                  <a:schemeClr val="tx2"/>
+                </a:solidFill>
+                <a:latin typeface="+mn-lt"/>
+                <a:ea typeface="+mn-ea"/>
+                <a:cs typeface="+mn-cs"/>
+              </a:defRPr>
+            </a:pPr>
+            <a:endParaRPr lang="pl-PL"/>
+          </a:p>
+        </c:txPr>
+        <c:crossAx val="1462609072"/>
+        <c:crosses val="autoZero"/>
+        <c:crossBetween val="between"/>
+        <c:dispUnits>
+          <c:builtInUnit val="thousands"/>
+        </c:dispUnits>
+      </c:valAx>
+      <c:spPr>
+        <a:noFill/>
+        <a:ln>
+          <a:noFill/>
+        </a:ln>
+        <a:effectLst/>
+      </c:spPr>
+    </c:plotArea>
+    <c:plotVisOnly val="1"/>
+    <c:dispBlanksAs val="gap"/>
+    <c:showDLblsOverMax val="0"/>
+    <c:extLst>
+      <c:ext xmlns:c16r3="http://schemas.microsoft.com/office/drawing/2017/03/chart" uri="{56B9EC1D-385E-4148-901F-78D8002777C0}">
+        <c16r3:dataDisplayOptions16>
+          <c16r3:dispNaAsBlank val="1"/>
+        </c16r3:dataDisplayOptions16>
+      </c:ext>
+    </c:extLst>
+  </c:chart>
+  <c:spPr>
+    <a:solidFill>
+      <a:schemeClr val="bg2"/>
+    </a:solidFill>
+    <a:ln>
+      <a:noFill/>
+    </a:ln>
+    <a:effectLst/>
+  </c:spPr>
+  <c:txPr>
+    <a:bodyPr/>
+    <a:lstStyle/>
+    <a:p>
+      <a:pPr>
+        <a:defRPr/>
+      </a:pPr>
+      <a:endParaRPr lang="pl-PL"/>
+    </a:p>
+  </c:txPr>
+  <c:externalData r:id="rId3">
+    <c:autoUpdate val="0"/>
+  </c:externalData>
+</c:chartSpace>
+</file>
+
+<file path=ppt/charts/chart6.xml><?xml version="1.0" encoding="utf-8"?>
+<c:chartSpace xmlns:c="http://schemas.openxmlformats.org/drawingml/2006/chart" xmlns:a="http://schemas.openxmlformats.org/drawingml/2006/main" xmlns:r="http://schemas.openxmlformats.org/officeDocument/2006/relationships" xmlns:c16r2="http://schemas.microsoft.com/office/drawing/2015/06/chart">
+  <c:date1904 val="0"/>
+  <c:lang val="pl-PL"/>
+  <c:roundedCorners val="0"/>
+  <mc:AlternateContent xmlns:mc="http://schemas.openxmlformats.org/markup-compatibility/2006">
+    <mc:Choice xmlns:c14="http://schemas.microsoft.com/office/drawing/2007/8/2/chart" Requires="c14">
+      <c14:style val="102"/>
+    </mc:Choice>
+    <mc:Fallback>
+      <c:style val="2"/>
+    </mc:Fallback>
+  </mc:AlternateContent>
+  <c:chart>
+    <c:title>
+      <c:tx>
+        <c:rich>
+          <a:bodyPr rot="0" spcFirstLastPara="1" vertOverflow="ellipsis" vert="horz" wrap="square" anchor="ctr" anchorCtr="1"/>
+          <a:lstStyle/>
+          <a:p>
+            <a:pPr algn="l">
+              <a:defRPr sz="1862" b="0" i="0" u="none" strike="noStrike" kern="1200" spc="0" baseline="0">
+                <a:solidFill>
+                  <a:schemeClr val="tx1"/>
+                </a:solidFill>
+                <a:latin typeface="+mn-lt"/>
+                <a:ea typeface="+mn-ea"/>
+                <a:cs typeface="+mn-cs"/>
+              </a:defRPr>
+            </a:pPr>
+            <a:r>
+              <a:rPr lang="pl-PL" sz="1800" dirty="0">
+                <a:solidFill>
+                  <a:schemeClr val="tx1"/>
+                </a:solidFill>
+              </a:rPr>
+              <a:t>Przebieg wyświetleń</a:t>
+            </a:r>
+            <a:r>
+              <a:rPr lang="pl-PL" sz="1800" baseline="0" dirty="0">
+                <a:solidFill>
+                  <a:schemeClr val="tx1"/>
+                </a:solidFill>
+              </a:rPr>
+              <a:t> stron </a:t>
+            </a:r>
+            <a:r>
+              <a:rPr lang="pl-PL" sz="1800" dirty="0">
+                <a:solidFill>
+                  <a:schemeClr val="tx1"/>
+                </a:solidFill>
+              </a:rPr>
+              <a:t>Republika Zielonego Przylądka oraz Curaçao [tys.]</a:t>
+            </a:r>
+            <a:endParaRPr lang="en-US" sz="1800" dirty="0">
+              <a:solidFill>
+                <a:schemeClr val="tx1"/>
+              </a:solidFill>
+            </a:endParaRPr>
+          </a:p>
+        </c:rich>
+      </c:tx>
+      <c:layout>
+        <c:manualLayout>
+          <c:xMode val="edge"/>
+          <c:yMode val="edge"/>
+          <c:x val="1.8313502485770299E-4"/>
+          <c:y val="0"/>
+        </c:manualLayout>
+      </c:layout>
+      <c:overlay val="0"/>
+      <c:spPr>
+        <a:noFill/>
+        <a:ln>
+          <a:noFill/>
+        </a:ln>
+        <a:effectLst/>
+      </c:spPr>
+      <c:txPr>
+        <a:bodyPr rot="0" spcFirstLastPara="1" vertOverflow="ellipsis" vert="horz" wrap="square" anchor="ctr" anchorCtr="1"/>
+        <a:lstStyle/>
+        <a:p>
+          <a:pPr algn="l">
+            <a:defRPr sz="1862" b="0" i="0" u="none" strike="noStrike" kern="1200" spc="0" baseline="0">
+              <a:solidFill>
+                <a:schemeClr val="tx1"/>
+              </a:solidFill>
+              <a:latin typeface="+mn-lt"/>
+              <a:ea typeface="+mn-ea"/>
+              <a:cs typeface="+mn-cs"/>
+            </a:defRPr>
+          </a:pPr>
+          <a:endParaRPr lang="en-US"/>
+        </a:p>
+      </c:txPr>
+    </c:title>
+    <c:autoTitleDeleted val="0"/>
+    <c:plotArea>
+      <c:layout>
+        <c:manualLayout>
+          <c:layoutTarget val="inner"/>
+          <c:xMode val="edge"/>
+          <c:yMode val="edge"/>
+          <c:x val="5.3603301286851403E-2"/>
+          <c:y val="0.19282223536522569"/>
+          <c:w val="0.94418872912625051"/>
+          <c:h val="0.69326471047150895"/>
+        </c:manualLayout>
+      </c:layout>
+      <c:lineChart>
+        <c:grouping val="standard"/>
+        <c:varyColors val="0"/>
+        <c:ser>
+          <c:idx val="0"/>
+          <c:order val="0"/>
+          <c:tx>
+            <c:strRef>
+              <c:f>Arkusz1!$B$1</c:f>
+              <c:strCache>
+                <c:ptCount val="1"/>
+                <c:pt idx="0">
+                  <c:v>Republika Zielonego Przylądka</c:v>
+                </c:pt>
+              </c:strCache>
+            </c:strRef>
+          </c:tx>
+          <c:spPr>
+            <a:ln w="25400" cap="rnd">
+              <a:solidFill>
+                <a:schemeClr val="accent4"/>
+              </a:solidFill>
+              <a:prstDash val="solid"/>
+              <a:round/>
+            </a:ln>
+            <a:effectLst/>
+          </c:spPr>
+          <c:marker>
+            <c:symbol val="none"/>
+          </c:marker>
+          <c:cat>
+            <c:numRef>
+              <c:f>Arkusz1!$A$2:$A$105</c:f>
+              <c:numCache>
+                <c:formatCode>m/d/yyyy</c:formatCode>
+                <c:ptCount val="104"/>
+                <c:pt idx="0">
+                  <c:v>43101</c:v>
+                </c:pt>
+                <c:pt idx="1">
+                  <c:v>43132</c:v>
+                </c:pt>
+                <c:pt idx="2">
+                  <c:v>43160</c:v>
+                </c:pt>
+                <c:pt idx="3">
+                  <c:v>43191</c:v>
+                </c:pt>
+                <c:pt idx="4">
+                  <c:v>43221</c:v>
+                </c:pt>
+                <c:pt idx="5">
+                  <c:v>43252</c:v>
+                </c:pt>
+                <c:pt idx="6">
+                  <c:v>43282</c:v>
+                </c:pt>
+                <c:pt idx="7">
+                  <c:v>43313</c:v>
+                </c:pt>
+                <c:pt idx="8">
+                  <c:v>43344</c:v>
+                </c:pt>
+                <c:pt idx="9">
+                  <c:v>43374</c:v>
+                </c:pt>
+                <c:pt idx="10">
+                  <c:v>43405</c:v>
+                </c:pt>
+                <c:pt idx="11">
+                  <c:v>43435</c:v>
+                </c:pt>
+                <c:pt idx="12">
+                  <c:v>43466</c:v>
+                </c:pt>
+                <c:pt idx="13">
+                  <c:v>43497</c:v>
+                </c:pt>
+                <c:pt idx="14">
+                  <c:v>43525</c:v>
+                </c:pt>
+                <c:pt idx="15">
+                  <c:v>43556</c:v>
+                </c:pt>
+                <c:pt idx="16">
+                  <c:v>43586</c:v>
+                </c:pt>
+                <c:pt idx="17">
+                  <c:v>43617</c:v>
+                </c:pt>
+                <c:pt idx="18">
+                  <c:v>43647</c:v>
+                </c:pt>
+                <c:pt idx="19">
+                  <c:v>43678</c:v>
+                </c:pt>
+                <c:pt idx="20">
+                  <c:v>43709</c:v>
+                </c:pt>
+                <c:pt idx="21">
+                  <c:v>43739</c:v>
+                </c:pt>
+                <c:pt idx="22">
+                  <c:v>43770</c:v>
+                </c:pt>
+                <c:pt idx="23">
+                  <c:v>43800</c:v>
+                </c:pt>
+                <c:pt idx="24">
+                  <c:v>43831</c:v>
+                </c:pt>
+                <c:pt idx="25">
+                  <c:v>43862</c:v>
+                </c:pt>
+                <c:pt idx="26">
+                  <c:v>43891</c:v>
+                </c:pt>
+                <c:pt idx="27">
+                  <c:v>43922</c:v>
+                </c:pt>
+                <c:pt idx="28">
+                  <c:v>43952</c:v>
+                </c:pt>
+                <c:pt idx="29">
+                  <c:v>43983</c:v>
+                </c:pt>
+                <c:pt idx="30">
+                  <c:v>44013</c:v>
+                </c:pt>
+                <c:pt idx="31">
+                  <c:v>44044</c:v>
+                </c:pt>
+                <c:pt idx="32">
+                  <c:v>44075</c:v>
+                </c:pt>
+                <c:pt idx="33">
+                  <c:v>44105</c:v>
+                </c:pt>
+                <c:pt idx="34">
+                  <c:v>44136</c:v>
+                </c:pt>
+                <c:pt idx="35">
+                  <c:v>44166</c:v>
+                </c:pt>
+                <c:pt idx="36">
+                  <c:v>44197</c:v>
+                </c:pt>
+                <c:pt idx="37">
+                  <c:v>44228</c:v>
+                </c:pt>
+                <c:pt idx="38">
+                  <c:v>44256</c:v>
+                </c:pt>
+                <c:pt idx="39">
+                  <c:v>44287</c:v>
+                </c:pt>
+                <c:pt idx="40">
+                  <c:v>44317</c:v>
+                </c:pt>
+                <c:pt idx="41">
+                  <c:v>44348</c:v>
+                </c:pt>
+                <c:pt idx="42">
+                  <c:v>44378</c:v>
+                </c:pt>
+                <c:pt idx="43">
+                  <c:v>44409</c:v>
+                </c:pt>
+                <c:pt idx="44">
+                  <c:v>44440</c:v>
+                </c:pt>
+                <c:pt idx="45">
+                  <c:v>44470</c:v>
+                </c:pt>
+                <c:pt idx="46">
+                  <c:v>44501</c:v>
+                </c:pt>
+                <c:pt idx="47">
+                  <c:v>44531</c:v>
+                </c:pt>
+                <c:pt idx="48">
+                  <c:v>44562</c:v>
+                </c:pt>
+                <c:pt idx="49">
+                  <c:v>44593</c:v>
+                </c:pt>
+                <c:pt idx="50">
+                  <c:v>44621</c:v>
+                </c:pt>
+                <c:pt idx="51">
+                  <c:v>44652</c:v>
+                </c:pt>
+                <c:pt idx="52">
+                  <c:v>44682</c:v>
+                </c:pt>
+                <c:pt idx="53">
+                  <c:v>44713</c:v>
+                </c:pt>
+                <c:pt idx="54">
+                  <c:v>44743</c:v>
+                </c:pt>
+                <c:pt idx="55">
+                  <c:v>44774</c:v>
+                </c:pt>
+                <c:pt idx="56">
+                  <c:v>44805</c:v>
+                </c:pt>
+                <c:pt idx="57">
+                  <c:v>44835</c:v>
+                </c:pt>
+                <c:pt idx="58">
+                  <c:v>44866</c:v>
+                </c:pt>
+                <c:pt idx="59">
+                  <c:v>44896</c:v>
+                </c:pt>
+                <c:pt idx="60">
+                  <c:v>44927</c:v>
+                </c:pt>
+                <c:pt idx="61">
+                  <c:v>44958</c:v>
+                </c:pt>
+                <c:pt idx="62">
+                  <c:v>44986</c:v>
+                </c:pt>
+                <c:pt idx="63">
+                  <c:v>45017</c:v>
+                </c:pt>
+                <c:pt idx="64">
+                  <c:v>45047</c:v>
+                </c:pt>
+                <c:pt idx="65">
+                  <c:v>45078</c:v>
+                </c:pt>
+                <c:pt idx="66">
+                  <c:v>45108</c:v>
+                </c:pt>
+                <c:pt idx="67">
+                  <c:v>45139</c:v>
+                </c:pt>
+                <c:pt idx="68">
+                  <c:v>45170</c:v>
+                </c:pt>
+                <c:pt idx="69">
+                  <c:v>45200</c:v>
+                </c:pt>
+                <c:pt idx="70">
+                  <c:v>45231</c:v>
+                </c:pt>
+                <c:pt idx="71">
+                  <c:v>45261</c:v>
+                </c:pt>
+                <c:pt idx="72">
+                  <c:v>45292</c:v>
+                </c:pt>
+                <c:pt idx="73">
+                  <c:v>45323</c:v>
+                </c:pt>
+                <c:pt idx="74">
+                  <c:v>45352</c:v>
+                </c:pt>
+                <c:pt idx="75">
+                  <c:v>45383</c:v>
+                </c:pt>
+                <c:pt idx="76">
+                  <c:v>45413</c:v>
+                </c:pt>
+                <c:pt idx="77">
+                  <c:v>45444</c:v>
+                </c:pt>
+                <c:pt idx="78">
+                  <c:v>45474</c:v>
+                </c:pt>
+                <c:pt idx="79">
+                  <c:v>45505</c:v>
+                </c:pt>
+                <c:pt idx="80">
+                  <c:v>45536</c:v>
+                </c:pt>
+                <c:pt idx="81">
+                  <c:v>45566</c:v>
+                </c:pt>
+                <c:pt idx="82">
+                  <c:v>45597</c:v>
+                </c:pt>
+                <c:pt idx="83">
+                  <c:v>45627</c:v>
+                </c:pt>
+                <c:pt idx="84">
+                  <c:v>45658</c:v>
+                </c:pt>
+                <c:pt idx="85">
+                  <c:v>45689</c:v>
+                </c:pt>
+                <c:pt idx="86">
+                  <c:v>45717</c:v>
+                </c:pt>
+                <c:pt idx="87">
+                  <c:v>45748</c:v>
+                </c:pt>
+                <c:pt idx="88">
+                  <c:v>45778</c:v>
+                </c:pt>
+                <c:pt idx="89">
+                  <c:v>45809</c:v>
+                </c:pt>
+                <c:pt idx="90">
+                  <c:v>45839</c:v>
+                </c:pt>
+                <c:pt idx="91">
+                  <c:v>45870</c:v>
+                </c:pt>
+                <c:pt idx="92">
+                  <c:v>45901</c:v>
+                </c:pt>
+                <c:pt idx="93">
+                  <c:v>45931</c:v>
+                </c:pt>
+                <c:pt idx="94">
+                  <c:v>45962</c:v>
+                </c:pt>
+                <c:pt idx="95">
+                  <c:v>45992</c:v>
+                </c:pt>
+                <c:pt idx="96">
+                  <c:v>46023</c:v>
+                </c:pt>
+                <c:pt idx="97">
+                  <c:v>46054</c:v>
+                </c:pt>
+                <c:pt idx="98">
+                  <c:v>46082</c:v>
+                </c:pt>
+                <c:pt idx="99">
+                  <c:v>46113</c:v>
+                </c:pt>
+                <c:pt idx="100">
+                  <c:v>46143</c:v>
+                </c:pt>
+                <c:pt idx="101">
+                  <c:v>46174</c:v>
+                </c:pt>
+                <c:pt idx="102">
+                  <c:v>46204</c:v>
+                </c:pt>
+                <c:pt idx="103">
+                  <c:v>46235</c:v>
+                </c:pt>
+              </c:numCache>
+            </c:numRef>
+          </c:cat>
+          <c:val>
+            <c:numRef>
+              <c:f>Arkusz1!$B$2:$B$105</c:f>
+              <c:numCache>
+                <c:formatCode>General</c:formatCode>
+                <c:ptCount val="104"/>
+                <c:pt idx="0">
+                  <c:v>22551</c:v>
+                </c:pt>
+                <c:pt idx="1">
+                  <c:v>20088</c:v>
+                </c:pt>
+                <c:pt idx="2">
+                  <c:v>18648</c:v>
+                </c:pt>
+                <c:pt idx="3">
+                  <c:v>15304</c:v>
+                </c:pt>
+                <c:pt idx="4">
+                  <c:v>16017</c:v>
+                </c:pt>
+                <c:pt idx="5">
+                  <c:v>20793</c:v>
+                </c:pt>
+                <c:pt idx="6">
+                  <c:v>24073</c:v>
+                </c:pt>
+                <c:pt idx="7">
+                  <c:v>20587</c:v>
+                </c:pt>
+                <c:pt idx="8">
+                  <c:v>21821</c:v>
+                </c:pt>
+                <c:pt idx="9">
+                  <c:v>20866</c:v>
+                </c:pt>
+                <c:pt idx="10">
+                  <c:v>20681</c:v>
+                </c:pt>
+                <c:pt idx="11">
+                  <c:v>20276</c:v>
+                </c:pt>
+                <c:pt idx="12">
+                  <c:v>22216</c:v>
+                </c:pt>
+                <c:pt idx="13">
+                  <c:v>20603</c:v>
+                </c:pt>
+                <c:pt idx="14">
+                  <c:v>19292</c:v>
+                </c:pt>
+                <c:pt idx="15">
+                  <c:v>11804</c:v>
+                </c:pt>
+                <c:pt idx="16">
+                  <c:v>12443</c:v>
+                </c:pt>
+                <c:pt idx="17">
+                  <c:v>15614</c:v>
+                </c:pt>
+                <c:pt idx="18">
+                  <c:v>18295</c:v>
+                </c:pt>
+                <c:pt idx="19">
+                  <c:v>34271</c:v>
+                </c:pt>
+                <c:pt idx="20">
+                  <c:v>32728</c:v>
+                </c:pt>
+                <c:pt idx="21">
+                  <c:v>16496</c:v>
+                </c:pt>
+                <c:pt idx="22">
+                  <c:v>15918</c:v>
+                </c:pt>
+                <c:pt idx="23">
+                  <c:v>14647</c:v>
+                </c:pt>
+                <c:pt idx="24">
+                  <c:v>18428</c:v>
+                </c:pt>
+                <c:pt idx="25">
+                  <c:v>13301</c:v>
+                </c:pt>
+                <c:pt idx="26">
+                  <c:v>10989</c:v>
+                </c:pt>
+                <c:pt idx="27">
+                  <c:v>7888</c:v>
+                </c:pt>
+                <c:pt idx="28">
+                  <c:v>7726</c:v>
+                </c:pt>
+                <c:pt idx="29">
+                  <c:v>5652</c:v>
+                </c:pt>
+                <c:pt idx="30">
+                  <c:v>7029</c:v>
+                </c:pt>
+                <c:pt idx="31">
+                  <c:v>6579</c:v>
+                </c:pt>
+                <c:pt idx="32">
+                  <c:v>6880</c:v>
+                </c:pt>
+                <c:pt idx="33">
+                  <c:v>6468</c:v>
+                </c:pt>
+                <c:pt idx="34">
+                  <c:v>7657</c:v>
+                </c:pt>
+                <c:pt idx="35">
+                  <c:v>8879</c:v>
+                </c:pt>
+                <c:pt idx="36">
+                  <c:v>14813</c:v>
+                </c:pt>
+                <c:pt idx="37">
+                  <c:v>10721</c:v>
+                </c:pt>
+                <c:pt idx="38">
+                  <c:v>15336</c:v>
+                </c:pt>
+                <c:pt idx="39">
+                  <c:v>15873</c:v>
+                </c:pt>
+                <c:pt idx="40">
+                  <c:v>13452</c:v>
+                </c:pt>
+                <c:pt idx="41">
+                  <c:v>18018</c:v>
+                </c:pt>
+                <c:pt idx="42">
+                  <c:v>18029</c:v>
+                </c:pt>
+                <c:pt idx="43">
+                  <c:v>17484</c:v>
+                </c:pt>
+                <c:pt idx="44">
+                  <c:v>18591</c:v>
+                </c:pt>
+                <c:pt idx="45">
+                  <c:v>20359</c:v>
+                </c:pt>
+                <c:pt idx="46">
+                  <c:v>17381</c:v>
+                </c:pt>
+                <c:pt idx="47">
+                  <c:v>14139</c:v>
+                </c:pt>
+                <c:pt idx="48">
+                  <c:v>21102</c:v>
+                </c:pt>
+                <c:pt idx="49">
+                  <c:v>13575</c:v>
+                </c:pt>
+                <c:pt idx="50">
+                  <c:v>16139</c:v>
+                </c:pt>
+                <c:pt idx="51">
+                  <c:v>12940</c:v>
+                </c:pt>
+                <c:pt idx="52">
+                  <c:v>12287</c:v>
+                </c:pt>
+                <c:pt idx="53">
+                  <c:v>11969</c:v>
+                </c:pt>
+                <c:pt idx="54">
+                  <c:v>15070</c:v>
+                </c:pt>
+                <c:pt idx="55">
+                  <c:v>14212</c:v>
+                </c:pt>
+                <c:pt idx="56">
+                  <c:v>12952</c:v>
+                </c:pt>
+                <c:pt idx="57">
+                  <c:v>13750</c:v>
+                </c:pt>
+                <c:pt idx="58">
+                  <c:v>15068</c:v>
+                </c:pt>
+                <c:pt idx="59">
+                  <c:v>16377</c:v>
+                </c:pt>
+                <c:pt idx="60">
+                  <c:v>20988</c:v>
+                </c:pt>
+                <c:pt idx="61">
+                  <c:v>16314</c:v>
+                </c:pt>
+                <c:pt idx="62">
+                  <c:v>16029</c:v>
+                </c:pt>
+                <c:pt idx="63">
+                  <c:v>15490</c:v>
+                </c:pt>
+                <c:pt idx="64">
+                  <c:v>16950</c:v>
+                </c:pt>
+                <c:pt idx="65">
+                  <c:v>16184</c:v>
+                </c:pt>
+                <c:pt idx="66">
+                  <c:v>16749</c:v>
+                </c:pt>
+                <c:pt idx="67">
+                  <c:v>19702</c:v>
+                </c:pt>
+                <c:pt idx="68">
+                  <c:v>18341</c:v>
+                </c:pt>
+                <c:pt idx="69">
+                  <c:v>20925</c:v>
+                </c:pt>
+                <c:pt idx="70">
+                  <c:v>22426</c:v>
+                </c:pt>
+                <c:pt idx="71">
+                  <c:v>24749</c:v>
+                </c:pt>
+                <c:pt idx="72">
+                  <c:v>36474</c:v>
+                </c:pt>
+                <c:pt idx="73">
+                  <c:v>26349</c:v>
+                </c:pt>
+                <c:pt idx="74">
+                  <c:v>23087</c:v>
+                </c:pt>
+                <c:pt idx="75">
+                  <c:v>19485</c:v>
+                </c:pt>
+                <c:pt idx="76">
+                  <c:v>18349</c:v>
+                </c:pt>
+                <c:pt idx="77">
+                  <c:v>15729</c:v>
+                </c:pt>
+                <c:pt idx="78">
+                  <c:v>20903</c:v>
+                </c:pt>
+                <c:pt idx="79">
+                  <c:v>18287</c:v>
+                </c:pt>
+                <c:pt idx="80">
+                  <c:v>19081</c:v>
+                </c:pt>
+                <c:pt idx="81">
+                  <c:v>20806</c:v>
+                </c:pt>
+                <c:pt idx="82">
+                  <c:v>23368</c:v>
+                </c:pt>
+                <c:pt idx="83">
+                  <c:v>24771</c:v>
+                </c:pt>
+                <c:pt idx="84">
+                  <c:v>29250</c:v>
+                </c:pt>
+                <c:pt idx="85">
+                  <c:v>24407</c:v>
+                </c:pt>
+                <c:pt idx="86">
+                  <c:v>26287</c:v>
+                </c:pt>
+                <c:pt idx="87">
+                  <c:v>18755</c:v>
+                </c:pt>
+                <c:pt idx="88">
+                  <c:v>17160</c:v>
+                </c:pt>
+                <c:pt idx="89">
+                  <c:v>18956</c:v>
+                </c:pt>
+                <c:pt idx="90">
+                  <c:v>22533</c:v>
+                </c:pt>
+                <c:pt idx="91">
+                  <c:v>26900</c:v>
+                </c:pt>
+                <c:pt idx="92">
+                  <c:v>31540</c:v>
+                </c:pt>
+                <c:pt idx="93">
+                  <c:v>42687</c:v>
+                </c:pt>
+                <c:pt idx="94">
+                  <c:v>27507</c:v>
+                </c:pt>
+                <c:pt idx="95">
+                  <c:v>25250</c:v>
+                </c:pt>
+                <c:pt idx="96">
+                  <c:v>28459</c:v>
+                </c:pt>
+                <c:pt idx="97">
+                  <c:v>23050</c:v>
+                </c:pt>
+                <c:pt idx="98">
+                  <c:v>23760</c:v>
+                </c:pt>
+                <c:pt idx="99">
+                  <c:v>21524</c:v>
+                </c:pt>
+                <c:pt idx="100">
+                  <c:v>24934</c:v>
+                </c:pt>
+                <c:pt idx="101">
+                  <c:v>338510</c:v>
+                </c:pt>
+                <c:pt idx="102">
+                  <c:v>176331</c:v>
+                </c:pt>
+                <c:pt idx="103">
+                  <c:v>19500</c:v>
+                </c:pt>
+              </c:numCache>
+            </c:numRef>
+          </c:val>
+          <c:smooth val="0"/>
+          <c:extLst>
+            <c:ext xmlns:c16="http://schemas.microsoft.com/office/drawing/2014/chart" uri="{C3380CC4-5D6E-409C-BE32-E72D297353CC}">
+              <c16:uniqueId val="{00000000-298A-42B4-BA2C-8AEEEEF9E6BE}"/>
+            </c:ext>
+          </c:extLst>
+        </c:ser>
+        <c:ser>
+          <c:idx val="1"/>
+          <c:order val="1"/>
+          <c:tx>
+            <c:strRef>
+              <c:f>Arkusz1!$C$1</c:f>
+              <c:strCache>
+                <c:ptCount val="1"/>
+                <c:pt idx="0">
+                  <c:v>Curaçao</c:v>
+                </c:pt>
+              </c:strCache>
+            </c:strRef>
+          </c:tx>
+          <c:spPr>
+            <a:ln w="25400" cap="rnd">
+              <a:solidFill>
+                <a:schemeClr val="accent2"/>
+              </a:solidFill>
+              <a:round/>
+            </a:ln>
+            <a:effectLst/>
+          </c:spPr>
+          <c:marker>
+            <c:symbol val="none"/>
+          </c:marker>
+          <c:cat>
+            <c:numRef>
+              <c:f>Arkusz1!$A$2:$A$105</c:f>
+              <c:numCache>
+                <c:formatCode>m/d/yyyy</c:formatCode>
+                <c:ptCount val="104"/>
+                <c:pt idx="0">
+                  <c:v>43101</c:v>
+                </c:pt>
+                <c:pt idx="1">
+                  <c:v>43132</c:v>
+                </c:pt>
+                <c:pt idx="2">
+                  <c:v>43160</c:v>
+                </c:pt>
+                <c:pt idx="3">
+                  <c:v>43191</c:v>
+                </c:pt>
+                <c:pt idx="4">
+                  <c:v>43221</c:v>
+                </c:pt>
+                <c:pt idx="5">
+                  <c:v>43252</c:v>
+                </c:pt>
+                <c:pt idx="6">
+                  <c:v>43282</c:v>
+                </c:pt>
+                <c:pt idx="7">
+                  <c:v>43313</c:v>
+                </c:pt>
+                <c:pt idx="8">
+                  <c:v>43344</c:v>
+                </c:pt>
+                <c:pt idx="9">
+                  <c:v>43374</c:v>
+                </c:pt>
+                <c:pt idx="10">
+                  <c:v>43405</c:v>
+                </c:pt>
+                <c:pt idx="11">
+                  <c:v>43435</c:v>
+                </c:pt>
+                <c:pt idx="12">
+                  <c:v>43466</c:v>
+                </c:pt>
+                <c:pt idx="13">
+                  <c:v>43497</c:v>
+                </c:pt>
+                <c:pt idx="14">
+                  <c:v>43525</c:v>
+                </c:pt>
+                <c:pt idx="15">
+                  <c:v>43556</c:v>
+                </c:pt>
+                <c:pt idx="16">
+                  <c:v>43586</c:v>
+                </c:pt>
+                <c:pt idx="17">
+                  <c:v>43617</c:v>
+                </c:pt>
+                <c:pt idx="18">
+                  <c:v>43647</c:v>
+                </c:pt>
+                <c:pt idx="19">
+                  <c:v>43678</c:v>
+                </c:pt>
+                <c:pt idx="20">
+                  <c:v>43709</c:v>
+                </c:pt>
+                <c:pt idx="21">
+                  <c:v>43739</c:v>
+                </c:pt>
+                <c:pt idx="22">
+                  <c:v>43770</c:v>
+                </c:pt>
+                <c:pt idx="23">
+                  <c:v>43800</c:v>
+                </c:pt>
+                <c:pt idx="24">
+                  <c:v>43831</c:v>
+                </c:pt>
+                <c:pt idx="25">
+                  <c:v>43862</c:v>
+                </c:pt>
+                <c:pt idx="26">
+                  <c:v>43891</c:v>
+                </c:pt>
+                <c:pt idx="27">
+                  <c:v>43922</c:v>
+                </c:pt>
+                <c:pt idx="28">
+                  <c:v>43952</c:v>
+                </c:pt>
+                <c:pt idx="29">
+                  <c:v>43983</c:v>
+                </c:pt>
+                <c:pt idx="30">
+                  <c:v>44013</c:v>
+                </c:pt>
+                <c:pt idx="31">
+                  <c:v>44044</c:v>
+                </c:pt>
+                <c:pt idx="32">
+                  <c:v>44075</c:v>
+                </c:pt>
+                <c:pt idx="33">
+                  <c:v>44105</c:v>
+                </c:pt>
+                <c:pt idx="34">
+                  <c:v>44136</c:v>
+                </c:pt>
+                <c:pt idx="35">
+                  <c:v>44166</c:v>
+                </c:pt>
+                <c:pt idx="36">
+                  <c:v>44197</c:v>
+                </c:pt>
+                <c:pt idx="37">
+                  <c:v>44228</c:v>
+                </c:pt>
+                <c:pt idx="38">
+                  <c:v>44256</c:v>
+                </c:pt>
+                <c:pt idx="39">
+                  <c:v>44287</c:v>
+                </c:pt>
+                <c:pt idx="40">
+                  <c:v>44317</c:v>
+                </c:pt>
+                <c:pt idx="41">
+                  <c:v>44348</c:v>
+                </c:pt>
+                <c:pt idx="42">
+                  <c:v>44378</c:v>
+                </c:pt>
+                <c:pt idx="43">
+                  <c:v>44409</c:v>
+                </c:pt>
+                <c:pt idx="44">
+                  <c:v>44440</c:v>
+                </c:pt>
+                <c:pt idx="45">
+                  <c:v>44470</c:v>
+                </c:pt>
+                <c:pt idx="46">
+                  <c:v>44501</c:v>
+                </c:pt>
+                <c:pt idx="47">
+                  <c:v>44531</c:v>
+                </c:pt>
+                <c:pt idx="48">
+                  <c:v>44562</c:v>
+                </c:pt>
+                <c:pt idx="49">
+                  <c:v>44593</c:v>
+                </c:pt>
+                <c:pt idx="50">
+                  <c:v>44621</c:v>
+                </c:pt>
+                <c:pt idx="51">
+                  <c:v>44652</c:v>
+                </c:pt>
+                <c:pt idx="52">
+                  <c:v>44682</c:v>
+                </c:pt>
+                <c:pt idx="53">
+                  <c:v>44713</c:v>
+                </c:pt>
+                <c:pt idx="54">
+                  <c:v>44743</c:v>
+                </c:pt>
+                <c:pt idx="55">
+                  <c:v>44774</c:v>
+                </c:pt>
+                <c:pt idx="56">
+                  <c:v>44805</c:v>
+                </c:pt>
+                <c:pt idx="57">
+                  <c:v>44835</c:v>
+                </c:pt>
+                <c:pt idx="58">
+                  <c:v>44866</c:v>
+                </c:pt>
+                <c:pt idx="59">
+                  <c:v>44896</c:v>
+                </c:pt>
+                <c:pt idx="60">
+                  <c:v>44927</c:v>
+                </c:pt>
+                <c:pt idx="61">
+                  <c:v>44958</c:v>
+                </c:pt>
+                <c:pt idx="62">
+                  <c:v>44986</c:v>
+                </c:pt>
+                <c:pt idx="63">
+                  <c:v>45017</c:v>
+                </c:pt>
+                <c:pt idx="64">
+                  <c:v>45047</c:v>
+                </c:pt>
+                <c:pt idx="65">
+                  <c:v>45078</c:v>
+                </c:pt>
+                <c:pt idx="66">
+                  <c:v>45108</c:v>
+                </c:pt>
+                <c:pt idx="67">
+                  <c:v>45139</c:v>
+                </c:pt>
+                <c:pt idx="68">
+                  <c:v>45170</c:v>
+                </c:pt>
+                <c:pt idx="69">
+                  <c:v>45200</c:v>
+                </c:pt>
+                <c:pt idx="70">
+                  <c:v>45231</c:v>
+                </c:pt>
+                <c:pt idx="71">
+                  <c:v>45261</c:v>
+                </c:pt>
+                <c:pt idx="72">
+                  <c:v>45292</c:v>
+                </c:pt>
+                <c:pt idx="73">
+                  <c:v>45323</c:v>
+                </c:pt>
+                <c:pt idx="74">
+                  <c:v>45352</c:v>
+                </c:pt>
+                <c:pt idx="75">
+                  <c:v>45383</c:v>
+                </c:pt>
+                <c:pt idx="76">
+                  <c:v>45413</c:v>
+                </c:pt>
+                <c:pt idx="77">
+                  <c:v>45444</c:v>
+                </c:pt>
+                <c:pt idx="78">
+                  <c:v>45474</c:v>
+                </c:pt>
+                <c:pt idx="79">
+                  <c:v>45505</c:v>
+                </c:pt>
+                <c:pt idx="80">
+                  <c:v>45536</c:v>
+                </c:pt>
+                <c:pt idx="81">
+                  <c:v>45566</c:v>
+                </c:pt>
+                <c:pt idx="82">
+                  <c:v>45597</c:v>
+                </c:pt>
+                <c:pt idx="83">
+                  <c:v>45627</c:v>
+                </c:pt>
+                <c:pt idx="84">
+                  <c:v>45658</c:v>
+                </c:pt>
+                <c:pt idx="85">
+                  <c:v>45689</c:v>
+                </c:pt>
+                <c:pt idx="86">
+                  <c:v>45717</c:v>
+                </c:pt>
+                <c:pt idx="87">
+                  <c:v>45748</c:v>
+                </c:pt>
+                <c:pt idx="88">
+                  <c:v>45778</c:v>
+                </c:pt>
+                <c:pt idx="89">
+                  <c:v>45809</c:v>
+                </c:pt>
+                <c:pt idx="90">
+                  <c:v>45839</c:v>
+                </c:pt>
+                <c:pt idx="91">
+                  <c:v>45870</c:v>
+                </c:pt>
+                <c:pt idx="92">
+                  <c:v>45901</c:v>
+                </c:pt>
+                <c:pt idx="93">
+                  <c:v>45931</c:v>
+                </c:pt>
+                <c:pt idx="94">
+                  <c:v>45962</c:v>
+                </c:pt>
+                <c:pt idx="95">
+                  <c:v>45992</c:v>
+                </c:pt>
+                <c:pt idx="96">
+                  <c:v>46023</c:v>
+                </c:pt>
+                <c:pt idx="97">
+                  <c:v>46054</c:v>
+                </c:pt>
+                <c:pt idx="98">
+                  <c:v>46082</c:v>
+                </c:pt>
+                <c:pt idx="99">
+                  <c:v>46113</c:v>
+                </c:pt>
+                <c:pt idx="100">
+                  <c:v>46143</c:v>
+                </c:pt>
+                <c:pt idx="101">
+                  <c:v>46174</c:v>
+                </c:pt>
+                <c:pt idx="102">
+                  <c:v>46204</c:v>
+                </c:pt>
+                <c:pt idx="103">
+                  <c:v>46235</c:v>
+                </c:pt>
+              </c:numCache>
+            </c:numRef>
+          </c:cat>
+          <c:val>
+            <c:numRef>
+              <c:f>Arkusz1!$C$2:$C$105</c:f>
+              <c:numCache>
+                <c:formatCode>General</c:formatCode>
+                <c:ptCount val="104"/>
+                <c:pt idx="0">
+                  <c:v>4960</c:v>
+                </c:pt>
+                <c:pt idx="1">
+                  <c:v>4015</c:v>
+                </c:pt>
+                <c:pt idx="2">
+                  <c:v>6474</c:v>
+                </c:pt>
+                <c:pt idx="3">
+                  <c:v>4131</c:v>
+                </c:pt>
+                <c:pt idx="4">
+                  <c:v>4209</c:v>
+                </c:pt>
+                <c:pt idx="5">
+                  <c:v>4919</c:v>
+                </c:pt>
+                <c:pt idx="6">
+                  <c:v>5130</c:v>
+                </c:pt>
+                <c:pt idx="7">
+                  <c:v>5424</c:v>
+                </c:pt>
+                <c:pt idx="8">
+                  <c:v>4967</c:v>
+                </c:pt>
+                <c:pt idx="9">
+                  <c:v>4789</c:v>
+                </c:pt>
+                <c:pt idx="10">
+                  <c:v>5160</c:v>
+                </c:pt>
+                <c:pt idx="11">
+                  <c:v>5804</c:v>
+                </c:pt>
+                <c:pt idx="12">
+                  <c:v>6412</c:v>
+                </c:pt>
+                <c:pt idx="13">
+                  <c:v>5483</c:v>
+                </c:pt>
+                <c:pt idx="14">
+                  <c:v>5347</c:v>
+                </c:pt>
+                <c:pt idx="15">
+                  <c:v>3877</c:v>
+                </c:pt>
+                <c:pt idx="16">
+                  <c:v>4447</c:v>
+                </c:pt>
+                <c:pt idx="17">
+                  <c:v>7604</c:v>
+                </c:pt>
+                <c:pt idx="18">
+                  <c:v>5939</c:v>
+                </c:pt>
+                <c:pt idx="19">
+                  <c:v>5042</c:v>
+                </c:pt>
+                <c:pt idx="20">
+                  <c:v>6801</c:v>
+                </c:pt>
+                <c:pt idx="21">
+                  <c:v>6864</c:v>
+                </c:pt>
+                <c:pt idx="22">
+                  <c:v>5952</c:v>
+                </c:pt>
+                <c:pt idx="23">
+                  <c:v>5743</c:v>
+                </c:pt>
+                <c:pt idx="24">
+                  <c:v>11412</c:v>
+                </c:pt>
+                <c:pt idx="25">
+                  <c:v>5938</c:v>
+                </c:pt>
+                <c:pt idx="26">
+                  <c:v>6179</c:v>
+                </c:pt>
+                <c:pt idx="27">
+                  <c:v>7535</c:v>
+                </c:pt>
+                <c:pt idx="28">
+                  <c:v>4814</c:v>
+                </c:pt>
+                <c:pt idx="29">
+                  <c:v>4120</c:v>
+                </c:pt>
+                <c:pt idx="30">
+                  <c:v>4437</c:v>
+                </c:pt>
+                <c:pt idx="31">
+                  <c:v>4986</c:v>
+                </c:pt>
+                <c:pt idx="32">
+                  <c:v>5141</c:v>
+                </c:pt>
+                <c:pt idx="33">
+                  <c:v>5343</c:v>
+                </c:pt>
+                <c:pt idx="34">
+                  <c:v>5062</c:v>
+                </c:pt>
+                <c:pt idx="35">
+                  <c:v>5273</c:v>
+                </c:pt>
+                <c:pt idx="36">
+                  <c:v>5441</c:v>
+                </c:pt>
+                <c:pt idx="37">
+                  <c:v>4138</c:v>
+                </c:pt>
+                <c:pt idx="38">
+                  <c:v>6732</c:v>
+                </c:pt>
+                <c:pt idx="39">
+                  <c:v>7821</c:v>
+                </c:pt>
+                <c:pt idx="40">
+                  <c:v>6303</c:v>
+                </c:pt>
+                <c:pt idx="41">
+                  <c:v>7504</c:v>
+                </c:pt>
+                <c:pt idx="42">
+                  <c:v>6409</c:v>
+                </c:pt>
+                <c:pt idx="43">
+                  <c:v>5988</c:v>
+                </c:pt>
+                <c:pt idx="44">
+                  <c:v>5574</c:v>
+                </c:pt>
+                <c:pt idx="45">
+                  <c:v>6041</c:v>
+                </c:pt>
+                <c:pt idx="46">
+                  <c:v>5295</c:v>
+                </c:pt>
+                <c:pt idx="47">
+                  <c:v>5387</c:v>
+                </c:pt>
+                <c:pt idx="48">
+                  <c:v>5831</c:v>
+                </c:pt>
+                <c:pt idx="49">
+                  <c:v>4844</c:v>
+                </c:pt>
+                <c:pt idx="50">
+                  <c:v>5654</c:v>
+                </c:pt>
+                <c:pt idx="51">
+                  <c:v>5115</c:v>
+                </c:pt>
+                <c:pt idx="52">
+                  <c:v>4868</c:v>
+                </c:pt>
+                <c:pt idx="53">
+                  <c:v>6929</c:v>
+                </c:pt>
+                <c:pt idx="54">
+                  <c:v>6460</c:v>
+                </c:pt>
+                <c:pt idx="55">
+                  <c:v>5523</c:v>
+                </c:pt>
+                <c:pt idx="56">
+                  <c:v>5545</c:v>
+                </c:pt>
+                <c:pt idx="57">
+                  <c:v>4835</c:v>
+                </c:pt>
+                <c:pt idx="58">
+                  <c:v>6508</c:v>
+                </c:pt>
+                <c:pt idx="59">
+                  <c:v>6668</c:v>
+                </c:pt>
+                <c:pt idx="60">
+                  <c:v>6183</c:v>
+                </c:pt>
+                <c:pt idx="61">
+                  <c:v>6594</c:v>
+                </c:pt>
+                <c:pt idx="62">
+                  <c:v>10725</c:v>
+                </c:pt>
+                <c:pt idx="63">
+                  <c:v>5583</c:v>
+                </c:pt>
+                <c:pt idx="64">
+                  <c:v>5670</c:v>
+                </c:pt>
+                <c:pt idx="65">
+                  <c:v>5919</c:v>
+                </c:pt>
+                <c:pt idx="66">
+                  <c:v>7305</c:v>
+                </c:pt>
+                <c:pt idx="67">
+                  <c:v>6385</c:v>
+                </c:pt>
+                <c:pt idx="68">
+                  <c:v>5432</c:v>
+                </c:pt>
+                <c:pt idx="69">
+                  <c:v>5156</c:v>
+                </c:pt>
+                <c:pt idx="70">
+                  <c:v>5927</c:v>
+                </c:pt>
+                <c:pt idx="71">
+                  <c:v>6007</c:v>
+                </c:pt>
+                <c:pt idx="72">
+                  <c:v>6957</c:v>
+                </c:pt>
+                <c:pt idx="73">
+                  <c:v>5917</c:v>
+                </c:pt>
+                <c:pt idx="74">
+                  <c:v>5922</c:v>
+                </c:pt>
+                <c:pt idx="75">
+                  <c:v>5516</c:v>
+                </c:pt>
+                <c:pt idx="76">
+                  <c:v>4974</c:v>
+                </c:pt>
+                <c:pt idx="77">
+                  <c:v>5967</c:v>
+                </c:pt>
+                <c:pt idx="78">
+                  <c:v>9441</c:v>
+                </c:pt>
+                <c:pt idx="79">
+                  <c:v>6516</c:v>
+                </c:pt>
+                <c:pt idx="80">
+                  <c:v>4786</c:v>
+                </c:pt>
+                <c:pt idx="81">
+                  <c:v>4976</c:v>
+                </c:pt>
+                <c:pt idx="82">
+                  <c:v>5073</c:v>
+                </c:pt>
+                <c:pt idx="83">
+                  <c:v>7020</c:v>
+                </c:pt>
+                <c:pt idx="84">
+                  <c:v>7384</c:v>
+                </c:pt>
+                <c:pt idx="85">
+                  <c:v>5723</c:v>
+                </c:pt>
+                <c:pt idx="86">
+                  <c:v>5627</c:v>
+                </c:pt>
+                <c:pt idx="87">
+                  <c:v>5559</c:v>
+                </c:pt>
+                <c:pt idx="88">
+                  <c:v>3798</c:v>
+                </c:pt>
+                <c:pt idx="89">
+                  <c:v>8780</c:v>
+                </c:pt>
+                <c:pt idx="90">
+                  <c:v>7324</c:v>
+                </c:pt>
+                <c:pt idx="91">
+                  <c:v>6670</c:v>
+                </c:pt>
+                <c:pt idx="92">
+                  <c:v>6034</c:v>
+                </c:pt>
+                <c:pt idx="93">
+                  <c:v>13600</c:v>
+                </c:pt>
+                <c:pt idx="94">
+                  <c:v>53420</c:v>
+                </c:pt>
+                <c:pt idx="95">
+                  <c:v>20560</c:v>
+                </c:pt>
+                <c:pt idx="96">
+                  <c:v>10172</c:v>
+                </c:pt>
+                <c:pt idx="97">
+                  <c:v>7314</c:v>
+                </c:pt>
+                <c:pt idx="98">
+                  <c:v>11119</c:v>
+                </c:pt>
+                <c:pt idx="99">
+                  <c:v>18778</c:v>
+                </c:pt>
+                <c:pt idx="100">
+                  <c:v>19030</c:v>
+                </c:pt>
+                <c:pt idx="101">
+                  <c:v>703315</c:v>
+                </c:pt>
+                <c:pt idx="102">
+                  <c:v>24281</c:v>
+                </c:pt>
+                <c:pt idx="103">
+                  <c:v>6829</c:v>
+                </c:pt>
+              </c:numCache>
+            </c:numRef>
+          </c:val>
+          <c:smooth val="0"/>
+          <c:extLst>
+            <c:ext xmlns:c16="http://schemas.microsoft.com/office/drawing/2014/chart" uri="{C3380CC4-5D6E-409C-BE32-E72D297353CC}">
+              <c16:uniqueId val="{00000008-298A-42B4-BA2C-8AEEEEF9E6BE}"/>
             </c:ext>
           </c:extLst>
         </c:ser>
@@ -6090,1616 +7286,6 @@
           <a:lstStyle/>
           <a:p>
             <a:pPr algn="l">
-              <a:defRPr sz="1862" b="0" i="0" u="none" strike="noStrike" kern="1200" spc="0" baseline="0">
-                <a:solidFill>
-                  <a:schemeClr val="tx1"/>
-                </a:solidFill>
-                <a:latin typeface="+mn-lt"/>
-                <a:ea typeface="+mn-ea"/>
-                <a:cs typeface="+mn-cs"/>
-              </a:defRPr>
-            </a:pPr>
-            <a:r>
-              <a:rPr lang="pl-PL" sz="1800" dirty="0">
-                <a:solidFill>
-                  <a:schemeClr val="tx1"/>
-                </a:solidFill>
-              </a:rPr>
-              <a:t>Przebieg wyświetleń</a:t>
-            </a:r>
-            <a:r>
-              <a:rPr lang="pl-PL" sz="1800" baseline="0" dirty="0">
-                <a:solidFill>
-                  <a:schemeClr val="tx1"/>
-                </a:solidFill>
-              </a:rPr>
-              <a:t> stron </a:t>
-            </a:r>
-            <a:r>
-              <a:rPr lang="pl-PL" sz="1800" dirty="0">
-                <a:solidFill>
-                  <a:schemeClr val="tx1"/>
-                </a:solidFill>
-              </a:rPr>
-              <a:t>Republika Zielonego Przylądka oraz Curaçao [tys.]</a:t>
-            </a:r>
-            <a:endParaRPr lang="en-US" sz="1800" dirty="0">
-              <a:solidFill>
-                <a:schemeClr val="tx1"/>
-              </a:solidFill>
-            </a:endParaRPr>
-          </a:p>
-        </c:rich>
-      </c:tx>
-      <c:layout>
-        <c:manualLayout>
-          <c:xMode val="edge"/>
-          <c:yMode val="edge"/>
-          <c:x val="1.8313502485770299E-4"/>
-          <c:y val="0"/>
-        </c:manualLayout>
-      </c:layout>
-      <c:overlay val="0"/>
-      <c:spPr>
-        <a:noFill/>
-        <a:ln>
-          <a:noFill/>
-        </a:ln>
-        <a:effectLst/>
-      </c:spPr>
-      <c:txPr>
-        <a:bodyPr rot="0" spcFirstLastPara="1" vertOverflow="ellipsis" vert="horz" wrap="square" anchor="ctr" anchorCtr="1"/>
-        <a:lstStyle/>
-        <a:p>
-          <a:pPr algn="l">
-            <a:defRPr sz="1862" b="0" i="0" u="none" strike="noStrike" kern="1200" spc="0" baseline="0">
-              <a:solidFill>
-                <a:schemeClr val="tx1"/>
-              </a:solidFill>
-              <a:latin typeface="+mn-lt"/>
-              <a:ea typeface="+mn-ea"/>
-              <a:cs typeface="+mn-cs"/>
-            </a:defRPr>
-          </a:pPr>
-          <a:endParaRPr lang="en-US"/>
-        </a:p>
-      </c:txPr>
-    </c:title>
-    <c:autoTitleDeleted val="0"/>
-    <c:plotArea>
-      <c:layout>
-        <c:manualLayout>
-          <c:layoutTarget val="inner"/>
-          <c:xMode val="edge"/>
-          <c:yMode val="edge"/>
-          <c:x val="5.3603301286851403E-2"/>
-          <c:y val="0.19282223536522569"/>
-          <c:w val="0.94418872912625051"/>
-          <c:h val="0.69326471047150895"/>
-        </c:manualLayout>
-      </c:layout>
-      <c:lineChart>
-        <c:grouping val="standard"/>
-        <c:varyColors val="0"/>
-        <c:ser>
-          <c:idx val="0"/>
-          <c:order val="0"/>
-          <c:tx>
-            <c:strRef>
-              <c:f>Arkusz1!$B$1</c:f>
-              <c:strCache>
-                <c:ptCount val="1"/>
-                <c:pt idx="0">
-                  <c:v>Republika Zielonego Przylądka</c:v>
-                </c:pt>
-              </c:strCache>
-            </c:strRef>
-          </c:tx>
-          <c:spPr>
-            <a:ln w="25400" cap="rnd">
-              <a:solidFill>
-                <a:schemeClr val="accent4"/>
-              </a:solidFill>
-              <a:prstDash val="solid"/>
-              <a:round/>
-            </a:ln>
-            <a:effectLst/>
-          </c:spPr>
-          <c:marker>
-            <c:symbol val="none"/>
-          </c:marker>
-          <c:cat>
-            <c:numRef>
-              <c:f>Arkusz1!$A$2:$A$105</c:f>
-              <c:numCache>
-                <c:formatCode>m/d/yyyy</c:formatCode>
-                <c:ptCount val="104"/>
-                <c:pt idx="0">
-                  <c:v>43101</c:v>
-                </c:pt>
-                <c:pt idx="1">
-                  <c:v>43132</c:v>
-                </c:pt>
-                <c:pt idx="2">
-                  <c:v>43160</c:v>
-                </c:pt>
-                <c:pt idx="3">
-                  <c:v>43191</c:v>
-                </c:pt>
-                <c:pt idx="4">
-                  <c:v>43221</c:v>
-                </c:pt>
-                <c:pt idx="5">
-                  <c:v>43252</c:v>
-                </c:pt>
-                <c:pt idx="6">
-                  <c:v>43282</c:v>
-                </c:pt>
-                <c:pt idx="7">
-                  <c:v>43313</c:v>
-                </c:pt>
-                <c:pt idx="8">
-                  <c:v>43344</c:v>
-                </c:pt>
-                <c:pt idx="9">
-                  <c:v>43374</c:v>
-                </c:pt>
-                <c:pt idx="10">
-                  <c:v>43405</c:v>
-                </c:pt>
-                <c:pt idx="11">
-                  <c:v>43435</c:v>
-                </c:pt>
-                <c:pt idx="12">
-                  <c:v>43466</c:v>
-                </c:pt>
-                <c:pt idx="13">
-                  <c:v>43497</c:v>
-                </c:pt>
-                <c:pt idx="14">
-                  <c:v>43525</c:v>
-                </c:pt>
-                <c:pt idx="15">
-                  <c:v>43556</c:v>
-                </c:pt>
-                <c:pt idx="16">
-                  <c:v>43586</c:v>
-                </c:pt>
-                <c:pt idx="17">
-                  <c:v>43617</c:v>
-                </c:pt>
-                <c:pt idx="18">
-                  <c:v>43647</c:v>
-                </c:pt>
-                <c:pt idx="19">
-                  <c:v>43678</c:v>
-                </c:pt>
-                <c:pt idx="20">
-                  <c:v>43709</c:v>
-                </c:pt>
-                <c:pt idx="21">
-                  <c:v>43739</c:v>
-                </c:pt>
-                <c:pt idx="22">
-                  <c:v>43770</c:v>
-                </c:pt>
-                <c:pt idx="23">
-                  <c:v>43800</c:v>
-                </c:pt>
-                <c:pt idx="24">
-                  <c:v>43831</c:v>
-                </c:pt>
-                <c:pt idx="25">
-                  <c:v>43862</c:v>
-                </c:pt>
-                <c:pt idx="26">
-                  <c:v>43891</c:v>
-                </c:pt>
-                <c:pt idx="27">
-                  <c:v>43922</c:v>
-                </c:pt>
-                <c:pt idx="28">
-                  <c:v>43952</c:v>
-                </c:pt>
-                <c:pt idx="29">
-                  <c:v>43983</c:v>
-                </c:pt>
-                <c:pt idx="30">
-                  <c:v>44013</c:v>
-                </c:pt>
-                <c:pt idx="31">
-                  <c:v>44044</c:v>
-                </c:pt>
-                <c:pt idx="32">
-                  <c:v>44075</c:v>
-                </c:pt>
-                <c:pt idx="33">
-                  <c:v>44105</c:v>
-                </c:pt>
-                <c:pt idx="34">
-                  <c:v>44136</c:v>
-                </c:pt>
-                <c:pt idx="35">
-                  <c:v>44166</c:v>
-                </c:pt>
-                <c:pt idx="36">
-                  <c:v>44197</c:v>
-                </c:pt>
-                <c:pt idx="37">
-                  <c:v>44228</c:v>
-                </c:pt>
-                <c:pt idx="38">
-                  <c:v>44256</c:v>
-                </c:pt>
-                <c:pt idx="39">
-                  <c:v>44287</c:v>
-                </c:pt>
-                <c:pt idx="40">
-                  <c:v>44317</c:v>
-                </c:pt>
-                <c:pt idx="41">
-                  <c:v>44348</c:v>
-                </c:pt>
-                <c:pt idx="42">
-                  <c:v>44378</c:v>
-                </c:pt>
-                <c:pt idx="43">
-                  <c:v>44409</c:v>
-                </c:pt>
-                <c:pt idx="44">
-                  <c:v>44440</c:v>
-                </c:pt>
-                <c:pt idx="45">
-                  <c:v>44470</c:v>
-                </c:pt>
-                <c:pt idx="46">
-                  <c:v>44501</c:v>
-                </c:pt>
-                <c:pt idx="47">
-                  <c:v>44531</c:v>
-                </c:pt>
-                <c:pt idx="48">
-                  <c:v>44562</c:v>
-                </c:pt>
-                <c:pt idx="49">
-                  <c:v>44593</c:v>
-                </c:pt>
-                <c:pt idx="50">
-                  <c:v>44621</c:v>
-                </c:pt>
-                <c:pt idx="51">
-                  <c:v>44652</c:v>
-                </c:pt>
-                <c:pt idx="52">
-                  <c:v>44682</c:v>
-                </c:pt>
-                <c:pt idx="53">
-                  <c:v>44713</c:v>
-                </c:pt>
-                <c:pt idx="54">
-                  <c:v>44743</c:v>
-                </c:pt>
-                <c:pt idx="55">
-                  <c:v>44774</c:v>
-                </c:pt>
-                <c:pt idx="56">
-                  <c:v>44805</c:v>
-                </c:pt>
-                <c:pt idx="57">
-                  <c:v>44835</c:v>
-                </c:pt>
-                <c:pt idx="58">
-                  <c:v>44866</c:v>
-                </c:pt>
-                <c:pt idx="59">
-                  <c:v>44896</c:v>
-                </c:pt>
-                <c:pt idx="60">
-                  <c:v>44927</c:v>
-                </c:pt>
-                <c:pt idx="61">
-                  <c:v>44958</c:v>
-                </c:pt>
-                <c:pt idx="62">
-                  <c:v>44986</c:v>
-                </c:pt>
-                <c:pt idx="63">
-                  <c:v>45017</c:v>
-                </c:pt>
-                <c:pt idx="64">
-                  <c:v>45047</c:v>
-                </c:pt>
-                <c:pt idx="65">
-                  <c:v>45078</c:v>
-                </c:pt>
-                <c:pt idx="66">
-                  <c:v>45108</c:v>
-                </c:pt>
-                <c:pt idx="67">
-                  <c:v>45139</c:v>
-                </c:pt>
-                <c:pt idx="68">
-                  <c:v>45170</c:v>
-                </c:pt>
-                <c:pt idx="69">
-                  <c:v>45200</c:v>
-                </c:pt>
-                <c:pt idx="70">
-                  <c:v>45231</c:v>
-                </c:pt>
-                <c:pt idx="71">
-                  <c:v>45261</c:v>
-                </c:pt>
-                <c:pt idx="72">
-                  <c:v>45292</c:v>
-                </c:pt>
-                <c:pt idx="73">
-                  <c:v>45323</c:v>
-                </c:pt>
-                <c:pt idx="74">
-                  <c:v>45352</c:v>
-                </c:pt>
-                <c:pt idx="75">
-                  <c:v>45383</c:v>
-                </c:pt>
-                <c:pt idx="76">
-                  <c:v>45413</c:v>
-                </c:pt>
-                <c:pt idx="77">
-                  <c:v>45444</c:v>
-                </c:pt>
-                <c:pt idx="78">
-                  <c:v>45474</c:v>
-                </c:pt>
-                <c:pt idx="79">
-                  <c:v>45505</c:v>
-                </c:pt>
-                <c:pt idx="80">
-                  <c:v>45536</c:v>
-                </c:pt>
-                <c:pt idx="81">
-                  <c:v>45566</c:v>
-                </c:pt>
-                <c:pt idx="82">
-                  <c:v>45597</c:v>
-                </c:pt>
-                <c:pt idx="83">
-                  <c:v>45627</c:v>
-                </c:pt>
-                <c:pt idx="84">
-                  <c:v>45658</c:v>
-                </c:pt>
-                <c:pt idx="85">
-                  <c:v>45689</c:v>
-                </c:pt>
-                <c:pt idx="86">
-                  <c:v>45717</c:v>
-                </c:pt>
-                <c:pt idx="87">
-                  <c:v>45748</c:v>
-                </c:pt>
-                <c:pt idx="88">
-                  <c:v>45778</c:v>
-                </c:pt>
-                <c:pt idx="89">
-                  <c:v>45809</c:v>
-                </c:pt>
-                <c:pt idx="90">
-                  <c:v>45839</c:v>
-                </c:pt>
-                <c:pt idx="91">
-                  <c:v>45870</c:v>
-                </c:pt>
-                <c:pt idx="92">
-                  <c:v>45901</c:v>
-                </c:pt>
-                <c:pt idx="93">
-                  <c:v>45931</c:v>
-                </c:pt>
-                <c:pt idx="94">
-                  <c:v>45962</c:v>
-                </c:pt>
-                <c:pt idx="95">
-                  <c:v>45992</c:v>
-                </c:pt>
-                <c:pt idx="96">
-                  <c:v>46023</c:v>
-                </c:pt>
-                <c:pt idx="97">
-                  <c:v>46054</c:v>
-                </c:pt>
-                <c:pt idx="98">
-                  <c:v>46082</c:v>
-                </c:pt>
-                <c:pt idx="99">
-                  <c:v>46113</c:v>
-                </c:pt>
-                <c:pt idx="100">
-                  <c:v>46143</c:v>
-                </c:pt>
-                <c:pt idx="101">
-                  <c:v>46174</c:v>
-                </c:pt>
-                <c:pt idx="102">
-                  <c:v>46204</c:v>
-                </c:pt>
-                <c:pt idx="103">
-                  <c:v>46235</c:v>
-                </c:pt>
-              </c:numCache>
-            </c:numRef>
-          </c:cat>
-          <c:val>
-            <c:numRef>
-              <c:f>Arkusz1!$B$2:$B$105</c:f>
-              <c:numCache>
-                <c:formatCode>General</c:formatCode>
-                <c:ptCount val="104"/>
-                <c:pt idx="0">
-                  <c:v>22551</c:v>
-                </c:pt>
-                <c:pt idx="1">
-                  <c:v>20088</c:v>
-                </c:pt>
-                <c:pt idx="2">
-                  <c:v>18648</c:v>
-                </c:pt>
-                <c:pt idx="3">
-                  <c:v>15304</c:v>
-                </c:pt>
-                <c:pt idx="4">
-                  <c:v>16017</c:v>
-                </c:pt>
-                <c:pt idx="5">
-                  <c:v>20793</c:v>
-                </c:pt>
-                <c:pt idx="6">
-                  <c:v>24073</c:v>
-                </c:pt>
-                <c:pt idx="7">
-                  <c:v>20587</c:v>
-                </c:pt>
-                <c:pt idx="8">
-                  <c:v>21821</c:v>
-                </c:pt>
-                <c:pt idx="9">
-                  <c:v>20866</c:v>
-                </c:pt>
-                <c:pt idx="10">
-                  <c:v>20681</c:v>
-                </c:pt>
-                <c:pt idx="11">
-                  <c:v>20276</c:v>
-                </c:pt>
-                <c:pt idx="12">
-                  <c:v>22216</c:v>
-                </c:pt>
-                <c:pt idx="13">
-                  <c:v>20603</c:v>
-                </c:pt>
-                <c:pt idx="14">
-                  <c:v>19292</c:v>
-                </c:pt>
-                <c:pt idx="15">
-                  <c:v>11804</c:v>
-                </c:pt>
-                <c:pt idx="16">
-                  <c:v>12443</c:v>
-                </c:pt>
-                <c:pt idx="17">
-                  <c:v>15614</c:v>
-                </c:pt>
-                <c:pt idx="18">
-                  <c:v>18295</c:v>
-                </c:pt>
-                <c:pt idx="19">
-                  <c:v>34271</c:v>
-                </c:pt>
-                <c:pt idx="20">
-                  <c:v>32728</c:v>
-                </c:pt>
-                <c:pt idx="21">
-                  <c:v>16496</c:v>
-                </c:pt>
-                <c:pt idx="22">
-                  <c:v>15918</c:v>
-                </c:pt>
-                <c:pt idx="23">
-                  <c:v>14647</c:v>
-                </c:pt>
-                <c:pt idx="24">
-                  <c:v>18428</c:v>
-                </c:pt>
-                <c:pt idx="25">
-                  <c:v>13301</c:v>
-                </c:pt>
-                <c:pt idx="26">
-                  <c:v>10989</c:v>
-                </c:pt>
-                <c:pt idx="27">
-                  <c:v>7888</c:v>
-                </c:pt>
-                <c:pt idx="28">
-                  <c:v>7726</c:v>
-                </c:pt>
-                <c:pt idx="29">
-                  <c:v>5652</c:v>
-                </c:pt>
-                <c:pt idx="30">
-                  <c:v>7029</c:v>
-                </c:pt>
-                <c:pt idx="31">
-                  <c:v>6579</c:v>
-                </c:pt>
-                <c:pt idx="32">
-                  <c:v>6880</c:v>
-                </c:pt>
-                <c:pt idx="33">
-                  <c:v>6468</c:v>
-                </c:pt>
-                <c:pt idx="34">
-                  <c:v>7657</c:v>
-                </c:pt>
-                <c:pt idx="35">
-                  <c:v>8879</c:v>
-                </c:pt>
-                <c:pt idx="36">
-                  <c:v>14813</c:v>
-                </c:pt>
-                <c:pt idx="37">
-                  <c:v>10721</c:v>
-                </c:pt>
-                <c:pt idx="38">
-                  <c:v>15336</c:v>
-                </c:pt>
-                <c:pt idx="39">
-                  <c:v>15873</c:v>
-                </c:pt>
-                <c:pt idx="40">
-                  <c:v>13452</c:v>
-                </c:pt>
-                <c:pt idx="41">
-                  <c:v>18018</c:v>
-                </c:pt>
-                <c:pt idx="42">
-                  <c:v>18029</c:v>
-                </c:pt>
-                <c:pt idx="43">
-                  <c:v>17484</c:v>
-                </c:pt>
-                <c:pt idx="44">
-                  <c:v>18591</c:v>
-                </c:pt>
-                <c:pt idx="45">
-                  <c:v>20359</c:v>
-                </c:pt>
-                <c:pt idx="46">
-                  <c:v>17381</c:v>
-                </c:pt>
-                <c:pt idx="47">
-                  <c:v>14139</c:v>
-                </c:pt>
-                <c:pt idx="48">
-                  <c:v>21102</c:v>
-                </c:pt>
-                <c:pt idx="49">
-                  <c:v>13575</c:v>
-                </c:pt>
-                <c:pt idx="50">
-                  <c:v>16139</c:v>
-                </c:pt>
-                <c:pt idx="51">
-                  <c:v>12940</c:v>
-                </c:pt>
-                <c:pt idx="52">
-                  <c:v>12287</c:v>
-                </c:pt>
-                <c:pt idx="53">
-                  <c:v>11969</c:v>
-                </c:pt>
-                <c:pt idx="54">
-                  <c:v>15070</c:v>
-                </c:pt>
-                <c:pt idx="55">
-                  <c:v>14212</c:v>
-                </c:pt>
-                <c:pt idx="56">
-                  <c:v>12952</c:v>
-                </c:pt>
-                <c:pt idx="57">
-                  <c:v>13750</c:v>
-                </c:pt>
-                <c:pt idx="58">
-                  <c:v>15068</c:v>
-                </c:pt>
-                <c:pt idx="59">
-                  <c:v>16377</c:v>
-                </c:pt>
-                <c:pt idx="60">
-                  <c:v>20988</c:v>
-                </c:pt>
-                <c:pt idx="61">
-                  <c:v>16314</c:v>
-                </c:pt>
-                <c:pt idx="62">
-                  <c:v>16029</c:v>
-                </c:pt>
-                <c:pt idx="63">
-                  <c:v>15490</c:v>
-                </c:pt>
-                <c:pt idx="64">
-                  <c:v>16950</c:v>
-                </c:pt>
-                <c:pt idx="65">
-                  <c:v>16184</c:v>
-                </c:pt>
-                <c:pt idx="66">
-                  <c:v>16749</c:v>
-                </c:pt>
-                <c:pt idx="67">
-                  <c:v>19702</c:v>
-                </c:pt>
-                <c:pt idx="68">
-                  <c:v>18341</c:v>
-                </c:pt>
-                <c:pt idx="69">
-                  <c:v>20925</c:v>
-                </c:pt>
-                <c:pt idx="70">
-                  <c:v>22426</c:v>
-                </c:pt>
-                <c:pt idx="71">
-                  <c:v>24749</c:v>
-                </c:pt>
-                <c:pt idx="72">
-                  <c:v>36474</c:v>
-                </c:pt>
-                <c:pt idx="73">
-                  <c:v>26349</c:v>
-                </c:pt>
-                <c:pt idx="74">
-                  <c:v>23087</c:v>
-                </c:pt>
-                <c:pt idx="75">
-                  <c:v>19485</c:v>
-                </c:pt>
-                <c:pt idx="76">
-                  <c:v>18349</c:v>
-                </c:pt>
-                <c:pt idx="77">
-                  <c:v>15729</c:v>
-                </c:pt>
-                <c:pt idx="78">
-                  <c:v>20903</c:v>
-                </c:pt>
-                <c:pt idx="79">
-                  <c:v>18287</c:v>
-                </c:pt>
-                <c:pt idx="80">
-                  <c:v>19081</c:v>
-                </c:pt>
-                <c:pt idx="81">
-                  <c:v>20806</c:v>
-                </c:pt>
-                <c:pt idx="82">
-                  <c:v>23368</c:v>
-                </c:pt>
-                <c:pt idx="83">
-                  <c:v>24771</c:v>
-                </c:pt>
-                <c:pt idx="84">
-                  <c:v>29250</c:v>
-                </c:pt>
-                <c:pt idx="85">
-                  <c:v>24407</c:v>
-                </c:pt>
-                <c:pt idx="86">
-                  <c:v>26287</c:v>
-                </c:pt>
-                <c:pt idx="87">
-                  <c:v>18755</c:v>
-                </c:pt>
-                <c:pt idx="88">
-                  <c:v>17160</c:v>
-                </c:pt>
-                <c:pt idx="89">
-                  <c:v>18956</c:v>
-                </c:pt>
-                <c:pt idx="90">
-                  <c:v>22533</c:v>
-                </c:pt>
-                <c:pt idx="91">
-                  <c:v>26900</c:v>
-                </c:pt>
-                <c:pt idx="92">
-                  <c:v>31540</c:v>
-                </c:pt>
-                <c:pt idx="93">
-                  <c:v>42687</c:v>
-                </c:pt>
-                <c:pt idx="94">
-                  <c:v>27507</c:v>
-                </c:pt>
-                <c:pt idx="95">
-                  <c:v>25250</c:v>
-                </c:pt>
-                <c:pt idx="96">
-                  <c:v>28459</c:v>
-                </c:pt>
-                <c:pt idx="97">
-                  <c:v>23050</c:v>
-                </c:pt>
-                <c:pt idx="98">
-                  <c:v>23760</c:v>
-                </c:pt>
-                <c:pt idx="99">
-                  <c:v>21524</c:v>
-                </c:pt>
-                <c:pt idx="100">
-                  <c:v>24934</c:v>
-                </c:pt>
-                <c:pt idx="101">
-                  <c:v>338510</c:v>
-                </c:pt>
-                <c:pt idx="102">
-                  <c:v>176331</c:v>
-                </c:pt>
-                <c:pt idx="103">
-                  <c:v>19500</c:v>
-                </c:pt>
-              </c:numCache>
-            </c:numRef>
-          </c:val>
-          <c:smooth val="0"/>
-          <c:extLst>
-            <c:ext xmlns:c16="http://schemas.microsoft.com/office/drawing/2014/chart" uri="{C3380CC4-5D6E-409C-BE32-E72D297353CC}">
-              <c16:uniqueId val="{00000000-298A-42B4-BA2C-8AEEEEF9E6BE}"/>
-            </c:ext>
-          </c:extLst>
-        </c:ser>
-        <c:ser>
-          <c:idx val="1"/>
-          <c:order val="1"/>
-          <c:tx>
-            <c:strRef>
-              <c:f>Arkusz1!$C$1</c:f>
-              <c:strCache>
-                <c:ptCount val="1"/>
-                <c:pt idx="0">
-                  <c:v>Curaçao</c:v>
-                </c:pt>
-              </c:strCache>
-            </c:strRef>
-          </c:tx>
-          <c:spPr>
-            <a:ln w="25400" cap="rnd">
-              <a:solidFill>
-                <a:schemeClr val="accent2"/>
-              </a:solidFill>
-              <a:round/>
-            </a:ln>
-            <a:effectLst/>
-          </c:spPr>
-          <c:marker>
-            <c:symbol val="none"/>
-          </c:marker>
-          <c:cat>
-            <c:numRef>
-              <c:f>Arkusz1!$A$2:$A$105</c:f>
-              <c:numCache>
-                <c:formatCode>m/d/yyyy</c:formatCode>
-                <c:ptCount val="104"/>
-                <c:pt idx="0">
-                  <c:v>43101</c:v>
-                </c:pt>
-                <c:pt idx="1">
-                  <c:v>43132</c:v>
-                </c:pt>
-                <c:pt idx="2">
-                  <c:v>43160</c:v>
-                </c:pt>
-                <c:pt idx="3">
-                  <c:v>43191</c:v>
-                </c:pt>
-                <c:pt idx="4">
-                  <c:v>43221</c:v>
-                </c:pt>
-                <c:pt idx="5">
-                  <c:v>43252</c:v>
-                </c:pt>
-                <c:pt idx="6">
-                  <c:v>43282</c:v>
-                </c:pt>
-                <c:pt idx="7">
-                  <c:v>43313</c:v>
-                </c:pt>
-                <c:pt idx="8">
-                  <c:v>43344</c:v>
-                </c:pt>
-                <c:pt idx="9">
-                  <c:v>43374</c:v>
-                </c:pt>
-                <c:pt idx="10">
-                  <c:v>43405</c:v>
-                </c:pt>
-                <c:pt idx="11">
-                  <c:v>43435</c:v>
-                </c:pt>
-                <c:pt idx="12">
-                  <c:v>43466</c:v>
-                </c:pt>
-                <c:pt idx="13">
-                  <c:v>43497</c:v>
-                </c:pt>
-                <c:pt idx="14">
-                  <c:v>43525</c:v>
-                </c:pt>
-                <c:pt idx="15">
-                  <c:v>43556</c:v>
-                </c:pt>
-                <c:pt idx="16">
-                  <c:v>43586</c:v>
-                </c:pt>
-                <c:pt idx="17">
-                  <c:v>43617</c:v>
-                </c:pt>
-                <c:pt idx="18">
-                  <c:v>43647</c:v>
-                </c:pt>
-                <c:pt idx="19">
-                  <c:v>43678</c:v>
-                </c:pt>
-                <c:pt idx="20">
-                  <c:v>43709</c:v>
-                </c:pt>
-                <c:pt idx="21">
-                  <c:v>43739</c:v>
-                </c:pt>
-                <c:pt idx="22">
-                  <c:v>43770</c:v>
-                </c:pt>
-                <c:pt idx="23">
-                  <c:v>43800</c:v>
-                </c:pt>
-                <c:pt idx="24">
-                  <c:v>43831</c:v>
-                </c:pt>
-                <c:pt idx="25">
-                  <c:v>43862</c:v>
-                </c:pt>
-                <c:pt idx="26">
-                  <c:v>43891</c:v>
-                </c:pt>
-                <c:pt idx="27">
-                  <c:v>43922</c:v>
-                </c:pt>
-                <c:pt idx="28">
-                  <c:v>43952</c:v>
-                </c:pt>
-                <c:pt idx="29">
-                  <c:v>43983</c:v>
-                </c:pt>
-                <c:pt idx="30">
-                  <c:v>44013</c:v>
-                </c:pt>
-                <c:pt idx="31">
-                  <c:v>44044</c:v>
-                </c:pt>
-                <c:pt idx="32">
-                  <c:v>44075</c:v>
-                </c:pt>
-                <c:pt idx="33">
-                  <c:v>44105</c:v>
-                </c:pt>
-                <c:pt idx="34">
-                  <c:v>44136</c:v>
-                </c:pt>
-                <c:pt idx="35">
-                  <c:v>44166</c:v>
-                </c:pt>
-                <c:pt idx="36">
-                  <c:v>44197</c:v>
-                </c:pt>
-                <c:pt idx="37">
-                  <c:v>44228</c:v>
-                </c:pt>
-                <c:pt idx="38">
-                  <c:v>44256</c:v>
-                </c:pt>
-                <c:pt idx="39">
-                  <c:v>44287</c:v>
-                </c:pt>
-                <c:pt idx="40">
-                  <c:v>44317</c:v>
-                </c:pt>
-                <c:pt idx="41">
-                  <c:v>44348</c:v>
-                </c:pt>
-                <c:pt idx="42">
-                  <c:v>44378</c:v>
-                </c:pt>
-                <c:pt idx="43">
-                  <c:v>44409</c:v>
-                </c:pt>
-                <c:pt idx="44">
-                  <c:v>44440</c:v>
-                </c:pt>
-                <c:pt idx="45">
-                  <c:v>44470</c:v>
-                </c:pt>
-                <c:pt idx="46">
-                  <c:v>44501</c:v>
-                </c:pt>
-                <c:pt idx="47">
-                  <c:v>44531</c:v>
-                </c:pt>
-                <c:pt idx="48">
-                  <c:v>44562</c:v>
-                </c:pt>
-                <c:pt idx="49">
-                  <c:v>44593</c:v>
-                </c:pt>
-                <c:pt idx="50">
-                  <c:v>44621</c:v>
-                </c:pt>
-                <c:pt idx="51">
-                  <c:v>44652</c:v>
-                </c:pt>
-                <c:pt idx="52">
-                  <c:v>44682</c:v>
-                </c:pt>
-                <c:pt idx="53">
-                  <c:v>44713</c:v>
-                </c:pt>
-                <c:pt idx="54">
-                  <c:v>44743</c:v>
-                </c:pt>
-                <c:pt idx="55">
-                  <c:v>44774</c:v>
-                </c:pt>
-                <c:pt idx="56">
-                  <c:v>44805</c:v>
-                </c:pt>
-                <c:pt idx="57">
-                  <c:v>44835</c:v>
-                </c:pt>
-                <c:pt idx="58">
-                  <c:v>44866</c:v>
-                </c:pt>
-                <c:pt idx="59">
-                  <c:v>44896</c:v>
-                </c:pt>
-                <c:pt idx="60">
-                  <c:v>44927</c:v>
-                </c:pt>
-                <c:pt idx="61">
-                  <c:v>44958</c:v>
-                </c:pt>
-                <c:pt idx="62">
-                  <c:v>44986</c:v>
-                </c:pt>
-                <c:pt idx="63">
-                  <c:v>45017</c:v>
-                </c:pt>
-                <c:pt idx="64">
-                  <c:v>45047</c:v>
-                </c:pt>
-                <c:pt idx="65">
-                  <c:v>45078</c:v>
-                </c:pt>
-                <c:pt idx="66">
-                  <c:v>45108</c:v>
-                </c:pt>
-                <c:pt idx="67">
-                  <c:v>45139</c:v>
-                </c:pt>
-                <c:pt idx="68">
-                  <c:v>45170</c:v>
-                </c:pt>
-                <c:pt idx="69">
-                  <c:v>45200</c:v>
-                </c:pt>
-                <c:pt idx="70">
-                  <c:v>45231</c:v>
-                </c:pt>
-                <c:pt idx="71">
-                  <c:v>45261</c:v>
-                </c:pt>
-                <c:pt idx="72">
-                  <c:v>45292</c:v>
-                </c:pt>
-                <c:pt idx="73">
-                  <c:v>45323</c:v>
-                </c:pt>
-                <c:pt idx="74">
-                  <c:v>45352</c:v>
-                </c:pt>
-                <c:pt idx="75">
-                  <c:v>45383</c:v>
-                </c:pt>
-                <c:pt idx="76">
-                  <c:v>45413</c:v>
-                </c:pt>
-                <c:pt idx="77">
-                  <c:v>45444</c:v>
-                </c:pt>
-                <c:pt idx="78">
-                  <c:v>45474</c:v>
-                </c:pt>
-                <c:pt idx="79">
-                  <c:v>45505</c:v>
-                </c:pt>
-                <c:pt idx="80">
-                  <c:v>45536</c:v>
-                </c:pt>
-                <c:pt idx="81">
-                  <c:v>45566</c:v>
-                </c:pt>
-                <c:pt idx="82">
-                  <c:v>45597</c:v>
-                </c:pt>
-                <c:pt idx="83">
-                  <c:v>45627</c:v>
-                </c:pt>
-                <c:pt idx="84">
-                  <c:v>45658</c:v>
-                </c:pt>
-                <c:pt idx="85">
-                  <c:v>45689</c:v>
-                </c:pt>
-                <c:pt idx="86">
-                  <c:v>45717</c:v>
-                </c:pt>
-                <c:pt idx="87">
-                  <c:v>45748</c:v>
-                </c:pt>
-                <c:pt idx="88">
-                  <c:v>45778</c:v>
-                </c:pt>
-                <c:pt idx="89">
-                  <c:v>45809</c:v>
-                </c:pt>
-                <c:pt idx="90">
-                  <c:v>45839</c:v>
-                </c:pt>
-                <c:pt idx="91">
-                  <c:v>45870</c:v>
-                </c:pt>
-                <c:pt idx="92">
-                  <c:v>45901</c:v>
-                </c:pt>
-                <c:pt idx="93">
-                  <c:v>45931</c:v>
-                </c:pt>
-                <c:pt idx="94">
-                  <c:v>45962</c:v>
-                </c:pt>
-                <c:pt idx="95">
-                  <c:v>45992</c:v>
-                </c:pt>
-                <c:pt idx="96">
-                  <c:v>46023</c:v>
-                </c:pt>
-                <c:pt idx="97">
-                  <c:v>46054</c:v>
-                </c:pt>
-                <c:pt idx="98">
-                  <c:v>46082</c:v>
-                </c:pt>
-                <c:pt idx="99">
-                  <c:v>46113</c:v>
-                </c:pt>
-                <c:pt idx="100">
-                  <c:v>46143</c:v>
-                </c:pt>
-                <c:pt idx="101">
-                  <c:v>46174</c:v>
-                </c:pt>
-                <c:pt idx="102">
-                  <c:v>46204</c:v>
-                </c:pt>
-                <c:pt idx="103">
-                  <c:v>46235</c:v>
-                </c:pt>
-              </c:numCache>
-            </c:numRef>
-          </c:cat>
-          <c:val>
-            <c:numRef>
-              <c:f>Arkusz1!$C$2:$C$105</c:f>
-              <c:numCache>
-                <c:formatCode>General</c:formatCode>
-                <c:ptCount val="104"/>
-                <c:pt idx="0">
-                  <c:v>4960</c:v>
-                </c:pt>
-                <c:pt idx="1">
-                  <c:v>4015</c:v>
-                </c:pt>
-                <c:pt idx="2">
-                  <c:v>6474</c:v>
-                </c:pt>
-                <c:pt idx="3">
-                  <c:v>4131</c:v>
-                </c:pt>
-                <c:pt idx="4">
-                  <c:v>4209</c:v>
-                </c:pt>
-                <c:pt idx="5">
-                  <c:v>4919</c:v>
-                </c:pt>
-                <c:pt idx="6">
-                  <c:v>5130</c:v>
-                </c:pt>
-                <c:pt idx="7">
-                  <c:v>5424</c:v>
-                </c:pt>
-                <c:pt idx="8">
-                  <c:v>4967</c:v>
-                </c:pt>
-                <c:pt idx="9">
-                  <c:v>4789</c:v>
-                </c:pt>
-                <c:pt idx="10">
-                  <c:v>5160</c:v>
-                </c:pt>
-                <c:pt idx="11">
-                  <c:v>5804</c:v>
-                </c:pt>
-                <c:pt idx="12">
-                  <c:v>6412</c:v>
-                </c:pt>
-                <c:pt idx="13">
-                  <c:v>5483</c:v>
-                </c:pt>
-                <c:pt idx="14">
-                  <c:v>5347</c:v>
-                </c:pt>
-                <c:pt idx="15">
-                  <c:v>3877</c:v>
-                </c:pt>
-                <c:pt idx="16">
-                  <c:v>4447</c:v>
-                </c:pt>
-                <c:pt idx="17">
-                  <c:v>7604</c:v>
-                </c:pt>
-                <c:pt idx="18">
-                  <c:v>5939</c:v>
-                </c:pt>
-                <c:pt idx="19">
-                  <c:v>5042</c:v>
-                </c:pt>
-                <c:pt idx="20">
-                  <c:v>6801</c:v>
-                </c:pt>
-                <c:pt idx="21">
-                  <c:v>6864</c:v>
-                </c:pt>
-                <c:pt idx="22">
-                  <c:v>5952</c:v>
-                </c:pt>
-                <c:pt idx="23">
-                  <c:v>5743</c:v>
-                </c:pt>
-                <c:pt idx="24">
-                  <c:v>11412</c:v>
-                </c:pt>
-                <c:pt idx="25">
-                  <c:v>5938</c:v>
-                </c:pt>
-                <c:pt idx="26">
-                  <c:v>6179</c:v>
-                </c:pt>
-                <c:pt idx="27">
-                  <c:v>7535</c:v>
-                </c:pt>
-                <c:pt idx="28">
-                  <c:v>4814</c:v>
-                </c:pt>
-                <c:pt idx="29">
-                  <c:v>4120</c:v>
-                </c:pt>
-                <c:pt idx="30">
-                  <c:v>4437</c:v>
-                </c:pt>
-                <c:pt idx="31">
-                  <c:v>4986</c:v>
-                </c:pt>
-                <c:pt idx="32">
-                  <c:v>5141</c:v>
-                </c:pt>
-                <c:pt idx="33">
-                  <c:v>5343</c:v>
-                </c:pt>
-                <c:pt idx="34">
-                  <c:v>5062</c:v>
-                </c:pt>
-                <c:pt idx="35">
-                  <c:v>5273</c:v>
-                </c:pt>
-                <c:pt idx="36">
-                  <c:v>5441</c:v>
-                </c:pt>
-                <c:pt idx="37">
-                  <c:v>4138</c:v>
-                </c:pt>
-                <c:pt idx="38">
-                  <c:v>6732</c:v>
-                </c:pt>
-                <c:pt idx="39">
-                  <c:v>7821</c:v>
-                </c:pt>
-                <c:pt idx="40">
-                  <c:v>6303</c:v>
-                </c:pt>
-                <c:pt idx="41">
-                  <c:v>7504</c:v>
-                </c:pt>
-                <c:pt idx="42">
-                  <c:v>6409</c:v>
-                </c:pt>
-                <c:pt idx="43">
-                  <c:v>5988</c:v>
-                </c:pt>
-                <c:pt idx="44">
-                  <c:v>5574</c:v>
-                </c:pt>
-                <c:pt idx="45">
-                  <c:v>6041</c:v>
-                </c:pt>
-                <c:pt idx="46">
-                  <c:v>5295</c:v>
-                </c:pt>
-                <c:pt idx="47">
-                  <c:v>5387</c:v>
-                </c:pt>
-                <c:pt idx="48">
-                  <c:v>5831</c:v>
-                </c:pt>
-                <c:pt idx="49">
-                  <c:v>4844</c:v>
-                </c:pt>
-                <c:pt idx="50">
-                  <c:v>5654</c:v>
-                </c:pt>
-                <c:pt idx="51">
-                  <c:v>5115</c:v>
-                </c:pt>
-                <c:pt idx="52">
-                  <c:v>4868</c:v>
-                </c:pt>
-                <c:pt idx="53">
-                  <c:v>6929</c:v>
-                </c:pt>
-                <c:pt idx="54">
-                  <c:v>6460</c:v>
-                </c:pt>
-                <c:pt idx="55">
-                  <c:v>5523</c:v>
-                </c:pt>
-                <c:pt idx="56">
-                  <c:v>5545</c:v>
-                </c:pt>
-                <c:pt idx="57">
-                  <c:v>4835</c:v>
-                </c:pt>
-                <c:pt idx="58">
-                  <c:v>6508</c:v>
-                </c:pt>
-                <c:pt idx="59">
-                  <c:v>6668</c:v>
-                </c:pt>
-                <c:pt idx="60">
-                  <c:v>6183</c:v>
-                </c:pt>
-                <c:pt idx="61">
-                  <c:v>6594</c:v>
-                </c:pt>
-                <c:pt idx="62">
-                  <c:v>10725</c:v>
-                </c:pt>
-                <c:pt idx="63">
-                  <c:v>5583</c:v>
-                </c:pt>
-                <c:pt idx="64">
-                  <c:v>5670</c:v>
-                </c:pt>
-                <c:pt idx="65">
-                  <c:v>5919</c:v>
-                </c:pt>
-                <c:pt idx="66">
-                  <c:v>7305</c:v>
-                </c:pt>
-                <c:pt idx="67">
-                  <c:v>6385</c:v>
-                </c:pt>
-                <c:pt idx="68">
-                  <c:v>5432</c:v>
-                </c:pt>
-                <c:pt idx="69">
-                  <c:v>5156</c:v>
-                </c:pt>
-                <c:pt idx="70">
-                  <c:v>5927</c:v>
-                </c:pt>
-                <c:pt idx="71">
-                  <c:v>6007</c:v>
-                </c:pt>
-                <c:pt idx="72">
-                  <c:v>6957</c:v>
-                </c:pt>
-                <c:pt idx="73">
-                  <c:v>5917</c:v>
-                </c:pt>
-                <c:pt idx="74">
-                  <c:v>5922</c:v>
-                </c:pt>
-                <c:pt idx="75">
-                  <c:v>5516</c:v>
-                </c:pt>
-                <c:pt idx="76">
-                  <c:v>4974</c:v>
-                </c:pt>
-                <c:pt idx="77">
-                  <c:v>5967</c:v>
-                </c:pt>
-                <c:pt idx="78">
-                  <c:v>9441</c:v>
-                </c:pt>
-                <c:pt idx="79">
-                  <c:v>6516</c:v>
-                </c:pt>
-                <c:pt idx="80">
-                  <c:v>4786</c:v>
-                </c:pt>
-                <c:pt idx="81">
-                  <c:v>4976</c:v>
-                </c:pt>
-                <c:pt idx="82">
-                  <c:v>5073</c:v>
-                </c:pt>
-                <c:pt idx="83">
-                  <c:v>7020</c:v>
-                </c:pt>
-                <c:pt idx="84">
-                  <c:v>7384</c:v>
-                </c:pt>
-                <c:pt idx="85">
-                  <c:v>5723</c:v>
-                </c:pt>
-                <c:pt idx="86">
-                  <c:v>5627</c:v>
-                </c:pt>
-                <c:pt idx="87">
-                  <c:v>5559</c:v>
-                </c:pt>
-                <c:pt idx="88">
-                  <c:v>3798</c:v>
-                </c:pt>
-                <c:pt idx="89">
-                  <c:v>8780</c:v>
-                </c:pt>
-                <c:pt idx="90">
-                  <c:v>7324</c:v>
-                </c:pt>
-                <c:pt idx="91">
-                  <c:v>6670</c:v>
-                </c:pt>
-                <c:pt idx="92">
-                  <c:v>6034</c:v>
-                </c:pt>
-                <c:pt idx="93">
-                  <c:v>13600</c:v>
-                </c:pt>
-                <c:pt idx="94">
-                  <c:v>53420</c:v>
-                </c:pt>
-                <c:pt idx="95">
-                  <c:v>20560</c:v>
-                </c:pt>
-                <c:pt idx="96">
-                  <c:v>10172</c:v>
-                </c:pt>
-                <c:pt idx="97">
-                  <c:v>7314</c:v>
-                </c:pt>
-                <c:pt idx="98">
-                  <c:v>11119</c:v>
-                </c:pt>
-                <c:pt idx="99">
-                  <c:v>18778</c:v>
-                </c:pt>
-                <c:pt idx="100">
-                  <c:v>19030</c:v>
-                </c:pt>
-                <c:pt idx="101">
-                  <c:v>703315</c:v>
-                </c:pt>
-                <c:pt idx="102">
-                  <c:v>24281</c:v>
-                </c:pt>
-                <c:pt idx="103">
-                  <c:v>6829</c:v>
-                </c:pt>
-              </c:numCache>
-            </c:numRef>
-          </c:val>
-          <c:smooth val="0"/>
-          <c:extLst>
-            <c:ext xmlns:c16="http://schemas.microsoft.com/office/drawing/2014/chart" uri="{C3380CC4-5D6E-409C-BE32-E72D297353CC}">
-              <c16:uniqueId val="{00000008-298A-42B4-BA2C-8AEEEEF9E6BE}"/>
-            </c:ext>
-          </c:extLst>
-        </c:ser>
-        <c:dLbls>
-          <c:showLegendKey val="0"/>
-          <c:showVal val="0"/>
-          <c:showCatName val="0"/>
-          <c:showSerName val="0"/>
-          <c:showPercent val="0"/>
-          <c:showBubbleSize val="0"/>
-        </c:dLbls>
-        <c:smooth val="0"/>
-        <c:axId val="1462609072"/>
-        <c:axId val="1473956560"/>
-      </c:lineChart>
-      <c:dateAx>
-        <c:axId val="1462609072"/>
-        <c:scaling>
-          <c:orientation val="minMax"/>
-        </c:scaling>
-        <c:delete val="0"/>
-        <c:axPos val="b"/>
-        <c:numFmt formatCode="yyyy" sourceLinked="0"/>
-        <c:majorTickMark val="in"/>
-        <c:minorTickMark val="none"/>
-        <c:tickLblPos val="nextTo"/>
-        <c:spPr>
-          <a:noFill/>
-          <a:ln w="9525" cap="flat" cmpd="sng" algn="ctr">
-            <a:solidFill>
-              <a:schemeClr val="tx1">
-                <a:lumMod val="15000"/>
-                <a:lumOff val="85000"/>
-              </a:schemeClr>
-            </a:solidFill>
-            <a:round/>
-          </a:ln>
-          <a:effectLst/>
-        </c:spPr>
-        <c:txPr>
-          <a:bodyPr rot="-60000000" spcFirstLastPara="1" vertOverflow="ellipsis" vert="horz" wrap="square" anchor="ctr" anchorCtr="1"/>
-          <a:lstStyle/>
-          <a:p>
-            <a:pPr>
-              <a:defRPr sz="1197" b="0" i="0" u="none" strike="noStrike" kern="1200" baseline="0">
-                <a:solidFill>
-                  <a:schemeClr val="tx2"/>
-                </a:solidFill>
-                <a:latin typeface="+mn-lt"/>
-                <a:ea typeface="+mn-ea"/>
-                <a:cs typeface="+mn-cs"/>
-              </a:defRPr>
-            </a:pPr>
-            <a:endParaRPr lang="pl-PL"/>
-          </a:p>
-        </c:txPr>
-        <c:crossAx val="1473956560"/>
-        <c:crosses val="autoZero"/>
-        <c:auto val="1"/>
-        <c:lblOffset val="100"/>
-        <c:baseTimeUnit val="months"/>
-        <c:majorUnit val="12"/>
-        <c:majorTimeUnit val="months"/>
-      </c:dateAx>
-      <c:valAx>
-        <c:axId val="1473956560"/>
-        <c:scaling>
-          <c:orientation val="minMax"/>
-        </c:scaling>
-        <c:delete val="0"/>
-        <c:axPos val="l"/>
-        <c:numFmt formatCode="General" sourceLinked="1"/>
-        <c:majorTickMark val="none"/>
-        <c:minorTickMark val="none"/>
-        <c:tickLblPos val="nextTo"/>
-        <c:spPr>
-          <a:noFill/>
-          <a:ln>
-            <a:noFill/>
-          </a:ln>
-          <a:effectLst/>
-        </c:spPr>
-        <c:txPr>
-          <a:bodyPr rot="-60000000" spcFirstLastPara="1" vertOverflow="ellipsis" vert="horz" wrap="square" anchor="ctr" anchorCtr="1"/>
-          <a:lstStyle/>
-          <a:p>
-            <a:pPr>
-              <a:defRPr sz="1197" b="0" i="0" u="none" strike="noStrike" kern="1200" baseline="0">
-                <a:solidFill>
-                  <a:schemeClr val="tx2"/>
-                </a:solidFill>
-                <a:latin typeface="+mn-lt"/>
-                <a:ea typeface="+mn-ea"/>
-                <a:cs typeface="+mn-cs"/>
-              </a:defRPr>
-            </a:pPr>
-            <a:endParaRPr lang="pl-PL"/>
-          </a:p>
-        </c:txPr>
-        <c:crossAx val="1462609072"/>
-        <c:crosses val="autoZero"/>
-        <c:crossBetween val="between"/>
-        <c:dispUnits>
-          <c:builtInUnit val="thousands"/>
-        </c:dispUnits>
-      </c:valAx>
-      <c:spPr>
-        <a:noFill/>
-        <a:ln>
-          <a:noFill/>
-        </a:ln>
-        <a:effectLst/>
-      </c:spPr>
-    </c:plotArea>
-    <c:plotVisOnly val="1"/>
-    <c:dispBlanksAs val="gap"/>
-    <c:showDLblsOverMax val="0"/>
-    <c:extLst>
-      <c:ext xmlns:c16r3="http://schemas.microsoft.com/office/drawing/2017/03/chart" uri="{56B9EC1D-385E-4148-901F-78D8002777C0}">
-        <c16r3:dataDisplayOptions16>
-          <c16r3:dispNaAsBlank val="1"/>
-        </c16r3:dataDisplayOptions16>
-      </c:ext>
-    </c:extLst>
-  </c:chart>
-  <c:spPr>
-    <a:solidFill>
-      <a:schemeClr val="bg2"/>
-    </a:solidFill>
-    <a:ln>
-      <a:noFill/>
-    </a:ln>
-    <a:effectLst/>
-  </c:spPr>
-  <c:txPr>
-    <a:bodyPr/>
-    <a:lstStyle/>
-    <a:p>
-      <a:pPr>
-        <a:defRPr/>
-      </a:pPr>
-      <a:endParaRPr lang="pl-PL"/>
-    </a:p>
-  </c:txPr>
-  <c:externalData r:id="rId3">
-    <c:autoUpdate val="0"/>
-  </c:externalData>
-</c:chartSpace>
-</file>
-
-<file path=ppt/charts/chart8.xml><?xml version="1.0" encoding="utf-8"?>
-<c:chartSpace xmlns:c="http://schemas.openxmlformats.org/drawingml/2006/chart" xmlns:a="http://schemas.openxmlformats.org/drawingml/2006/main" xmlns:r="http://schemas.openxmlformats.org/officeDocument/2006/relationships" xmlns:c16r2="http://schemas.microsoft.com/office/drawing/2015/06/chart">
-  <c:date1904 val="0"/>
-  <c:lang val="pl-PL"/>
-  <c:roundedCorners val="0"/>
-  <mc:AlternateContent xmlns:mc="http://schemas.openxmlformats.org/markup-compatibility/2006">
-    <mc:Choice xmlns:c14="http://schemas.microsoft.com/office/drawing/2007/8/2/chart" Requires="c14">
-      <c14:style val="102"/>
-    </mc:Choice>
-    <mc:Fallback>
-      <c:style val="2"/>
-    </mc:Fallback>
-  </mc:AlternateContent>
-  <c:chart>
-    <c:title>
-      <c:tx>
-        <c:rich>
-          <a:bodyPr rot="0" spcFirstLastPara="1" vertOverflow="ellipsis" vert="horz" wrap="square" anchor="ctr" anchorCtr="1"/>
-          <a:lstStyle/>
-          <a:p>
-            <a:pPr algn="l">
               <a:defRPr sz="1800" b="0" i="0" u="none" strike="noStrike" kern="1200" spc="0" baseline="0">
                 <a:solidFill>
                   <a:schemeClr val="tx1"/>
@@ -8620,6 +8206,12 @@
 </file>
 
 <file path=ppt/charts/colors1.xml><?xml version="1.0" encoding="utf-8"?>
+<cs:colorStyle xmlns:cs="http://schemas.microsoft.com/office/drawing/2012/chartStyle" xmlns:a="http://schemas.openxmlformats.org/drawingml/2006/main" meth="withinLinear" id="15">
+  <a:schemeClr val="accent2"/>
+</cs:colorStyle>
+</file>
+
+<file path=ppt/charts/colors2.xml><?xml version="1.0" encoding="utf-8"?>
 <cs:colorStyle xmlns:cs="http://schemas.microsoft.com/office/drawing/2012/chartStyle" xmlns:a="http://schemas.openxmlformats.org/drawingml/2006/main" meth="cycle" id="10">
   <a:schemeClr val="accent1"/>
   <a:schemeClr val="accent2"/>
@@ -8656,12 +8248,6 @@
     <a:lumMod val="50000"/>
     <a:lumOff val="50000"/>
   </cs:variation>
-</cs:colorStyle>
-</file>
-
-<file path=ppt/charts/colors2.xml><?xml version="1.0" encoding="utf-8"?>
-<cs:colorStyle xmlns:cs="http://schemas.microsoft.com/office/drawing/2012/chartStyle" xmlns:a="http://schemas.openxmlformats.org/drawingml/2006/main" meth="withinLinear" id="15">
-  <a:schemeClr val="accent2"/>
 </cs:colorStyle>
 </file>
 
@@ -8865,46 +8451,6 @@
 </cs:colorStyle>
 </file>
 
-<file path=ppt/charts/colors8.xml><?xml version="1.0" encoding="utf-8"?>
-<cs:colorStyle xmlns:cs="http://schemas.microsoft.com/office/drawing/2012/chartStyle" xmlns:a="http://schemas.openxmlformats.org/drawingml/2006/main" meth="cycle" id="10">
-  <a:schemeClr val="accent1"/>
-  <a:schemeClr val="accent2"/>
-  <a:schemeClr val="accent3"/>
-  <a:schemeClr val="accent4"/>
-  <a:schemeClr val="accent5"/>
-  <a:schemeClr val="accent6"/>
-  <cs:variation/>
-  <cs:variation>
-    <a:lumMod val="60000"/>
-  </cs:variation>
-  <cs:variation>
-    <a:lumMod val="80000"/>
-    <a:lumOff val="20000"/>
-  </cs:variation>
-  <cs:variation>
-    <a:lumMod val="80000"/>
-  </cs:variation>
-  <cs:variation>
-    <a:lumMod val="60000"/>
-    <a:lumOff val="40000"/>
-  </cs:variation>
-  <cs:variation>
-    <a:lumMod val="50000"/>
-  </cs:variation>
-  <cs:variation>
-    <a:lumMod val="70000"/>
-    <a:lumOff val="30000"/>
-  </cs:variation>
-  <cs:variation>
-    <a:lumMod val="70000"/>
-  </cs:variation>
-  <cs:variation>
-    <a:lumMod val="50000"/>
-    <a:lumOff val="50000"/>
-  </cs:variation>
-</cs:colorStyle>
-</file>
-
 <file path=ppt/charts/style1.xml><?xml version="1.0" encoding="utf-8"?>
 <cs:chartStyle xmlns:cs="http://schemas.microsoft.com/office/drawing/2012/chartStyle" xmlns:a="http://schemas.openxmlformats.org/drawingml/2006/main" id="216">
   <cs:axisTitle>
@@ -9411,7 +8957,510 @@
 </file>
 
 <file path=ppt/charts/style2.xml><?xml version="1.0" encoding="utf-8"?>
-<cs:chartStyle xmlns:cs="http://schemas.microsoft.com/office/drawing/2012/chartStyle" xmlns:a="http://schemas.openxmlformats.org/drawingml/2006/main" id="216">
+<cs:chartStyle xmlns:cs="http://schemas.microsoft.com/office/drawing/2012/chartStyle" xmlns:a="http://schemas.openxmlformats.org/drawingml/2006/main" id="201">
+  <cs:axisTitle>
+    <cs:lnRef idx="0"/>
+    <cs:fillRef idx="0"/>
+    <cs:effectRef idx="0"/>
+    <cs:fontRef idx="minor">
+      <a:schemeClr val="tx1">
+        <a:lumMod val="65000"/>
+        <a:lumOff val="35000"/>
+      </a:schemeClr>
+    </cs:fontRef>
+    <cs:defRPr sz="1000" kern="1200"/>
+  </cs:axisTitle>
+  <cs:categoryAxis>
+    <cs:lnRef idx="0"/>
+    <cs:fillRef idx="0"/>
+    <cs:effectRef idx="0"/>
+    <cs:fontRef idx="minor">
+      <a:schemeClr val="tx1">
+        <a:lumMod val="65000"/>
+        <a:lumOff val="35000"/>
+      </a:schemeClr>
+    </cs:fontRef>
+    <cs:spPr>
+      <a:ln w="9525" cap="flat" cmpd="sng" algn="ctr">
+        <a:solidFill>
+          <a:schemeClr val="tx1">
+            <a:lumMod val="15000"/>
+            <a:lumOff val="85000"/>
+          </a:schemeClr>
+        </a:solidFill>
+        <a:round/>
+      </a:ln>
+    </cs:spPr>
+    <cs:defRPr sz="900" kern="1200"/>
+  </cs:categoryAxis>
+  <cs:chartArea mods="allowNoFillOverride allowNoLineOverride">
+    <cs:lnRef idx="0"/>
+    <cs:fillRef idx="0"/>
+    <cs:effectRef idx="0"/>
+    <cs:fontRef idx="minor">
+      <a:schemeClr val="tx1"/>
+    </cs:fontRef>
+    <cs:spPr>
+      <a:solidFill>
+        <a:schemeClr val="bg1"/>
+      </a:solidFill>
+      <a:ln w="9525" cap="flat" cmpd="sng" algn="ctr">
+        <a:solidFill>
+          <a:schemeClr val="tx1">
+            <a:lumMod val="15000"/>
+            <a:lumOff val="85000"/>
+          </a:schemeClr>
+        </a:solidFill>
+        <a:round/>
+      </a:ln>
+    </cs:spPr>
+    <cs:defRPr sz="1000" kern="1200"/>
+  </cs:chartArea>
+  <cs:dataLabel>
+    <cs:lnRef idx="0"/>
+    <cs:fillRef idx="0"/>
+    <cs:effectRef idx="0"/>
+    <cs:fontRef idx="minor">
+      <a:schemeClr val="tx1">
+        <a:lumMod val="75000"/>
+        <a:lumOff val="25000"/>
+      </a:schemeClr>
+    </cs:fontRef>
+    <cs:defRPr sz="900" kern="1200"/>
+  </cs:dataLabel>
+  <cs:dataLabelCallout>
+    <cs:lnRef idx="0"/>
+    <cs:fillRef idx="0"/>
+    <cs:effectRef idx="0"/>
+    <cs:fontRef idx="minor">
+      <a:schemeClr val="dk1">
+        <a:lumMod val="65000"/>
+        <a:lumOff val="35000"/>
+      </a:schemeClr>
+    </cs:fontRef>
+    <cs:spPr>
+      <a:solidFill>
+        <a:schemeClr val="lt1"/>
+      </a:solidFill>
+      <a:ln>
+        <a:solidFill>
+          <a:schemeClr val="dk1">
+            <a:lumMod val="25000"/>
+            <a:lumOff val="75000"/>
+          </a:schemeClr>
+        </a:solidFill>
+      </a:ln>
+    </cs:spPr>
+    <cs:defRPr sz="900" kern="1200"/>
+    <cs:bodyPr rot="0" spcFirstLastPara="1" vertOverflow="clip" horzOverflow="clip" vert="horz" wrap="square" lIns="36576" tIns="18288" rIns="36576" bIns="18288" anchor="ctr" anchorCtr="1">
+      <a:spAutoFit/>
+    </cs:bodyPr>
+  </cs:dataLabelCallout>
+  <cs:dataPoint>
+    <cs:lnRef idx="0"/>
+    <cs:fillRef idx="1">
+      <cs:styleClr val="auto"/>
+    </cs:fillRef>
+    <cs:effectRef idx="0"/>
+    <cs:fontRef idx="minor">
+      <a:schemeClr val="tx1"/>
+    </cs:fontRef>
+  </cs:dataPoint>
+  <cs:dataPoint3D>
+    <cs:lnRef idx="0"/>
+    <cs:fillRef idx="1">
+      <cs:styleClr val="auto"/>
+    </cs:fillRef>
+    <cs:effectRef idx="0"/>
+    <cs:fontRef idx="minor">
+      <a:schemeClr val="tx1"/>
+    </cs:fontRef>
+  </cs:dataPoint3D>
+  <cs:dataPointLine>
+    <cs:lnRef idx="0">
+      <cs:styleClr val="auto"/>
+    </cs:lnRef>
+    <cs:fillRef idx="1"/>
+    <cs:effectRef idx="0"/>
+    <cs:fontRef idx="minor">
+      <a:schemeClr val="tx1"/>
+    </cs:fontRef>
+    <cs:spPr>
+      <a:ln w="28575" cap="rnd">
+        <a:solidFill>
+          <a:schemeClr val="phClr"/>
+        </a:solidFill>
+        <a:round/>
+      </a:ln>
+    </cs:spPr>
+  </cs:dataPointLine>
+  <cs:dataPointMarker>
+    <cs:lnRef idx="0">
+      <cs:styleClr val="auto"/>
+    </cs:lnRef>
+    <cs:fillRef idx="1">
+      <cs:styleClr val="auto"/>
+    </cs:fillRef>
+    <cs:effectRef idx="0"/>
+    <cs:fontRef idx="minor">
+      <a:schemeClr val="tx1"/>
+    </cs:fontRef>
+    <cs:spPr>
+      <a:ln w="9525">
+        <a:solidFill>
+          <a:schemeClr val="phClr"/>
+        </a:solidFill>
+      </a:ln>
+    </cs:spPr>
+  </cs:dataPointMarker>
+  <cs:dataPointMarkerLayout symbol="circle" size="5"/>
+  <cs:dataPointWireframe>
+    <cs:lnRef idx="0">
+      <cs:styleClr val="auto"/>
+    </cs:lnRef>
+    <cs:fillRef idx="1"/>
+    <cs:effectRef idx="0"/>
+    <cs:fontRef idx="minor">
+      <a:schemeClr val="tx1"/>
+    </cs:fontRef>
+    <cs:spPr>
+      <a:ln w="9525" cap="rnd">
+        <a:solidFill>
+          <a:schemeClr val="phClr"/>
+        </a:solidFill>
+        <a:round/>
+      </a:ln>
+    </cs:spPr>
+  </cs:dataPointWireframe>
+  <cs:dataTable>
+    <cs:lnRef idx="0"/>
+    <cs:fillRef idx="0"/>
+    <cs:effectRef idx="0"/>
+    <cs:fontRef idx="minor">
+      <a:schemeClr val="tx1">
+        <a:lumMod val="65000"/>
+        <a:lumOff val="35000"/>
+      </a:schemeClr>
+    </cs:fontRef>
+    <cs:spPr>
+      <a:noFill/>
+      <a:ln w="9525" cap="flat" cmpd="sng" algn="ctr">
+        <a:solidFill>
+          <a:schemeClr val="tx1">
+            <a:lumMod val="15000"/>
+            <a:lumOff val="85000"/>
+          </a:schemeClr>
+        </a:solidFill>
+        <a:round/>
+      </a:ln>
+    </cs:spPr>
+    <cs:defRPr sz="900" kern="1200"/>
+  </cs:dataTable>
+  <cs:downBar>
+    <cs:lnRef idx="0"/>
+    <cs:fillRef idx="0"/>
+    <cs:effectRef idx="0"/>
+    <cs:fontRef idx="minor">
+      <a:schemeClr val="dk1"/>
+    </cs:fontRef>
+    <cs:spPr>
+      <a:solidFill>
+        <a:schemeClr val="dk1">
+          <a:lumMod val="65000"/>
+          <a:lumOff val="35000"/>
+        </a:schemeClr>
+      </a:solidFill>
+      <a:ln w="9525">
+        <a:solidFill>
+          <a:schemeClr val="tx1">
+            <a:lumMod val="65000"/>
+            <a:lumOff val="35000"/>
+          </a:schemeClr>
+        </a:solidFill>
+      </a:ln>
+    </cs:spPr>
+  </cs:downBar>
+  <cs:dropLine>
+    <cs:lnRef idx="0"/>
+    <cs:fillRef idx="0"/>
+    <cs:effectRef idx="0"/>
+    <cs:fontRef idx="minor">
+      <a:schemeClr val="tx1"/>
+    </cs:fontRef>
+    <cs:spPr>
+      <a:ln w="9525" cap="flat" cmpd="sng" algn="ctr">
+        <a:solidFill>
+          <a:schemeClr val="tx1">
+            <a:lumMod val="35000"/>
+            <a:lumOff val="65000"/>
+          </a:schemeClr>
+        </a:solidFill>
+        <a:round/>
+      </a:ln>
+    </cs:spPr>
+  </cs:dropLine>
+  <cs:errorBar>
+    <cs:lnRef idx="0"/>
+    <cs:fillRef idx="0"/>
+    <cs:effectRef idx="0"/>
+    <cs:fontRef idx="minor">
+      <a:schemeClr val="tx1"/>
+    </cs:fontRef>
+    <cs:spPr>
+      <a:ln w="9525" cap="flat" cmpd="sng" algn="ctr">
+        <a:solidFill>
+          <a:schemeClr val="tx1">
+            <a:lumMod val="65000"/>
+            <a:lumOff val="35000"/>
+          </a:schemeClr>
+        </a:solidFill>
+        <a:round/>
+      </a:ln>
+    </cs:spPr>
+  </cs:errorBar>
+  <cs:floor>
+    <cs:lnRef idx="0"/>
+    <cs:fillRef idx="0"/>
+    <cs:effectRef idx="0"/>
+    <cs:fontRef idx="minor">
+      <a:schemeClr val="tx1"/>
+    </cs:fontRef>
+    <cs:spPr>
+      <a:noFill/>
+      <a:ln>
+        <a:noFill/>
+      </a:ln>
+    </cs:spPr>
+  </cs:floor>
+  <cs:gridlineMajor>
+    <cs:lnRef idx="0"/>
+    <cs:fillRef idx="0"/>
+    <cs:effectRef idx="0"/>
+    <cs:fontRef idx="minor">
+      <a:schemeClr val="tx1"/>
+    </cs:fontRef>
+    <cs:spPr>
+      <a:ln w="9525" cap="flat" cmpd="sng" algn="ctr">
+        <a:solidFill>
+          <a:schemeClr val="tx1">
+            <a:lumMod val="15000"/>
+            <a:lumOff val="85000"/>
+          </a:schemeClr>
+        </a:solidFill>
+        <a:round/>
+      </a:ln>
+    </cs:spPr>
+  </cs:gridlineMajor>
+  <cs:gridlineMinor>
+    <cs:lnRef idx="0"/>
+    <cs:fillRef idx="0"/>
+    <cs:effectRef idx="0"/>
+    <cs:fontRef idx="minor">
+      <a:schemeClr val="tx1"/>
+    </cs:fontRef>
+    <cs:spPr>
+      <a:ln w="9525" cap="flat" cmpd="sng" algn="ctr">
+        <a:solidFill>
+          <a:schemeClr val="tx1">
+            <a:lumMod val="5000"/>
+            <a:lumOff val="95000"/>
+          </a:schemeClr>
+        </a:solidFill>
+        <a:round/>
+      </a:ln>
+    </cs:spPr>
+  </cs:gridlineMinor>
+  <cs:hiLoLine>
+    <cs:lnRef idx="0"/>
+    <cs:fillRef idx="0"/>
+    <cs:effectRef idx="0"/>
+    <cs:fontRef idx="minor">
+      <a:schemeClr val="tx1"/>
+    </cs:fontRef>
+    <cs:spPr>
+      <a:ln w="9525" cap="flat" cmpd="sng" algn="ctr">
+        <a:solidFill>
+          <a:schemeClr val="tx1">
+            <a:lumMod val="75000"/>
+            <a:lumOff val="25000"/>
+          </a:schemeClr>
+        </a:solidFill>
+        <a:round/>
+      </a:ln>
+    </cs:spPr>
+  </cs:hiLoLine>
+  <cs:leaderLine>
+    <cs:lnRef idx="0"/>
+    <cs:fillRef idx="0"/>
+    <cs:effectRef idx="0"/>
+    <cs:fontRef idx="minor">
+      <a:schemeClr val="tx1"/>
+    </cs:fontRef>
+    <cs:spPr>
+      <a:ln w="9525" cap="flat" cmpd="sng" algn="ctr">
+        <a:solidFill>
+          <a:schemeClr val="tx1">
+            <a:lumMod val="35000"/>
+            <a:lumOff val="65000"/>
+          </a:schemeClr>
+        </a:solidFill>
+        <a:round/>
+      </a:ln>
+    </cs:spPr>
+  </cs:leaderLine>
+  <cs:legend>
+    <cs:lnRef idx="0"/>
+    <cs:fillRef idx="0"/>
+    <cs:effectRef idx="0"/>
+    <cs:fontRef idx="minor">
+      <a:schemeClr val="tx1">
+        <a:lumMod val="65000"/>
+        <a:lumOff val="35000"/>
+      </a:schemeClr>
+    </cs:fontRef>
+    <cs:defRPr sz="900" kern="1200"/>
+  </cs:legend>
+  <cs:plotArea mods="allowNoFillOverride allowNoLineOverride">
+    <cs:lnRef idx="0"/>
+    <cs:fillRef idx="0"/>
+    <cs:effectRef idx="0"/>
+    <cs:fontRef idx="minor">
+      <a:schemeClr val="tx1"/>
+    </cs:fontRef>
+  </cs:plotArea>
+  <cs:plotArea3D mods="allowNoFillOverride allowNoLineOverride">
+    <cs:lnRef idx="0"/>
+    <cs:fillRef idx="0"/>
+    <cs:effectRef idx="0"/>
+    <cs:fontRef idx="minor">
+      <a:schemeClr val="tx1"/>
+    </cs:fontRef>
+  </cs:plotArea3D>
+  <cs:seriesAxis>
+    <cs:lnRef idx="0"/>
+    <cs:fillRef idx="0"/>
+    <cs:effectRef idx="0"/>
+    <cs:fontRef idx="minor">
+      <a:schemeClr val="tx1">
+        <a:lumMod val="65000"/>
+        <a:lumOff val="35000"/>
+      </a:schemeClr>
+    </cs:fontRef>
+    <cs:defRPr sz="900" kern="1200"/>
+  </cs:seriesAxis>
+  <cs:seriesLine>
+    <cs:lnRef idx="0"/>
+    <cs:fillRef idx="0"/>
+    <cs:effectRef idx="0"/>
+    <cs:fontRef idx="minor">
+      <a:schemeClr val="tx1"/>
+    </cs:fontRef>
+    <cs:spPr>
+      <a:ln w="9525" cap="flat" cmpd="sng" algn="ctr">
+        <a:solidFill>
+          <a:schemeClr val="tx1">
+            <a:lumMod val="35000"/>
+            <a:lumOff val="65000"/>
+          </a:schemeClr>
+        </a:solidFill>
+        <a:round/>
+      </a:ln>
+    </cs:spPr>
+  </cs:seriesLine>
+  <cs:title>
+    <cs:lnRef idx="0"/>
+    <cs:fillRef idx="0"/>
+    <cs:effectRef idx="0"/>
+    <cs:fontRef idx="minor">
+      <a:schemeClr val="tx1">
+        <a:lumMod val="65000"/>
+        <a:lumOff val="35000"/>
+      </a:schemeClr>
+    </cs:fontRef>
+    <cs:defRPr sz="1400" b="0" kern="1200" spc="0" baseline="0"/>
+  </cs:title>
+  <cs:trendline>
+    <cs:lnRef idx="0">
+      <cs:styleClr val="auto"/>
+    </cs:lnRef>
+    <cs:fillRef idx="0"/>
+    <cs:effectRef idx="0"/>
+    <cs:fontRef idx="minor">
+      <a:schemeClr val="tx1"/>
+    </cs:fontRef>
+    <cs:spPr>
+      <a:ln w="19050" cap="rnd">
+        <a:solidFill>
+          <a:schemeClr val="phClr"/>
+        </a:solidFill>
+        <a:prstDash val="sysDot"/>
+      </a:ln>
+    </cs:spPr>
+  </cs:trendline>
+  <cs:trendlineLabel>
+    <cs:lnRef idx="0"/>
+    <cs:fillRef idx="0"/>
+    <cs:effectRef idx="0"/>
+    <cs:fontRef idx="minor">
+      <a:schemeClr val="tx1">
+        <a:lumMod val="65000"/>
+        <a:lumOff val="35000"/>
+      </a:schemeClr>
+    </cs:fontRef>
+    <cs:defRPr sz="900" kern="1200"/>
+  </cs:trendlineLabel>
+  <cs:upBar>
+    <cs:lnRef idx="0"/>
+    <cs:fillRef idx="0"/>
+    <cs:effectRef idx="0"/>
+    <cs:fontRef idx="minor">
+      <a:schemeClr val="dk1"/>
+    </cs:fontRef>
+    <cs:spPr>
+      <a:solidFill>
+        <a:schemeClr val="lt1"/>
+      </a:solidFill>
+      <a:ln w="9525">
+        <a:solidFill>
+          <a:schemeClr val="tx1">
+            <a:lumMod val="15000"/>
+            <a:lumOff val="85000"/>
+          </a:schemeClr>
+        </a:solidFill>
+      </a:ln>
+    </cs:spPr>
+  </cs:upBar>
+  <cs:valueAxis>
+    <cs:lnRef idx="0"/>
+    <cs:fillRef idx="0"/>
+    <cs:effectRef idx="0"/>
+    <cs:fontRef idx="minor">
+      <a:schemeClr val="tx1">
+        <a:lumMod val="65000"/>
+        <a:lumOff val="35000"/>
+      </a:schemeClr>
+    </cs:fontRef>
+    <cs:defRPr sz="900" kern="1200"/>
+  </cs:valueAxis>
+  <cs:wall>
+    <cs:lnRef idx="0"/>
+    <cs:fillRef idx="0"/>
+    <cs:effectRef idx="0"/>
+    <cs:fontRef idx="minor">
+      <a:schemeClr val="tx1"/>
+    </cs:fontRef>
+    <cs:spPr>
+      <a:noFill/>
+      <a:ln>
+        <a:noFill/>
+      </a:ln>
+    </cs:spPr>
+  </cs:wall>
+</cs:chartStyle>
+</file>
+
+<file path=ppt/charts/style3.xml><?xml version="1.0" encoding="utf-8"?>
+<cs:chartStyle xmlns:cs="http://schemas.microsoft.com/office/drawing/2012/chartStyle" xmlns:a="http://schemas.openxmlformats.org/drawingml/2006/main" id="227">
   <cs:axisTitle>
     <cs:lnRef idx="0"/>
     <cs:fillRef idx="0"/>
@@ -9519,6 +9568,11 @@
     <cs:fontRef idx="minor">
       <a:schemeClr val="tx1"/>
     </cs:fontRef>
+    <cs:spPr>
+      <a:solidFill>
+        <a:schemeClr val="phClr"/>
+      </a:solidFill>
+    </cs:spPr>
   </cs:dataPoint>
   <cs:dataPoint3D>
     <cs:lnRef idx="0"/>
@@ -9529,6 +9583,11 @@
     <cs:fontRef idx="minor">
       <a:schemeClr val="tx1"/>
     </cs:fontRef>
+    <cs:spPr>
+      <a:solidFill>
+        <a:schemeClr val="phClr"/>
+      </a:solidFill>
+    </cs:spPr>
   </cs:dataPoint3D>
   <cs:dataPointLine>
     <cs:lnRef idx="0">
@@ -9560,6 +9619,9 @@
       <a:schemeClr val="tx1"/>
     </cs:fontRef>
     <cs:spPr>
+      <a:solidFill>
+        <a:schemeClr val="phClr"/>
+      </a:solidFill>
       <a:ln w="9525">
         <a:solidFill>
           <a:schemeClr val="phClr"/>
@@ -9609,511 +9671,6 @@
       </a:ln>
     </cs:spPr>
     <cs:defRPr sz="1197" kern="1200"/>
-  </cs:dataTable>
-  <cs:downBar>
-    <cs:lnRef idx="0"/>
-    <cs:fillRef idx="0"/>
-    <cs:effectRef idx="0"/>
-    <cs:fontRef idx="minor">
-      <a:schemeClr val="tx1"/>
-    </cs:fontRef>
-    <cs:spPr>
-      <a:solidFill>
-        <a:schemeClr val="dk1">
-          <a:lumMod val="75000"/>
-          <a:lumOff val="25000"/>
-        </a:schemeClr>
-      </a:solidFill>
-      <a:ln w="9525" cap="flat" cmpd="sng" algn="ctr">
-        <a:solidFill>
-          <a:schemeClr val="tx1">
-            <a:lumMod val="65000"/>
-            <a:lumOff val="35000"/>
-          </a:schemeClr>
-        </a:solidFill>
-        <a:round/>
-      </a:ln>
-    </cs:spPr>
-  </cs:downBar>
-  <cs:dropLine>
-    <cs:lnRef idx="0"/>
-    <cs:fillRef idx="0"/>
-    <cs:effectRef idx="0"/>
-    <cs:fontRef idx="minor">
-      <a:schemeClr val="tx1"/>
-    </cs:fontRef>
-    <cs:spPr>
-      <a:ln w="9525" cap="flat" cmpd="sng" algn="ctr">
-        <a:solidFill>
-          <a:schemeClr val="tx1">
-            <a:lumMod val="35000"/>
-            <a:lumOff val="65000"/>
-          </a:schemeClr>
-        </a:solidFill>
-        <a:round/>
-      </a:ln>
-    </cs:spPr>
-  </cs:dropLine>
-  <cs:errorBar>
-    <cs:lnRef idx="0"/>
-    <cs:fillRef idx="0"/>
-    <cs:effectRef idx="0"/>
-    <cs:fontRef idx="minor">
-      <a:schemeClr val="tx1"/>
-    </cs:fontRef>
-    <cs:spPr>
-      <a:ln w="9525" cap="flat" cmpd="sng" algn="ctr">
-        <a:solidFill>
-          <a:schemeClr val="tx1">
-            <a:lumMod val="65000"/>
-            <a:lumOff val="35000"/>
-          </a:schemeClr>
-        </a:solidFill>
-        <a:round/>
-      </a:ln>
-    </cs:spPr>
-  </cs:errorBar>
-  <cs:floor>
-    <cs:lnRef idx="0"/>
-    <cs:fillRef idx="0"/>
-    <cs:effectRef idx="0"/>
-    <cs:fontRef idx="minor">
-      <a:schemeClr val="tx1"/>
-    </cs:fontRef>
-    <cs:spPr>
-      <a:noFill/>
-      <a:ln>
-        <a:noFill/>
-      </a:ln>
-    </cs:spPr>
-  </cs:floor>
-  <cs:gridlineMajor>
-    <cs:lnRef idx="0"/>
-    <cs:fillRef idx="0"/>
-    <cs:effectRef idx="0"/>
-    <cs:fontRef idx="minor">
-      <a:schemeClr val="tx1"/>
-    </cs:fontRef>
-    <cs:spPr>
-      <a:ln w="9525" cap="flat" cmpd="sng" algn="ctr">
-        <a:solidFill>
-          <a:schemeClr val="tx1">
-            <a:lumMod val="15000"/>
-            <a:lumOff val="85000"/>
-          </a:schemeClr>
-        </a:solidFill>
-        <a:round/>
-      </a:ln>
-    </cs:spPr>
-  </cs:gridlineMajor>
-  <cs:gridlineMinor>
-    <cs:lnRef idx="0"/>
-    <cs:fillRef idx="0"/>
-    <cs:effectRef idx="0"/>
-    <cs:fontRef idx="minor">
-      <a:schemeClr val="tx1"/>
-    </cs:fontRef>
-    <cs:spPr>
-      <a:ln w="9525" cap="flat" cmpd="sng" algn="ctr">
-        <a:solidFill>
-          <a:schemeClr val="tx1">
-            <a:lumMod val="5000"/>
-            <a:lumOff val="95000"/>
-          </a:schemeClr>
-        </a:solidFill>
-        <a:round/>
-      </a:ln>
-    </cs:spPr>
-  </cs:gridlineMinor>
-  <cs:hiLoLine>
-    <cs:lnRef idx="0"/>
-    <cs:fillRef idx="0"/>
-    <cs:effectRef idx="0"/>
-    <cs:fontRef idx="minor">
-      <a:schemeClr val="tx1"/>
-    </cs:fontRef>
-    <cs:spPr>
-      <a:ln w="9525" cap="flat" cmpd="sng" algn="ctr">
-        <a:solidFill>
-          <a:schemeClr val="tx1">
-            <a:lumMod val="50000"/>
-            <a:lumOff val="50000"/>
-          </a:schemeClr>
-        </a:solidFill>
-        <a:round/>
-      </a:ln>
-    </cs:spPr>
-  </cs:hiLoLine>
-  <cs:leaderLine>
-    <cs:lnRef idx="0"/>
-    <cs:fillRef idx="0"/>
-    <cs:effectRef idx="0"/>
-    <cs:fontRef idx="minor">
-      <a:schemeClr val="tx1"/>
-    </cs:fontRef>
-    <cs:spPr>
-      <a:ln w="9525" cap="flat" cmpd="sng" algn="ctr">
-        <a:solidFill>
-          <a:schemeClr val="tx1">
-            <a:lumMod val="35000"/>
-            <a:lumOff val="65000"/>
-          </a:schemeClr>
-        </a:solidFill>
-        <a:round/>
-      </a:ln>
-    </cs:spPr>
-  </cs:leaderLine>
-  <cs:legend>
-    <cs:lnRef idx="0"/>
-    <cs:fillRef idx="0"/>
-    <cs:effectRef idx="0"/>
-    <cs:fontRef idx="minor">
-      <a:schemeClr val="tx1">
-        <a:lumMod val="65000"/>
-        <a:lumOff val="35000"/>
-      </a:schemeClr>
-    </cs:fontRef>
-    <cs:defRPr sz="1197" kern="1200"/>
-  </cs:legend>
-  <cs:plotArea mods="allowNoFillOverride allowNoLineOverride">
-    <cs:lnRef idx="0"/>
-    <cs:fillRef idx="0"/>
-    <cs:effectRef idx="0"/>
-    <cs:fontRef idx="minor">
-      <a:schemeClr val="tx1"/>
-    </cs:fontRef>
-  </cs:plotArea>
-  <cs:plotArea3D mods="allowNoFillOverride allowNoLineOverride">
-    <cs:lnRef idx="0"/>
-    <cs:fillRef idx="0"/>
-    <cs:effectRef idx="0"/>
-    <cs:fontRef idx="minor">
-      <a:schemeClr val="tx1"/>
-    </cs:fontRef>
-  </cs:plotArea3D>
-  <cs:seriesAxis>
-    <cs:lnRef idx="0"/>
-    <cs:fillRef idx="0"/>
-    <cs:effectRef idx="0"/>
-    <cs:fontRef idx="minor">
-      <a:schemeClr val="tx1">
-        <a:lumMod val="65000"/>
-        <a:lumOff val="35000"/>
-      </a:schemeClr>
-    </cs:fontRef>
-    <cs:defRPr sz="1197" kern="1200"/>
-  </cs:seriesAxis>
-  <cs:seriesLine>
-    <cs:lnRef idx="0"/>
-    <cs:fillRef idx="0"/>
-    <cs:effectRef idx="0"/>
-    <cs:fontRef idx="minor">
-      <a:schemeClr val="tx1"/>
-    </cs:fontRef>
-    <cs:spPr>
-      <a:ln w="9525" cap="flat" cmpd="sng" algn="ctr">
-        <a:solidFill>
-          <a:schemeClr val="tx1">
-            <a:lumMod val="35000"/>
-            <a:lumOff val="65000"/>
-          </a:schemeClr>
-        </a:solidFill>
-        <a:round/>
-      </a:ln>
-    </cs:spPr>
-  </cs:seriesLine>
-  <cs:title>
-    <cs:lnRef idx="0"/>
-    <cs:fillRef idx="0"/>
-    <cs:effectRef idx="0"/>
-    <cs:fontRef idx="minor">
-      <a:schemeClr val="tx1">
-        <a:lumMod val="65000"/>
-        <a:lumOff val="35000"/>
-      </a:schemeClr>
-    </cs:fontRef>
-    <cs:defRPr sz="1862" b="0" kern="1200" spc="0" baseline="0"/>
-  </cs:title>
-  <cs:trendline>
-    <cs:lnRef idx="0">
-      <cs:styleClr val="auto"/>
-    </cs:lnRef>
-    <cs:fillRef idx="0"/>
-    <cs:effectRef idx="0"/>
-    <cs:fontRef idx="minor">
-      <a:schemeClr val="tx1"/>
-    </cs:fontRef>
-    <cs:spPr>
-      <a:ln w="19050" cap="rnd">
-        <a:solidFill>
-          <a:schemeClr val="phClr"/>
-        </a:solidFill>
-        <a:prstDash val="sysDot"/>
-      </a:ln>
-    </cs:spPr>
-  </cs:trendline>
-  <cs:trendlineLabel>
-    <cs:lnRef idx="0"/>
-    <cs:fillRef idx="0"/>
-    <cs:effectRef idx="0"/>
-    <cs:fontRef idx="minor">
-      <a:schemeClr val="tx1">
-        <a:lumMod val="65000"/>
-        <a:lumOff val="35000"/>
-      </a:schemeClr>
-    </cs:fontRef>
-    <cs:defRPr sz="1197" kern="1200"/>
-  </cs:trendlineLabel>
-  <cs:upBar>
-    <cs:lnRef idx="0"/>
-    <cs:fillRef idx="0"/>
-    <cs:effectRef idx="0"/>
-    <cs:fontRef idx="minor">
-      <a:schemeClr val="tx1"/>
-    </cs:fontRef>
-    <cs:spPr>
-      <a:solidFill>
-        <a:schemeClr val="lt1"/>
-      </a:solidFill>
-      <a:ln w="9525" cap="flat" cmpd="sng" algn="ctr">
-        <a:solidFill>
-          <a:schemeClr val="tx1">
-            <a:lumMod val="65000"/>
-            <a:lumOff val="35000"/>
-          </a:schemeClr>
-        </a:solidFill>
-        <a:round/>
-      </a:ln>
-    </cs:spPr>
-  </cs:upBar>
-  <cs:valueAxis>
-    <cs:lnRef idx="0"/>
-    <cs:fillRef idx="0"/>
-    <cs:effectRef idx="0"/>
-    <cs:fontRef idx="minor">
-      <a:schemeClr val="tx1">
-        <a:lumMod val="65000"/>
-        <a:lumOff val="35000"/>
-      </a:schemeClr>
-    </cs:fontRef>
-    <cs:defRPr sz="1197" kern="1200"/>
-  </cs:valueAxis>
-  <cs:wall>
-    <cs:lnRef idx="0"/>
-    <cs:fillRef idx="0"/>
-    <cs:effectRef idx="0"/>
-    <cs:fontRef idx="minor">
-      <a:schemeClr val="tx1"/>
-    </cs:fontRef>
-    <cs:spPr>
-      <a:noFill/>
-      <a:ln>
-        <a:noFill/>
-      </a:ln>
-    </cs:spPr>
-  </cs:wall>
-</cs:chartStyle>
-</file>
-
-<file path=ppt/charts/style3.xml><?xml version="1.0" encoding="utf-8"?>
-<cs:chartStyle xmlns:cs="http://schemas.microsoft.com/office/drawing/2012/chartStyle" xmlns:a="http://schemas.openxmlformats.org/drawingml/2006/main" id="201">
-  <cs:axisTitle>
-    <cs:lnRef idx="0"/>
-    <cs:fillRef idx="0"/>
-    <cs:effectRef idx="0"/>
-    <cs:fontRef idx="minor">
-      <a:schemeClr val="tx1">
-        <a:lumMod val="65000"/>
-        <a:lumOff val="35000"/>
-      </a:schemeClr>
-    </cs:fontRef>
-    <cs:defRPr sz="1000" kern="1200"/>
-  </cs:axisTitle>
-  <cs:categoryAxis>
-    <cs:lnRef idx="0"/>
-    <cs:fillRef idx="0"/>
-    <cs:effectRef idx="0"/>
-    <cs:fontRef idx="minor">
-      <a:schemeClr val="tx1">
-        <a:lumMod val="65000"/>
-        <a:lumOff val="35000"/>
-      </a:schemeClr>
-    </cs:fontRef>
-    <cs:spPr>
-      <a:ln w="9525" cap="flat" cmpd="sng" algn="ctr">
-        <a:solidFill>
-          <a:schemeClr val="tx1">
-            <a:lumMod val="15000"/>
-            <a:lumOff val="85000"/>
-          </a:schemeClr>
-        </a:solidFill>
-        <a:round/>
-      </a:ln>
-    </cs:spPr>
-    <cs:defRPr sz="900" kern="1200"/>
-  </cs:categoryAxis>
-  <cs:chartArea mods="allowNoFillOverride allowNoLineOverride">
-    <cs:lnRef idx="0"/>
-    <cs:fillRef idx="0"/>
-    <cs:effectRef idx="0"/>
-    <cs:fontRef idx="minor">
-      <a:schemeClr val="tx1"/>
-    </cs:fontRef>
-    <cs:spPr>
-      <a:solidFill>
-        <a:schemeClr val="bg1"/>
-      </a:solidFill>
-      <a:ln w="9525" cap="flat" cmpd="sng" algn="ctr">
-        <a:solidFill>
-          <a:schemeClr val="tx1">
-            <a:lumMod val="15000"/>
-            <a:lumOff val="85000"/>
-          </a:schemeClr>
-        </a:solidFill>
-        <a:round/>
-      </a:ln>
-    </cs:spPr>
-    <cs:defRPr sz="1000" kern="1200"/>
-  </cs:chartArea>
-  <cs:dataLabel>
-    <cs:lnRef idx="0"/>
-    <cs:fillRef idx="0"/>
-    <cs:effectRef idx="0"/>
-    <cs:fontRef idx="minor">
-      <a:schemeClr val="tx1">
-        <a:lumMod val="75000"/>
-        <a:lumOff val="25000"/>
-      </a:schemeClr>
-    </cs:fontRef>
-    <cs:defRPr sz="900" kern="1200"/>
-  </cs:dataLabel>
-  <cs:dataLabelCallout>
-    <cs:lnRef idx="0"/>
-    <cs:fillRef idx="0"/>
-    <cs:effectRef idx="0"/>
-    <cs:fontRef idx="minor">
-      <a:schemeClr val="dk1">
-        <a:lumMod val="65000"/>
-        <a:lumOff val="35000"/>
-      </a:schemeClr>
-    </cs:fontRef>
-    <cs:spPr>
-      <a:solidFill>
-        <a:schemeClr val="lt1"/>
-      </a:solidFill>
-      <a:ln>
-        <a:solidFill>
-          <a:schemeClr val="dk1">
-            <a:lumMod val="25000"/>
-            <a:lumOff val="75000"/>
-          </a:schemeClr>
-        </a:solidFill>
-      </a:ln>
-    </cs:spPr>
-    <cs:defRPr sz="900" kern="1200"/>
-    <cs:bodyPr rot="0" spcFirstLastPara="1" vertOverflow="clip" horzOverflow="clip" vert="horz" wrap="square" lIns="36576" tIns="18288" rIns="36576" bIns="18288" anchor="ctr" anchorCtr="1">
-      <a:spAutoFit/>
-    </cs:bodyPr>
-  </cs:dataLabelCallout>
-  <cs:dataPoint>
-    <cs:lnRef idx="0"/>
-    <cs:fillRef idx="1">
-      <cs:styleClr val="auto"/>
-    </cs:fillRef>
-    <cs:effectRef idx="0"/>
-    <cs:fontRef idx="minor">
-      <a:schemeClr val="tx1"/>
-    </cs:fontRef>
-  </cs:dataPoint>
-  <cs:dataPoint3D>
-    <cs:lnRef idx="0"/>
-    <cs:fillRef idx="1">
-      <cs:styleClr val="auto"/>
-    </cs:fillRef>
-    <cs:effectRef idx="0"/>
-    <cs:fontRef idx="minor">
-      <a:schemeClr val="tx1"/>
-    </cs:fontRef>
-  </cs:dataPoint3D>
-  <cs:dataPointLine>
-    <cs:lnRef idx="0">
-      <cs:styleClr val="auto"/>
-    </cs:lnRef>
-    <cs:fillRef idx="1"/>
-    <cs:effectRef idx="0"/>
-    <cs:fontRef idx="minor">
-      <a:schemeClr val="tx1"/>
-    </cs:fontRef>
-    <cs:spPr>
-      <a:ln w="28575" cap="rnd">
-        <a:solidFill>
-          <a:schemeClr val="phClr"/>
-        </a:solidFill>
-        <a:round/>
-      </a:ln>
-    </cs:spPr>
-  </cs:dataPointLine>
-  <cs:dataPointMarker>
-    <cs:lnRef idx="0">
-      <cs:styleClr val="auto"/>
-    </cs:lnRef>
-    <cs:fillRef idx="1">
-      <cs:styleClr val="auto"/>
-    </cs:fillRef>
-    <cs:effectRef idx="0"/>
-    <cs:fontRef idx="minor">
-      <a:schemeClr val="tx1"/>
-    </cs:fontRef>
-    <cs:spPr>
-      <a:ln w="9525">
-        <a:solidFill>
-          <a:schemeClr val="phClr"/>
-        </a:solidFill>
-      </a:ln>
-    </cs:spPr>
-  </cs:dataPointMarker>
-  <cs:dataPointMarkerLayout symbol="circle" size="5"/>
-  <cs:dataPointWireframe>
-    <cs:lnRef idx="0">
-      <cs:styleClr val="auto"/>
-    </cs:lnRef>
-    <cs:fillRef idx="1"/>
-    <cs:effectRef idx="0"/>
-    <cs:fontRef idx="minor">
-      <a:schemeClr val="tx1"/>
-    </cs:fontRef>
-    <cs:spPr>
-      <a:ln w="9525" cap="rnd">
-        <a:solidFill>
-          <a:schemeClr val="phClr"/>
-        </a:solidFill>
-        <a:round/>
-      </a:ln>
-    </cs:spPr>
-  </cs:dataPointWireframe>
-  <cs:dataTable>
-    <cs:lnRef idx="0"/>
-    <cs:fillRef idx="0"/>
-    <cs:effectRef idx="0"/>
-    <cs:fontRef idx="minor">
-      <a:schemeClr val="tx1">
-        <a:lumMod val="65000"/>
-        <a:lumOff val="35000"/>
-      </a:schemeClr>
-    </cs:fontRef>
-    <cs:spPr>
-      <a:noFill/>
-      <a:ln w="9525" cap="flat" cmpd="sng" algn="ctr">
-        <a:solidFill>
-          <a:schemeClr val="tx1">
-            <a:lumMod val="15000"/>
-            <a:lumOff val="85000"/>
-          </a:schemeClr>
-        </a:solidFill>
-        <a:round/>
-      </a:ln>
-    </cs:spPr>
-    <cs:defRPr sz="900" kern="1200"/>
   </cs:dataTable>
   <cs:downBar>
     <cs:lnRef idx="0"/>
@@ -10277,7 +9834,7 @@
         <a:lumOff val="35000"/>
       </a:schemeClr>
     </cs:fontRef>
-    <cs:defRPr sz="900" kern="1200"/>
+    <cs:defRPr sz="1197" kern="1200"/>
   </cs:legend>
   <cs:plotArea mods="allowNoFillOverride allowNoLineOverride">
     <cs:lnRef idx="0"/>
@@ -10305,7 +9862,7 @@
         <a:lumOff val="35000"/>
       </a:schemeClr>
     </cs:fontRef>
-    <cs:defRPr sz="900" kern="1200"/>
+    <cs:defRPr sz="1197" kern="1200"/>
   </cs:seriesAxis>
   <cs:seriesLine>
     <cs:lnRef idx="0"/>
@@ -10336,7 +9893,7 @@
         <a:lumOff val="35000"/>
       </a:schemeClr>
     </cs:fontRef>
-    <cs:defRPr sz="1400" b="0" kern="1200" spc="0" baseline="0"/>
+    <cs:defRPr sz="1862" b="0" kern="1200" spc="0" baseline="0"/>
   </cs:title>
   <cs:trendline>
     <cs:lnRef idx="0">
@@ -10366,7 +9923,7 @@
         <a:lumOff val="35000"/>
       </a:schemeClr>
     </cs:fontRef>
-    <cs:defRPr sz="900" kern="1200"/>
+    <cs:defRPr sz="1197" kern="1200"/>
   </cs:trendlineLabel>
   <cs:upBar>
     <cs:lnRef idx="0"/>
@@ -10399,7 +9956,7 @@
         <a:lumOff val="35000"/>
       </a:schemeClr>
     </cs:fontRef>
-    <cs:defRPr sz="900" kern="1200"/>
+    <cs:defRPr sz="1197" kern="1200"/>
   </cs:valueAxis>
   <cs:wall>
     <cs:lnRef idx="0"/>
@@ -11967,522 +11524,6 @@
 </file>
 
 <file path=ppt/charts/style7.xml><?xml version="1.0" encoding="utf-8"?>
-<cs:chartStyle xmlns:cs="http://schemas.microsoft.com/office/drawing/2012/chartStyle" xmlns:a="http://schemas.openxmlformats.org/drawingml/2006/main" id="227">
-  <cs:axisTitle>
-    <cs:lnRef idx="0"/>
-    <cs:fillRef idx="0"/>
-    <cs:effectRef idx="0"/>
-    <cs:fontRef idx="minor">
-      <a:schemeClr val="tx1">
-        <a:lumMod val="65000"/>
-        <a:lumOff val="35000"/>
-      </a:schemeClr>
-    </cs:fontRef>
-    <cs:defRPr sz="1330" kern="1200"/>
-  </cs:axisTitle>
-  <cs:categoryAxis>
-    <cs:lnRef idx="0"/>
-    <cs:fillRef idx="0"/>
-    <cs:effectRef idx="0"/>
-    <cs:fontRef idx="minor">
-      <a:schemeClr val="tx1">
-        <a:lumMod val="65000"/>
-        <a:lumOff val="35000"/>
-      </a:schemeClr>
-    </cs:fontRef>
-    <cs:spPr>
-      <a:ln w="9525" cap="flat" cmpd="sng" algn="ctr">
-        <a:solidFill>
-          <a:schemeClr val="tx1">
-            <a:lumMod val="15000"/>
-            <a:lumOff val="85000"/>
-          </a:schemeClr>
-        </a:solidFill>
-        <a:round/>
-      </a:ln>
-    </cs:spPr>
-    <cs:defRPr sz="1197" kern="1200"/>
-  </cs:categoryAxis>
-  <cs:chartArea mods="allowNoFillOverride allowNoLineOverride">
-    <cs:lnRef idx="0"/>
-    <cs:fillRef idx="0"/>
-    <cs:effectRef idx="0"/>
-    <cs:fontRef idx="minor">
-      <a:schemeClr val="tx1"/>
-    </cs:fontRef>
-    <cs:spPr>
-      <a:solidFill>
-        <a:schemeClr val="bg1"/>
-      </a:solidFill>
-      <a:ln w="9525" cap="flat" cmpd="sng" algn="ctr">
-        <a:solidFill>
-          <a:schemeClr val="tx1">
-            <a:lumMod val="15000"/>
-            <a:lumOff val="85000"/>
-          </a:schemeClr>
-        </a:solidFill>
-        <a:round/>
-      </a:ln>
-    </cs:spPr>
-    <cs:defRPr sz="1330" kern="1200"/>
-  </cs:chartArea>
-  <cs:dataLabel>
-    <cs:lnRef idx="0"/>
-    <cs:fillRef idx="0"/>
-    <cs:effectRef idx="0"/>
-    <cs:fontRef idx="minor">
-      <a:schemeClr val="tx1">
-        <a:lumMod val="75000"/>
-        <a:lumOff val="25000"/>
-      </a:schemeClr>
-    </cs:fontRef>
-    <cs:defRPr sz="1197" kern="1200"/>
-  </cs:dataLabel>
-  <cs:dataLabelCallout>
-    <cs:lnRef idx="0"/>
-    <cs:fillRef idx="0"/>
-    <cs:effectRef idx="0"/>
-    <cs:fontRef idx="minor">
-      <a:schemeClr val="dk1">
-        <a:lumMod val="65000"/>
-        <a:lumOff val="35000"/>
-      </a:schemeClr>
-    </cs:fontRef>
-    <cs:spPr>
-      <a:solidFill>
-        <a:schemeClr val="lt1"/>
-      </a:solidFill>
-      <a:ln>
-        <a:solidFill>
-          <a:schemeClr val="dk1">
-            <a:lumMod val="25000"/>
-            <a:lumOff val="75000"/>
-          </a:schemeClr>
-        </a:solidFill>
-      </a:ln>
-    </cs:spPr>
-    <cs:defRPr sz="1197" kern="1200"/>
-    <cs:bodyPr rot="0" spcFirstLastPara="1" vertOverflow="clip" horzOverflow="clip" vert="horz" wrap="square" lIns="36576" tIns="18288" rIns="36576" bIns="18288" anchor="ctr" anchorCtr="1">
-      <a:spAutoFit/>
-    </cs:bodyPr>
-  </cs:dataLabelCallout>
-  <cs:dataPoint>
-    <cs:lnRef idx="0"/>
-    <cs:fillRef idx="1">
-      <cs:styleClr val="auto"/>
-    </cs:fillRef>
-    <cs:effectRef idx="0"/>
-    <cs:fontRef idx="minor">
-      <a:schemeClr val="tx1"/>
-    </cs:fontRef>
-    <cs:spPr>
-      <a:solidFill>
-        <a:schemeClr val="phClr"/>
-      </a:solidFill>
-    </cs:spPr>
-  </cs:dataPoint>
-  <cs:dataPoint3D>
-    <cs:lnRef idx="0"/>
-    <cs:fillRef idx="1">
-      <cs:styleClr val="auto"/>
-    </cs:fillRef>
-    <cs:effectRef idx="0"/>
-    <cs:fontRef idx="minor">
-      <a:schemeClr val="tx1"/>
-    </cs:fontRef>
-    <cs:spPr>
-      <a:solidFill>
-        <a:schemeClr val="phClr"/>
-      </a:solidFill>
-    </cs:spPr>
-  </cs:dataPoint3D>
-  <cs:dataPointLine>
-    <cs:lnRef idx="0">
-      <cs:styleClr val="auto"/>
-    </cs:lnRef>
-    <cs:fillRef idx="1"/>
-    <cs:effectRef idx="0"/>
-    <cs:fontRef idx="minor">
-      <a:schemeClr val="tx1"/>
-    </cs:fontRef>
-    <cs:spPr>
-      <a:ln w="28575" cap="rnd">
-        <a:solidFill>
-          <a:schemeClr val="phClr"/>
-        </a:solidFill>
-        <a:round/>
-      </a:ln>
-    </cs:spPr>
-  </cs:dataPointLine>
-  <cs:dataPointMarker>
-    <cs:lnRef idx="0">
-      <cs:styleClr val="auto"/>
-    </cs:lnRef>
-    <cs:fillRef idx="1">
-      <cs:styleClr val="auto"/>
-    </cs:fillRef>
-    <cs:effectRef idx="0"/>
-    <cs:fontRef idx="minor">
-      <a:schemeClr val="tx1"/>
-    </cs:fontRef>
-    <cs:spPr>
-      <a:solidFill>
-        <a:schemeClr val="phClr"/>
-      </a:solidFill>
-      <a:ln w="9525">
-        <a:solidFill>
-          <a:schemeClr val="phClr"/>
-        </a:solidFill>
-      </a:ln>
-    </cs:spPr>
-  </cs:dataPointMarker>
-  <cs:dataPointMarkerLayout symbol="circle" size="5"/>
-  <cs:dataPointWireframe>
-    <cs:lnRef idx="0">
-      <cs:styleClr val="auto"/>
-    </cs:lnRef>
-    <cs:fillRef idx="1"/>
-    <cs:effectRef idx="0"/>
-    <cs:fontRef idx="minor">
-      <a:schemeClr val="tx1"/>
-    </cs:fontRef>
-    <cs:spPr>
-      <a:ln w="9525" cap="rnd">
-        <a:solidFill>
-          <a:schemeClr val="phClr"/>
-        </a:solidFill>
-        <a:round/>
-      </a:ln>
-    </cs:spPr>
-  </cs:dataPointWireframe>
-  <cs:dataTable>
-    <cs:lnRef idx="0"/>
-    <cs:fillRef idx="0"/>
-    <cs:effectRef idx="0"/>
-    <cs:fontRef idx="minor">
-      <a:schemeClr val="tx1">
-        <a:lumMod val="65000"/>
-        <a:lumOff val="35000"/>
-      </a:schemeClr>
-    </cs:fontRef>
-    <cs:spPr>
-      <a:noFill/>
-      <a:ln w="9525" cap="flat" cmpd="sng" algn="ctr">
-        <a:solidFill>
-          <a:schemeClr val="tx1">
-            <a:lumMod val="15000"/>
-            <a:lumOff val="85000"/>
-          </a:schemeClr>
-        </a:solidFill>
-        <a:round/>
-      </a:ln>
-    </cs:spPr>
-    <cs:defRPr sz="1197" kern="1200"/>
-  </cs:dataTable>
-  <cs:downBar>
-    <cs:lnRef idx="0"/>
-    <cs:fillRef idx="0"/>
-    <cs:effectRef idx="0"/>
-    <cs:fontRef idx="minor">
-      <a:schemeClr val="dk1"/>
-    </cs:fontRef>
-    <cs:spPr>
-      <a:solidFill>
-        <a:schemeClr val="dk1">
-          <a:lumMod val="65000"/>
-          <a:lumOff val="35000"/>
-        </a:schemeClr>
-      </a:solidFill>
-      <a:ln w="9525">
-        <a:solidFill>
-          <a:schemeClr val="tx1">
-            <a:lumMod val="65000"/>
-            <a:lumOff val="35000"/>
-          </a:schemeClr>
-        </a:solidFill>
-      </a:ln>
-    </cs:spPr>
-  </cs:downBar>
-  <cs:dropLine>
-    <cs:lnRef idx="0"/>
-    <cs:fillRef idx="0"/>
-    <cs:effectRef idx="0"/>
-    <cs:fontRef idx="minor">
-      <a:schemeClr val="tx1"/>
-    </cs:fontRef>
-    <cs:spPr>
-      <a:ln w="9525" cap="flat" cmpd="sng" algn="ctr">
-        <a:solidFill>
-          <a:schemeClr val="tx1">
-            <a:lumMod val="35000"/>
-            <a:lumOff val="65000"/>
-          </a:schemeClr>
-        </a:solidFill>
-        <a:round/>
-      </a:ln>
-    </cs:spPr>
-  </cs:dropLine>
-  <cs:errorBar>
-    <cs:lnRef idx="0"/>
-    <cs:fillRef idx="0"/>
-    <cs:effectRef idx="0"/>
-    <cs:fontRef idx="minor">
-      <a:schemeClr val="tx1"/>
-    </cs:fontRef>
-    <cs:spPr>
-      <a:ln w="9525" cap="flat" cmpd="sng" algn="ctr">
-        <a:solidFill>
-          <a:schemeClr val="tx1">
-            <a:lumMod val="65000"/>
-            <a:lumOff val="35000"/>
-          </a:schemeClr>
-        </a:solidFill>
-        <a:round/>
-      </a:ln>
-    </cs:spPr>
-  </cs:errorBar>
-  <cs:floor>
-    <cs:lnRef idx="0"/>
-    <cs:fillRef idx="0"/>
-    <cs:effectRef idx="0"/>
-    <cs:fontRef idx="minor">
-      <a:schemeClr val="tx1"/>
-    </cs:fontRef>
-    <cs:spPr>
-      <a:noFill/>
-      <a:ln>
-        <a:noFill/>
-      </a:ln>
-    </cs:spPr>
-  </cs:floor>
-  <cs:gridlineMajor>
-    <cs:lnRef idx="0"/>
-    <cs:fillRef idx="0"/>
-    <cs:effectRef idx="0"/>
-    <cs:fontRef idx="minor">
-      <a:schemeClr val="tx1"/>
-    </cs:fontRef>
-    <cs:spPr>
-      <a:ln w="9525" cap="flat" cmpd="sng" algn="ctr">
-        <a:solidFill>
-          <a:schemeClr val="tx1">
-            <a:lumMod val="15000"/>
-            <a:lumOff val="85000"/>
-          </a:schemeClr>
-        </a:solidFill>
-        <a:round/>
-      </a:ln>
-    </cs:spPr>
-  </cs:gridlineMajor>
-  <cs:gridlineMinor>
-    <cs:lnRef idx="0"/>
-    <cs:fillRef idx="0"/>
-    <cs:effectRef idx="0"/>
-    <cs:fontRef idx="minor">
-      <a:schemeClr val="tx1"/>
-    </cs:fontRef>
-    <cs:spPr>
-      <a:ln w="9525" cap="flat" cmpd="sng" algn="ctr">
-        <a:solidFill>
-          <a:schemeClr val="tx1">
-            <a:lumMod val="5000"/>
-            <a:lumOff val="95000"/>
-          </a:schemeClr>
-        </a:solidFill>
-        <a:round/>
-      </a:ln>
-    </cs:spPr>
-  </cs:gridlineMinor>
-  <cs:hiLoLine>
-    <cs:lnRef idx="0"/>
-    <cs:fillRef idx="0"/>
-    <cs:effectRef idx="0"/>
-    <cs:fontRef idx="minor">
-      <a:schemeClr val="tx1"/>
-    </cs:fontRef>
-    <cs:spPr>
-      <a:ln w="9525" cap="flat" cmpd="sng" algn="ctr">
-        <a:solidFill>
-          <a:schemeClr val="tx1">
-            <a:lumMod val="75000"/>
-            <a:lumOff val="25000"/>
-          </a:schemeClr>
-        </a:solidFill>
-        <a:round/>
-      </a:ln>
-    </cs:spPr>
-  </cs:hiLoLine>
-  <cs:leaderLine>
-    <cs:lnRef idx="0"/>
-    <cs:fillRef idx="0"/>
-    <cs:effectRef idx="0"/>
-    <cs:fontRef idx="minor">
-      <a:schemeClr val="tx1"/>
-    </cs:fontRef>
-    <cs:spPr>
-      <a:ln w="9525" cap="flat" cmpd="sng" algn="ctr">
-        <a:solidFill>
-          <a:schemeClr val="tx1">
-            <a:lumMod val="35000"/>
-            <a:lumOff val="65000"/>
-          </a:schemeClr>
-        </a:solidFill>
-        <a:round/>
-      </a:ln>
-    </cs:spPr>
-  </cs:leaderLine>
-  <cs:legend>
-    <cs:lnRef idx="0"/>
-    <cs:fillRef idx="0"/>
-    <cs:effectRef idx="0"/>
-    <cs:fontRef idx="minor">
-      <a:schemeClr val="tx1">
-        <a:lumMod val="65000"/>
-        <a:lumOff val="35000"/>
-      </a:schemeClr>
-    </cs:fontRef>
-    <cs:defRPr sz="1197" kern="1200"/>
-  </cs:legend>
-  <cs:plotArea mods="allowNoFillOverride allowNoLineOverride">
-    <cs:lnRef idx="0"/>
-    <cs:fillRef idx="0"/>
-    <cs:effectRef idx="0"/>
-    <cs:fontRef idx="minor">
-      <a:schemeClr val="tx1"/>
-    </cs:fontRef>
-  </cs:plotArea>
-  <cs:plotArea3D mods="allowNoFillOverride allowNoLineOverride">
-    <cs:lnRef idx="0"/>
-    <cs:fillRef idx="0"/>
-    <cs:effectRef idx="0"/>
-    <cs:fontRef idx="minor">
-      <a:schemeClr val="tx1"/>
-    </cs:fontRef>
-  </cs:plotArea3D>
-  <cs:seriesAxis>
-    <cs:lnRef idx="0"/>
-    <cs:fillRef idx="0"/>
-    <cs:effectRef idx="0"/>
-    <cs:fontRef idx="minor">
-      <a:schemeClr val="tx1">
-        <a:lumMod val="65000"/>
-        <a:lumOff val="35000"/>
-      </a:schemeClr>
-    </cs:fontRef>
-    <cs:defRPr sz="1197" kern="1200"/>
-  </cs:seriesAxis>
-  <cs:seriesLine>
-    <cs:lnRef idx="0"/>
-    <cs:fillRef idx="0"/>
-    <cs:effectRef idx="0"/>
-    <cs:fontRef idx="minor">
-      <a:schemeClr val="tx1"/>
-    </cs:fontRef>
-    <cs:spPr>
-      <a:ln w="9525" cap="flat" cmpd="sng" algn="ctr">
-        <a:solidFill>
-          <a:schemeClr val="tx1">
-            <a:lumMod val="35000"/>
-            <a:lumOff val="65000"/>
-          </a:schemeClr>
-        </a:solidFill>
-        <a:round/>
-      </a:ln>
-    </cs:spPr>
-  </cs:seriesLine>
-  <cs:title>
-    <cs:lnRef idx="0"/>
-    <cs:fillRef idx="0"/>
-    <cs:effectRef idx="0"/>
-    <cs:fontRef idx="minor">
-      <a:schemeClr val="tx1">
-        <a:lumMod val="65000"/>
-        <a:lumOff val="35000"/>
-      </a:schemeClr>
-    </cs:fontRef>
-    <cs:defRPr sz="1862" b="0" kern="1200" spc="0" baseline="0"/>
-  </cs:title>
-  <cs:trendline>
-    <cs:lnRef idx="0">
-      <cs:styleClr val="auto"/>
-    </cs:lnRef>
-    <cs:fillRef idx="0"/>
-    <cs:effectRef idx="0"/>
-    <cs:fontRef idx="minor">
-      <a:schemeClr val="tx1"/>
-    </cs:fontRef>
-    <cs:spPr>
-      <a:ln w="19050" cap="rnd">
-        <a:solidFill>
-          <a:schemeClr val="phClr"/>
-        </a:solidFill>
-        <a:prstDash val="sysDot"/>
-      </a:ln>
-    </cs:spPr>
-  </cs:trendline>
-  <cs:trendlineLabel>
-    <cs:lnRef idx="0"/>
-    <cs:fillRef idx="0"/>
-    <cs:effectRef idx="0"/>
-    <cs:fontRef idx="minor">
-      <a:schemeClr val="tx1">
-        <a:lumMod val="65000"/>
-        <a:lumOff val="35000"/>
-      </a:schemeClr>
-    </cs:fontRef>
-    <cs:defRPr sz="1197" kern="1200"/>
-  </cs:trendlineLabel>
-  <cs:upBar>
-    <cs:lnRef idx="0"/>
-    <cs:fillRef idx="0"/>
-    <cs:effectRef idx="0"/>
-    <cs:fontRef idx="minor">
-      <a:schemeClr val="dk1"/>
-    </cs:fontRef>
-    <cs:spPr>
-      <a:solidFill>
-        <a:schemeClr val="lt1"/>
-      </a:solidFill>
-      <a:ln w="9525">
-        <a:solidFill>
-          <a:schemeClr val="tx1">
-            <a:lumMod val="15000"/>
-            <a:lumOff val="85000"/>
-          </a:schemeClr>
-        </a:solidFill>
-      </a:ln>
-    </cs:spPr>
-  </cs:upBar>
-  <cs:valueAxis>
-    <cs:lnRef idx="0"/>
-    <cs:fillRef idx="0"/>
-    <cs:effectRef idx="0"/>
-    <cs:fontRef idx="minor">
-      <a:schemeClr val="tx1">
-        <a:lumMod val="65000"/>
-        <a:lumOff val="35000"/>
-      </a:schemeClr>
-    </cs:fontRef>
-    <cs:defRPr sz="1197" kern="1200"/>
-  </cs:valueAxis>
-  <cs:wall>
-    <cs:lnRef idx="0"/>
-    <cs:fillRef idx="0"/>
-    <cs:effectRef idx="0"/>
-    <cs:fontRef idx="minor">
-      <a:schemeClr val="tx1"/>
-    </cs:fontRef>
-    <cs:spPr>
-      <a:noFill/>
-      <a:ln>
-        <a:noFill/>
-      </a:ln>
-    </cs:spPr>
-  </cs:wall>
-</cs:chartStyle>
-</file>
-
-<file path=ppt/charts/style8.xml><?xml version="1.0" encoding="utf-8"?>
 <cs:chartStyle xmlns:cs="http://schemas.microsoft.com/office/drawing/2012/chartStyle" xmlns:a="http://schemas.openxmlformats.org/drawingml/2006/main" id="227">
   <cs:axisTitle>
     <cs:lnRef idx="0"/>
@@ -13724,7 +12765,7 @@
           <a:p>
             <a:fld id="{1795FADB-00C8-4FB2-BB50-76DE30578D93}" type="slidenum">
               <a:rPr lang="pl-PL" smtClean="0"/>
-              <a:t>6</a:t>
+              <a:t>5</a:t>
             </a:fld>
             <a:endParaRPr lang="pl-PL"/>
           </a:p>
@@ -17763,201 +16804,6 @@
 </file>
 
 <file path=ppt/slides/slide10.xml><?xml version="1.0" encoding="utf-8"?>
-<p:sld xmlns:a="http://schemas.openxmlformats.org/drawingml/2006/main" xmlns:r="http://schemas.openxmlformats.org/officeDocument/2006/relationships" xmlns:p="http://schemas.openxmlformats.org/presentationml/2006/main" show="0">
-  <p:cSld>
-    <p:spTree>
-      <p:nvGrpSpPr>
-        <p:cNvPr id="1" name="">
-          <a:extLst>
-            <a:ext uri="{FF2B5EF4-FFF2-40B4-BE49-F238E27FC236}">
-              <a16:creationId xmlns:a16="http://schemas.microsoft.com/office/drawing/2014/main" id="{21897F48-AF87-1935-680A-A761D3CA20C5}"/>
-            </a:ext>
-          </a:extLst>
-        </p:cNvPr>
-        <p:cNvGrpSpPr/>
-        <p:nvPr/>
-      </p:nvGrpSpPr>
-      <p:grpSpPr>
-        <a:xfrm>
-          <a:off x="0" y="0"/>
-          <a:ext cx="0" cy="0"/>
-          <a:chOff x="0" y="0"/>
-          <a:chExt cx="0" cy="0"/>
-        </a:xfrm>
-      </p:grpSpPr>
-      <p:sp>
-        <p:nvSpPr>
-          <p:cNvPr id="2" name="Tytuł 1">
-            <a:extLst>
-              <a:ext uri="{FF2B5EF4-FFF2-40B4-BE49-F238E27FC236}">
-                <a16:creationId xmlns:a16="http://schemas.microsoft.com/office/drawing/2014/main" id="{DE7A4FF8-5762-F565-D0C2-521912B3ACD8}"/>
-              </a:ext>
-            </a:extLst>
-          </p:cNvPr>
-          <p:cNvSpPr>
-            <a:spLocks noGrp="1"/>
-          </p:cNvSpPr>
-          <p:nvPr>
-            <p:ph type="title"/>
-          </p:nvPr>
-        </p:nvSpPr>
-        <p:spPr/>
-        <p:txBody>
-          <a:bodyPr>
-            <a:noAutofit/>
-          </a:bodyPr>
-          <a:lstStyle/>
-          <a:p>
-            <a:r>
-              <a:rPr lang="pl-PL" dirty="0"/>
-              <a:t>Dlaczego otwieramy Wikipedię?</a:t>
-            </a:r>
-          </a:p>
-        </p:txBody>
-      </p:sp>
-      <p:sp>
-        <p:nvSpPr>
-          <p:cNvPr id="3" name="Symbol zastępczy zawartości 2">
-            <a:extLst>
-              <a:ext uri="{FF2B5EF4-FFF2-40B4-BE49-F238E27FC236}">
-                <a16:creationId xmlns:a16="http://schemas.microsoft.com/office/drawing/2014/main" id="{D38FDE60-81F8-8812-1058-CE3E9E55C7D3}"/>
-              </a:ext>
-            </a:extLst>
-          </p:cNvPr>
-          <p:cNvSpPr>
-            <a:spLocks noGrp="1"/>
-          </p:cNvSpPr>
-          <p:nvPr>
-            <p:ph idx="1"/>
-          </p:nvPr>
-        </p:nvSpPr>
-        <p:spPr/>
-        <p:txBody>
-          <a:bodyPr/>
-          <a:lstStyle/>
-          <a:p>
-            <a:pPr marL="0" indent="0">
-              <a:buNone/>
-            </a:pPr>
-            <a:r>
-              <a:rPr lang="pl-PL" dirty="0">
-                <a:solidFill>
-                  <a:schemeClr val="tx2"/>
-                </a:solidFill>
-              </a:rPr>
-              <a:t>Analiza powyższych przykładów pokazuje, że Wikipedia nie jest tylko encyklopedią. </a:t>
-            </a:r>
-          </a:p>
-          <a:p>
-            <a:pPr marL="0" indent="0">
-              <a:buNone/>
-            </a:pPr>
-            <a:r>
-              <a:rPr lang="pl-PL" dirty="0">
-                <a:solidFill>
-                  <a:schemeClr val="tx2"/>
-                </a:solidFill>
-              </a:rPr>
-              <a:t>Jest miejscem do którego udajemy się, by zrozumieć świat wokół nas. By zgłębić wydarzenia wywołujące smutek, strach, ciekawość czy ekscytację.</a:t>
-            </a:r>
-          </a:p>
-          <a:p>
-            <a:pPr marL="0" indent="0">
-              <a:buNone/>
-            </a:pPr>
-            <a:endParaRPr lang="pl-PL" dirty="0"/>
-          </a:p>
-          <a:p>
-            <a:pPr marL="0" indent="0">
-              <a:buNone/>
-            </a:pPr>
-            <a:r>
-              <a:rPr lang="pl-PL" b="1" dirty="0"/>
-              <a:t>Wikipedia odpowiada na nasze emocje. Od 25 lat.</a:t>
-            </a:r>
-          </a:p>
-        </p:txBody>
-      </p:sp>
-    </p:spTree>
-    <p:extLst>
-      <p:ext uri="{BB962C8B-B14F-4D97-AF65-F5344CB8AC3E}">
-        <p14:creationId xmlns:p14="http://schemas.microsoft.com/office/powerpoint/2010/main" val="769765417"/>
-      </p:ext>
-    </p:extLst>
-  </p:cSld>
-  <p:clrMapOvr>
-    <a:masterClrMapping/>
-  </p:clrMapOvr>
-</p:sld>
-</file>
-
-<file path=ppt/slides/slide11.xml><?xml version="1.0" encoding="utf-8"?>
-<p:sld xmlns:a="http://schemas.openxmlformats.org/drawingml/2006/main" xmlns:r="http://schemas.openxmlformats.org/officeDocument/2006/relationships" xmlns:p="http://schemas.openxmlformats.org/presentationml/2006/main">
-  <p:cSld>
-    <p:spTree>
-      <p:nvGrpSpPr>
-        <p:cNvPr id="1" name=""/>
-        <p:cNvGrpSpPr/>
-        <p:nvPr/>
-      </p:nvGrpSpPr>
-      <p:grpSpPr>
-        <a:xfrm>
-          <a:off x="0" y="0"/>
-          <a:ext cx="0" cy="0"/>
-          <a:chOff x="0" y="0"/>
-          <a:chExt cx="0" cy="0"/>
-        </a:xfrm>
-      </p:grpSpPr>
-      <p:pic>
-        <p:nvPicPr>
-          <p:cNvPr id="5" name="Obraz 4">
-            <a:extLst>
-              <a:ext uri="{FF2B5EF4-FFF2-40B4-BE49-F238E27FC236}">
-                <a16:creationId xmlns:a16="http://schemas.microsoft.com/office/drawing/2014/main" id="{7687F5BB-8301-DFD8-9EDB-3655C22572DF}"/>
-              </a:ext>
-            </a:extLst>
-          </p:cNvPr>
-          <p:cNvPicPr>
-            <a:picLocks noChangeAspect="1"/>
-          </p:cNvPicPr>
-          <p:nvPr/>
-        </p:nvPicPr>
-        <p:blipFill>
-          <a:blip r:embed="rId2">
-            <a:extLst>
-              <a:ext uri="{28A0092B-C50C-407E-A947-70E740481C1C}">
-                <a14:useLocalDpi xmlns:a14="http://schemas.microsoft.com/office/drawing/2010/main" val="0"/>
-              </a:ext>
-            </a:extLst>
-          </a:blip>
-          <a:stretch>
-            <a:fillRect/>
-          </a:stretch>
-        </p:blipFill>
-        <p:spPr>
-          <a:xfrm>
-            <a:off x="481794" y="2572213"/>
-            <a:ext cx="11228412" cy="1713573"/>
-          </a:xfrm>
-          <a:prstGeom prst="rect">
-            <a:avLst/>
-          </a:prstGeom>
-        </p:spPr>
-      </p:pic>
-    </p:spTree>
-    <p:extLst>
-      <p:ext uri="{BB962C8B-B14F-4D97-AF65-F5344CB8AC3E}">
-        <p14:creationId xmlns:p14="http://schemas.microsoft.com/office/powerpoint/2010/main" val="2325017849"/>
-      </p:ext>
-    </p:extLst>
-  </p:cSld>
-  <p:clrMapOvr>
-    <a:masterClrMapping/>
-  </p:clrMapOvr>
-</p:sld>
-</file>
-
-<file path=ppt/slides/slide12.xml><?xml version="1.0" encoding="utf-8"?>
 <p:sld xmlns:a="http://schemas.openxmlformats.org/drawingml/2006/main" xmlns:r="http://schemas.openxmlformats.org/officeDocument/2006/relationships" xmlns:p="http://schemas.openxmlformats.org/presentationml/2006/main">
   <p:cSld>
     <p:spTree>
@@ -18420,7 +17266,7 @@
 </p:sld>
 </file>
 
-<file path=ppt/slides/slide13.xml><?xml version="1.0" encoding="utf-8"?>
+<file path=ppt/slides/slide11.xml><?xml version="1.0" encoding="utf-8"?>
 <p:sld xmlns:a="http://schemas.openxmlformats.org/drawingml/2006/main" xmlns:r="http://schemas.openxmlformats.org/officeDocument/2006/relationships" xmlns:p="http://schemas.openxmlformats.org/presentationml/2006/main">
   <p:cSld>
     <p:spTree>
@@ -18837,293 +17683,6 @@
 </file>
 
 <file path=ppt/slides/slide2.xml><?xml version="1.0" encoding="utf-8"?>
-<p:sld xmlns:a="http://schemas.openxmlformats.org/drawingml/2006/main" xmlns:r="http://schemas.openxmlformats.org/officeDocument/2006/relationships" xmlns:p="http://schemas.openxmlformats.org/presentationml/2006/main" show="0">
-  <p:cSld>
-    <p:spTree>
-      <p:nvGrpSpPr>
-        <p:cNvPr id="1" name=""/>
-        <p:cNvGrpSpPr/>
-        <p:nvPr/>
-      </p:nvGrpSpPr>
-      <p:grpSpPr>
-        <a:xfrm>
-          <a:off x="0" y="0"/>
-          <a:ext cx="0" cy="0"/>
-          <a:chOff x="0" y="0"/>
-          <a:chExt cx="0" cy="0"/>
-        </a:xfrm>
-      </p:grpSpPr>
-      <p:sp>
-        <p:nvSpPr>
-          <p:cNvPr id="5" name="Prostokąt: zaokrąglone rogi 4">
-            <a:extLst>
-              <a:ext uri="{FF2B5EF4-FFF2-40B4-BE49-F238E27FC236}">
-                <a16:creationId xmlns:a16="http://schemas.microsoft.com/office/drawing/2014/main" id="{CE47D99B-5AB5-A1B6-D7CA-B9BE2403A4F2}"/>
-              </a:ext>
-            </a:extLst>
-          </p:cNvPr>
-          <p:cNvSpPr/>
-          <p:nvPr/>
-        </p:nvSpPr>
-        <p:spPr>
-          <a:xfrm>
-            <a:off x="8080374" y="1455421"/>
-            <a:ext cx="3416299" cy="4169092"/>
-          </a:xfrm>
-          <a:prstGeom prst="roundRect">
-            <a:avLst>
-              <a:gd name="adj" fmla="val 4121"/>
-            </a:avLst>
-          </a:prstGeom>
-          <a:solidFill>
-            <a:schemeClr val="bg1"/>
-          </a:solidFill>
-          <a:ln w="12700"/>
-        </p:spPr>
-        <p:style>
-          <a:lnRef idx="2">
-            <a:schemeClr val="accent1">
-              <a:shade val="15000"/>
-            </a:schemeClr>
-          </a:lnRef>
-          <a:fillRef idx="1">
-            <a:schemeClr val="accent1"/>
-          </a:fillRef>
-          <a:effectRef idx="0">
-            <a:schemeClr val="accent1"/>
-          </a:effectRef>
-          <a:fontRef idx="minor">
-            <a:schemeClr val="lt1"/>
-          </a:fontRef>
-        </p:style>
-        <p:txBody>
-          <a:bodyPr rtlCol="0" anchor="ctr"/>
-          <a:lstStyle/>
-          <a:p>
-            <a:pPr algn="ctr"/>
-            <a:endParaRPr lang="pl-PL"/>
-          </a:p>
-        </p:txBody>
-      </p:sp>
-      <p:sp>
-        <p:nvSpPr>
-          <p:cNvPr id="2" name="Tytuł 1">
-            <a:extLst>
-              <a:ext uri="{FF2B5EF4-FFF2-40B4-BE49-F238E27FC236}">
-                <a16:creationId xmlns:a16="http://schemas.microsoft.com/office/drawing/2014/main" id="{71B94377-C155-CDFE-9C2B-B07543175251}"/>
-              </a:ext>
-            </a:extLst>
-          </p:cNvPr>
-          <p:cNvSpPr>
-            <a:spLocks noGrp="1"/>
-          </p:cNvSpPr>
-          <p:nvPr>
-            <p:ph type="title"/>
-          </p:nvPr>
-        </p:nvSpPr>
-        <p:spPr/>
-        <p:txBody>
-          <a:bodyPr tIns="0"/>
-          <a:lstStyle/>
-          <a:p>
-            <a:r>
-              <a:rPr lang="pl-PL" dirty="0"/>
-              <a:t>Ludzie interesują się ludźmi</a:t>
-            </a:r>
-          </a:p>
-        </p:txBody>
-      </p:sp>
-      <p:graphicFrame>
-        <p:nvGraphicFramePr>
-          <p:cNvPr id="6" name="Symbol zastępczy zawartości 5">
-            <a:extLst>
-              <a:ext uri="{FF2B5EF4-FFF2-40B4-BE49-F238E27FC236}">
-                <a16:creationId xmlns:a16="http://schemas.microsoft.com/office/drawing/2014/main" id="{C11DD809-F3DD-AF53-5429-39F7AACFF9ED}"/>
-              </a:ext>
-            </a:extLst>
-          </p:cNvPr>
-          <p:cNvGraphicFramePr>
-            <a:graphicFrameLocks noGrp="1"/>
-          </p:cNvGraphicFramePr>
-          <p:nvPr>
-            <p:ph idx="1"/>
-            <p:extLst>
-              <p:ext uri="{D42A27DB-BD31-4B8C-83A1-F6EECF244321}">
-                <p14:modId xmlns:p14="http://schemas.microsoft.com/office/powerpoint/2010/main" val="2059036917"/>
-              </p:ext>
-            </p:extLst>
-          </p:nvPr>
-        </p:nvGraphicFramePr>
-        <p:xfrm>
-          <a:off x="695325" y="1455738"/>
-          <a:ext cx="7115175" cy="4313237"/>
-        </p:xfrm>
-        <a:graphic>
-          <a:graphicData uri="http://schemas.openxmlformats.org/drawingml/2006/chart">
-            <c:chart xmlns:c="http://schemas.openxmlformats.org/drawingml/2006/chart" xmlns:r="http://schemas.openxmlformats.org/officeDocument/2006/relationships" r:id="rId2"/>
-          </a:graphicData>
-        </a:graphic>
-      </p:graphicFrame>
-      <p:sp>
-        <p:nvSpPr>
-          <p:cNvPr id="4" name="Symbol zastępczy zawartości 3">
-            <a:extLst>
-              <a:ext uri="{FF2B5EF4-FFF2-40B4-BE49-F238E27FC236}">
-                <a16:creationId xmlns:a16="http://schemas.microsoft.com/office/drawing/2014/main" id="{AAB13062-29A3-4E92-B477-A13B6A55B72D}"/>
-              </a:ext>
-            </a:extLst>
-          </p:cNvPr>
-          <p:cNvSpPr>
-            <a:spLocks noGrp="1"/>
-          </p:cNvSpPr>
-          <p:nvPr>
-            <p:ph idx="13"/>
-          </p:nvPr>
-        </p:nvSpPr>
-        <p:spPr>
-          <a:noFill/>
-          <a:ln>
-            <a:noFill/>
-          </a:ln>
-        </p:spPr>
-        <p:txBody>
-          <a:bodyPr>
-            <a:normAutofit/>
-          </a:bodyPr>
-          <a:lstStyle/>
-          <a:p>
-            <a:pPr marL="0" indent="0">
-              <a:lnSpc>
-                <a:spcPct val="100000"/>
-              </a:lnSpc>
-              <a:buNone/>
-            </a:pPr>
-            <a:r>
-              <a:rPr lang="pl-PL" dirty="0">
-                <a:solidFill>
-                  <a:schemeClr val="tx2"/>
-                </a:solidFill>
-              </a:rPr>
-              <a:t>Choć Wikipedia zawiera informacje o niemal każdym aspekcie świata, najczęściej interesują nas </a:t>
-            </a:r>
-            <a:r>
-              <a:rPr lang="pl-PL" b="1" dirty="0">
-                <a:solidFill>
-                  <a:schemeClr val="tx2"/>
-                </a:solidFill>
-              </a:rPr>
-              <a:t>ludzie </a:t>
-            </a:r>
-            <a:br>
-              <a:rPr lang="pl-PL" b="1" dirty="0">
-                <a:solidFill>
-                  <a:schemeClr val="tx2"/>
-                </a:solidFill>
-              </a:rPr>
-            </a:br>
-            <a:r>
-              <a:rPr lang="pl-PL" b="1" dirty="0">
-                <a:solidFill>
-                  <a:schemeClr val="tx2"/>
-                </a:solidFill>
-              </a:rPr>
-              <a:t>i miejsca</a:t>
-            </a:r>
-            <a:r>
-              <a:rPr lang="pl-PL" dirty="0">
-                <a:solidFill>
-                  <a:schemeClr val="tx2"/>
-                </a:solidFill>
-              </a:rPr>
-              <a:t>. </a:t>
-            </a:r>
-          </a:p>
-          <a:p>
-            <a:pPr marL="0" indent="0">
-              <a:lnSpc>
-                <a:spcPct val="100000"/>
-              </a:lnSpc>
-              <a:buNone/>
-            </a:pPr>
-            <a:r>
-              <a:rPr lang="pl-PL" dirty="0">
-                <a:solidFill>
-                  <a:schemeClr val="tx2"/>
-                </a:solidFill>
-              </a:rPr>
-              <a:t>Biografie pozostają najpopularniejszą kategorią, jednak niewiele ustępują im artykuły geograficzne, opisujące kraje, miasta </a:t>
-            </a:r>
-            <a:br>
-              <a:rPr lang="pl-PL" dirty="0">
-                <a:solidFill>
-                  <a:schemeClr val="tx2"/>
-                </a:solidFill>
-              </a:rPr>
-            </a:br>
-            <a:r>
-              <a:rPr lang="pl-PL" dirty="0">
-                <a:solidFill>
-                  <a:schemeClr val="tx2"/>
-                </a:solidFill>
-              </a:rPr>
-              <a:t>i regiony z całego świata.</a:t>
-            </a:r>
-          </a:p>
-        </p:txBody>
-      </p:sp>
-      <p:sp>
-        <p:nvSpPr>
-          <p:cNvPr id="8" name="pole tekstowe 7">
-            <a:extLst>
-              <a:ext uri="{FF2B5EF4-FFF2-40B4-BE49-F238E27FC236}">
-                <a16:creationId xmlns:a16="http://schemas.microsoft.com/office/drawing/2014/main" id="{7E87780E-5B20-ACFA-6A11-7A79835FD890}"/>
-              </a:ext>
-            </a:extLst>
-          </p:cNvPr>
-          <p:cNvSpPr txBox="1"/>
-          <p:nvPr/>
-        </p:nvSpPr>
-        <p:spPr>
-          <a:xfrm>
-            <a:off x="695325" y="6215875"/>
-            <a:ext cx="9568976" cy="276999"/>
-          </a:xfrm>
-          <a:prstGeom prst="rect">
-            <a:avLst/>
-          </a:prstGeom>
-          <a:noFill/>
-        </p:spPr>
-        <p:txBody>
-          <a:bodyPr wrap="square" lIns="0" rtlCol="0">
-            <a:spAutoFit/>
-          </a:bodyPr>
-          <a:lstStyle/>
-          <a:p>
-            <a:r>
-              <a:rPr lang="pl-PL" sz="1200" dirty="0">
-                <a:solidFill>
-                  <a:schemeClr val="tx2"/>
-                </a:solidFill>
-              </a:rPr>
-              <a:t>Kategoryzacja w oparciu o model językowy, który przypisał jedną z głównych kategorii Wikipedii do top 300 artykułów.</a:t>
-            </a:r>
-          </a:p>
-        </p:txBody>
-      </p:sp>
-    </p:spTree>
-    <p:extLst>
-      <p:ext uri="{BB962C8B-B14F-4D97-AF65-F5344CB8AC3E}">
-        <p14:creationId xmlns:p14="http://schemas.microsoft.com/office/powerpoint/2010/main" val="4105226799"/>
-      </p:ext>
-    </p:extLst>
-  </p:cSld>
-  <p:clrMapOvr>
-    <a:masterClrMapping/>
-  </p:clrMapOvr>
-</p:sld>
-</file>
-
-<file path=ppt/slides/slide3.xml><?xml version="1.0" encoding="utf-8"?>
 <p:sld xmlns:a="http://schemas.openxmlformats.org/drawingml/2006/main" xmlns:r="http://schemas.openxmlformats.org/officeDocument/2006/relationships" xmlns:p="http://schemas.openxmlformats.org/presentationml/2006/main">
   <p:cSld>
     <p:spTree>
@@ -19539,7 +18098,7 @@
 </p:sld>
 </file>
 
-<file path=ppt/slides/slide4.xml><?xml version="1.0" encoding="utf-8"?>
+<file path=ppt/slides/slide3.xml><?xml version="1.0" encoding="utf-8"?>
 <p:sld xmlns:a="http://schemas.openxmlformats.org/drawingml/2006/main" xmlns:r="http://schemas.openxmlformats.org/officeDocument/2006/relationships" xmlns:p="http://schemas.openxmlformats.org/presentationml/2006/main">
   <p:cSld>
     <p:spTree>
@@ -19758,7 +18317,7 @@
 </p:sld>
 </file>
 
-<file path=ppt/slides/slide5.xml><?xml version="1.0" encoding="utf-8"?>
+<file path=ppt/slides/slide4.xml><?xml version="1.0" encoding="utf-8"?>
 <p:sld xmlns:a="http://schemas.openxmlformats.org/drawingml/2006/main" xmlns:r="http://schemas.openxmlformats.org/officeDocument/2006/relationships" xmlns:p="http://schemas.openxmlformats.org/presentationml/2006/main">
   <p:cSld>
     <p:spTree>
@@ -19967,7 +18526,7 @@
 </p:sld>
 </file>
 
-<file path=ppt/slides/slide6.xml><?xml version="1.0" encoding="utf-8"?>
+<file path=ppt/slides/slide5.xml><?xml version="1.0" encoding="utf-8"?>
 <p:sld xmlns:a="http://schemas.openxmlformats.org/drawingml/2006/main" xmlns:r="http://schemas.openxmlformats.org/officeDocument/2006/relationships" xmlns:p="http://schemas.openxmlformats.org/presentationml/2006/main">
   <p:cSld>
     <p:spTree>
@@ -20199,7 +18758,7 @@
 </p:sld>
 </file>
 
-<file path=ppt/slides/slide7.xml><?xml version="1.0" encoding="utf-8"?>
+<file path=ppt/slides/slide6.xml><?xml version="1.0" encoding="utf-8"?>
 <p:sld xmlns:a="http://schemas.openxmlformats.org/drawingml/2006/main" xmlns:r="http://schemas.openxmlformats.org/officeDocument/2006/relationships" xmlns:p="http://schemas.openxmlformats.org/presentationml/2006/main">
   <p:cSld>
     <p:spTree>
@@ -20446,7 +19005,7 @@
 </p:sld>
 </file>
 
-<file path=ppt/slides/slide8.xml><?xml version="1.0" encoding="utf-8"?>
+<file path=ppt/slides/slide7.xml><?xml version="1.0" encoding="utf-8"?>
 <p:sld xmlns:a="http://schemas.openxmlformats.org/drawingml/2006/main" xmlns:r="http://schemas.openxmlformats.org/officeDocument/2006/relationships" xmlns:p="http://schemas.openxmlformats.org/presentationml/2006/main">
   <p:cSld>
     <p:spTree>
@@ -20878,7 +19437,7 @@
 </p:sld>
 </file>
 
-<file path=ppt/slides/slide9.xml><?xml version="1.0" encoding="utf-8"?>
+<file path=ppt/slides/slide8.xml><?xml version="1.0" encoding="utf-8"?>
 <p:sld xmlns:a="http://schemas.openxmlformats.org/drawingml/2006/main" xmlns:r="http://schemas.openxmlformats.org/officeDocument/2006/relationships" xmlns:p="http://schemas.openxmlformats.org/presentationml/2006/main">
   <p:cSld>
     <p:spTree>
@@ -20994,6 +19553,72 @@
     <p:extLst>
       <p:ext uri="{BB962C8B-B14F-4D97-AF65-F5344CB8AC3E}">
         <p14:creationId xmlns:p14="http://schemas.microsoft.com/office/powerpoint/2010/main" val="1392380390"/>
+      </p:ext>
+    </p:extLst>
+  </p:cSld>
+  <p:clrMapOvr>
+    <a:masterClrMapping/>
+  </p:clrMapOvr>
+</p:sld>
+</file>
+
+<file path=ppt/slides/slide9.xml><?xml version="1.0" encoding="utf-8"?>
+<p:sld xmlns:a="http://schemas.openxmlformats.org/drawingml/2006/main" xmlns:r="http://schemas.openxmlformats.org/officeDocument/2006/relationships" xmlns:p="http://schemas.openxmlformats.org/presentationml/2006/main">
+  <p:cSld>
+    <p:spTree>
+      <p:nvGrpSpPr>
+        <p:cNvPr id="1" name=""/>
+        <p:cNvGrpSpPr/>
+        <p:nvPr/>
+      </p:nvGrpSpPr>
+      <p:grpSpPr>
+        <a:xfrm>
+          <a:off x="0" y="0"/>
+          <a:ext cx="0" cy="0"/>
+          <a:chOff x="0" y="0"/>
+          <a:chExt cx="0" cy="0"/>
+        </a:xfrm>
+      </p:grpSpPr>
+      <p:pic>
+        <p:nvPicPr>
+          <p:cNvPr id="5" name="Obraz 4">
+            <a:extLst>
+              <a:ext uri="{FF2B5EF4-FFF2-40B4-BE49-F238E27FC236}">
+                <a16:creationId xmlns:a16="http://schemas.microsoft.com/office/drawing/2014/main" id="{7687F5BB-8301-DFD8-9EDB-3655C22572DF}"/>
+              </a:ext>
+            </a:extLst>
+          </p:cNvPr>
+          <p:cNvPicPr>
+            <a:picLocks noChangeAspect="1"/>
+          </p:cNvPicPr>
+          <p:nvPr/>
+        </p:nvPicPr>
+        <p:blipFill>
+          <a:blip r:embed="rId2">
+            <a:extLst>
+              <a:ext uri="{28A0092B-C50C-407E-A947-70E740481C1C}">
+                <a14:useLocalDpi xmlns:a14="http://schemas.microsoft.com/office/drawing/2010/main" val="0"/>
+              </a:ext>
+            </a:extLst>
+          </a:blip>
+          <a:stretch>
+            <a:fillRect/>
+          </a:stretch>
+        </p:blipFill>
+        <p:spPr>
+          <a:xfrm>
+            <a:off x="481794" y="2572213"/>
+            <a:ext cx="11228412" cy="1713573"/>
+          </a:xfrm>
+          <a:prstGeom prst="rect">
+            <a:avLst/>
+          </a:prstGeom>
+        </p:spPr>
+      </p:pic>
+    </p:spTree>
+    <p:extLst>
+      <p:ext uri="{BB962C8B-B14F-4D97-AF65-F5344CB8AC3E}">
+        <p14:creationId xmlns:p14="http://schemas.microsoft.com/office/powerpoint/2010/main" val="2325017849"/>
       </p:ext>
     </p:extLst>
   </p:cSld>
